--- a/Curso Gas B/15 - UNE 60670 - Pruebas y puesta en servicio/15 - UNE 60670 - Pruebas y puesta en servicio - Vídeo 2.pptx
+++ b/Curso Gas B/15 - UNE 60670 - Pruebas y puesta en servicio/15 - UNE 60670 - Pruebas y puesta en servicio - Vídeo 2.pptx
@@ -17,6 +17,7 @@
     <p:sldId id="265" r:id="rId17"/>
     <p:sldId id="266" r:id="rId18"/>
     <p:sldId id="267" r:id="rId19"/>
+    <p:sldId id="268" r:id="rId20"/>
   </p:sldIdLst>
   <p:sldSz cx="12191695" cy="6858000" type="screen4x3"/>
   <p:notesSz cx="6858000" cy="9144000"/>
@@ -598,22 +599,22 @@
           <a:lstStyle/>
           <a:p>
             <a:r>
-              <a:t>N1: Ya he purgado, ¿qué me falta para acabar?</a:t>
-            </a:r>
-          </a:p>
-          <a:p>
-            <a:r>
-              <a:t>N2: Te falta la verificación final y el papel. La verificación es comprobar la estanquidad ya con gas y a la presión de operación, la normal de trabajo. Es la última comprobación antes de dar la instalación por servida: aquí aparece la unión que sellaba en seco pero rezuma con gas. Si todo va bien, se deja la instalación en servicio. Y entonces, el paso que cierra la faena: extender el certificado de pruebas previas y puesta en servicio, y entregar copia al titular o usuario.</a:t>
-            </a:r>
-          </a:p>
-          <a:p>
-            <a:r>
-              <a:t>N1: ¿Y si no entrego ese certificado?</a:t>
-            </a:r>
-          </a:p>
-          <a:p>
-            <a:r>
-              <a:t>N2: Entonces la instalación no está formalmente en servicio, hagas lo que hagas en obra. El papel es lo que lo hace legal. Ubícalo mentalmente en la cadena de certificados del tema: primero el de la prueba de estanquidad de la parte ocho, luego este de pruebas previas y puesta en servicio de la parte nueve, y después el de puesta en marcha de los aparatos de la parte diez. Tres certificados en tres momentos.</a:t>
+              <a:t>N1: ¿Qué es purgar y por qué dices que es lo más peligroso?</a:t>
+            </a:r>
+          </a:p>
+          <a:p>
+            <a:r>
+              <a:t>N2: Purgar es expulsar el aire que hay dentro de la tubería, empujándolo con el gas que entra. Y el peligro está en el punto intermedio de esa operación: durante un rato, dentro del tubo conviven aire y gas mezclados, y esa mezcla de aire y gas, en cierta proporción, es explosiva. Basta una chispa o una llama cerca para una deflagración. Es el momento más peligroso de todo el tema, sin exagerar.</a:t>
+            </a:r>
+          </a:p>
+          <a:p>
+            <a:r>
+              <a:t>N1: ¿Cómo se purga entonces con seguridad?</a:t>
+            </a:r>
+          </a:p>
+          <a:p>
+            <a:r>
+              <a:t>N2: Se purga hacia un punto seguro, al exterior, no hacia un local cerrado; con un detector en la mano; y sin ninguna fuente de ignición cerca, ni llamas ni interruptores que salten. Se sigue purgando hasta que por ese punto sale gas puro, es decir, hasta quedar fuera de los límites de inflamabilidad, ya sin mezcla peligrosa dentro. Imagínatelo como vaciar una botella llena de aire soplando gas dentro hasta que ya no queda nada de aire mezclado. La norma exige justo eso: acabar el purgado con la seguridad de que dentro ya no hay mezcla inflamable.</a:t>
             </a:r>
           </a:p>
         </p:txBody>
@@ -683,22 +684,22 @@
           <a:lstStyle/>
           <a:p>
             <a:r>
-              <a:t>N1: ¿Cambia algo si el gas viene de un depósito de GLP?</a:t>
-            </a:r>
-          </a:p>
-          <a:p>
-            <a:r>
-              <a:t>N2: Sí, un matiz muy lógico. Cuando el gas no viene de la red de la ciudad sino de un depósito fijo de gases licuados del petróleo, típico de un chalé o de una urbanización aislada, la puesta en servicio se hace tras el primer llenado del depósito. No puedes poner en servicio con el depósito vacío.</a:t>
-            </a:r>
-          </a:p>
-          <a:p>
-            <a:r>
-              <a:t>N1: ¿Y por qué es tan evidente?</a:t>
-            </a:r>
-          </a:p>
-          <a:p>
-            <a:r>
-              <a:t>N2: Porque sin producto en el depósito no tienes gas con el que purgar la instalación, ni presión de operación que verificar. Es como querer poner en marcha un coche sin combustible en el tanque: primero llenas, luego arrancas. Así que en instalaciones de GLP de depósito, el orden manda: primer llenado y después la puesta en servicio. Es una pregunta fácil si te acuerdas de la lógica.</a:t>
+              <a:t>N1: Ya he purgado, ¿qué me falta para acabar?</a:t>
+            </a:r>
+          </a:p>
+          <a:p>
+            <a:r>
+              <a:t>N2: Te falta la verificación final y el papel. La verificación es comprobar la estanquidad ya con gas y a la presión de operación, la normal de trabajo. Es la última comprobación antes de dar la instalación por servida: aquí aparece la unión que sellaba en seco pero rezuma con gas. Si todo va bien, se deja la instalación en servicio. Y entonces, el paso que cierra la faena: extender el certificado de pruebas previas y puesta en servicio, y entregar copia al titular o usuario.</a:t>
+            </a:r>
+          </a:p>
+          <a:p>
+            <a:r>
+              <a:t>N1: ¿Y si no entrego ese certificado?</a:t>
+            </a:r>
+          </a:p>
+          <a:p>
+            <a:r>
+              <a:t>N2: Entonces la instalación no está formalmente en servicio, hagas lo que hagas en obra. El papel es lo que lo hace legal. Ubícalo mentalmente en la cadena de certificados del tema: primero el de la prueba de estanquidad de la parte ocho, luego este de pruebas previas y puesta en servicio de la parte nueve, y después el de puesta en marcha de los aparatos de la parte diez. Tres certificados en tres momentos.</a:t>
             </a:r>
           </a:p>
         </p:txBody>
@@ -768,6 +769,91 @@
           <a:lstStyle/>
           <a:p>
             <a:r>
+              <a:t>N1: ¿Cambia algo si el gas viene de un depósito de GLP?</a:t>
+            </a:r>
+          </a:p>
+          <a:p>
+            <a:r>
+              <a:t>N2: Sí, un matiz muy lógico. Cuando el gas no viene de la red de la ciudad sino de un depósito fijo de gases licuados del petróleo, típico de un chalé o de una urbanización aislada, la puesta en servicio se hace tras el primer llenado del depósito. No puedes poner en servicio con el depósito vacío.</a:t>
+            </a:r>
+          </a:p>
+          <a:p>
+            <a:r>
+              <a:t>N1: ¿Y por qué es tan evidente?</a:t>
+            </a:r>
+          </a:p>
+          <a:p>
+            <a:r>
+              <a:t>N2: Porque sin producto en el depósito no tienes gas con el que purgar la instalación, ni presión de operación que verificar. Es como querer poner en marcha un coche sin combustible en el tanque: primero llenas, luego arrancas. Así que en instalaciones de GLP de depósito, el orden manda: primer llenado y después la puesta en servicio. Es una pregunta fácil si te acuerdas de la lógica.</a:t>
+            </a:r>
+          </a:p>
+        </p:txBody>
+      </p:sp>
+      <p:sp>
+        <p:nvSpPr>
+          <p:cNvPr id="4" name="Slide Number Placeholder 3"/>
+          <p:cNvSpPr>
+            <a:spLocks noGrp="1"/>
+          </p:cNvSpPr>
+          <p:nvPr>
+            <p:ph type="sldNum" idx="5" sz="quarter"/>
+          </p:nvPr>
+        </p:nvSpPr>
+        <p:spPr/>
+      </p:sp>
+    </p:spTree>
+  </p:cSld>
+  <p:clrMapOvr>
+    <a:masterClrMapping/>
+  </p:clrMapOvr>
+</p:notes>
+</file>
+
+<file path=ppt/notesSlides/notesSlide13.xml><?xml version="1.0" encoding="utf-8"?>
+<p:notes xmlns:a="http://schemas.openxmlformats.org/drawingml/2006/main" xmlns:p="http://schemas.openxmlformats.org/presentationml/2006/main" xmlns:r="http://schemas.openxmlformats.org/officeDocument/2006/relationships">
+  <p:cSld>
+    <p:spTree>
+      <p:nvGrpSpPr>
+        <p:cNvPr id="1" name=""/>
+        <p:cNvGrpSpPr/>
+        <p:nvPr/>
+      </p:nvGrpSpPr>
+      <p:grpSpPr>
+        <a:xfrm>
+          <a:off x="0" y="0"/>
+          <a:ext cx="0" cy="0"/>
+          <a:chOff x="0" y="0"/>
+          <a:chExt cx="0" cy="0"/>
+        </a:xfrm>
+      </p:grpSpPr>
+      <p:sp>
+        <p:nvSpPr>
+          <p:cNvPr id="2" name="Slide Image Placeholder 1"/>
+          <p:cNvSpPr>
+            <a:spLocks noGrp="1"/>
+          </p:cNvSpPr>
+          <p:nvPr>
+            <p:ph type="sldImg" idx="2"/>
+          </p:nvPr>
+        </p:nvSpPr>
+        <p:spPr/>
+      </p:sp>
+      <p:sp>
+        <p:nvSpPr>
+          <p:cNvPr id="3" name="Notes Placeholder 2"/>
+          <p:cNvSpPr>
+            <a:spLocks noGrp="1"/>
+          </p:cNvSpPr>
+          <p:nvPr>
+            <p:ph type="body" idx="3" sz="quarter"/>
+          </p:nvPr>
+        </p:nvSpPr>
+        <p:spPr/>
+        <p:txBody>
+          <a:bodyPr/>
+          <a:lstStyle/>
+          <a:p>
+            <a:r>
               <a:t>N1: Recapitulando, ¿qué es lo que de verdad tengo que dominar?</a:t>
             </a:r>
           </a:p>
@@ -926,26 +1012,7 @@
         <p:txBody>
           <a:bodyPr/>
           <a:lstStyle/>
-          <a:p>
-            <a:r>
-              <a:t>N1: ¿En qué punto de la secuencia estamos?</a:t>
-            </a:r>
-          </a:p>
-          <a:p>
-            <a:r>
-              <a:t>N2: Justo en el medio del arranque de una instalación. Recuerda la película: montas, pruebas que no pierde con la parte ocho, pones en servicio con la parte nueve, y arrancas los aparatos con la parte diez. Estamos en la nueve, entre la estanquidad y el encendido de los aparatos. Se aplica, como toda la norma, a instalaciones receptoras que trabajan a presión máxima de operación igual o menor de cinco bar.</a:t>
-            </a:r>
-          </a:p>
-          <a:p>
-            <a:r>
-              <a:t>N1: ¿Esta parte ha cambiado mucho en la nueva edición?</a:t>
-            </a:r>
-          </a:p>
-          <a:p>
-            <a:r>
-              <a:t>N2: No, esta apenas se ha tocado; solo se actualizó el título de alguna de las partes que menciona en la introducción. El contenido de fondo es el de siempre. Eso te viene bien: lo que aprendas aquí es estable.</a:t>
-            </a:r>
-          </a:p>
+          <a:p/>
         </p:txBody>
       </p:sp>
       <p:sp>
@@ -1013,22 +1080,22 @@
           <a:lstStyle/>
           <a:p>
             <a:r>
-              <a:t>N1: ¿No habíamos hecho ya la estanquidad en el vídeo anterior?</a:t>
-            </a:r>
-          </a:p>
-          <a:p>
-            <a:r>
-              <a:t>N2: Cuidado aquí, que es un lío clásico y por eso lo pregunta. Hay dos estanquidades distintas, en dos momentos distintos. La del vídeo anterior, la de la parte ocho, era la prueba de estanquidad de entrega: con aire o gas inerte, con la tubería vacía, a presión de prueba, la alta. La de este vídeo, la de la parte nueve, es otra: es la verificación de la estanquidad ya con gas de verdad y a la presión de operación, la normal de trabajo, y se hace como paso final de la puesta en servicio.</a:t>
-            </a:r>
-          </a:p>
-          <a:p>
-            <a:r>
-              <a:t>N1: ¿Y por qué comprobar otra vez si ya salió bien la primera?</a:t>
-            </a:r>
-          </a:p>
-          <a:p>
-            <a:r>
-              <a:t>N2: Porque son escenarios diferentes. La primera prueba el tubo desnudo antes de entregarlo. La segunda confirma que, ya con gas real circulando a presión de trabajo, no se escapa nada por ninguna unión. Hay uniones que sellan en seco con aire y luego rezuman con gas. Esta segunda es la última red de seguridad antes de dar la instalación por servida.</a:t>
+              <a:t>N1: ¿En qué punto de la secuencia estamos?</a:t>
+            </a:r>
+          </a:p>
+          <a:p>
+            <a:r>
+              <a:t>N2: Justo en el medio del arranque de una instalación. Recuerda la película: montas, pruebas que no pierde con la parte ocho, pones en servicio con la parte nueve, y arrancas los aparatos con la parte diez. Estamos en la nueve, entre la estanquidad y el encendido de los aparatos. Se aplica, como toda la norma, a instalaciones receptoras que trabajan a presión máxima de operación igual o menor de cinco bar.</a:t>
+            </a:r>
+          </a:p>
+          <a:p>
+            <a:r>
+              <a:t>N1: ¿Esta parte ha cambiado mucho en la nueva edición?</a:t>
+            </a:r>
+          </a:p>
+          <a:p>
+            <a:r>
+              <a:t>N2: No, esta apenas se ha tocado; solo se actualizó el título de alguna de las partes que menciona en la introducción. El contenido de fondo es el de siempre. Eso te viene bien: lo que aprendas aquí es estable.</a:t>
             </a:r>
           </a:p>
         </p:txBody>
@@ -1098,22 +1165,22 @@
           <a:lstStyle/>
           <a:p>
             <a:r>
-              <a:t>N1: ¿Qué son exactamente las pruebas previas?</a:t>
-            </a:r>
-          </a:p>
-          <a:p>
-            <a:r>
-              <a:t>N2: Son una inspección de entrega que hace el responsable antes de meter gas: un repaso con los ojos y con las manos. Mira cuatro cosas. Una, que los papeles estén completos, toda la documentación de la instalación. Dos, que lo visible y accesible cumpla la norma. Tres, que los locales donde van los aparatos y sus salidas de humos, los conductos de evacuación, estén bien. Y cuatro, que las válvulas se maniobren, que las llaves giren como deben.</a:t>
-            </a:r>
-          </a:p>
-          <a:p>
-            <a:r>
-              <a:t>N1: ¿Tiene que revisar toda la tubería, incluso la empotrada?</a:t>
-            </a:r>
-          </a:p>
-          <a:p>
-            <a:r>
-              <a:t>N2: No, y esto es clave: solo lo visible y accesible. Nadie pica una pared para revisar el tubo empotrado. Por eso el diseño y la ejecución previos tienen que estar bien hechos, porque en este momento ya no se revisan por dentro. Si la instalación lleva una estación de regulación, además comprueba que regula bien y que sus dispositivos de seguridad funcionan.</a:t>
+              <a:t>N1: ¿No habíamos hecho ya la estanquidad en el vídeo anterior?</a:t>
+            </a:r>
+          </a:p>
+          <a:p>
+            <a:r>
+              <a:t>N2: Cuidado aquí, que es un lío clásico y por eso lo pregunta. Hay dos estanquidades distintas, en dos momentos distintos. La del vídeo anterior, la de la parte ocho, era la prueba de estanquidad de entrega: con aire o gas inerte, con la tubería vacía, a presión de prueba, la alta. La de este vídeo, la de la parte nueve, es otra: es la verificación de la estanquidad ya con gas de verdad y a la presión de operación, la normal de trabajo, y se hace como paso final de la puesta en servicio.</a:t>
+            </a:r>
+          </a:p>
+          <a:p>
+            <a:r>
+              <a:t>N1: ¿Y por qué comprobar otra vez si ya salió bien la primera?</a:t>
+            </a:r>
+          </a:p>
+          <a:p>
+            <a:r>
+              <a:t>N2: Porque son escenarios diferentes. La primera prueba el tubo desnudo antes de entregarlo. La segunda confirma que, ya con gas real circulando a presión de trabajo, no se escapa nada por ninguna unión. Hay uniones que sellan en seco con aire y luego rezuman con gas. Esta segunda es la última red de seguridad antes de dar la instalación por servida.</a:t>
             </a:r>
           </a:p>
         </p:txBody>
@@ -1183,22 +1250,22 @@
           <a:lstStyle/>
           <a:p>
             <a:r>
-              <a:t>N1: La norma habla del agente responsable, ¿quién es?</a:t>
-            </a:r>
-          </a:p>
-          <a:p>
-            <a:r>
-              <a:t>N2: La norma no le pone un carné concreto; dice de acuerdo con lo que establezca la legislación vigente. En la práctica es la empresa instaladora habilitada, o el agente que corresponda según el Reglamento de gas y sus instrucciones técnicas. Para el examen quédate con la idea de fondo: hay un responsable designado que ejecuta y firma estas comprobaciones. No las hace cualquiera que pase por allí.</a:t>
-            </a:r>
-          </a:p>
-          <a:p>
-            <a:r>
-              <a:t>N1: ¿Y por qué la norma no dice un nombre fijo?</a:t>
-            </a:r>
-          </a:p>
-          <a:p>
-            <a:r>
-              <a:t>N2: Porque la norma técnica describe el cómo, y quién puede firmar lo decide el Reglamento, que es la parte legal y puede cambiar. Al remitir a la legislación vigente, la UNE se mantiene válida aunque cambie quién está habilitado. Tú piensa: persona designada, cualificada, que responde con su firma. Esa es la idea que te van a pedir.</a:t>
+              <a:t>N1: ¿Qué son exactamente las pruebas previas?</a:t>
+            </a:r>
+          </a:p>
+          <a:p>
+            <a:r>
+              <a:t>N2: Son una inspección de entrega que hace el responsable antes de meter gas: un repaso con los ojos y con las manos. Mira cuatro cosas. Una, que los papeles estén completos, toda la documentación de la instalación. Dos, que lo visible y accesible cumpla la norma. Tres, que los locales donde van los aparatos y sus salidas de humos, los conductos de evacuación, estén bien. Y cuatro, que las válvulas se maniobren, que las llaves giren como deben.</a:t>
+            </a:r>
+          </a:p>
+          <a:p>
+            <a:r>
+              <a:t>N1: ¿Tiene que revisar toda la tubería, incluso la empotrada?</a:t>
+            </a:r>
+          </a:p>
+          <a:p>
+            <a:r>
+              <a:t>N2: No, y esto es clave: solo lo visible y accesible. Nadie pica una pared para revisar el tubo empotrado. Por eso el diseño y la ejecución previos tienen que estar bien hechos, porque en este momento ya no se revisan por dentro. Si la instalación lleva una estación de regulación, además comprueba que regula bien y que sus dispositivos de seguridad funcionan.</a:t>
             </a:r>
           </a:p>
         </p:txBody>
@@ -1268,22 +1335,22 @@
           <a:lstStyle/>
           <a:p>
             <a:r>
-              <a:t>N1: Vale, las previas salieron bien, ¿ahora qué maniobra hago?</a:t>
-            </a:r>
-          </a:p>
-          <a:p>
-            <a:r>
-              <a:t>N2: Ahora viene la puesta en servicio, y tiene un orden que conviene recitar. Primero, precintar los equipos de medida, los contadores. Segundo, dejar cerradas, bloqueadas y precintadas las llaves de las viviendas o aparatos que de momento no entran en servicio; y taponarlas si además están pendientes de instalación, pero eso lo vemos aparte. Tercero, abrir la llave de acometida y purgar las instalaciones que sí van a quedar en servicio. Cuarto, verificar la estanquidad ya con gas a la presión de operación. Y quinto, si todo va bien, dejar en servicio y extender el certificado.</a:t>
-            </a:r>
-          </a:p>
-          <a:p>
-            <a:r>
-              <a:t>N1: ¿Ese orden es importante o me lo puedo saltar?</a:t>
-            </a:r>
-          </a:p>
-          <a:p>
-            <a:r>
-              <a:t>N2: Es importante y es lógico. Precintas y aíslas lo que no entra antes de abrir el gas, para que al abrir no vaya gas a donde no debe. Luego abres y purgas. Y solo al final, con todo comprobado, certificas. Cada paso prepara al siguiente.</a:t>
+              <a:t>N1: La norma habla del agente responsable, ¿quién es?</a:t>
+            </a:r>
+          </a:p>
+          <a:p>
+            <a:r>
+              <a:t>N2: La norma no le pone un carné concreto; dice de acuerdo con lo que establezca la legislación vigente. En la práctica es la empresa instaladora habilitada, o el agente que corresponda según el Reglamento de gas y sus instrucciones técnicas. Para el examen quédate con la idea de fondo: hay un responsable designado que ejecuta y firma estas comprobaciones. No las hace cualquiera que pase por allí.</a:t>
+            </a:r>
+          </a:p>
+          <a:p>
+            <a:r>
+              <a:t>N1: ¿Y por qué la norma no dice un nombre fijo?</a:t>
+            </a:r>
+          </a:p>
+          <a:p>
+            <a:r>
+              <a:t>N2: Porque la norma técnica describe el cómo, y quién puede firmar lo decide el Reglamento, que es la parte legal y puede cambiar. Al remitir a la legislación vigente, la UNE se mantiene válida aunque cambie quién está habilitado. Tú piensa: persona designada, cualificada, que responde con su firma. Esa es la idea que te van a pedir.</a:t>
             </a:r>
           </a:p>
         </p:txBody>
@@ -1353,22 +1420,22 @@
           <a:lstStyle/>
           <a:p>
             <a:r>
-              <a:t>N1: Cerrada, bloqueada, precintada y taponada, ¿no es todo lo mismo?</a:t>
-            </a:r>
-          </a:p>
-          <a:p>
-            <a:r>
-              <a:t>N2: No, son cuatro estados y cada uno añade algo. Cerrada es girada, cortando el paso del gas. Bloqueada es que además no la pueda abrir cualquiera, que quede trabada. Precintada es que lleva un precinto que se rompe si alguien la toca, o sea, que delata la manipulación. Y taponada es poner un tapón físico en la boca de la llave.</a:t>
-            </a:r>
-          </a:p>
-          <a:p>
-            <a:r>
-              <a:t>N1: ¿Y cuándo se pone el tapón y cuándo no?</a:t>
-            </a:r>
-          </a:p>
-          <a:p>
-            <a:r>
-              <a:t>N2: Aquí está la regla que te van a preguntar. Si la llave no va a servicio pero tiene algo detrás, una vivienda o un aparato ya instalado, basta con dejarla cerrada, bloqueada y precintada. Pero si la llave da a la nada, porque la instalación individual o el aparato todavía están pendientes de instalar, entonces además se tapona. El porqué es puro sentido de seguridad: si alguien forzara el precinto de una llave sin nada detrás, saldría gas al aire libre; el tapón lo impide. Regla mental: sin nada detrás, tapón; con algo detrás, basta cerrar, bloquear y precintar. Saltarte el tapón es dejar una fuga programada en el montante.</a:t>
+              <a:t>N1: Vale, las previas salieron bien, ¿ahora qué maniobra hago?</a:t>
+            </a:r>
+          </a:p>
+          <a:p>
+            <a:r>
+              <a:t>N2: Ahora viene la puesta en servicio, y tiene un orden que conviene recitar. Primero, precintar los equipos de medida, los contadores. Segundo, dejar cerradas, bloqueadas y precintadas las llaves de las viviendas o aparatos que de momento no entran en servicio; y taponarlas si además están pendientes de instalación, pero eso lo vemos aparte. Tercero, abrir la llave de acometida y purgar las instalaciones que sí van a quedar en servicio. Cuarto, verificar la estanquidad ya con gas a la presión de operación. Y quinto, si todo va bien, dejar en servicio y extender el certificado.</a:t>
+            </a:r>
+          </a:p>
+          <a:p>
+            <a:r>
+              <a:t>N1: ¿Ese orden es importante o me lo puedo saltar?</a:t>
+            </a:r>
+          </a:p>
+          <a:p>
+            <a:r>
+              <a:t>N2: Es importante y es lógico. Precintas y aíslas lo que no entra antes de abrir el gas, para que al abrir no vaya gas a donde no debe. Luego abres y purgas. Y solo al final, con todo comprobado, certificas. Cada paso prepara al siguiente.</a:t>
             </a:r>
           </a:p>
         </p:txBody>
@@ -1438,22 +1505,22 @@
           <a:lstStyle/>
           <a:p>
             <a:r>
-              <a:t>N1: ¿Qué es purgar y por qué dices que es lo más peligroso?</a:t>
-            </a:r>
-          </a:p>
-          <a:p>
-            <a:r>
-              <a:t>N2: Purgar es expulsar el aire que hay dentro de la tubería, empujándolo con el gas que entra. Y el peligro está en el punto intermedio de esa operación: durante un rato, dentro del tubo conviven aire y gas mezclados, y esa mezcla de aire y gas, en cierta proporción, es explosiva. Basta una chispa o una llama cerca para una deflagración. Es el momento más peligroso de todo el tema, sin exagerar.</a:t>
-            </a:r>
-          </a:p>
-          <a:p>
-            <a:r>
-              <a:t>N1: ¿Cómo se purga entonces con seguridad?</a:t>
-            </a:r>
-          </a:p>
-          <a:p>
-            <a:r>
-              <a:t>N2: Se purga hacia un punto seguro, al exterior, no hacia un local cerrado; con un detector en la mano; y sin ninguna fuente de ignición cerca, ni llamas ni interruptores que salten. Se sigue purgando hasta que por ese punto sale gas puro, es decir, hasta quedar fuera de los límites de inflamabilidad, ya sin mezcla peligrosa dentro. Imagínatelo como vaciar una botella llena de aire soplando gas dentro hasta que ya no queda nada de aire mezclado. La norma exige justo eso: acabar el purgado con la seguridad de que dentro ya no hay mezcla inflamable.</a:t>
+              <a:t>N1: Cerrada, bloqueada, precintada y taponada, ¿no es todo lo mismo?</a:t>
+            </a:r>
+          </a:p>
+          <a:p>
+            <a:r>
+              <a:t>N2: No, son cuatro estados y cada uno añade algo. Cerrada es girada, cortando el paso del gas. Bloqueada es que además no la pueda abrir cualquiera, que quede trabada. Precintada es que lleva un precinto que se rompe si alguien la toca, o sea, que delata la manipulación. Y taponada es poner un tapón físico en la boca de la llave.</a:t>
+            </a:r>
+          </a:p>
+          <a:p>
+            <a:r>
+              <a:t>N1: ¿Y cuándo se pone el tapón y cuándo no?</a:t>
+            </a:r>
+          </a:p>
+          <a:p>
+            <a:r>
+              <a:t>N2: Aquí está la regla que te van a preguntar. Si la llave no va a servicio pero tiene algo detrás, una vivienda o un aparato ya instalado, basta con dejarla cerrada, bloqueada y precintada. Pero si la llave da a la nada, porque la instalación individual o el aparato todavía están pendientes de instalar, entonces además se tapona. El porqué es puro sentido de seguridad: si alguien forzara el precinto de una llave sin nada detrás, saldría gas al aire libre; el tapón lo impide. Regla mental: sin nada detrás, tapón; con algo detrás, basta cerrar, bloquear y precintar. Saltarte el tapón es dejar una fuga programada en el montante.</a:t>
             </a:r>
           </a:p>
         </p:txBody>
@@ -4528,7 +4595,7 @@
             <a:r>
               <a:rPr sz="1400" b="1" i="0">
                 <a:solidFill>
-                  <a:srgbClr val="CADCFC"/>
+                  <a:srgbClr val="F4A24C"/>
                 </a:solidFill>
                 <a:latin typeface="Montserrat"/>
               </a:rPr>
@@ -4539,13 +4606,57 @@
       </p:sp>
       <p:sp>
         <p:nvSpPr>
-          <p:cNvPr id="4" name="TextBox 3"/>
+          <p:cNvPr id="4" name="Rounded Rectangle 3"/>
+          <p:cNvSpPr/>
+          <p:nvPr/>
+        </p:nvSpPr>
+        <p:spPr>
+          <a:xfrm>
+            <a:off x="868680" y="2057400"/>
+            <a:ext cx="1463040" cy="82296"/>
+          </a:xfrm>
+          <a:prstGeom prst="roundRect">
+            <a:avLst/>
+          </a:prstGeom>
+          <a:solidFill>
+            <a:srgbClr val="E8801A"/>
+          </a:solidFill>
+          <a:ln>
+            <a:noFill/>
+          </a:ln>
+          <a:effectLst/>
+        </p:spPr>
+        <p:style>
+          <a:lnRef idx="1">
+            <a:schemeClr val="accent1"/>
+          </a:lnRef>
+          <a:fillRef idx="3">
+            <a:schemeClr val="accent1"/>
+          </a:fillRef>
+          <a:effectRef idx="2">
+            <a:schemeClr val="accent1"/>
+          </a:effectRef>
+          <a:fontRef idx="minor">
+            <a:schemeClr val="lt1"/>
+          </a:fontRef>
+        </p:style>
+        <p:txBody>
+          <a:bodyPr rtlCol="0" anchor="ctr"/>
+          <a:lstStyle/>
+          <a:p>
+            <a:pPr algn="ctr"/>
+          </a:p>
+        </p:txBody>
+      </p:sp>
+      <p:sp>
+        <p:nvSpPr>
+          <p:cNvPr id="5" name="TextBox 4"/>
           <p:cNvSpPr txBox="1"/>
           <p:nvPr/>
         </p:nvSpPr>
         <p:spPr>
           <a:xfrm>
-            <a:off x="822960" y="2194560"/>
+            <a:off x="822960" y="2286000"/>
             <a:ext cx="10515600" cy="2011680"/>
           </a:xfrm>
           <a:prstGeom prst="rect">
@@ -4584,7 +4695,7 @@
       </p:sp>
       <p:sp>
         <p:nvSpPr>
-          <p:cNvPr id="5" name="TextBox 4"/>
+          <p:cNvPr id="6" name="TextBox 5"/>
           <p:cNvSpPr txBox="1"/>
           <p:nvPr/>
         </p:nvSpPr>
@@ -4708,7 +4819,7 @@
                 </a:solidFill>
                 <a:latin typeface="Montserrat"/>
               </a:rPr>
-              <a:t>010 / 012</a:t>
+              <a:t>010 / 013</a:t>
             </a:r>
           </a:p>
         </p:txBody>
@@ -4756,7 +4867,7 @@
         <p:spPr>
           <a:xfrm>
             <a:off x="822960" y="457200"/>
-            <a:ext cx="8229600" cy="365760"/>
+            <a:ext cx="10058400" cy="365760"/>
           </a:xfrm>
           <a:prstGeom prst="rect">
             <a:avLst/>
@@ -4770,9 +4881,9 @@
           <a:lstStyle/>
           <a:p>
             <a:r>
-              <a:rPr sz="1200" b="1" i="0">
-                <a:solidFill>
-                  <a:srgbClr val="64748B"/>
+              <a:rPr sz="1300" b="1" i="0">
+                <a:solidFill>
+                  <a:srgbClr val="E8801A"/>
                 </a:solidFill>
                 <a:latin typeface="Montserrat"/>
               </a:rPr>
@@ -4804,26 +4915,70 @@
           <a:lstStyle/>
           <a:p>
             <a:r>
-              <a:rPr sz="2700" b="1" i="0">
+              <a:rPr sz="2800" b="1" i="0">
                 <a:solidFill>
                   <a:srgbClr val="1E2761"/>
                 </a:solidFill>
                 <a:latin typeface="Montserrat"/>
               </a:rPr>
-              <a:t>Verificar y certificar</a:t>
-            </a:r>
-          </a:p>
-        </p:txBody>
-      </p:sp>
-      <p:sp>
-        <p:nvSpPr>
-          <p:cNvPr id="7" name="TextBox 6"/>
+              <a:t>El purgado, el momento clave</a:t>
+            </a:r>
+          </a:p>
+        </p:txBody>
+      </p:sp>
+      <p:sp>
+        <p:nvSpPr>
+          <p:cNvPr id="7" name="Rounded Rectangle 6"/>
+          <p:cNvSpPr/>
+          <p:nvPr/>
+        </p:nvSpPr>
+        <p:spPr>
+          <a:xfrm>
+            <a:off x="868680" y="1627632"/>
+            <a:ext cx="2011680" cy="73152"/>
+          </a:xfrm>
+          <a:prstGeom prst="roundRect">
+            <a:avLst/>
+          </a:prstGeom>
+          <a:solidFill>
+            <a:srgbClr val="E8801A"/>
+          </a:solidFill>
+          <a:ln>
+            <a:noFill/>
+          </a:ln>
+          <a:effectLst/>
+        </p:spPr>
+        <p:style>
+          <a:lnRef idx="1">
+            <a:schemeClr val="accent1"/>
+          </a:lnRef>
+          <a:fillRef idx="3">
+            <a:schemeClr val="accent1"/>
+          </a:fillRef>
+          <a:effectRef idx="2">
+            <a:schemeClr val="accent1"/>
+          </a:effectRef>
+          <a:fontRef idx="minor">
+            <a:schemeClr val="lt1"/>
+          </a:fontRef>
+        </p:style>
+        <p:txBody>
+          <a:bodyPr rtlCol="0" anchor="ctr"/>
+          <a:lstStyle/>
+          <a:p>
+            <a:pPr algn="ctr"/>
+          </a:p>
+        </p:txBody>
+      </p:sp>
+      <p:sp>
+        <p:nvSpPr>
+          <p:cNvPr id="8" name="TextBox 7"/>
           <p:cNvSpPr txBox="1"/>
           <p:nvPr/>
         </p:nvSpPr>
         <p:spPr>
           <a:xfrm>
-            <a:off x="822960" y="1920240"/>
+            <a:off x="822960" y="1965960"/>
             <a:ext cx="4983480" cy="4206240"/>
           </a:xfrm>
           <a:prstGeom prst="rect">
@@ -4839,17 +4994,17 @@
           <a:p>
             <a:pPr>
               <a:spcAft>
-                <a:spcPts val="1000"/>
+                <a:spcPts val="1100"/>
               </a:spcAft>
             </a:pPr>
             <a:r>
               <a:rPr sz="1600" b="1" i="0">
                 <a:solidFill>
-                  <a:srgbClr val="2E3A80"/>
-                </a:solidFill>
-                <a:latin typeface="Montserrat"/>
-              </a:rPr>
-              <a:t>•  </a:t>
+                  <a:srgbClr val="E8801A"/>
+                </a:solidFill>
+                <a:latin typeface="Montserrat"/>
+              </a:rPr>
+              <a:t>▸  </a:t>
             </a:r>
             <a:r>
               <a:rPr sz="1600" b="0" i="0">
@@ -4858,23 +5013,23 @@
                 </a:solidFill>
                 <a:latin typeface="Montserrat"/>
               </a:rPr>
-              <a:t>Estanquidad final con gas, a presión de operación</a:t>
+              <a:t>Es expulsar el aire empujándolo con gas</a:t>
             </a:r>
           </a:p>
           <a:p>
             <a:pPr>
               <a:spcAft>
-                <a:spcPts val="1000"/>
+                <a:spcPts val="1100"/>
               </a:spcAft>
             </a:pPr>
             <a:r>
               <a:rPr sz="1600" b="1" i="0">
                 <a:solidFill>
-                  <a:srgbClr val="2E3A80"/>
-                </a:solidFill>
-                <a:latin typeface="Montserrat"/>
-              </a:rPr>
-              <a:t>•  </a:t>
+                  <a:srgbClr val="E8801A"/>
+                </a:solidFill>
+                <a:latin typeface="Montserrat"/>
+              </a:rPr>
+              <a:t>▸  </a:t>
             </a:r>
             <a:r>
               <a:rPr sz="1600" b="0" i="0">
@@ -4883,23 +5038,23 @@
                 </a:solidFill>
                 <a:latin typeface="Montserrat"/>
               </a:rPr>
-              <a:t>Si todo va bien, dejar en servicio</a:t>
+              <a:t>Peligro: mezcla aire-gas explosiva</a:t>
             </a:r>
           </a:p>
           <a:p>
             <a:pPr>
               <a:spcAft>
-                <a:spcPts val="1000"/>
+                <a:spcPts val="1100"/>
               </a:spcAft>
             </a:pPr>
             <a:r>
               <a:rPr sz="1600" b="1" i="0">
                 <a:solidFill>
-                  <a:srgbClr val="2E3A80"/>
-                </a:solidFill>
-                <a:latin typeface="Montserrat"/>
-              </a:rPr>
-              <a:t>•  </a:t>
+                  <a:srgbClr val="E8801A"/>
+                </a:solidFill>
+                <a:latin typeface="Montserrat"/>
+              </a:rPr>
+              <a:t>▸  </a:t>
             </a:r>
             <a:r>
               <a:rPr sz="1600" b="0" i="0">
@@ -4908,23 +5063,23 @@
                 </a:solidFill>
                 <a:latin typeface="Montserrat"/>
               </a:rPr>
-              <a:t>Certificado de pruebas previas y puesta en servicio</a:t>
+              <a:t>Purgar a punto seguro, al exterior</a:t>
             </a:r>
           </a:p>
           <a:p>
             <a:pPr>
               <a:spcAft>
-                <a:spcPts val="1000"/>
+                <a:spcPts val="1100"/>
               </a:spcAft>
             </a:pPr>
             <a:r>
               <a:rPr sz="1600" b="1" i="0">
                 <a:solidFill>
-                  <a:srgbClr val="2E3A80"/>
-                </a:solidFill>
-                <a:latin typeface="Montserrat"/>
-              </a:rPr>
-              <a:t>•  </a:t>
+                  <a:srgbClr val="E8801A"/>
+                </a:solidFill>
+                <a:latin typeface="Montserrat"/>
+              </a:rPr>
+              <a:t>▸  </a:t>
             </a:r>
             <a:r>
               <a:rPr sz="1600" b="0" i="0">
@@ -4933,14 +5088,14 @@
                 </a:solidFill>
                 <a:latin typeface="Montserrat"/>
               </a:rPr>
-              <a:t>Entregar copia al titular o usuario</a:t>
-            </a:r>
-          </a:p>
-        </p:txBody>
-      </p:sp>
-      <p:sp>
-        <p:nvSpPr>
-          <p:cNvPr id="8" name="imgph" descr="IMGQ:signing installation certificate document"/>
+              <a:t>Sin llamas ni chispas; con detector</a:t>
+            </a:r>
+          </a:p>
+        </p:txBody>
+      </p:sp>
+      <p:sp>
+        <p:nvSpPr>
+          <p:cNvPr id="9" name="imgph" descr="IMGQ:gas purging outdoor safe point"/>
           <p:cNvSpPr/>
           <p:nvPr/>
         </p:nvSpPr>
@@ -4986,7 +5141,7 @@
       </p:sp>
       <p:sp>
         <p:nvSpPr>
-          <p:cNvPr id="9" name="TextBox 8"/>
+          <p:cNvPr id="10" name="TextBox 9"/>
           <p:cNvSpPr txBox="1"/>
           <p:nvPr/>
         </p:nvSpPr>
@@ -5026,7 +5181,7 @@
                 </a:solidFill>
                 <a:latin typeface="Montserrat"/>
               </a:rPr>
-              <a:t>signing installation certificate document</a:t>
+              <a:t>gas purging outdoor safe point</a:t>
             </a:r>
           </a:p>
         </p:txBody>
@@ -5123,7 +5278,7 @@
                 </a:solidFill>
                 <a:latin typeface="Montserrat"/>
               </a:rPr>
-              <a:t>011 / 012</a:t>
+              <a:t>011 / 013</a:t>
             </a:r>
           </a:p>
         </p:txBody>
@@ -5171,7 +5326,7 @@
         <p:spPr>
           <a:xfrm>
             <a:off x="822960" y="457200"/>
-            <a:ext cx="8229600" cy="365760"/>
+            <a:ext cx="10058400" cy="365760"/>
           </a:xfrm>
           <a:prstGeom prst="rect">
             <a:avLst/>
@@ -5185,13 +5340,13 @@
           <a:lstStyle/>
           <a:p>
             <a:r>
-              <a:rPr sz="1200" b="1" i="0">
-                <a:solidFill>
-                  <a:srgbClr val="64748B"/>
-                </a:solidFill>
-                <a:latin typeface="Montserrat"/>
-              </a:rPr>
-              <a:t>CASO ESPECIAL</a:t>
+              <a:rPr sz="1300" b="1" i="0">
+                <a:solidFill>
+                  <a:srgbClr val="E8801A"/>
+                </a:solidFill>
+                <a:latin typeface="Montserrat"/>
+              </a:rPr>
+              <a:t>PUESTA EN SERVICIO</a:t>
             </a:r>
           </a:p>
         </p:txBody>
@@ -5219,26 +5374,70 @@
           <a:lstStyle/>
           <a:p>
             <a:r>
-              <a:rPr sz="2700" b="1" i="0">
+              <a:rPr sz="2800" b="1" i="0">
                 <a:solidFill>
                   <a:srgbClr val="1E2761"/>
                 </a:solidFill>
                 <a:latin typeface="Montserrat"/>
               </a:rPr>
-              <a:t>GLP de depósito: primero llenar</a:t>
-            </a:r>
-          </a:p>
-        </p:txBody>
-      </p:sp>
-      <p:sp>
-        <p:nvSpPr>
-          <p:cNvPr id="7" name="TextBox 6"/>
+              <a:t>Verificar y certificar</a:t>
+            </a:r>
+          </a:p>
+        </p:txBody>
+      </p:sp>
+      <p:sp>
+        <p:nvSpPr>
+          <p:cNvPr id="7" name="Rounded Rectangle 6"/>
+          <p:cNvSpPr/>
+          <p:nvPr/>
+        </p:nvSpPr>
+        <p:spPr>
+          <a:xfrm>
+            <a:off x="868680" y="1627632"/>
+            <a:ext cx="2011680" cy="73152"/>
+          </a:xfrm>
+          <a:prstGeom prst="roundRect">
+            <a:avLst/>
+          </a:prstGeom>
+          <a:solidFill>
+            <a:srgbClr val="E8801A"/>
+          </a:solidFill>
+          <a:ln>
+            <a:noFill/>
+          </a:ln>
+          <a:effectLst/>
+        </p:spPr>
+        <p:style>
+          <a:lnRef idx="1">
+            <a:schemeClr val="accent1"/>
+          </a:lnRef>
+          <a:fillRef idx="3">
+            <a:schemeClr val="accent1"/>
+          </a:fillRef>
+          <a:effectRef idx="2">
+            <a:schemeClr val="accent1"/>
+          </a:effectRef>
+          <a:fontRef idx="minor">
+            <a:schemeClr val="lt1"/>
+          </a:fontRef>
+        </p:style>
+        <p:txBody>
+          <a:bodyPr rtlCol="0" anchor="ctr"/>
+          <a:lstStyle/>
+          <a:p>
+            <a:pPr algn="ctr"/>
+          </a:p>
+        </p:txBody>
+      </p:sp>
+      <p:sp>
+        <p:nvSpPr>
+          <p:cNvPr id="8" name="TextBox 7"/>
           <p:cNvSpPr txBox="1"/>
           <p:nvPr/>
         </p:nvSpPr>
         <p:spPr>
           <a:xfrm>
-            <a:off x="822960" y="1920240"/>
+            <a:off x="822960" y="1965960"/>
             <a:ext cx="4983480" cy="4206240"/>
           </a:xfrm>
           <a:prstGeom prst="rect">
@@ -5254,17 +5453,17 @@
           <a:p>
             <a:pPr>
               <a:spcAft>
-                <a:spcPts val="1000"/>
+                <a:spcPts val="1100"/>
               </a:spcAft>
             </a:pPr>
             <a:r>
               <a:rPr sz="1600" b="1" i="0">
                 <a:solidFill>
-                  <a:srgbClr val="2E3A80"/>
-                </a:solidFill>
-                <a:latin typeface="Montserrat"/>
-              </a:rPr>
-              <a:t>•  </a:t>
+                  <a:srgbClr val="E8801A"/>
+                </a:solidFill>
+                <a:latin typeface="Montserrat"/>
+              </a:rPr>
+              <a:t>▸  </a:t>
             </a:r>
             <a:r>
               <a:rPr sz="1600" b="0" i="0">
@@ -5273,23 +5472,23 @@
                 </a:solidFill>
                 <a:latin typeface="Montserrat"/>
               </a:rPr>
-              <a:t>Depósito fijo de GLP en chalé o urbanización</a:t>
+              <a:t>Estanquidad final con gas, a presión de operación</a:t>
             </a:r>
           </a:p>
           <a:p>
             <a:pPr>
               <a:spcAft>
-                <a:spcPts val="1000"/>
+                <a:spcPts val="1100"/>
               </a:spcAft>
             </a:pPr>
             <a:r>
               <a:rPr sz="1600" b="1" i="0">
                 <a:solidFill>
-                  <a:srgbClr val="2E3A80"/>
-                </a:solidFill>
-                <a:latin typeface="Montserrat"/>
-              </a:rPr>
-              <a:t>•  </a:t>
+                  <a:srgbClr val="E8801A"/>
+                </a:solidFill>
+                <a:latin typeface="Montserrat"/>
+              </a:rPr>
+              <a:t>▸  </a:t>
             </a:r>
             <a:r>
               <a:rPr sz="1600" b="0" i="0">
@@ -5298,23 +5497,23 @@
                 </a:solidFill>
                 <a:latin typeface="Montserrat"/>
               </a:rPr>
-              <a:t>No hay servicio con el depósito vacío</a:t>
+              <a:t>Si todo va bien, dejar en servicio</a:t>
             </a:r>
           </a:p>
           <a:p>
             <a:pPr>
               <a:spcAft>
-                <a:spcPts val="1000"/>
+                <a:spcPts val="1100"/>
               </a:spcAft>
             </a:pPr>
             <a:r>
               <a:rPr sz="1600" b="1" i="0">
                 <a:solidFill>
-                  <a:srgbClr val="2E3A80"/>
-                </a:solidFill>
-                <a:latin typeface="Montserrat"/>
-              </a:rPr>
-              <a:t>•  </a:t>
+                  <a:srgbClr val="E8801A"/>
+                </a:solidFill>
+                <a:latin typeface="Montserrat"/>
+              </a:rPr>
+              <a:t>▸  </a:t>
             </a:r>
             <a:r>
               <a:rPr sz="1600" b="0" i="0">
@@ -5323,23 +5522,23 @@
                 </a:solidFill>
                 <a:latin typeface="Montserrat"/>
               </a:rPr>
-              <a:t>Puesta en servicio tras el primer llenado</a:t>
+              <a:t>Certificado de pruebas previas y puesta en servicio</a:t>
             </a:r>
           </a:p>
           <a:p>
             <a:pPr>
               <a:spcAft>
-                <a:spcPts val="1000"/>
+                <a:spcPts val="1100"/>
               </a:spcAft>
             </a:pPr>
             <a:r>
               <a:rPr sz="1600" b="1" i="0">
                 <a:solidFill>
-                  <a:srgbClr val="2E3A80"/>
-                </a:solidFill>
-                <a:latin typeface="Montserrat"/>
-              </a:rPr>
-              <a:t>•  </a:t>
+                  <a:srgbClr val="E8801A"/>
+                </a:solidFill>
+                <a:latin typeface="Montserrat"/>
+              </a:rPr>
+              <a:t>▸  </a:t>
             </a:r>
             <a:r>
               <a:rPr sz="1600" b="0" i="0">
@@ -5348,14 +5547,14 @@
                 </a:solidFill>
                 <a:latin typeface="Montserrat"/>
               </a:rPr>
-              <a:t>Sin producto no hay gas para purgar</a:t>
-            </a:r>
-          </a:p>
-        </p:txBody>
-      </p:sp>
-      <p:sp>
-        <p:nvSpPr>
-          <p:cNvPr id="8" name="imgph" descr="IMGQ:LPG storage tank residential garden"/>
+              <a:t>Entregar copia al titular o usuario</a:t>
+            </a:r>
+          </a:p>
+        </p:txBody>
+      </p:sp>
+      <p:sp>
+        <p:nvSpPr>
+          <p:cNvPr id="9" name="imgph" descr="IMGQ:signing installation certificate document"/>
           <p:cNvSpPr/>
           <p:nvPr/>
         </p:nvSpPr>
@@ -5401,7 +5600,7 @@
       </p:sp>
       <p:sp>
         <p:nvSpPr>
-          <p:cNvPr id="9" name="TextBox 8"/>
+          <p:cNvPr id="10" name="TextBox 9"/>
           <p:cNvSpPr txBox="1"/>
           <p:nvPr/>
         </p:nvSpPr>
@@ -5441,7 +5640,7 @@
                 </a:solidFill>
                 <a:latin typeface="Montserrat"/>
               </a:rPr>
-              <a:t>LPG storage tank residential garden</a:t>
+              <a:t>signing installation certificate document</a:t>
             </a:r>
           </a:p>
         </p:txBody>
@@ -5479,6 +5678,465 @@
             <a:avLst/>
           </a:prstGeom>
           <a:solidFill>
+            <a:srgbClr val="FFFFFF"/>
+          </a:solidFill>
+          <a:ln>
+            <a:noFill/>
+          </a:ln>
+          <a:effectLst/>
+        </p:spPr>
+        <p:style>
+          <a:lnRef idx="1">
+            <a:schemeClr val="accent1"/>
+          </a:lnRef>
+          <a:fillRef idx="3">
+            <a:schemeClr val="accent1"/>
+          </a:fillRef>
+          <a:effectRef idx="2">
+            <a:schemeClr val="accent1"/>
+          </a:effectRef>
+          <a:fontRef idx="minor">
+            <a:schemeClr val="lt1"/>
+          </a:fontRef>
+        </p:style>
+        <p:txBody>
+          <a:bodyPr rtlCol="0" anchor="ctr"/>
+          <a:lstStyle/>
+          <a:p>
+            <a:pPr algn="ctr"/>
+          </a:p>
+        </p:txBody>
+      </p:sp>
+      <p:sp>
+        <p:nvSpPr>
+          <p:cNvPr id="3" name="TextBox 2"/>
+          <p:cNvSpPr txBox="1"/>
+          <p:nvPr/>
+        </p:nvSpPr>
+        <p:spPr>
+          <a:xfrm>
+            <a:off x="10607040" y="320040"/>
+            <a:ext cx="1371600" cy="365760"/>
+          </a:xfrm>
+          <a:prstGeom prst="rect">
+            <a:avLst/>
+          </a:prstGeom>
+          <a:noFill/>
+        </p:spPr>
+        <p:txBody>
+          <a:bodyPr wrap="square">
+            <a:spAutoFit/>
+          </a:bodyPr>
+          <a:lstStyle/>
+          <a:p>
+            <a:pPr algn="r"/>
+            <a:r>
+              <a:rPr sz="1000" b="1" i="0">
+                <a:solidFill>
+                  <a:srgbClr val="64748B"/>
+                </a:solidFill>
+                <a:latin typeface="Montserrat"/>
+              </a:rPr>
+              <a:t>012 / 013</a:t>
+            </a:r>
+          </a:p>
+        </p:txBody>
+      </p:sp>
+      <p:sp>
+        <p:nvSpPr>
+          <p:cNvPr id="4" name="TextBox 3"/>
+          <p:cNvSpPr txBox="1"/>
+          <p:nvPr/>
+        </p:nvSpPr>
+        <p:spPr>
+          <a:xfrm>
+            <a:off x="457200" y="6419088"/>
+            <a:ext cx="8229600" cy="365760"/>
+          </a:xfrm>
+          <a:prstGeom prst="rect">
+            <a:avLst/>
+          </a:prstGeom>
+          <a:noFill/>
+        </p:spPr>
+        <p:txBody>
+          <a:bodyPr wrap="square">
+            <a:spAutoFit/>
+          </a:bodyPr>
+          <a:lstStyle/>
+          <a:p>
+            <a:r>
+              <a:rPr sz="900" b="0" i="0">
+                <a:solidFill>
+                  <a:srgbClr val="64748B"/>
+                </a:solidFill>
+                <a:latin typeface="Montserrat"/>
+              </a:rPr>
+              <a:t>Curso Gas B · Tema 15 · UNE 60670-9 · Pruebas previas y puesta en servicio</a:t>
+            </a:r>
+          </a:p>
+        </p:txBody>
+      </p:sp>
+      <p:sp>
+        <p:nvSpPr>
+          <p:cNvPr id="5" name="TextBox 4"/>
+          <p:cNvSpPr txBox="1"/>
+          <p:nvPr/>
+        </p:nvSpPr>
+        <p:spPr>
+          <a:xfrm>
+            <a:off x="822960" y="457200"/>
+            <a:ext cx="10058400" cy="365760"/>
+          </a:xfrm>
+          <a:prstGeom prst="rect">
+            <a:avLst/>
+          </a:prstGeom>
+          <a:noFill/>
+        </p:spPr>
+        <p:txBody>
+          <a:bodyPr wrap="square">
+            <a:spAutoFit/>
+          </a:bodyPr>
+          <a:lstStyle/>
+          <a:p>
+            <a:r>
+              <a:rPr sz="1300" b="1" i="0">
+                <a:solidFill>
+                  <a:srgbClr val="E8801A"/>
+                </a:solidFill>
+                <a:latin typeface="Montserrat"/>
+              </a:rPr>
+              <a:t>CASO ESPECIAL</a:t>
+            </a:r>
+          </a:p>
+        </p:txBody>
+      </p:sp>
+      <p:sp>
+        <p:nvSpPr>
+          <p:cNvPr id="6" name="TextBox 5"/>
+          <p:cNvSpPr txBox="1"/>
+          <p:nvPr/>
+        </p:nvSpPr>
+        <p:spPr>
+          <a:xfrm>
+            <a:off x="822960" y="868680"/>
+            <a:ext cx="10515600" cy="914400"/>
+          </a:xfrm>
+          <a:prstGeom prst="rect">
+            <a:avLst/>
+          </a:prstGeom>
+          <a:noFill/>
+        </p:spPr>
+        <p:txBody>
+          <a:bodyPr wrap="square">
+            <a:spAutoFit/>
+          </a:bodyPr>
+          <a:lstStyle/>
+          <a:p>
+            <a:r>
+              <a:rPr sz="2800" b="1" i="0">
+                <a:solidFill>
+                  <a:srgbClr val="1E2761"/>
+                </a:solidFill>
+                <a:latin typeface="Montserrat"/>
+              </a:rPr>
+              <a:t>GLP de depósito: primero llenar</a:t>
+            </a:r>
+          </a:p>
+        </p:txBody>
+      </p:sp>
+      <p:sp>
+        <p:nvSpPr>
+          <p:cNvPr id="7" name="Rounded Rectangle 6"/>
+          <p:cNvSpPr/>
+          <p:nvPr/>
+        </p:nvSpPr>
+        <p:spPr>
+          <a:xfrm>
+            <a:off x="868680" y="1627632"/>
+            <a:ext cx="2011680" cy="73152"/>
+          </a:xfrm>
+          <a:prstGeom prst="roundRect">
+            <a:avLst/>
+          </a:prstGeom>
+          <a:solidFill>
+            <a:srgbClr val="E8801A"/>
+          </a:solidFill>
+          <a:ln>
+            <a:noFill/>
+          </a:ln>
+          <a:effectLst/>
+        </p:spPr>
+        <p:style>
+          <a:lnRef idx="1">
+            <a:schemeClr val="accent1"/>
+          </a:lnRef>
+          <a:fillRef idx="3">
+            <a:schemeClr val="accent1"/>
+          </a:fillRef>
+          <a:effectRef idx="2">
+            <a:schemeClr val="accent1"/>
+          </a:effectRef>
+          <a:fontRef idx="minor">
+            <a:schemeClr val="lt1"/>
+          </a:fontRef>
+        </p:style>
+        <p:txBody>
+          <a:bodyPr rtlCol="0" anchor="ctr"/>
+          <a:lstStyle/>
+          <a:p>
+            <a:pPr algn="ctr"/>
+          </a:p>
+        </p:txBody>
+      </p:sp>
+      <p:sp>
+        <p:nvSpPr>
+          <p:cNvPr id="8" name="TextBox 7"/>
+          <p:cNvSpPr txBox="1"/>
+          <p:nvPr/>
+        </p:nvSpPr>
+        <p:spPr>
+          <a:xfrm>
+            <a:off x="822960" y="1965960"/>
+            <a:ext cx="4983480" cy="4206240"/>
+          </a:xfrm>
+          <a:prstGeom prst="rect">
+            <a:avLst/>
+          </a:prstGeom>
+          <a:noFill/>
+        </p:spPr>
+        <p:txBody>
+          <a:bodyPr wrap="square">
+            <a:spAutoFit/>
+          </a:bodyPr>
+          <a:lstStyle/>
+          <a:p>
+            <a:pPr>
+              <a:spcAft>
+                <a:spcPts val="1100"/>
+              </a:spcAft>
+            </a:pPr>
+            <a:r>
+              <a:rPr sz="1600" b="1" i="0">
+                <a:solidFill>
+                  <a:srgbClr val="E8801A"/>
+                </a:solidFill>
+                <a:latin typeface="Montserrat"/>
+              </a:rPr>
+              <a:t>▸  </a:t>
+            </a:r>
+            <a:r>
+              <a:rPr sz="1600" b="0" i="0">
+                <a:solidFill>
+                  <a:srgbClr val="1B2330"/>
+                </a:solidFill>
+                <a:latin typeface="Montserrat"/>
+              </a:rPr>
+              <a:t>Depósito fijo de GLP en chalé o urbanización</a:t>
+            </a:r>
+          </a:p>
+          <a:p>
+            <a:pPr>
+              <a:spcAft>
+                <a:spcPts val="1100"/>
+              </a:spcAft>
+            </a:pPr>
+            <a:r>
+              <a:rPr sz="1600" b="1" i="0">
+                <a:solidFill>
+                  <a:srgbClr val="E8801A"/>
+                </a:solidFill>
+                <a:latin typeface="Montserrat"/>
+              </a:rPr>
+              <a:t>▸  </a:t>
+            </a:r>
+            <a:r>
+              <a:rPr sz="1600" b="0" i="0">
+                <a:solidFill>
+                  <a:srgbClr val="1B2330"/>
+                </a:solidFill>
+                <a:latin typeface="Montserrat"/>
+              </a:rPr>
+              <a:t>No hay servicio con el depósito vacío</a:t>
+            </a:r>
+          </a:p>
+          <a:p>
+            <a:pPr>
+              <a:spcAft>
+                <a:spcPts val="1100"/>
+              </a:spcAft>
+            </a:pPr>
+            <a:r>
+              <a:rPr sz="1600" b="1" i="0">
+                <a:solidFill>
+                  <a:srgbClr val="E8801A"/>
+                </a:solidFill>
+                <a:latin typeface="Montserrat"/>
+              </a:rPr>
+              <a:t>▸  </a:t>
+            </a:r>
+            <a:r>
+              <a:rPr sz="1600" b="0" i="0">
+                <a:solidFill>
+                  <a:srgbClr val="1B2330"/>
+                </a:solidFill>
+                <a:latin typeface="Montserrat"/>
+              </a:rPr>
+              <a:t>Puesta en servicio tras el primer llenado</a:t>
+            </a:r>
+          </a:p>
+          <a:p>
+            <a:pPr>
+              <a:spcAft>
+                <a:spcPts val="1100"/>
+              </a:spcAft>
+            </a:pPr>
+            <a:r>
+              <a:rPr sz="1600" b="1" i="0">
+                <a:solidFill>
+                  <a:srgbClr val="E8801A"/>
+                </a:solidFill>
+                <a:latin typeface="Montserrat"/>
+              </a:rPr>
+              <a:t>▸  </a:t>
+            </a:r>
+            <a:r>
+              <a:rPr sz="1600" b="0" i="0">
+                <a:solidFill>
+                  <a:srgbClr val="1B2330"/>
+                </a:solidFill>
+                <a:latin typeface="Montserrat"/>
+              </a:rPr>
+              <a:t>Sin producto no hay gas para purgar</a:t>
+            </a:r>
+          </a:p>
+        </p:txBody>
+      </p:sp>
+      <p:sp>
+        <p:nvSpPr>
+          <p:cNvPr id="9" name="imgph" descr="IMGQ:LPG storage tank residential garden"/>
+          <p:cNvSpPr/>
+          <p:nvPr/>
+        </p:nvSpPr>
+        <p:spPr>
+          <a:xfrm>
+            <a:off x="5806440" y="1051560"/>
+            <a:ext cx="5298947" cy="4629150"/>
+          </a:xfrm>
+          <a:prstGeom prst="roundRect">
+            <a:avLst/>
+          </a:prstGeom>
+          <a:solidFill>
+            <a:srgbClr val="F3F6FB"/>
+          </a:solidFill>
+          <a:ln w="12700">
+            <a:solidFill>
+              <a:srgbClr val="C7D2E6"/>
+            </a:solidFill>
+          </a:ln>
+          <a:effectLst/>
+        </p:spPr>
+        <p:style>
+          <a:lnRef idx="1">
+            <a:schemeClr val="accent1"/>
+          </a:lnRef>
+          <a:fillRef idx="3">
+            <a:schemeClr val="accent1"/>
+          </a:fillRef>
+          <a:effectRef idx="2">
+            <a:schemeClr val="accent1"/>
+          </a:effectRef>
+          <a:fontRef idx="minor">
+            <a:schemeClr val="lt1"/>
+          </a:fontRef>
+        </p:style>
+        <p:txBody>
+          <a:bodyPr rtlCol="0" anchor="ctr"/>
+          <a:lstStyle/>
+          <a:p>
+            <a:pPr algn="ctr"/>
+          </a:p>
+        </p:txBody>
+      </p:sp>
+      <p:sp>
+        <p:nvSpPr>
+          <p:cNvPr id="10" name="TextBox 9"/>
+          <p:cNvSpPr txBox="1"/>
+          <p:nvPr/>
+        </p:nvSpPr>
+        <p:spPr>
+          <a:xfrm>
+            <a:off x="6080760" y="2726055"/>
+            <a:ext cx="4750307" cy="1280160"/>
+          </a:xfrm>
+          <a:prstGeom prst="rect">
+            <a:avLst/>
+          </a:prstGeom>
+          <a:noFill/>
+        </p:spPr>
+        <p:txBody>
+          <a:bodyPr wrap="square">
+            <a:spAutoFit/>
+          </a:bodyPr>
+          <a:lstStyle/>
+          <a:p>
+            <a:pPr algn="ctr"/>
+            <a:r>
+              <a:rPr sz="1400" b="1" i="0">
+                <a:solidFill>
+                  <a:srgbClr val="64748B"/>
+                </a:solidFill>
+                <a:latin typeface="Montserrat"/>
+              </a:rPr>
+              <a:t>IMAGEN REALISTA</a:t>
+            </a:r>
+          </a:p>
+          <a:p>
+            <a:pPr algn="ctr"/>
+            <a:r>
+              <a:rPr sz="1100" b="0" i="1">
+                <a:solidFill>
+                  <a:srgbClr val="64748B"/>
+                </a:solidFill>
+                <a:latin typeface="Montserrat"/>
+              </a:rPr>
+              <a:t>LPG storage tank residential garden</a:t>
+            </a:r>
+          </a:p>
+        </p:txBody>
+      </p:sp>
+    </p:spTree>
+  </p:cSld>
+  <p:clrMapOvr>
+    <a:masterClrMapping/>
+  </p:clrMapOvr>
+</p:sld>
+</file>
+
+<file path=ppt/slides/slide13.xml><?xml version="1.0" encoding="utf-8"?>
+<p:sld xmlns:a="http://schemas.openxmlformats.org/drawingml/2006/main" xmlns:p="http://schemas.openxmlformats.org/presentationml/2006/main" xmlns:r="http://schemas.openxmlformats.org/officeDocument/2006/relationships">
+  <p:cSld>
+    <p:spTree>
+      <p:nvGrpSpPr>
+        <p:cNvPr id="1" name=""/>
+        <p:cNvGrpSpPr/>
+        <p:nvPr/>
+      </p:nvGrpSpPr>
+      <p:grpSpPr/>
+      <p:sp>
+        <p:nvSpPr>
+          <p:cNvPr id="2" name="Rectangle 1"/>
+          <p:cNvSpPr/>
+          <p:nvPr/>
+        </p:nvSpPr>
+        <p:spPr>
+          <a:xfrm>
+            <a:off x="0" y="0"/>
+            <a:ext cx="12191695" cy="6858000"/>
+          </a:xfrm>
+          <a:prstGeom prst="rect">
+            <a:avLst/>
+          </a:prstGeom>
+          <a:solidFill>
             <a:srgbClr val="1E2761"/>
           </a:solidFill>
           <a:ln>
@@ -5533,7 +6191,7 @@
             <a:r>
               <a:rPr sz="1400" b="1" i="0">
                 <a:solidFill>
-                  <a:srgbClr val="CADCFC"/>
+                  <a:srgbClr val="F4A24C"/>
                 </a:solidFill>
                 <a:latin typeface="Montserrat"/>
               </a:rPr>
@@ -5544,13 +6202,57 @@
       </p:sp>
       <p:sp>
         <p:nvSpPr>
-          <p:cNvPr id="4" name="TextBox 3"/>
+          <p:cNvPr id="4" name="Rounded Rectangle 3"/>
+          <p:cNvSpPr/>
+          <p:nvPr/>
+        </p:nvSpPr>
+        <p:spPr>
+          <a:xfrm>
+            <a:off x="868680" y="1051560"/>
+            <a:ext cx="1463040" cy="82296"/>
+          </a:xfrm>
+          <a:prstGeom prst="roundRect">
+            <a:avLst/>
+          </a:prstGeom>
+          <a:solidFill>
+            <a:srgbClr val="E8801A"/>
+          </a:solidFill>
+          <a:ln>
+            <a:noFill/>
+          </a:ln>
+          <a:effectLst/>
+        </p:spPr>
+        <p:style>
+          <a:lnRef idx="1">
+            <a:schemeClr val="accent1"/>
+          </a:lnRef>
+          <a:fillRef idx="3">
+            <a:schemeClr val="accent1"/>
+          </a:fillRef>
+          <a:effectRef idx="2">
+            <a:schemeClr val="accent1"/>
+          </a:effectRef>
+          <a:fontRef idx="minor">
+            <a:schemeClr val="lt1"/>
+          </a:fontRef>
+        </p:style>
+        <p:txBody>
+          <a:bodyPr rtlCol="0" anchor="ctr"/>
+          <a:lstStyle/>
+          <a:p>
+            <a:pPr algn="ctr"/>
+          </a:p>
+        </p:txBody>
+      </p:sp>
+      <p:sp>
+        <p:nvSpPr>
+          <p:cNvPr id="5" name="TextBox 4"/>
           <p:cNvSpPr txBox="1"/>
           <p:nvPr/>
         </p:nvSpPr>
         <p:spPr>
           <a:xfrm>
-            <a:off x="822960" y="1143000"/>
+            <a:off x="822960" y="1234440"/>
             <a:ext cx="10515600" cy="1097280"/>
           </a:xfrm>
           <a:prstGeom prst="rect">
@@ -5578,14 +6280,14 @@
       </p:sp>
       <p:sp>
         <p:nvSpPr>
-          <p:cNvPr id="5" name="TextBox 4"/>
+          <p:cNvPr id="6" name="TextBox 5"/>
           <p:cNvSpPr txBox="1"/>
           <p:nvPr/>
         </p:nvSpPr>
         <p:spPr>
           <a:xfrm>
-            <a:off x="822960" y="2514600"/>
-            <a:ext cx="10515600" cy="2834640"/>
+            <a:off x="822960" y="2606040"/>
+            <a:ext cx="10515600" cy="2743200"/>
           </a:xfrm>
           <a:prstGeom prst="rect">
             <a:avLst/>
@@ -5606,7 +6308,7 @@
             <a:r>
               <a:rPr sz="2000" b="1" i="0">
                 <a:solidFill>
-                  <a:srgbClr val="CADCFC"/>
+                  <a:srgbClr val="F4A24C"/>
                 </a:solidFill>
                 <a:latin typeface="Montserrat"/>
               </a:rPr>
@@ -5631,7 +6333,7 @@
             <a:r>
               <a:rPr sz="2000" b="1" i="0">
                 <a:solidFill>
-                  <a:srgbClr val="CADCFC"/>
+                  <a:srgbClr val="F4A24C"/>
                 </a:solidFill>
                 <a:latin typeface="Montserrat"/>
               </a:rPr>
@@ -5656,7 +6358,7 @@
             <a:r>
               <a:rPr sz="2000" b="1" i="0">
                 <a:solidFill>
-                  <a:srgbClr val="CADCFC"/>
+                  <a:srgbClr val="F4A24C"/>
                 </a:solidFill>
                 <a:latin typeface="Montserrat"/>
               </a:rPr>
@@ -5681,7 +6383,7 @@
             <a:r>
               <a:rPr sz="2000" b="1" i="0">
                 <a:solidFill>
-                  <a:srgbClr val="CADCFC"/>
+                  <a:srgbClr val="F4A24C"/>
                 </a:solidFill>
                 <a:latin typeface="Montserrat"/>
               </a:rPr>
@@ -5701,20 +6403,20 @@
       </p:sp>
       <p:sp>
         <p:nvSpPr>
-          <p:cNvPr id="6" name="Rounded Rectangle 5"/>
+          <p:cNvPr id="7" name="Rounded Rectangle 6"/>
           <p:cNvSpPr/>
           <p:nvPr/>
         </p:nvSpPr>
         <p:spPr>
           <a:xfrm>
             <a:off x="822960" y="5532120"/>
-            <a:ext cx="10515600" cy="777240"/>
+            <a:ext cx="10515600" cy="822960"/>
           </a:xfrm>
           <a:prstGeom prst="roundRect">
             <a:avLst/>
           </a:prstGeom>
           <a:solidFill>
-            <a:srgbClr val="2E3A80"/>
+            <a:srgbClr val="E8801A"/>
           </a:solidFill>
           <a:ln>
             <a:noFill/>
@@ -5745,13 +6447,13 @@
       </p:sp>
       <p:sp>
         <p:nvSpPr>
-          <p:cNvPr id="7" name="TextBox 6"/>
+          <p:cNvPr id="8" name="TextBox 7"/>
           <p:cNvSpPr txBox="1"/>
           <p:nvPr/>
         </p:nvSpPr>
         <p:spPr>
           <a:xfrm>
-            <a:off x="1051560" y="5605272"/>
+            <a:off x="1051560" y="5623560"/>
             <a:ext cx="10058400" cy="640080"/>
           </a:xfrm>
           <a:prstGeom prst="rect">
@@ -5768,7 +6470,7 @@
             <a:r>
               <a:rPr sz="1500" b="1" i="1">
                 <a:solidFill>
-                  <a:srgbClr val="CADCFC"/>
+                  <a:srgbClr val="1E2761"/>
                 </a:solidFill>
                 <a:latin typeface="Montserrat"/>
               </a:rPr>
@@ -5869,7 +6571,7 @@
                 </a:solidFill>
                 <a:latin typeface="Montserrat"/>
               </a:rPr>
-              <a:t>002 / 012</a:t>
+              <a:t>002 / 013</a:t>
             </a:r>
           </a:p>
         </p:txBody>
@@ -5933,7 +6635,7 @@
             <a:r>
               <a:rPr sz="2700" b="1" i="0">
                 <a:solidFill>
-                  <a:srgbClr val="1E2761"/>
+                  <a:srgbClr val="E8801A"/>
                 </a:solidFill>
                 <a:latin typeface="Montserrat"/>
               </a:rPr>
@@ -5945,6 +6647,50 @@
       <p:sp>
         <p:nvSpPr>
           <p:cNvPr id="6" name="Rounded Rectangle 5"/>
+          <p:cNvSpPr/>
+          <p:nvPr/>
+        </p:nvSpPr>
+        <p:spPr>
+          <a:xfrm>
+            <a:off x="868680" y="1234440"/>
+            <a:ext cx="1463040" cy="73152"/>
+          </a:xfrm>
+          <a:prstGeom prst="roundRect">
+            <a:avLst/>
+          </a:prstGeom>
+          <a:solidFill>
+            <a:srgbClr val="1E2761"/>
+          </a:solidFill>
+          <a:ln>
+            <a:noFill/>
+          </a:ln>
+          <a:effectLst/>
+        </p:spPr>
+        <p:style>
+          <a:lnRef idx="1">
+            <a:schemeClr val="accent1"/>
+          </a:lnRef>
+          <a:fillRef idx="3">
+            <a:schemeClr val="accent1"/>
+          </a:fillRef>
+          <a:effectRef idx="2">
+            <a:schemeClr val="accent1"/>
+          </a:effectRef>
+          <a:fontRef idx="minor">
+            <a:schemeClr val="lt1"/>
+          </a:fontRef>
+        </p:style>
+        <p:txBody>
+          <a:bodyPr rtlCol="0" anchor="ctr"/>
+          <a:lstStyle/>
+          <a:p>
+            <a:pPr algn="ctr"/>
+          </a:p>
+        </p:txBody>
+      </p:sp>
+      <p:sp>
+        <p:nvSpPr>
+          <p:cNvPr id="7" name="Rounded Rectangle 6"/>
           <p:cNvSpPr/>
           <p:nvPr/>
         </p:nvSpPr>
@@ -5990,7 +6736,7 @@
       </p:sp>
       <p:sp>
         <p:nvSpPr>
-          <p:cNvPr id="7" name="TextBox 6"/>
+          <p:cNvPr id="8" name="TextBox 7"/>
           <p:cNvSpPr txBox="1"/>
           <p:nvPr/>
         </p:nvSpPr>
@@ -6025,7 +6771,7 @@
       </p:sp>
       <p:sp>
         <p:nvSpPr>
-          <p:cNvPr id="8" name="TextBox 7"/>
+          <p:cNvPr id="9" name="TextBox 8"/>
           <p:cNvSpPr txBox="1"/>
           <p:nvPr/>
         </p:nvSpPr>
@@ -6060,7 +6806,7 @@
       </p:sp>
       <p:sp>
         <p:nvSpPr>
-          <p:cNvPr id="9" name="Rounded Rectangle 8"/>
+          <p:cNvPr id="10" name="Rounded Rectangle 9"/>
           <p:cNvSpPr/>
           <p:nvPr/>
         </p:nvSpPr>
@@ -6106,7 +6852,7 @@
       </p:sp>
       <p:sp>
         <p:nvSpPr>
-          <p:cNvPr id="10" name="TextBox 9"/>
+          <p:cNvPr id="11" name="TextBox 10"/>
           <p:cNvSpPr txBox="1"/>
           <p:nvPr/>
         </p:nvSpPr>
@@ -6141,7 +6887,7 @@
       </p:sp>
       <p:sp>
         <p:nvSpPr>
-          <p:cNvPr id="11" name="TextBox 10"/>
+          <p:cNvPr id="12" name="TextBox 11"/>
           <p:cNvSpPr txBox="1"/>
           <p:nvPr/>
         </p:nvSpPr>
@@ -6176,7 +6922,7 @@
       </p:sp>
       <p:sp>
         <p:nvSpPr>
-          <p:cNvPr id="12" name="Rounded Rectangle 11"/>
+          <p:cNvPr id="13" name="Rounded Rectangle 12"/>
           <p:cNvSpPr/>
           <p:nvPr/>
         </p:nvSpPr>
@@ -6222,7 +6968,7 @@
       </p:sp>
       <p:sp>
         <p:nvSpPr>
-          <p:cNvPr id="13" name="TextBox 12"/>
+          <p:cNvPr id="14" name="TextBox 13"/>
           <p:cNvSpPr txBox="1"/>
           <p:nvPr/>
         </p:nvSpPr>
@@ -6257,7 +7003,7 @@
       </p:sp>
       <p:sp>
         <p:nvSpPr>
-          <p:cNvPr id="14" name="TextBox 13"/>
+          <p:cNvPr id="15" name="TextBox 14"/>
           <p:cNvSpPr txBox="1"/>
           <p:nvPr/>
         </p:nvSpPr>
@@ -6382,7 +7128,7 @@
                 </a:solidFill>
                 <a:latin typeface="Montserrat"/>
               </a:rPr>
-              <a:t>003 / 012</a:t>
+              <a:t>003 / 013</a:t>
             </a:r>
           </a:p>
         </p:txBody>
@@ -6429,7 +7175,7 @@
         </p:nvSpPr>
         <p:spPr>
           <a:xfrm>
-            <a:off x="822960" y="457200"/>
+            <a:off x="822960" y="502920"/>
             <a:ext cx="8229600" cy="365760"/>
           </a:xfrm>
           <a:prstGeom prst="rect">
@@ -6444,13 +7190,13 @@
           <a:lstStyle/>
           <a:p>
             <a:r>
-              <a:rPr sz="1200" b="1" i="0">
-                <a:solidFill>
-                  <a:srgbClr val="64748B"/>
-                </a:solidFill>
-                <a:latin typeface="Montserrat"/>
-              </a:rPr>
-              <a:t>MARCO · UNE 60670</a:t>
+              <a:rPr sz="1300" b="1" i="0">
+                <a:solidFill>
+                  <a:srgbClr val="E8801A"/>
+                </a:solidFill>
+                <a:latin typeface="Montserrat"/>
+              </a:rPr>
+              <a:t>PARTES DE ESTE VÍDEO</a:t>
             </a:r>
           </a:p>
         </p:txBody>
@@ -6463,7 +7209,7 @@
         </p:nvSpPr>
         <p:spPr>
           <a:xfrm>
-            <a:off x="822960" y="868680"/>
+            <a:off x="822960" y="914400"/>
             <a:ext cx="10515600" cy="914400"/>
           </a:xfrm>
           <a:prstGeom prst="rect">
@@ -6484,155 +7230,30 @@
                 </a:solidFill>
                 <a:latin typeface="Montserrat"/>
               </a:rPr>
-              <a:t>Dónde encaja la Parte 9</a:t>
-            </a:r>
-          </a:p>
-        </p:txBody>
-      </p:sp>
-      <p:sp>
-        <p:nvSpPr>
-          <p:cNvPr id="7" name="TextBox 6"/>
-          <p:cNvSpPr txBox="1"/>
-          <p:nvPr/>
-        </p:nvSpPr>
-        <p:spPr>
-          <a:xfrm>
-            <a:off x="822960" y="1920240"/>
-            <a:ext cx="4983480" cy="4206240"/>
-          </a:xfrm>
-          <a:prstGeom prst="rect">
-            <a:avLst/>
-          </a:prstGeom>
-          <a:noFill/>
-        </p:spPr>
-        <p:txBody>
-          <a:bodyPr wrap="square">
-            <a:spAutoFit/>
-          </a:bodyPr>
-          <a:lstStyle/>
-          <a:p>
-            <a:pPr>
-              <a:spcAft>
-                <a:spcPts val="1000"/>
-              </a:spcAft>
-            </a:pPr>
-            <a:r>
-              <a:rPr sz="1600" b="1" i="0">
-                <a:solidFill>
-                  <a:srgbClr val="2E3A80"/>
-                </a:solidFill>
-                <a:latin typeface="Montserrat"/>
-              </a:rPr>
-              <a:t>•  </a:t>
-            </a:r>
-            <a:r>
-              <a:rPr sz="1600" b="0" i="0">
-                <a:solidFill>
-                  <a:srgbClr val="1B2330"/>
-                </a:solidFill>
-                <a:latin typeface="Montserrat"/>
-              </a:rPr>
-              <a:t>Va después de la estanquidad (Parte 8)</a:t>
-            </a:r>
-          </a:p>
-          <a:p>
-            <a:pPr>
-              <a:spcAft>
-                <a:spcPts val="1000"/>
-              </a:spcAft>
-            </a:pPr>
-            <a:r>
-              <a:rPr sz="1600" b="1" i="0">
-                <a:solidFill>
-                  <a:srgbClr val="2E3A80"/>
-                </a:solidFill>
-                <a:latin typeface="Montserrat"/>
-              </a:rPr>
-              <a:t>•  </a:t>
-            </a:r>
-            <a:r>
-              <a:rPr sz="1600" b="0" i="0">
-                <a:solidFill>
-                  <a:srgbClr val="1B2330"/>
-                </a:solidFill>
-                <a:latin typeface="Montserrat"/>
-              </a:rPr>
-              <a:t>Va antes de arrancar aparatos (Parte 10)</a:t>
-            </a:r>
-          </a:p>
-          <a:p>
-            <a:pPr>
-              <a:spcAft>
-                <a:spcPts val="1000"/>
-              </a:spcAft>
-            </a:pPr>
-            <a:r>
-              <a:rPr sz="1600" b="1" i="0">
-                <a:solidFill>
-                  <a:srgbClr val="2E3A80"/>
-                </a:solidFill>
-                <a:latin typeface="Montserrat"/>
-              </a:rPr>
-              <a:t>•  </a:t>
-            </a:r>
-            <a:r>
-              <a:rPr sz="1600" b="0" i="0">
-                <a:solidFill>
-                  <a:srgbClr val="1B2330"/>
-                </a:solidFill>
-                <a:latin typeface="Montserrat"/>
-              </a:rPr>
-              <a:t>Instalaciones receptoras hasta 5 bar</a:t>
-            </a:r>
-          </a:p>
-          <a:p>
-            <a:pPr>
-              <a:spcAft>
-                <a:spcPts val="1000"/>
-              </a:spcAft>
-            </a:pPr>
-            <a:r>
-              <a:rPr sz="1600" b="1" i="0">
-                <a:solidFill>
-                  <a:srgbClr val="2E3A80"/>
-                </a:solidFill>
-                <a:latin typeface="Montserrat"/>
-              </a:rPr>
-              <a:t>•  </a:t>
-            </a:r>
-            <a:r>
-              <a:rPr sz="1600" b="0" i="0">
-                <a:solidFill>
-                  <a:srgbClr val="1B2330"/>
-                </a:solidFill>
-                <a:latin typeface="Montserrat"/>
-              </a:rPr>
-              <a:t>Sin cambios relevantes de edición</a:t>
-            </a:r>
-          </a:p>
-        </p:txBody>
-      </p:sp>
-      <p:sp>
-        <p:nvSpPr>
-          <p:cNvPr id="8" name="imgph" descr="IMGQ:gas installation pipes building riser"/>
+              <a:t>En este vídeo</a:t>
+            </a:r>
+          </a:p>
+        </p:txBody>
+      </p:sp>
+      <p:sp>
+        <p:nvSpPr>
+          <p:cNvPr id="7" name="Rounded Rectangle 6"/>
           <p:cNvSpPr/>
           <p:nvPr/>
         </p:nvSpPr>
         <p:spPr>
           <a:xfrm>
-            <a:off x="5806440" y="1051560"/>
-            <a:ext cx="5298947" cy="4629150"/>
+            <a:off x="868680" y="1673352"/>
+            <a:ext cx="2011680" cy="73152"/>
           </a:xfrm>
           <a:prstGeom prst="roundRect">
             <a:avLst/>
           </a:prstGeom>
           <a:solidFill>
-            <a:srgbClr val="F3F6FB"/>
+            <a:srgbClr val="E8801A"/>
           </a:solidFill>
-          <a:ln w="12700">
-            <a:solidFill>
-              <a:srgbClr val="C7D2E6"/>
-            </a:solidFill>
+          <a:ln>
+            <a:noFill/>
           </a:ln>
           <a:effectLst/>
         </p:spPr>
@@ -6660,14 +7281,14 @@
       </p:sp>
       <p:sp>
         <p:nvSpPr>
-          <p:cNvPr id="9" name="TextBox 8"/>
+          <p:cNvPr id="8" name="TextBox 7"/>
           <p:cNvSpPr txBox="1"/>
           <p:nvPr/>
         </p:nvSpPr>
         <p:spPr>
           <a:xfrm>
-            <a:off x="6080760" y="2726055"/>
-            <a:ext cx="4750307" cy="1280160"/>
+            <a:off x="822960" y="2103120"/>
+            <a:ext cx="10515600" cy="4023360"/>
           </a:xfrm>
           <a:prstGeom prst="rect">
             <a:avLst/>
@@ -6680,27 +7301,128 @@
           </a:bodyPr>
           <a:lstStyle/>
           <a:p>
-            <a:pPr algn="ctr"/>
-            <a:r>
-              <a:rPr sz="1400" b="1" i="0">
-                <a:solidFill>
-                  <a:srgbClr val="64748B"/>
-                </a:solidFill>
-                <a:latin typeface="Montserrat"/>
-              </a:rPr>
-              <a:t>IMAGEN REALISTA</a:t>
-            </a:r>
-          </a:p>
-          <a:p>
-            <a:pPr algn="ctr"/>
-            <a:r>
-              <a:rPr sz="1100" b="0" i="1">
-                <a:solidFill>
-                  <a:srgbClr val="64748B"/>
-                </a:solidFill>
-                <a:latin typeface="Montserrat"/>
-              </a:rPr>
-              <a:t>gas installation pipes building riser</a:t>
+            <a:pPr>
+              <a:spcAft>
+                <a:spcPts val="900"/>
+              </a:spcAft>
+            </a:pPr>
+            <a:r>
+              <a:rPr sz="1800" b="1" i="0">
+                <a:solidFill>
+                  <a:srgbClr val="E8801A"/>
+                </a:solidFill>
+                <a:latin typeface="Montserrat"/>
+              </a:rPr>
+              <a:t>01   </a:t>
+            </a:r>
+            <a:r>
+              <a:rPr sz="1700" b="0" i="0">
+                <a:solidFill>
+                  <a:srgbClr val="1B2330"/>
+                </a:solidFill>
+                <a:latin typeface="Montserrat"/>
+              </a:rPr>
+              <a:t>Marco</a:t>
+            </a:r>
+          </a:p>
+          <a:p>
+            <a:pPr>
+              <a:spcAft>
+                <a:spcPts val="900"/>
+              </a:spcAft>
+            </a:pPr>
+            <a:r>
+              <a:rPr sz="1800" b="1" i="0">
+                <a:solidFill>
+                  <a:srgbClr val="E8801A"/>
+                </a:solidFill>
+                <a:latin typeface="Montserrat"/>
+              </a:rPr>
+              <a:t>02   </a:t>
+            </a:r>
+            <a:r>
+              <a:rPr sz="1700" b="0" i="0">
+                <a:solidFill>
+                  <a:srgbClr val="1B2330"/>
+                </a:solidFill>
+                <a:latin typeface="Montserrat"/>
+              </a:rPr>
+              <a:t>Objeto</a:t>
+            </a:r>
+          </a:p>
+          <a:p>
+            <a:pPr>
+              <a:spcAft>
+                <a:spcPts val="900"/>
+              </a:spcAft>
+            </a:pPr>
+            <a:r>
+              <a:rPr sz="1800" b="1" i="0">
+                <a:solidFill>
+                  <a:srgbClr val="E8801A"/>
+                </a:solidFill>
+                <a:latin typeface="Montserrat"/>
+              </a:rPr>
+              <a:t>03   </a:t>
+            </a:r>
+            <a:r>
+              <a:rPr sz="1700" b="0" i="0">
+                <a:solidFill>
+                  <a:srgbClr val="1B2330"/>
+                </a:solidFill>
+                <a:latin typeface="Montserrat"/>
+              </a:rPr>
+              <a:t>Pruebas previas</a:t>
+            </a:r>
+          </a:p>
+          <a:p>
+            <a:pPr>
+              <a:spcAft>
+                <a:spcPts val="900"/>
+              </a:spcAft>
+            </a:pPr>
+            <a:r>
+              <a:rPr sz="1800" b="1" i="0">
+                <a:solidFill>
+                  <a:srgbClr val="E8801A"/>
+                </a:solidFill>
+                <a:latin typeface="Montserrat"/>
+              </a:rPr>
+              <a:t>04   </a:t>
+            </a:r>
+            <a:r>
+              <a:rPr sz="1700" b="0" i="0">
+                <a:solidFill>
+                  <a:srgbClr val="1B2330"/>
+                </a:solidFill>
+                <a:latin typeface="Montserrat"/>
+              </a:rPr>
+              <a:t>Puesta en servicio</a:t>
+            </a:r>
+          </a:p>
+          <a:p>
+            <a:pPr>
+              <a:spcAft>
+                <a:spcPts val="900"/>
+              </a:spcAft>
+            </a:pPr>
+            <a:r>
+              <a:rPr sz="1800" b="1" i="0">
+                <a:solidFill>
+                  <a:srgbClr val="E8801A"/>
+                </a:solidFill>
+                <a:latin typeface="Montserrat"/>
+              </a:rPr>
+              <a:t>05   </a:t>
+            </a:r>
+            <a:r>
+              <a:rPr sz="1700" b="0" i="0">
+                <a:solidFill>
+                  <a:srgbClr val="1B2330"/>
+                </a:solidFill>
+                <a:latin typeface="Montserrat"/>
+              </a:rPr>
+              <a:t>Caso especial</a:t>
             </a:r>
           </a:p>
         </p:txBody>
@@ -6797,7 +7519,7 @@
                 </a:solidFill>
                 <a:latin typeface="Montserrat"/>
               </a:rPr>
-              <a:t>004 / 012</a:t>
+              <a:t>004 / 013</a:t>
             </a:r>
           </a:p>
         </p:txBody>
@@ -6845,7 +7567,7 @@
         <p:spPr>
           <a:xfrm>
             <a:off x="822960" y="457200"/>
-            <a:ext cx="8229600" cy="365760"/>
+            <a:ext cx="10058400" cy="365760"/>
           </a:xfrm>
           <a:prstGeom prst="rect">
             <a:avLst/>
@@ -6859,13 +7581,13 @@
           <a:lstStyle/>
           <a:p>
             <a:r>
-              <a:rPr sz="1200" b="1" i="0">
-                <a:solidFill>
-                  <a:srgbClr val="64748B"/>
-                </a:solidFill>
-                <a:latin typeface="Montserrat"/>
-              </a:rPr>
-              <a:t>OBJETO</a:t>
+              <a:rPr sz="1300" b="1" i="0">
+                <a:solidFill>
+                  <a:srgbClr val="E8801A"/>
+                </a:solidFill>
+                <a:latin typeface="Montserrat"/>
+              </a:rPr>
+              <a:t>MARCO · UNE 60670</a:t>
             </a:r>
           </a:p>
         </p:txBody>
@@ -6893,26 +7615,70 @@
           <a:lstStyle/>
           <a:p>
             <a:r>
-              <a:rPr sz="2700" b="1" i="0">
+              <a:rPr sz="2800" b="1" i="0">
                 <a:solidFill>
                   <a:srgbClr val="1E2761"/>
                 </a:solidFill>
                 <a:latin typeface="Montserrat"/>
               </a:rPr>
-              <a:t>Dos estanquidades distintas</a:t>
-            </a:r>
-          </a:p>
-        </p:txBody>
-      </p:sp>
-      <p:sp>
-        <p:nvSpPr>
-          <p:cNvPr id="7" name="TextBox 6"/>
+              <a:t>Dónde encaja la Parte 9</a:t>
+            </a:r>
+          </a:p>
+        </p:txBody>
+      </p:sp>
+      <p:sp>
+        <p:nvSpPr>
+          <p:cNvPr id="7" name="Rounded Rectangle 6"/>
+          <p:cNvSpPr/>
+          <p:nvPr/>
+        </p:nvSpPr>
+        <p:spPr>
+          <a:xfrm>
+            <a:off x="868680" y="1627632"/>
+            <a:ext cx="2011680" cy="73152"/>
+          </a:xfrm>
+          <a:prstGeom prst="roundRect">
+            <a:avLst/>
+          </a:prstGeom>
+          <a:solidFill>
+            <a:srgbClr val="E8801A"/>
+          </a:solidFill>
+          <a:ln>
+            <a:noFill/>
+          </a:ln>
+          <a:effectLst/>
+        </p:spPr>
+        <p:style>
+          <a:lnRef idx="1">
+            <a:schemeClr val="accent1"/>
+          </a:lnRef>
+          <a:fillRef idx="3">
+            <a:schemeClr val="accent1"/>
+          </a:fillRef>
+          <a:effectRef idx="2">
+            <a:schemeClr val="accent1"/>
+          </a:effectRef>
+          <a:fontRef idx="minor">
+            <a:schemeClr val="lt1"/>
+          </a:fontRef>
+        </p:style>
+        <p:txBody>
+          <a:bodyPr rtlCol="0" anchor="ctr"/>
+          <a:lstStyle/>
+          <a:p>
+            <a:pPr algn="ctr"/>
+          </a:p>
+        </p:txBody>
+      </p:sp>
+      <p:sp>
+        <p:nvSpPr>
+          <p:cNvPr id="8" name="TextBox 7"/>
           <p:cNvSpPr txBox="1"/>
           <p:nvPr/>
         </p:nvSpPr>
         <p:spPr>
           <a:xfrm>
-            <a:off x="822960" y="1920240"/>
+            <a:off x="822960" y="1965960"/>
             <a:ext cx="4983480" cy="4206240"/>
           </a:xfrm>
           <a:prstGeom prst="rect">
@@ -6928,17 +7694,17 @@
           <a:p>
             <a:pPr>
               <a:spcAft>
-                <a:spcPts val="1000"/>
+                <a:spcPts val="1100"/>
               </a:spcAft>
             </a:pPr>
             <a:r>
               <a:rPr sz="1600" b="1" i="0">
                 <a:solidFill>
-                  <a:srgbClr val="2E3A80"/>
-                </a:solidFill>
-                <a:latin typeface="Montserrat"/>
-              </a:rPr>
-              <a:t>•  </a:t>
+                  <a:srgbClr val="E8801A"/>
+                </a:solidFill>
+                <a:latin typeface="Montserrat"/>
+              </a:rPr>
+              <a:t>▸  </a:t>
             </a:r>
             <a:r>
               <a:rPr sz="1600" b="0" i="0">
@@ -6947,23 +7713,23 @@
                 </a:solidFill>
                 <a:latin typeface="Montserrat"/>
               </a:rPr>
-              <a:t>Parte 8: prueba con aire, presión de prueba</a:t>
+              <a:t>Va después de la estanquidad (Parte 8)</a:t>
             </a:r>
           </a:p>
           <a:p>
             <a:pPr>
               <a:spcAft>
-                <a:spcPts val="1000"/>
+                <a:spcPts val="1100"/>
               </a:spcAft>
             </a:pPr>
             <a:r>
               <a:rPr sz="1600" b="1" i="0">
                 <a:solidFill>
-                  <a:srgbClr val="2E3A80"/>
-                </a:solidFill>
-                <a:latin typeface="Montserrat"/>
-              </a:rPr>
-              <a:t>•  </a:t>
+                  <a:srgbClr val="E8801A"/>
+                </a:solidFill>
+                <a:latin typeface="Montserrat"/>
+              </a:rPr>
+              <a:t>▸  </a:t>
             </a:r>
             <a:r>
               <a:rPr sz="1600" b="0" i="0">
@@ -6972,23 +7738,23 @@
                 </a:solidFill>
                 <a:latin typeface="Montserrat"/>
               </a:rPr>
-              <a:t>Parte 9: verificación con gas, presión de operación</a:t>
+              <a:t>Va antes de arrancar aparatos (Parte 10)</a:t>
             </a:r>
           </a:p>
           <a:p>
             <a:pPr>
               <a:spcAft>
-                <a:spcPts val="1000"/>
+                <a:spcPts val="1100"/>
               </a:spcAft>
             </a:pPr>
             <a:r>
               <a:rPr sz="1600" b="1" i="0">
                 <a:solidFill>
-                  <a:srgbClr val="2E3A80"/>
-                </a:solidFill>
-                <a:latin typeface="Montserrat"/>
-              </a:rPr>
-              <a:t>•  </a:t>
+                  <a:srgbClr val="E8801A"/>
+                </a:solidFill>
+                <a:latin typeface="Montserrat"/>
+              </a:rPr>
+              <a:t>▸  </a:t>
             </a:r>
             <a:r>
               <a:rPr sz="1600" b="0" i="0">
@@ -6997,23 +7763,23 @@
                 </a:solidFill>
                 <a:latin typeface="Montserrat"/>
               </a:rPr>
-              <a:t>Tubo vacío antes de entregar</a:t>
+              <a:t>Instalaciones receptoras hasta 5 bar</a:t>
             </a:r>
           </a:p>
           <a:p>
             <a:pPr>
               <a:spcAft>
-                <a:spcPts val="1000"/>
+                <a:spcPts val="1100"/>
               </a:spcAft>
             </a:pPr>
             <a:r>
               <a:rPr sz="1600" b="1" i="0">
                 <a:solidFill>
-                  <a:srgbClr val="2E3A80"/>
-                </a:solidFill>
-                <a:latin typeface="Montserrat"/>
-              </a:rPr>
-              <a:t>•  </a:t>
+                  <a:srgbClr val="E8801A"/>
+                </a:solidFill>
+                <a:latin typeface="Montserrat"/>
+              </a:rPr>
+              <a:t>▸  </a:t>
             </a:r>
             <a:r>
               <a:rPr sz="1600" b="0" i="0">
@@ -7022,14 +7788,14 @@
                 </a:solidFill>
                 <a:latin typeface="Montserrat"/>
               </a:rPr>
-              <a:t>Instalación con gas antes de dejar en servicio</a:t>
-            </a:r>
-          </a:p>
-        </p:txBody>
-      </p:sp>
-      <p:sp>
-        <p:nvSpPr>
-          <p:cNvPr id="8" name="imgph" descr="IMGQ:technician checking gas pipe joint"/>
+              <a:t>Sin cambios relevantes de edición</a:t>
+            </a:r>
+          </a:p>
+        </p:txBody>
+      </p:sp>
+      <p:sp>
+        <p:nvSpPr>
+          <p:cNvPr id="9" name="imgph" descr="IMGQ:gas installation pipes building riser"/>
           <p:cNvSpPr/>
           <p:nvPr/>
         </p:nvSpPr>
@@ -7075,7 +7841,7 @@
       </p:sp>
       <p:sp>
         <p:nvSpPr>
-          <p:cNvPr id="9" name="TextBox 8"/>
+          <p:cNvPr id="10" name="TextBox 9"/>
           <p:cNvSpPr txBox="1"/>
           <p:nvPr/>
         </p:nvSpPr>
@@ -7115,7 +7881,7 @@
                 </a:solidFill>
                 <a:latin typeface="Montserrat"/>
               </a:rPr>
-              <a:t>technician checking gas pipe joint</a:t>
+              <a:t>gas installation pipes building riser</a:t>
             </a:r>
           </a:p>
         </p:txBody>
@@ -7212,7 +7978,7 @@
                 </a:solidFill>
                 <a:latin typeface="Montserrat"/>
               </a:rPr>
-              <a:t>005 / 012</a:t>
+              <a:t>005 / 013</a:t>
             </a:r>
           </a:p>
         </p:txBody>
@@ -7260,7 +8026,7 @@
         <p:spPr>
           <a:xfrm>
             <a:off x="822960" y="457200"/>
-            <a:ext cx="8229600" cy="365760"/>
+            <a:ext cx="10058400" cy="365760"/>
           </a:xfrm>
           <a:prstGeom prst="rect">
             <a:avLst/>
@@ -7274,13 +8040,13 @@
           <a:lstStyle/>
           <a:p>
             <a:r>
-              <a:rPr sz="1200" b="1" i="0">
-                <a:solidFill>
-                  <a:srgbClr val="64748B"/>
-                </a:solidFill>
-                <a:latin typeface="Montserrat"/>
-              </a:rPr>
-              <a:t>PRUEBAS PREVIAS</a:t>
+              <a:rPr sz="1300" b="1" i="0">
+                <a:solidFill>
+                  <a:srgbClr val="E8801A"/>
+                </a:solidFill>
+                <a:latin typeface="Montserrat"/>
+              </a:rPr>
+              <a:t>OBJETO</a:t>
             </a:r>
           </a:p>
         </p:txBody>
@@ -7308,26 +8074,70 @@
           <a:lstStyle/>
           <a:p>
             <a:r>
-              <a:rPr sz="2700" b="1" i="0">
+              <a:rPr sz="2800" b="1" i="0">
                 <a:solidFill>
                   <a:srgbClr val="1E2761"/>
                 </a:solidFill>
                 <a:latin typeface="Montserrat"/>
               </a:rPr>
-              <a:t>El repaso antes de dar gas</a:t>
-            </a:r>
-          </a:p>
-        </p:txBody>
-      </p:sp>
-      <p:sp>
-        <p:nvSpPr>
-          <p:cNvPr id="7" name="TextBox 6"/>
+              <a:t>Dos estanquidades distintas</a:t>
+            </a:r>
+          </a:p>
+        </p:txBody>
+      </p:sp>
+      <p:sp>
+        <p:nvSpPr>
+          <p:cNvPr id="7" name="Rounded Rectangle 6"/>
+          <p:cNvSpPr/>
+          <p:nvPr/>
+        </p:nvSpPr>
+        <p:spPr>
+          <a:xfrm>
+            <a:off x="868680" y="1627632"/>
+            <a:ext cx="2011680" cy="73152"/>
+          </a:xfrm>
+          <a:prstGeom prst="roundRect">
+            <a:avLst/>
+          </a:prstGeom>
+          <a:solidFill>
+            <a:srgbClr val="E8801A"/>
+          </a:solidFill>
+          <a:ln>
+            <a:noFill/>
+          </a:ln>
+          <a:effectLst/>
+        </p:spPr>
+        <p:style>
+          <a:lnRef idx="1">
+            <a:schemeClr val="accent1"/>
+          </a:lnRef>
+          <a:fillRef idx="3">
+            <a:schemeClr val="accent1"/>
+          </a:fillRef>
+          <a:effectRef idx="2">
+            <a:schemeClr val="accent1"/>
+          </a:effectRef>
+          <a:fontRef idx="minor">
+            <a:schemeClr val="lt1"/>
+          </a:fontRef>
+        </p:style>
+        <p:txBody>
+          <a:bodyPr rtlCol="0" anchor="ctr"/>
+          <a:lstStyle/>
+          <a:p>
+            <a:pPr algn="ctr"/>
+          </a:p>
+        </p:txBody>
+      </p:sp>
+      <p:sp>
+        <p:nvSpPr>
+          <p:cNvPr id="8" name="TextBox 7"/>
           <p:cNvSpPr txBox="1"/>
           <p:nvPr/>
         </p:nvSpPr>
         <p:spPr>
           <a:xfrm>
-            <a:off x="822960" y="1920240"/>
+            <a:off x="822960" y="1965960"/>
             <a:ext cx="4983480" cy="4206240"/>
           </a:xfrm>
           <a:prstGeom prst="rect">
@@ -7343,17 +8153,17 @@
           <a:p>
             <a:pPr>
               <a:spcAft>
-                <a:spcPts val="1000"/>
+                <a:spcPts val="1100"/>
               </a:spcAft>
             </a:pPr>
             <a:r>
               <a:rPr sz="1600" b="1" i="0">
                 <a:solidFill>
-                  <a:srgbClr val="2E3A80"/>
-                </a:solidFill>
-                <a:latin typeface="Montserrat"/>
-              </a:rPr>
-              <a:t>•  </a:t>
+                  <a:srgbClr val="E8801A"/>
+                </a:solidFill>
+                <a:latin typeface="Montserrat"/>
+              </a:rPr>
+              <a:t>▸  </a:t>
             </a:r>
             <a:r>
               <a:rPr sz="1600" b="0" i="0">
@@ -7362,23 +8172,23 @@
                 </a:solidFill>
                 <a:latin typeface="Montserrat"/>
               </a:rPr>
-              <a:t>Documentación completa</a:t>
+              <a:t>Parte 8: prueba con aire, presión de prueba</a:t>
             </a:r>
           </a:p>
           <a:p>
             <a:pPr>
               <a:spcAft>
-                <a:spcPts val="1000"/>
+                <a:spcPts val="1100"/>
               </a:spcAft>
             </a:pPr>
             <a:r>
               <a:rPr sz="1600" b="1" i="0">
                 <a:solidFill>
-                  <a:srgbClr val="2E3A80"/>
-                </a:solidFill>
-                <a:latin typeface="Montserrat"/>
-              </a:rPr>
-              <a:t>•  </a:t>
+                  <a:srgbClr val="E8801A"/>
+                </a:solidFill>
+                <a:latin typeface="Montserrat"/>
+              </a:rPr>
+              <a:t>▸  </a:t>
             </a:r>
             <a:r>
               <a:rPr sz="1600" b="0" i="0">
@@ -7387,23 +8197,23 @@
                 </a:solidFill>
                 <a:latin typeface="Montserrat"/>
               </a:rPr>
-              <a:t>Lo visible y accesible cumple la norma</a:t>
+              <a:t>Parte 9: verificación con gas, presión de operación</a:t>
             </a:r>
           </a:p>
           <a:p>
             <a:pPr>
               <a:spcAft>
-                <a:spcPts val="1000"/>
+                <a:spcPts val="1100"/>
               </a:spcAft>
             </a:pPr>
             <a:r>
               <a:rPr sz="1600" b="1" i="0">
                 <a:solidFill>
-                  <a:srgbClr val="2E3A80"/>
-                </a:solidFill>
-                <a:latin typeface="Montserrat"/>
-              </a:rPr>
-              <a:t>•  </a:t>
+                  <a:srgbClr val="E8801A"/>
+                </a:solidFill>
+                <a:latin typeface="Montserrat"/>
+              </a:rPr>
+              <a:t>▸  </a:t>
             </a:r>
             <a:r>
               <a:rPr sz="1600" b="0" i="0">
@@ -7412,23 +8222,23 @@
                 </a:solidFill>
                 <a:latin typeface="Montserrat"/>
               </a:rPr>
-              <a:t>Locales y salidas de humos correctos</a:t>
+              <a:t>Tubo vacío antes de entregar</a:t>
             </a:r>
           </a:p>
           <a:p>
             <a:pPr>
               <a:spcAft>
-                <a:spcPts val="1000"/>
+                <a:spcPts val="1100"/>
               </a:spcAft>
             </a:pPr>
             <a:r>
               <a:rPr sz="1600" b="1" i="0">
                 <a:solidFill>
-                  <a:srgbClr val="2E3A80"/>
-                </a:solidFill>
-                <a:latin typeface="Montserrat"/>
-              </a:rPr>
-              <a:t>•  </a:t>
+                  <a:srgbClr val="E8801A"/>
+                </a:solidFill>
+                <a:latin typeface="Montserrat"/>
+              </a:rPr>
+              <a:t>▸  </a:t>
             </a:r>
             <a:r>
               <a:rPr sz="1600" b="0" i="0">
@@ -7437,14 +8247,14 @@
                 </a:solidFill>
                 <a:latin typeface="Montserrat"/>
               </a:rPr>
-              <a:t>Maniobrabilidad de las válvulas</a:t>
-            </a:r>
-          </a:p>
-        </p:txBody>
-      </p:sp>
-      <p:sp>
-        <p:nvSpPr>
-          <p:cNvPr id="8" name="imgph" descr="IMGQ:inspector with clipboard gas installation"/>
+              <a:t>Instalación con gas antes de dejar en servicio</a:t>
+            </a:r>
+          </a:p>
+        </p:txBody>
+      </p:sp>
+      <p:sp>
+        <p:nvSpPr>
+          <p:cNvPr id="9" name="imgph" descr="IMGQ:technician checking gas pipe joint"/>
           <p:cNvSpPr/>
           <p:nvPr/>
         </p:nvSpPr>
@@ -7490,7 +8300,7 @@
       </p:sp>
       <p:sp>
         <p:nvSpPr>
-          <p:cNvPr id="9" name="TextBox 8"/>
+          <p:cNvPr id="10" name="TextBox 9"/>
           <p:cNvSpPr txBox="1"/>
           <p:nvPr/>
         </p:nvSpPr>
@@ -7530,7 +8340,7 @@
                 </a:solidFill>
                 <a:latin typeface="Montserrat"/>
               </a:rPr>
-              <a:t>inspector with clipboard gas installation</a:t>
+              <a:t>technician checking gas pipe joint</a:t>
             </a:r>
           </a:p>
         </p:txBody>
@@ -7627,7 +8437,7 @@
                 </a:solidFill>
                 <a:latin typeface="Montserrat"/>
               </a:rPr>
-              <a:t>006 / 012</a:t>
+              <a:t>006 / 013</a:t>
             </a:r>
           </a:p>
         </p:txBody>
@@ -7675,7 +8485,7 @@
         <p:spPr>
           <a:xfrm>
             <a:off x="822960" y="457200"/>
-            <a:ext cx="8229600" cy="365760"/>
+            <a:ext cx="10058400" cy="365760"/>
           </a:xfrm>
           <a:prstGeom prst="rect">
             <a:avLst/>
@@ -7689,9 +8499,9 @@
           <a:lstStyle/>
           <a:p>
             <a:r>
-              <a:rPr sz="1200" b="1" i="0">
-                <a:solidFill>
-                  <a:srgbClr val="64748B"/>
+              <a:rPr sz="1300" b="1" i="0">
+                <a:solidFill>
+                  <a:srgbClr val="E8801A"/>
                 </a:solidFill>
                 <a:latin typeface="Montserrat"/>
               </a:rPr>
@@ -7723,26 +8533,70 @@
           <a:lstStyle/>
           <a:p>
             <a:r>
-              <a:rPr sz="2700" b="1" i="0">
+              <a:rPr sz="2800" b="1" i="0">
                 <a:solidFill>
                   <a:srgbClr val="1E2761"/>
                 </a:solidFill>
                 <a:latin typeface="Montserrat"/>
               </a:rPr>
-              <a:t>Quién es el agente responsable</a:t>
-            </a:r>
-          </a:p>
-        </p:txBody>
-      </p:sp>
-      <p:sp>
-        <p:nvSpPr>
-          <p:cNvPr id="7" name="TextBox 6"/>
+              <a:t>El repaso antes de dar gas</a:t>
+            </a:r>
+          </a:p>
+        </p:txBody>
+      </p:sp>
+      <p:sp>
+        <p:nvSpPr>
+          <p:cNvPr id="7" name="Rounded Rectangle 6"/>
+          <p:cNvSpPr/>
+          <p:nvPr/>
+        </p:nvSpPr>
+        <p:spPr>
+          <a:xfrm>
+            <a:off x="868680" y="1627632"/>
+            <a:ext cx="2011680" cy="73152"/>
+          </a:xfrm>
+          <a:prstGeom prst="roundRect">
+            <a:avLst/>
+          </a:prstGeom>
+          <a:solidFill>
+            <a:srgbClr val="E8801A"/>
+          </a:solidFill>
+          <a:ln>
+            <a:noFill/>
+          </a:ln>
+          <a:effectLst/>
+        </p:spPr>
+        <p:style>
+          <a:lnRef idx="1">
+            <a:schemeClr val="accent1"/>
+          </a:lnRef>
+          <a:fillRef idx="3">
+            <a:schemeClr val="accent1"/>
+          </a:fillRef>
+          <a:effectRef idx="2">
+            <a:schemeClr val="accent1"/>
+          </a:effectRef>
+          <a:fontRef idx="minor">
+            <a:schemeClr val="lt1"/>
+          </a:fontRef>
+        </p:style>
+        <p:txBody>
+          <a:bodyPr rtlCol="0" anchor="ctr"/>
+          <a:lstStyle/>
+          <a:p>
+            <a:pPr algn="ctr"/>
+          </a:p>
+        </p:txBody>
+      </p:sp>
+      <p:sp>
+        <p:nvSpPr>
+          <p:cNvPr id="8" name="TextBox 7"/>
           <p:cNvSpPr txBox="1"/>
           <p:nvPr/>
         </p:nvSpPr>
         <p:spPr>
           <a:xfrm>
-            <a:off x="822960" y="1920240"/>
+            <a:off x="822960" y="1965960"/>
             <a:ext cx="4983480" cy="4206240"/>
           </a:xfrm>
           <a:prstGeom prst="rect">
@@ -7758,17 +8612,17 @@
           <a:p>
             <a:pPr>
               <a:spcAft>
-                <a:spcPts val="1000"/>
+                <a:spcPts val="1100"/>
               </a:spcAft>
             </a:pPr>
             <a:r>
               <a:rPr sz="1600" b="1" i="0">
                 <a:solidFill>
-                  <a:srgbClr val="2E3A80"/>
-                </a:solidFill>
-                <a:latin typeface="Montserrat"/>
-              </a:rPr>
-              <a:t>•  </a:t>
+                  <a:srgbClr val="E8801A"/>
+                </a:solidFill>
+                <a:latin typeface="Montserrat"/>
+              </a:rPr>
+              <a:t>▸  </a:t>
             </a:r>
             <a:r>
               <a:rPr sz="1600" b="0" i="0">
@@ -7777,23 +8631,23 @@
                 </a:solidFill>
                 <a:latin typeface="Montserrat"/>
               </a:rPr>
-              <a:t>La norma remite a la legislación vigente</a:t>
+              <a:t>Documentación completa</a:t>
             </a:r>
           </a:p>
           <a:p>
             <a:pPr>
               <a:spcAft>
-                <a:spcPts val="1000"/>
+                <a:spcPts val="1100"/>
               </a:spcAft>
             </a:pPr>
             <a:r>
               <a:rPr sz="1600" b="1" i="0">
                 <a:solidFill>
-                  <a:srgbClr val="2E3A80"/>
-                </a:solidFill>
-                <a:latin typeface="Montserrat"/>
-              </a:rPr>
-              <a:t>•  </a:t>
+                  <a:srgbClr val="E8801A"/>
+                </a:solidFill>
+                <a:latin typeface="Montserrat"/>
+              </a:rPr>
+              <a:t>▸  </a:t>
             </a:r>
             <a:r>
               <a:rPr sz="1600" b="0" i="0">
@@ -7802,23 +8656,23 @@
                 </a:solidFill>
                 <a:latin typeface="Montserrat"/>
               </a:rPr>
-              <a:t>En la práctica: empresa instaladora habilitada</a:t>
+              <a:t>Lo visible y accesible cumple la norma</a:t>
             </a:r>
           </a:p>
           <a:p>
             <a:pPr>
               <a:spcAft>
-                <a:spcPts val="1000"/>
+                <a:spcPts val="1100"/>
               </a:spcAft>
             </a:pPr>
             <a:r>
               <a:rPr sz="1600" b="1" i="0">
                 <a:solidFill>
-                  <a:srgbClr val="2E3A80"/>
-                </a:solidFill>
-                <a:latin typeface="Montserrat"/>
-              </a:rPr>
-              <a:t>•  </a:t>
+                  <a:srgbClr val="E8801A"/>
+                </a:solidFill>
+                <a:latin typeface="Montserrat"/>
+              </a:rPr>
+              <a:t>▸  </a:t>
             </a:r>
             <a:r>
               <a:rPr sz="1600" b="0" i="0">
@@ -7827,23 +8681,23 @@
                 </a:solidFill>
                 <a:latin typeface="Montserrat"/>
               </a:rPr>
-              <a:t>Hay un responsable designado</a:t>
+              <a:t>Locales y salidas de humos correctos</a:t>
             </a:r>
           </a:p>
           <a:p>
             <a:pPr>
               <a:spcAft>
-                <a:spcPts val="1000"/>
+                <a:spcPts val="1100"/>
               </a:spcAft>
             </a:pPr>
             <a:r>
               <a:rPr sz="1600" b="1" i="0">
                 <a:solidFill>
-                  <a:srgbClr val="2E3A80"/>
-                </a:solidFill>
-                <a:latin typeface="Montserrat"/>
-              </a:rPr>
-              <a:t>•  </a:t>
+                  <a:srgbClr val="E8801A"/>
+                </a:solidFill>
+                <a:latin typeface="Montserrat"/>
+              </a:rPr>
+              <a:t>▸  </a:t>
             </a:r>
             <a:r>
               <a:rPr sz="1600" b="0" i="0">
@@ -7852,14 +8706,14 @@
                 </a:solidFill>
                 <a:latin typeface="Montserrat"/>
               </a:rPr>
-              <a:t>No lo hace cualquiera</a:t>
-            </a:r>
-          </a:p>
-        </p:txBody>
-      </p:sp>
-      <p:sp>
-        <p:nvSpPr>
-          <p:cNvPr id="8" name="imgph" descr="IMGQ:certified gas technician working"/>
+              <a:t>Maniobrabilidad de las válvulas</a:t>
+            </a:r>
+          </a:p>
+        </p:txBody>
+      </p:sp>
+      <p:sp>
+        <p:nvSpPr>
+          <p:cNvPr id="9" name="imgph" descr="IMGQ:inspector with clipboard gas installation"/>
           <p:cNvSpPr/>
           <p:nvPr/>
         </p:nvSpPr>
@@ -7905,7 +8759,7 @@
       </p:sp>
       <p:sp>
         <p:nvSpPr>
-          <p:cNvPr id="9" name="TextBox 8"/>
+          <p:cNvPr id="10" name="TextBox 9"/>
           <p:cNvSpPr txBox="1"/>
           <p:nvPr/>
         </p:nvSpPr>
@@ -7945,7 +8799,7 @@
                 </a:solidFill>
                 <a:latin typeface="Montserrat"/>
               </a:rPr>
-              <a:t>certified gas technician working</a:t>
+              <a:t>inspector with clipboard gas installation</a:t>
             </a:r>
           </a:p>
         </p:txBody>
@@ -8042,7 +8896,7 @@
                 </a:solidFill>
                 <a:latin typeface="Montserrat"/>
               </a:rPr>
-              <a:t>007 / 012</a:t>
+              <a:t>007 / 013</a:t>
             </a:r>
           </a:p>
         </p:txBody>
@@ -8090,7 +8944,7 @@
         <p:spPr>
           <a:xfrm>
             <a:off x="822960" y="457200"/>
-            <a:ext cx="8229600" cy="365760"/>
+            <a:ext cx="10058400" cy="365760"/>
           </a:xfrm>
           <a:prstGeom prst="rect">
             <a:avLst/>
@@ -8104,13 +8958,13 @@
           <a:lstStyle/>
           <a:p>
             <a:r>
-              <a:rPr sz="1200" b="1" i="0">
-                <a:solidFill>
-                  <a:srgbClr val="64748B"/>
-                </a:solidFill>
-                <a:latin typeface="Montserrat"/>
-              </a:rPr>
-              <a:t>PUESTA EN SERVICIO</a:t>
+              <a:rPr sz="1300" b="1" i="0">
+                <a:solidFill>
+                  <a:srgbClr val="E8801A"/>
+                </a:solidFill>
+                <a:latin typeface="Montserrat"/>
+              </a:rPr>
+              <a:t>PRUEBAS PREVIAS</a:t>
             </a:r>
           </a:p>
         </p:txBody>
@@ -8138,26 +8992,70 @@
           <a:lstStyle/>
           <a:p>
             <a:r>
-              <a:rPr sz="2700" b="1" i="0">
+              <a:rPr sz="2800" b="1" i="0">
                 <a:solidFill>
                   <a:srgbClr val="1E2761"/>
                 </a:solidFill>
                 <a:latin typeface="Montserrat"/>
               </a:rPr>
-              <a:t>La maniobra, paso a paso</a:t>
-            </a:r>
-          </a:p>
-        </p:txBody>
-      </p:sp>
-      <p:sp>
-        <p:nvSpPr>
-          <p:cNvPr id="7" name="TextBox 6"/>
+              <a:t>Quién es el agente responsable</a:t>
+            </a:r>
+          </a:p>
+        </p:txBody>
+      </p:sp>
+      <p:sp>
+        <p:nvSpPr>
+          <p:cNvPr id="7" name="Rounded Rectangle 6"/>
+          <p:cNvSpPr/>
+          <p:nvPr/>
+        </p:nvSpPr>
+        <p:spPr>
+          <a:xfrm>
+            <a:off x="868680" y="1627632"/>
+            <a:ext cx="2011680" cy="73152"/>
+          </a:xfrm>
+          <a:prstGeom prst="roundRect">
+            <a:avLst/>
+          </a:prstGeom>
+          <a:solidFill>
+            <a:srgbClr val="E8801A"/>
+          </a:solidFill>
+          <a:ln>
+            <a:noFill/>
+          </a:ln>
+          <a:effectLst/>
+        </p:spPr>
+        <p:style>
+          <a:lnRef idx="1">
+            <a:schemeClr val="accent1"/>
+          </a:lnRef>
+          <a:fillRef idx="3">
+            <a:schemeClr val="accent1"/>
+          </a:fillRef>
+          <a:effectRef idx="2">
+            <a:schemeClr val="accent1"/>
+          </a:effectRef>
+          <a:fontRef idx="minor">
+            <a:schemeClr val="lt1"/>
+          </a:fontRef>
+        </p:style>
+        <p:txBody>
+          <a:bodyPr rtlCol="0" anchor="ctr"/>
+          <a:lstStyle/>
+          <a:p>
+            <a:pPr algn="ctr"/>
+          </a:p>
+        </p:txBody>
+      </p:sp>
+      <p:sp>
+        <p:nvSpPr>
+          <p:cNvPr id="8" name="TextBox 7"/>
           <p:cNvSpPr txBox="1"/>
           <p:nvPr/>
         </p:nvSpPr>
         <p:spPr>
           <a:xfrm>
-            <a:off x="822960" y="1920240"/>
+            <a:off x="822960" y="1965960"/>
             <a:ext cx="4983480" cy="4206240"/>
           </a:xfrm>
           <a:prstGeom prst="rect">
@@ -8173,17 +9071,17 @@
           <a:p>
             <a:pPr>
               <a:spcAft>
-                <a:spcPts val="1000"/>
+                <a:spcPts val="1100"/>
               </a:spcAft>
             </a:pPr>
             <a:r>
               <a:rPr sz="1600" b="1" i="0">
                 <a:solidFill>
-                  <a:srgbClr val="2E3A80"/>
-                </a:solidFill>
-                <a:latin typeface="Montserrat"/>
-              </a:rPr>
-              <a:t>•  </a:t>
+                  <a:srgbClr val="E8801A"/>
+                </a:solidFill>
+                <a:latin typeface="Montserrat"/>
+              </a:rPr>
+              <a:t>▸  </a:t>
             </a:r>
             <a:r>
               <a:rPr sz="1600" b="0" i="0">
@@ -8192,23 +9090,23 @@
                 </a:solidFill>
                 <a:latin typeface="Montserrat"/>
               </a:rPr>
-              <a:t>Precintar los equipos de medida</a:t>
+              <a:t>La norma remite a la legislación vigente</a:t>
             </a:r>
           </a:p>
           <a:p>
             <a:pPr>
               <a:spcAft>
-                <a:spcPts val="1000"/>
+                <a:spcPts val="1100"/>
               </a:spcAft>
             </a:pPr>
             <a:r>
               <a:rPr sz="1600" b="1" i="0">
                 <a:solidFill>
-                  <a:srgbClr val="2E3A80"/>
-                </a:solidFill>
-                <a:latin typeface="Montserrat"/>
-              </a:rPr>
-              <a:t>•  </a:t>
+                  <a:srgbClr val="E8801A"/>
+                </a:solidFill>
+                <a:latin typeface="Montserrat"/>
+              </a:rPr>
+              <a:t>▸  </a:t>
             </a:r>
             <a:r>
               <a:rPr sz="1600" b="0" i="0">
@@ -8217,23 +9115,23 @@
                 </a:solidFill>
                 <a:latin typeface="Montserrat"/>
               </a:rPr>
-              <a:t>Cerrar y precintar llaves que no van a servicio</a:t>
+              <a:t>En la práctica: empresa instaladora habilitada</a:t>
             </a:r>
           </a:p>
           <a:p>
             <a:pPr>
               <a:spcAft>
-                <a:spcPts val="1000"/>
+                <a:spcPts val="1100"/>
               </a:spcAft>
             </a:pPr>
             <a:r>
               <a:rPr sz="1600" b="1" i="0">
                 <a:solidFill>
-                  <a:srgbClr val="2E3A80"/>
-                </a:solidFill>
-                <a:latin typeface="Montserrat"/>
-              </a:rPr>
-              <a:t>•  </a:t>
+                  <a:srgbClr val="E8801A"/>
+                </a:solidFill>
+                <a:latin typeface="Montserrat"/>
+              </a:rPr>
+              <a:t>▸  </a:t>
             </a:r>
             <a:r>
               <a:rPr sz="1600" b="0" i="0">
@@ -8242,23 +9140,23 @@
                 </a:solidFill>
                 <a:latin typeface="Montserrat"/>
               </a:rPr>
-              <a:t>Abrir acometida y purgar</a:t>
+              <a:t>Hay un responsable designado</a:t>
             </a:r>
           </a:p>
           <a:p>
             <a:pPr>
               <a:spcAft>
-                <a:spcPts val="1000"/>
+                <a:spcPts val="1100"/>
               </a:spcAft>
             </a:pPr>
             <a:r>
               <a:rPr sz="1600" b="1" i="0">
                 <a:solidFill>
-                  <a:srgbClr val="2E3A80"/>
-                </a:solidFill>
-                <a:latin typeface="Montserrat"/>
-              </a:rPr>
-              <a:t>•  </a:t>
+                  <a:srgbClr val="E8801A"/>
+                </a:solidFill>
+                <a:latin typeface="Montserrat"/>
+              </a:rPr>
+              <a:t>▸  </a:t>
             </a:r>
             <a:r>
               <a:rPr sz="1600" b="0" i="0">
@@ -8267,14 +9165,14 @@
                 </a:solidFill>
                 <a:latin typeface="Montserrat"/>
               </a:rPr>
-              <a:t>Verificar estanquidad y certificar</a:t>
-            </a:r>
-          </a:p>
-        </p:txBody>
-      </p:sp>
-      <p:sp>
-        <p:nvSpPr>
-          <p:cNvPr id="8" name="imgph" descr="IMGQ:opening gas main valve meter"/>
+              <a:t>No lo hace cualquiera</a:t>
+            </a:r>
+          </a:p>
+        </p:txBody>
+      </p:sp>
+      <p:sp>
+        <p:nvSpPr>
+          <p:cNvPr id="9" name="imgph" descr="IMGQ:certified gas technician working"/>
           <p:cNvSpPr/>
           <p:nvPr/>
         </p:nvSpPr>
@@ -8320,7 +9218,7 @@
       </p:sp>
       <p:sp>
         <p:nvSpPr>
-          <p:cNvPr id="9" name="TextBox 8"/>
+          <p:cNvPr id="10" name="TextBox 9"/>
           <p:cNvSpPr txBox="1"/>
           <p:nvPr/>
         </p:nvSpPr>
@@ -8360,7 +9258,7 @@
                 </a:solidFill>
                 <a:latin typeface="Montserrat"/>
               </a:rPr>
-              <a:t>opening gas main valve meter</a:t>
+              <a:t>certified gas technician working</a:t>
             </a:r>
           </a:p>
         </p:txBody>
@@ -8457,7 +9355,7 @@
                 </a:solidFill>
                 <a:latin typeface="Montserrat"/>
               </a:rPr>
-              <a:t>008 / 012</a:t>
+              <a:t>008 / 013</a:t>
             </a:r>
           </a:p>
         </p:txBody>
@@ -8505,7 +9403,7 @@
         <p:spPr>
           <a:xfrm>
             <a:off x="822960" y="457200"/>
-            <a:ext cx="8229600" cy="365760"/>
+            <a:ext cx="10058400" cy="365760"/>
           </a:xfrm>
           <a:prstGeom prst="rect">
             <a:avLst/>
@@ -8519,9 +9417,9 @@
           <a:lstStyle/>
           <a:p>
             <a:r>
-              <a:rPr sz="1200" b="1" i="0">
-                <a:solidFill>
-                  <a:srgbClr val="64748B"/>
+              <a:rPr sz="1300" b="1" i="0">
+                <a:solidFill>
+                  <a:srgbClr val="E8801A"/>
                 </a:solidFill>
                 <a:latin typeface="Montserrat"/>
               </a:rPr>
@@ -8553,26 +9451,70 @@
           <a:lstStyle/>
           <a:p>
             <a:r>
-              <a:rPr sz="2700" b="1" i="0">
+              <a:rPr sz="2800" b="1" i="0">
                 <a:solidFill>
                   <a:srgbClr val="1E2761"/>
                 </a:solidFill>
                 <a:latin typeface="Montserrat"/>
               </a:rPr>
-              <a:t>Cerrada, bloqueada, precintada</a:t>
-            </a:r>
-          </a:p>
-        </p:txBody>
-      </p:sp>
-      <p:sp>
-        <p:nvSpPr>
-          <p:cNvPr id="7" name="TextBox 6"/>
+              <a:t>La maniobra, paso a paso</a:t>
+            </a:r>
+          </a:p>
+        </p:txBody>
+      </p:sp>
+      <p:sp>
+        <p:nvSpPr>
+          <p:cNvPr id="7" name="Rounded Rectangle 6"/>
+          <p:cNvSpPr/>
+          <p:nvPr/>
+        </p:nvSpPr>
+        <p:spPr>
+          <a:xfrm>
+            <a:off x="868680" y="1627632"/>
+            <a:ext cx="2011680" cy="73152"/>
+          </a:xfrm>
+          <a:prstGeom prst="roundRect">
+            <a:avLst/>
+          </a:prstGeom>
+          <a:solidFill>
+            <a:srgbClr val="E8801A"/>
+          </a:solidFill>
+          <a:ln>
+            <a:noFill/>
+          </a:ln>
+          <a:effectLst/>
+        </p:spPr>
+        <p:style>
+          <a:lnRef idx="1">
+            <a:schemeClr val="accent1"/>
+          </a:lnRef>
+          <a:fillRef idx="3">
+            <a:schemeClr val="accent1"/>
+          </a:fillRef>
+          <a:effectRef idx="2">
+            <a:schemeClr val="accent1"/>
+          </a:effectRef>
+          <a:fontRef idx="minor">
+            <a:schemeClr val="lt1"/>
+          </a:fontRef>
+        </p:style>
+        <p:txBody>
+          <a:bodyPr rtlCol="0" anchor="ctr"/>
+          <a:lstStyle/>
+          <a:p>
+            <a:pPr algn="ctr"/>
+          </a:p>
+        </p:txBody>
+      </p:sp>
+      <p:sp>
+        <p:nvSpPr>
+          <p:cNvPr id="8" name="TextBox 7"/>
           <p:cNvSpPr txBox="1"/>
           <p:nvPr/>
         </p:nvSpPr>
         <p:spPr>
           <a:xfrm>
-            <a:off x="822960" y="1920240"/>
+            <a:off x="822960" y="1965960"/>
             <a:ext cx="4983480" cy="4206240"/>
           </a:xfrm>
           <a:prstGeom prst="rect">
@@ -8588,17 +9530,17 @@
           <a:p>
             <a:pPr>
               <a:spcAft>
-                <a:spcPts val="1000"/>
+                <a:spcPts val="1100"/>
               </a:spcAft>
             </a:pPr>
             <a:r>
               <a:rPr sz="1600" b="1" i="0">
                 <a:solidFill>
-                  <a:srgbClr val="2E3A80"/>
-                </a:solidFill>
-                <a:latin typeface="Montserrat"/>
-              </a:rPr>
-              <a:t>•  </a:t>
+                  <a:srgbClr val="E8801A"/>
+                </a:solidFill>
+                <a:latin typeface="Montserrat"/>
+              </a:rPr>
+              <a:t>▸  </a:t>
             </a:r>
             <a:r>
               <a:rPr sz="1600" b="0" i="0">
@@ -8607,23 +9549,23 @@
                 </a:solidFill>
                 <a:latin typeface="Montserrat"/>
               </a:rPr>
-              <a:t>Cerrada: girada, sin paso</a:t>
+              <a:t>Precintar los equipos de medida</a:t>
             </a:r>
           </a:p>
           <a:p>
             <a:pPr>
               <a:spcAft>
-                <a:spcPts val="1000"/>
+                <a:spcPts val="1100"/>
               </a:spcAft>
             </a:pPr>
             <a:r>
               <a:rPr sz="1600" b="1" i="0">
                 <a:solidFill>
-                  <a:srgbClr val="2E3A80"/>
-                </a:solidFill>
-                <a:latin typeface="Montserrat"/>
-              </a:rPr>
-              <a:t>•  </a:t>
+                  <a:srgbClr val="E8801A"/>
+                </a:solidFill>
+                <a:latin typeface="Montserrat"/>
+              </a:rPr>
+              <a:t>▸  </a:t>
             </a:r>
             <a:r>
               <a:rPr sz="1600" b="0" i="0">
@@ -8632,23 +9574,23 @@
                 </a:solidFill>
                 <a:latin typeface="Montserrat"/>
               </a:rPr>
-              <a:t>Bloqueada: que no la abra cualquiera</a:t>
+              <a:t>Cerrar y precintar llaves que no van a servicio</a:t>
             </a:r>
           </a:p>
           <a:p>
             <a:pPr>
               <a:spcAft>
-                <a:spcPts val="1000"/>
+                <a:spcPts val="1100"/>
               </a:spcAft>
             </a:pPr>
             <a:r>
               <a:rPr sz="1600" b="1" i="0">
                 <a:solidFill>
-                  <a:srgbClr val="2E3A80"/>
-                </a:solidFill>
-                <a:latin typeface="Montserrat"/>
-              </a:rPr>
-              <a:t>•  </a:t>
+                  <a:srgbClr val="E8801A"/>
+                </a:solidFill>
+                <a:latin typeface="Montserrat"/>
+              </a:rPr>
+              <a:t>▸  </a:t>
             </a:r>
             <a:r>
               <a:rPr sz="1600" b="0" i="0">
@@ -8657,23 +9599,23 @@
                 </a:solidFill>
                 <a:latin typeface="Montserrat"/>
               </a:rPr>
-              <a:t>Precintada: el precinto delata manipulación</a:t>
+              <a:t>Abrir acometida y purgar</a:t>
             </a:r>
           </a:p>
           <a:p>
             <a:pPr>
               <a:spcAft>
-                <a:spcPts val="1000"/>
+                <a:spcPts val="1100"/>
               </a:spcAft>
             </a:pPr>
             <a:r>
               <a:rPr sz="1600" b="1" i="0">
                 <a:solidFill>
-                  <a:srgbClr val="2E3A80"/>
-                </a:solidFill>
-                <a:latin typeface="Montserrat"/>
-              </a:rPr>
-              <a:t>•  </a:t>
+                  <a:srgbClr val="E8801A"/>
+                </a:solidFill>
+                <a:latin typeface="Montserrat"/>
+              </a:rPr>
+              <a:t>▸  </a:t>
             </a:r>
             <a:r>
               <a:rPr sz="1600" b="0" i="0">
@@ -8682,14 +9624,14 @@
                 </a:solidFill>
                 <a:latin typeface="Montserrat"/>
               </a:rPr>
-              <a:t>Taponada: cuando no hay nada detrás</a:t>
-            </a:r>
-          </a:p>
-        </p:txBody>
-      </p:sp>
-      <p:sp>
-        <p:nvSpPr>
-          <p:cNvPr id="8" name="imgph" descr="IMGQ:sealed gas valve with security seal"/>
+              <a:t>Verificar estanquidad y certificar</a:t>
+            </a:r>
+          </a:p>
+        </p:txBody>
+      </p:sp>
+      <p:sp>
+        <p:nvSpPr>
+          <p:cNvPr id="9" name="imgph" descr="IMGQ:opening gas main valve meter"/>
           <p:cNvSpPr/>
           <p:nvPr/>
         </p:nvSpPr>
@@ -8735,7 +9677,7 @@
       </p:sp>
       <p:sp>
         <p:nvSpPr>
-          <p:cNvPr id="9" name="TextBox 8"/>
+          <p:cNvPr id="10" name="TextBox 9"/>
           <p:cNvSpPr txBox="1"/>
           <p:nvPr/>
         </p:nvSpPr>
@@ -8775,7 +9717,7 @@
                 </a:solidFill>
                 <a:latin typeface="Montserrat"/>
               </a:rPr>
-              <a:t>sealed gas valve with security seal</a:t>
+              <a:t>opening gas main valve meter</a:t>
             </a:r>
           </a:p>
         </p:txBody>
@@ -8872,7 +9814,7 @@
                 </a:solidFill>
                 <a:latin typeface="Montserrat"/>
               </a:rPr>
-              <a:t>009 / 012</a:t>
+              <a:t>009 / 013</a:t>
             </a:r>
           </a:p>
         </p:txBody>
@@ -8920,7 +9862,7 @@
         <p:spPr>
           <a:xfrm>
             <a:off x="822960" y="457200"/>
-            <a:ext cx="8229600" cy="365760"/>
+            <a:ext cx="10058400" cy="365760"/>
           </a:xfrm>
           <a:prstGeom prst="rect">
             <a:avLst/>
@@ -8934,9 +9876,9 @@
           <a:lstStyle/>
           <a:p>
             <a:r>
-              <a:rPr sz="1200" b="1" i="0">
-                <a:solidFill>
-                  <a:srgbClr val="64748B"/>
+              <a:rPr sz="1300" b="1" i="0">
+                <a:solidFill>
+                  <a:srgbClr val="E8801A"/>
                 </a:solidFill>
                 <a:latin typeface="Montserrat"/>
               </a:rPr>
@@ -8968,26 +9910,70 @@
           <a:lstStyle/>
           <a:p>
             <a:r>
-              <a:rPr sz="2700" b="1" i="0">
+              <a:rPr sz="2800" b="1" i="0">
                 <a:solidFill>
                   <a:srgbClr val="1E2761"/>
                 </a:solidFill>
                 <a:latin typeface="Montserrat"/>
               </a:rPr>
-              <a:t>El purgado, el momento clave</a:t>
-            </a:r>
-          </a:p>
-        </p:txBody>
-      </p:sp>
-      <p:sp>
-        <p:nvSpPr>
-          <p:cNvPr id="7" name="TextBox 6"/>
+              <a:t>Cerrada, bloqueada, precintada</a:t>
+            </a:r>
+          </a:p>
+        </p:txBody>
+      </p:sp>
+      <p:sp>
+        <p:nvSpPr>
+          <p:cNvPr id="7" name="Rounded Rectangle 6"/>
+          <p:cNvSpPr/>
+          <p:nvPr/>
+        </p:nvSpPr>
+        <p:spPr>
+          <a:xfrm>
+            <a:off x="868680" y="1627632"/>
+            <a:ext cx="2011680" cy="73152"/>
+          </a:xfrm>
+          <a:prstGeom prst="roundRect">
+            <a:avLst/>
+          </a:prstGeom>
+          <a:solidFill>
+            <a:srgbClr val="E8801A"/>
+          </a:solidFill>
+          <a:ln>
+            <a:noFill/>
+          </a:ln>
+          <a:effectLst/>
+        </p:spPr>
+        <p:style>
+          <a:lnRef idx="1">
+            <a:schemeClr val="accent1"/>
+          </a:lnRef>
+          <a:fillRef idx="3">
+            <a:schemeClr val="accent1"/>
+          </a:fillRef>
+          <a:effectRef idx="2">
+            <a:schemeClr val="accent1"/>
+          </a:effectRef>
+          <a:fontRef idx="minor">
+            <a:schemeClr val="lt1"/>
+          </a:fontRef>
+        </p:style>
+        <p:txBody>
+          <a:bodyPr rtlCol="0" anchor="ctr"/>
+          <a:lstStyle/>
+          <a:p>
+            <a:pPr algn="ctr"/>
+          </a:p>
+        </p:txBody>
+      </p:sp>
+      <p:sp>
+        <p:nvSpPr>
+          <p:cNvPr id="8" name="TextBox 7"/>
           <p:cNvSpPr txBox="1"/>
           <p:nvPr/>
         </p:nvSpPr>
         <p:spPr>
           <a:xfrm>
-            <a:off x="822960" y="1920240"/>
+            <a:off x="822960" y="1965960"/>
             <a:ext cx="4983480" cy="4206240"/>
           </a:xfrm>
           <a:prstGeom prst="rect">
@@ -9003,17 +9989,17 @@
           <a:p>
             <a:pPr>
               <a:spcAft>
-                <a:spcPts val="1000"/>
+                <a:spcPts val="1100"/>
               </a:spcAft>
             </a:pPr>
             <a:r>
               <a:rPr sz="1600" b="1" i="0">
                 <a:solidFill>
-                  <a:srgbClr val="2E3A80"/>
-                </a:solidFill>
-                <a:latin typeface="Montserrat"/>
-              </a:rPr>
-              <a:t>•  </a:t>
+                  <a:srgbClr val="E8801A"/>
+                </a:solidFill>
+                <a:latin typeface="Montserrat"/>
+              </a:rPr>
+              <a:t>▸  </a:t>
             </a:r>
             <a:r>
               <a:rPr sz="1600" b="0" i="0">
@@ -9022,23 +10008,23 @@
                 </a:solidFill>
                 <a:latin typeface="Montserrat"/>
               </a:rPr>
-              <a:t>Es expulsar el aire empujándolo con gas</a:t>
+              <a:t>Cerrada: girada, sin paso</a:t>
             </a:r>
           </a:p>
           <a:p>
             <a:pPr>
               <a:spcAft>
-                <a:spcPts val="1000"/>
+                <a:spcPts val="1100"/>
               </a:spcAft>
             </a:pPr>
             <a:r>
               <a:rPr sz="1600" b="1" i="0">
                 <a:solidFill>
-                  <a:srgbClr val="2E3A80"/>
-                </a:solidFill>
-                <a:latin typeface="Montserrat"/>
-              </a:rPr>
-              <a:t>•  </a:t>
+                  <a:srgbClr val="E8801A"/>
+                </a:solidFill>
+                <a:latin typeface="Montserrat"/>
+              </a:rPr>
+              <a:t>▸  </a:t>
             </a:r>
             <a:r>
               <a:rPr sz="1600" b="0" i="0">
@@ -9047,23 +10033,23 @@
                 </a:solidFill>
                 <a:latin typeface="Montserrat"/>
               </a:rPr>
-              <a:t>Peligro: mezcla aire-gas explosiva</a:t>
+              <a:t>Bloqueada: que no la abra cualquiera</a:t>
             </a:r>
           </a:p>
           <a:p>
             <a:pPr>
               <a:spcAft>
-                <a:spcPts val="1000"/>
+                <a:spcPts val="1100"/>
               </a:spcAft>
             </a:pPr>
             <a:r>
               <a:rPr sz="1600" b="1" i="0">
                 <a:solidFill>
-                  <a:srgbClr val="2E3A80"/>
-                </a:solidFill>
-                <a:latin typeface="Montserrat"/>
-              </a:rPr>
-              <a:t>•  </a:t>
+                  <a:srgbClr val="E8801A"/>
+                </a:solidFill>
+                <a:latin typeface="Montserrat"/>
+              </a:rPr>
+              <a:t>▸  </a:t>
             </a:r>
             <a:r>
               <a:rPr sz="1600" b="0" i="0">
@@ -9072,23 +10058,23 @@
                 </a:solidFill>
                 <a:latin typeface="Montserrat"/>
               </a:rPr>
-              <a:t>Purgar a punto seguro, al exterior</a:t>
+              <a:t>Precintada: el precinto delata manipulación</a:t>
             </a:r>
           </a:p>
           <a:p>
             <a:pPr>
               <a:spcAft>
-                <a:spcPts val="1000"/>
+                <a:spcPts val="1100"/>
               </a:spcAft>
             </a:pPr>
             <a:r>
               <a:rPr sz="1600" b="1" i="0">
                 <a:solidFill>
-                  <a:srgbClr val="2E3A80"/>
-                </a:solidFill>
-                <a:latin typeface="Montserrat"/>
-              </a:rPr>
-              <a:t>•  </a:t>
+                  <a:srgbClr val="E8801A"/>
+                </a:solidFill>
+                <a:latin typeface="Montserrat"/>
+              </a:rPr>
+              <a:t>▸  </a:t>
             </a:r>
             <a:r>
               <a:rPr sz="1600" b="0" i="0">
@@ -9097,14 +10083,14 @@
                 </a:solidFill>
                 <a:latin typeface="Montserrat"/>
               </a:rPr>
-              <a:t>Sin llamas ni chispas; con detector</a:t>
-            </a:r>
-          </a:p>
-        </p:txBody>
-      </p:sp>
-      <p:sp>
-        <p:nvSpPr>
-          <p:cNvPr id="8" name="imgph" descr="IMGQ:gas purging outdoor safe point"/>
+              <a:t>Taponada: cuando no hay nada detrás</a:t>
+            </a:r>
+          </a:p>
+        </p:txBody>
+      </p:sp>
+      <p:sp>
+        <p:nvSpPr>
+          <p:cNvPr id="9" name="imgph" descr="IMGQ:sealed gas valve with security seal"/>
           <p:cNvSpPr/>
           <p:nvPr/>
         </p:nvSpPr>
@@ -9150,7 +10136,7 @@
       </p:sp>
       <p:sp>
         <p:nvSpPr>
-          <p:cNvPr id="9" name="TextBox 8"/>
+          <p:cNvPr id="10" name="TextBox 9"/>
           <p:cNvSpPr txBox="1"/>
           <p:nvPr/>
         </p:nvSpPr>
@@ -9190,7 +10176,7 @@
                 </a:solidFill>
                 <a:latin typeface="Montserrat"/>
               </a:rPr>
-              <a:t>gas purging outdoor safe point</a:t>
+              <a:t>sealed gas valve with security seal</a:t>
             </a:r>
           </a:p>
         </p:txBody>

--- a/Curso Gas B/15 - UNE 60670 - Pruebas y puesta en servicio/15 - UNE 60670 - Pruebas y puesta en servicio - Vídeo 2.pptx
+++ b/Curso Gas B/15 - UNE 60670 - Pruebas y puesta en servicio/15 - UNE 60670 - Pruebas y puesta en servicio - Vídeo 2.pptx
@@ -18,6 +18,12 @@
     <p:sldId id="266" r:id="rId18"/>
     <p:sldId id="267" r:id="rId19"/>
     <p:sldId id="268" r:id="rId20"/>
+    <p:sldId id="269" r:id="rId21"/>
+    <p:sldId id="270" r:id="rId22"/>
+    <p:sldId id="271" r:id="rId23"/>
+    <p:sldId id="272" r:id="rId24"/>
+    <p:sldId id="273" r:id="rId25"/>
+    <p:sldId id="274" r:id="rId26"/>
   </p:sldIdLst>
   <p:sldSz cx="12191695" cy="6858000" type="screen4x3"/>
   <p:notesSz cx="6858000" cy="9144000"/>
@@ -599,22 +605,22 @@
           <a:lstStyle/>
           <a:p>
             <a:r>
-              <a:t>N1: ¿Qué es purgar y por qué dices que es lo más peligroso?</a:t>
-            </a:r>
-          </a:p>
-          <a:p>
-            <a:r>
-              <a:t>N2: Purgar es expulsar el aire que hay dentro de la tubería, empujándolo con el gas que entra. Y el peligro está en el punto intermedio de esa operación: durante un rato, dentro del tubo conviven aire y gas mezclados, y esa mezcla de aire y gas, en cierta proporción, es explosiva. Basta una chispa o una llama cerca para una deflagración. Es el momento más peligroso de todo el tema, sin exagerar.</a:t>
-            </a:r>
-          </a:p>
-          <a:p>
-            <a:r>
-              <a:t>N1: ¿Cómo se purga entonces con seguridad?</a:t>
-            </a:r>
-          </a:p>
-          <a:p>
-            <a:r>
-              <a:t>N2: Se purga hacia un punto seguro, al exterior, no hacia un local cerrado; con un detector en la mano; y sin ninguna fuente de ignición cerca, ni llamas ni interruptores que salten. Se sigue purgando hasta que por ese punto sale gas puro, es decir, hasta quedar fuera de los límites de inflamabilidad, ya sin mezcla peligrosa dentro. Imagínatelo como vaciar una botella llena de aire soplando gas dentro hasta que ya no queda nada de aire mezclado. La norma exige justo eso: acabar el purgado con la seguridad de que dentro ya no hay mezcla inflamable.</a:t>
+              <a:t>N1: Vale, las previas salieron bien, ¿ahora qué maniobra hago?</a:t>
+            </a:r>
+          </a:p>
+          <a:p>
+            <a:r>
+              <a:t>N2: Ahora viene la puesta en servicio, y tiene un orden que conviene recitar. Primero, precintar los equipos de medida, los contadores. Segundo, dejar cerradas, bloqueadas y precintadas las llaves de las viviendas o aparatos que de momento no entran en servicio; y taponarlas si además están pendientes de instalación, pero eso lo vemos aparte. Tercero, abrir la llave de acometida y purgar las instalaciones que sí van a quedar en servicio. Cuarto, verificar la estanquidad ya con gas a la presión de operación. Y quinto, si todo va bien, dejar en servicio y extender el certificado.</a:t>
+            </a:r>
+          </a:p>
+          <a:p>
+            <a:r>
+              <a:t>N1: ¿Ese orden es importante o me lo puedo saltar?</a:t>
+            </a:r>
+          </a:p>
+          <a:p>
+            <a:r>
+              <a:t>N2: Es importante y es lógico. Precintas y aíslas lo que no entra antes de abrir el gas, para que al abrir no vaya gas a donde no debe. Luego abres y purgas. Y solo al final, con todo comprobado, certificas. Cada paso prepara al siguiente.</a:t>
             </a:r>
           </a:p>
         </p:txBody>
@@ -684,22 +690,22 @@
           <a:lstStyle/>
           <a:p>
             <a:r>
-              <a:t>N1: Ya he purgado, ¿qué me falta para acabar?</a:t>
-            </a:r>
-          </a:p>
-          <a:p>
-            <a:r>
-              <a:t>N2: Te falta la verificación final y el papel. La verificación es comprobar la estanquidad ya con gas y a la presión de operación, la normal de trabajo. Es la última comprobación antes de dar la instalación por servida: aquí aparece la unión que sellaba en seco pero rezuma con gas. Si todo va bien, se deja la instalación en servicio. Y entonces, el paso que cierra la faena: extender el certificado de pruebas previas y puesta en servicio, y entregar copia al titular o usuario.</a:t>
-            </a:r>
-          </a:p>
-          <a:p>
-            <a:r>
-              <a:t>N1: ¿Y si no entrego ese certificado?</a:t>
-            </a:r>
-          </a:p>
-          <a:p>
-            <a:r>
-              <a:t>N2: Entonces la instalación no está formalmente en servicio, hagas lo que hagas en obra. El papel es lo que lo hace legal. Ubícalo mentalmente en la cadena de certificados del tema: primero el de la prueba de estanquidad de la parte ocho, luego este de pruebas previas y puesta en servicio de la parte nueve, y después el de puesta en marcha de los aparatos de la parte diez. Tres certificados en tres momentos.</a:t>
+              <a:t>N1: Cerrada, bloqueada, precintada y taponada, ¿no es todo lo mismo?</a:t>
+            </a:r>
+          </a:p>
+          <a:p>
+            <a:r>
+              <a:t>N2: No, son cuatro estados y cada uno añade algo. Cerrada es girada, cortando el paso del gas. Bloqueada es que además no la pueda abrir cualquiera, que quede trabada. Precintada es que lleva un precinto que se rompe si alguien la toca, o sea, que delata la manipulación. Y taponada es poner un tapón físico en la boca de la llave.</a:t>
+            </a:r>
+          </a:p>
+          <a:p>
+            <a:r>
+              <a:t>N1: ¿Y cuándo se pone el tapón y cuándo no?</a:t>
+            </a:r>
+          </a:p>
+          <a:p>
+            <a:r>
+              <a:t>N2: Aquí está la regla que te van a preguntar. Si la llave no va a servicio pero tiene algo detrás, una vivienda o un aparato ya instalado, basta con dejarla cerrada, bloqueada y precintada. Pero si la llave da a la nada, porque la instalación individual o el aparato todavía están pendientes de instalar, entonces además se tapona. El porqué es puro sentido de seguridad: si alguien forzara el precinto de una llave sin nada detrás, saldría gas al aire libre; el tapón lo impide. Regla mental: sin nada detrás, tapón; con algo detrás, basta cerrar, bloquear y precintar. Saltarte el tapón es dejar una fuga programada en el montante.</a:t>
             </a:r>
           </a:p>
         </p:txBody>
@@ -769,22 +775,12 @@
           <a:lstStyle/>
           <a:p>
             <a:r>
-              <a:t>N1: ¿Cambia algo si el gas viene de un depósito de GLP?</a:t>
-            </a:r>
-          </a:p>
-          <a:p>
-            <a:r>
-              <a:t>N2: Sí, un matiz muy lógico. Cuando el gas no viene de la red de la ciudad sino de un depósito fijo de gases licuados del petróleo, típico de un chalé o de una urbanización aislada, la puesta en servicio se hace tras el primer llenado del depósito. No puedes poner en servicio con el depósito vacío.</a:t>
-            </a:r>
-          </a:p>
-          <a:p>
-            <a:r>
-              <a:t>N1: ¿Y por qué es tan evidente?</a:t>
-            </a:r>
-          </a:p>
-          <a:p>
-            <a:r>
-              <a:t>N2: Porque sin producto en el depósito no tienes gas con el que purgar la instalación, ni presión de operación que verificar. Es como querer poner en marcha un coche sin combustible en el tanque: primero llenas, luego arrancas. Así que en instalaciones de GLP de depósito, el orden manda: primer llenado y después la puesta en servicio. Es una pregunta fácil si te acuerdas de la lógica.</a:t>
+              <a:t>N1: Las cuatro palabras de la llave, que caen juntas. Llave sin nada detrás, ¿cómo la dejas?</a:t>
+            </a:r>
+          </a:p>
+          <a:p>
+            <a:r>
+              <a:t>N2: Piensa qué pasaría si alguien forzara el precinto y detrás no hubiera ni vivienda ni aparato.</a:t>
             </a:r>
           </a:p>
         </p:txBody>
@@ -854,6 +850,486 @@
           <a:lstStyle/>
           <a:p>
             <a:r>
+              <a:t>N1: ¿Por qué la be?</a:t>
+            </a:r>
+          </a:p>
+          <a:p>
+            <a:r>
+              <a:t>N2: Sin nada detrás, tapón; con algo detrás, basta cerrar, bloquear y precintar. El tapón evita que salga gas al aire si alguien manipula el precinto de una llave que da a la nada.</a:t>
+            </a:r>
+          </a:p>
+        </p:txBody>
+      </p:sp>
+      <p:sp>
+        <p:nvSpPr>
+          <p:cNvPr id="4" name="Slide Number Placeholder 3"/>
+          <p:cNvSpPr>
+            <a:spLocks noGrp="1"/>
+          </p:cNvSpPr>
+          <p:nvPr>
+            <p:ph type="sldNum" idx="5" sz="quarter"/>
+          </p:nvPr>
+        </p:nvSpPr>
+        <p:spPr/>
+      </p:sp>
+    </p:spTree>
+  </p:cSld>
+  <p:clrMapOvr>
+    <a:masterClrMapping/>
+  </p:clrMapOvr>
+</p:notes>
+</file>
+
+<file path=ppt/notesSlides/notesSlide14.xml><?xml version="1.0" encoding="utf-8"?>
+<p:notes xmlns:a="http://schemas.openxmlformats.org/drawingml/2006/main" xmlns:p="http://schemas.openxmlformats.org/presentationml/2006/main" xmlns:r="http://schemas.openxmlformats.org/officeDocument/2006/relationships">
+  <p:cSld>
+    <p:spTree>
+      <p:nvGrpSpPr>
+        <p:cNvPr id="1" name=""/>
+        <p:cNvGrpSpPr/>
+        <p:nvPr/>
+      </p:nvGrpSpPr>
+      <p:grpSpPr>
+        <a:xfrm>
+          <a:off x="0" y="0"/>
+          <a:ext cx="0" cy="0"/>
+          <a:chOff x="0" y="0"/>
+          <a:chExt cx="0" cy="0"/>
+        </a:xfrm>
+      </p:grpSpPr>
+      <p:sp>
+        <p:nvSpPr>
+          <p:cNvPr id="2" name="Slide Image Placeholder 1"/>
+          <p:cNvSpPr>
+            <a:spLocks noGrp="1"/>
+          </p:cNvSpPr>
+          <p:nvPr>
+            <p:ph type="sldImg" idx="2"/>
+          </p:nvPr>
+        </p:nvSpPr>
+        <p:spPr/>
+      </p:sp>
+      <p:sp>
+        <p:nvSpPr>
+          <p:cNvPr id="3" name="Notes Placeholder 2"/>
+          <p:cNvSpPr>
+            <a:spLocks noGrp="1"/>
+          </p:cNvSpPr>
+          <p:nvPr>
+            <p:ph type="body" idx="3" sz="quarter"/>
+          </p:nvPr>
+        </p:nvSpPr>
+        <p:spPr/>
+        <p:txBody>
+          <a:bodyPr/>
+          <a:lstStyle/>
+          <a:p>
+            <a:r>
+              <a:t>N1: ¿Qué es purgar y por qué dices que es lo más peligroso?</a:t>
+            </a:r>
+          </a:p>
+          <a:p>
+            <a:r>
+              <a:t>N2: Purgar es expulsar el aire que hay dentro de la tubería, empujándolo con el gas que entra. Y el peligro está en el punto intermedio de esa operación: durante un rato, dentro del tubo conviven aire y gas mezclados, y esa mezcla de aire y gas, en cierta proporción, es explosiva. Basta una chispa o una llama cerca para una deflagración. Es el momento más peligroso de todo el tema, sin exagerar.</a:t>
+            </a:r>
+          </a:p>
+          <a:p>
+            <a:r>
+              <a:t>N1: ¿Cómo se purga entonces con seguridad?</a:t>
+            </a:r>
+          </a:p>
+          <a:p>
+            <a:r>
+              <a:t>N2: Se purga hacia un punto seguro, al exterior, no hacia un local cerrado; con un detector en la mano; y sin ninguna fuente de ignición cerca, ni llamas ni interruptores que salten. Se sigue purgando hasta que por ese punto sale gas puro, es decir, hasta quedar fuera de los límites de inflamabilidad, ya sin mezcla peligrosa dentro. Imagínatelo como vaciar una botella llena de aire soplando gas dentro hasta que ya no queda nada de aire mezclado. La norma exige justo eso: acabar el purgado con la seguridad de que dentro ya no hay mezcla inflamable.</a:t>
+            </a:r>
+          </a:p>
+        </p:txBody>
+      </p:sp>
+      <p:sp>
+        <p:nvSpPr>
+          <p:cNvPr id="4" name="Slide Number Placeholder 3"/>
+          <p:cNvSpPr>
+            <a:spLocks noGrp="1"/>
+          </p:cNvSpPr>
+          <p:nvPr>
+            <p:ph type="sldNum" idx="5" sz="quarter"/>
+          </p:nvPr>
+        </p:nvSpPr>
+        <p:spPr/>
+      </p:sp>
+    </p:spTree>
+  </p:cSld>
+  <p:clrMapOvr>
+    <a:masterClrMapping/>
+  </p:clrMapOvr>
+</p:notes>
+</file>
+
+<file path=ppt/notesSlides/notesSlide15.xml><?xml version="1.0" encoding="utf-8"?>
+<p:notes xmlns:a="http://schemas.openxmlformats.org/drawingml/2006/main" xmlns:p="http://schemas.openxmlformats.org/presentationml/2006/main" xmlns:r="http://schemas.openxmlformats.org/officeDocument/2006/relationships">
+  <p:cSld>
+    <p:spTree>
+      <p:nvGrpSpPr>
+        <p:cNvPr id="1" name=""/>
+        <p:cNvGrpSpPr/>
+        <p:nvPr/>
+      </p:nvGrpSpPr>
+      <p:grpSpPr>
+        <a:xfrm>
+          <a:off x="0" y="0"/>
+          <a:ext cx="0" cy="0"/>
+          <a:chOff x="0" y="0"/>
+          <a:chExt cx="0" cy="0"/>
+        </a:xfrm>
+      </p:grpSpPr>
+      <p:sp>
+        <p:nvSpPr>
+          <p:cNvPr id="2" name="Slide Image Placeholder 1"/>
+          <p:cNvSpPr>
+            <a:spLocks noGrp="1"/>
+          </p:cNvSpPr>
+          <p:nvPr>
+            <p:ph type="sldImg" idx="2"/>
+          </p:nvPr>
+        </p:nvSpPr>
+        <p:spPr/>
+      </p:sp>
+      <p:sp>
+        <p:nvSpPr>
+          <p:cNvPr id="3" name="Notes Placeholder 2"/>
+          <p:cNvSpPr>
+            <a:spLocks noGrp="1"/>
+          </p:cNvSpPr>
+          <p:nvPr>
+            <p:ph type="body" idx="3" sz="quarter"/>
+          </p:nvPr>
+        </p:nvSpPr>
+        <p:spPr/>
+        <p:txBody>
+          <a:bodyPr/>
+          <a:lstStyle/>
+          <a:p>
+            <a:r>
+              <a:t>N1: Con chispa. ¿Qué hace del purgado el momento más delicado de todo el tema?</a:t>
+            </a:r>
+          </a:p>
+          <a:p>
+            <a:r>
+              <a:t>N2: Piensa en qué hay dentro del tubo justo cuando el gas va empujando al aire hacia fuera.</a:t>
+            </a:r>
+          </a:p>
+        </p:txBody>
+      </p:sp>
+      <p:sp>
+        <p:nvSpPr>
+          <p:cNvPr id="4" name="Slide Number Placeholder 3"/>
+          <p:cNvSpPr>
+            <a:spLocks noGrp="1"/>
+          </p:cNvSpPr>
+          <p:nvPr>
+            <p:ph type="sldNum" idx="5" sz="quarter"/>
+          </p:nvPr>
+        </p:nvSpPr>
+        <p:spPr/>
+      </p:sp>
+    </p:spTree>
+  </p:cSld>
+  <p:clrMapOvr>
+    <a:masterClrMapping/>
+  </p:clrMapOvr>
+</p:notes>
+</file>
+
+<file path=ppt/notesSlides/notesSlide16.xml><?xml version="1.0" encoding="utf-8"?>
+<p:notes xmlns:a="http://schemas.openxmlformats.org/drawingml/2006/main" xmlns:p="http://schemas.openxmlformats.org/presentationml/2006/main" xmlns:r="http://schemas.openxmlformats.org/officeDocument/2006/relationships">
+  <p:cSld>
+    <p:spTree>
+      <p:nvGrpSpPr>
+        <p:cNvPr id="1" name=""/>
+        <p:cNvGrpSpPr/>
+        <p:nvPr/>
+      </p:nvGrpSpPr>
+      <p:grpSpPr>
+        <a:xfrm>
+          <a:off x="0" y="0"/>
+          <a:ext cx="0" cy="0"/>
+          <a:chOff x="0" y="0"/>
+          <a:chExt cx="0" cy="0"/>
+        </a:xfrm>
+      </p:grpSpPr>
+      <p:sp>
+        <p:nvSpPr>
+          <p:cNvPr id="2" name="Slide Image Placeholder 1"/>
+          <p:cNvSpPr>
+            <a:spLocks noGrp="1"/>
+          </p:cNvSpPr>
+          <p:nvPr>
+            <p:ph type="sldImg" idx="2"/>
+          </p:nvPr>
+        </p:nvSpPr>
+        <p:spPr/>
+      </p:sp>
+      <p:sp>
+        <p:nvSpPr>
+          <p:cNvPr id="3" name="Notes Placeholder 2"/>
+          <p:cNvSpPr>
+            <a:spLocks noGrp="1"/>
+          </p:cNvSpPr>
+          <p:nvPr>
+            <p:ph type="body" idx="3" sz="quarter"/>
+          </p:nvPr>
+        </p:nvSpPr>
+        <p:spPr/>
+        <p:txBody>
+          <a:bodyPr/>
+          <a:lstStyle/>
+          <a:p>
+            <a:r>
+              <a:t>N1: ¿Por qué la be?</a:t>
+            </a:r>
+          </a:p>
+          <a:p>
+            <a:r>
+              <a:t>N2: Durante el purgado conviven aire y gas, y esa mezcla es explosiva con una simple chispa. Por eso se purga al exterior, sin llamas ni chispas y con detector, hasta que sale gas puro y queda fuera de los límites de inflamabilidad.</a:t>
+            </a:r>
+          </a:p>
+        </p:txBody>
+      </p:sp>
+      <p:sp>
+        <p:nvSpPr>
+          <p:cNvPr id="4" name="Slide Number Placeholder 3"/>
+          <p:cNvSpPr>
+            <a:spLocks noGrp="1"/>
+          </p:cNvSpPr>
+          <p:nvPr>
+            <p:ph type="sldNum" idx="5" sz="quarter"/>
+          </p:nvPr>
+        </p:nvSpPr>
+        <p:spPr/>
+      </p:sp>
+    </p:spTree>
+  </p:cSld>
+  <p:clrMapOvr>
+    <a:masterClrMapping/>
+  </p:clrMapOvr>
+</p:notes>
+</file>
+
+<file path=ppt/notesSlides/notesSlide17.xml><?xml version="1.0" encoding="utf-8"?>
+<p:notes xmlns:a="http://schemas.openxmlformats.org/drawingml/2006/main" xmlns:p="http://schemas.openxmlformats.org/presentationml/2006/main" xmlns:r="http://schemas.openxmlformats.org/officeDocument/2006/relationships">
+  <p:cSld>
+    <p:spTree>
+      <p:nvGrpSpPr>
+        <p:cNvPr id="1" name=""/>
+        <p:cNvGrpSpPr/>
+        <p:nvPr/>
+      </p:nvGrpSpPr>
+      <p:grpSpPr>
+        <a:xfrm>
+          <a:off x="0" y="0"/>
+          <a:ext cx="0" cy="0"/>
+          <a:chOff x="0" y="0"/>
+          <a:chExt cx="0" cy="0"/>
+        </a:xfrm>
+      </p:grpSpPr>
+      <p:sp>
+        <p:nvSpPr>
+          <p:cNvPr id="2" name="Slide Image Placeholder 1"/>
+          <p:cNvSpPr>
+            <a:spLocks noGrp="1"/>
+          </p:cNvSpPr>
+          <p:nvPr>
+            <p:ph type="sldImg" idx="2"/>
+          </p:nvPr>
+        </p:nvSpPr>
+        <p:spPr/>
+      </p:sp>
+      <p:sp>
+        <p:nvSpPr>
+          <p:cNvPr id="3" name="Notes Placeholder 2"/>
+          <p:cNvSpPr>
+            <a:spLocks noGrp="1"/>
+          </p:cNvSpPr>
+          <p:nvPr>
+            <p:ph type="body" idx="3" sz="quarter"/>
+          </p:nvPr>
+        </p:nvSpPr>
+        <p:spPr/>
+        <p:txBody>
+          <a:bodyPr/>
+          <a:lstStyle/>
+          <a:p>
+            <a:r>
+              <a:t>N1: Ya he purgado, ¿qué me falta para acabar?</a:t>
+            </a:r>
+          </a:p>
+          <a:p>
+            <a:r>
+              <a:t>N2: Te falta la verificación final y el papel. La verificación es comprobar la estanquidad ya con gas y a la presión de operación, la normal de trabajo. Es la última comprobación antes de dar la instalación por servida: aquí aparece la unión que sellaba en seco pero rezuma con gas. Si todo va bien, se deja la instalación en servicio. Y entonces, el paso que cierra la faena: extender el certificado de pruebas previas y puesta en servicio, y entregar copia al titular o usuario.</a:t>
+            </a:r>
+          </a:p>
+          <a:p>
+            <a:r>
+              <a:t>N1: ¿Y si no entrego ese certificado?</a:t>
+            </a:r>
+          </a:p>
+          <a:p>
+            <a:r>
+              <a:t>N2: Entonces la instalación no está formalmente en servicio, hagas lo que hagas en obra. El papel es lo que lo hace legal. Ubícalo mentalmente en la cadena de certificados del tema: primero el de la prueba de estanquidad de la parte ocho, luego este de pruebas previas y puesta en servicio de la parte nueve, y después el de puesta en marcha de los aparatos de la parte diez. Tres certificados en tres momentos.</a:t>
+            </a:r>
+          </a:p>
+        </p:txBody>
+      </p:sp>
+      <p:sp>
+        <p:nvSpPr>
+          <p:cNvPr id="4" name="Slide Number Placeholder 3"/>
+          <p:cNvSpPr>
+            <a:spLocks noGrp="1"/>
+          </p:cNvSpPr>
+          <p:nvPr>
+            <p:ph type="sldNum" idx="5" sz="quarter"/>
+          </p:nvPr>
+        </p:nvSpPr>
+        <p:spPr/>
+      </p:sp>
+    </p:spTree>
+  </p:cSld>
+  <p:clrMapOvr>
+    <a:masterClrMapping/>
+  </p:clrMapOvr>
+</p:notes>
+</file>
+
+<file path=ppt/notesSlides/notesSlide18.xml><?xml version="1.0" encoding="utf-8"?>
+<p:notes xmlns:a="http://schemas.openxmlformats.org/drawingml/2006/main" xmlns:p="http://schemas.openxmlformats.org/presentationml/2006/main" xmlns:r="http://schemas.openxmlformats.org/officeDocument/2006/relationships">
+  <p:cSld>
+    <p:spTree>
+      <p:nvGrpSpPr>
+        <p:cNvPr id="1" name=""/>
+        <p:cNvGrpSpPr/>
+        <p:nvPr/>
+      </p:nvGrpSpPr>
+      <p:grpSpPr>
+        <a:xfrm>
+          <a:off x="0" y="0"/>
+          <a:ext cx="0" cy="0"/>
+          <a:chOff x="0" y="0"/>
+          <a:chExt cx="0" cy="0"/>
+        </a:xfrm>
+      </p:grpSpPr>
+      <p:sp>
+        <p:nvSpPr>
+          <p:cNvPr id="2" name="Slide Image Placeholder 1"/>
+          <p:cNvSpPr>
+            <a:spLocks noGrp="1"/>
+          </p:cNvSpPr>
+          <p:nvPr>
+            <p:ph type="sldImg" idx="2"/>
+          </p:nvPr>
+        </p:nvSpPr>
+        <p:spPr/>
+      </p:sp>
+      <p:sp>
+        <p:nvSpPr>
+          <p:cNvPr id="3" name="Notes Placeholder 2"/>
+          <p:cNvSpPr>
+            <a:spLocks noGrp="1"/>
+          </p:cNvSpPr>
+          <p:nvPr>
+            <p:ph type="body" idx="3" sz="quarter"/>
+          </p:nvPr>
+        </p:nvSpPr>
+        <p:spPr/>
+        <p:txBody>
+          <a:bodyPr/>
+          <a:lstStyle/>
+          <a:p>
+            <a:r>
+              <a:t>N1: ¿Cambia algo si el gas viene de un depósito de GLP?</a:t>
+            </a:r>
+          </a:p>
+          <a:p>
+            <a:r>
+              <a:t>N2: Sí, un matiz muy lógico. Cuando el gas no viene de la red de la ciudad sino de un depósito fijo de gases licuados del petróleo, típico de un chalé o de una urbanización aislada, la puesta en servicio se hace tras el primer llenado del depósito. No puedes poner en servicio con el depósito vacío.</a:t>
+            </a:r>
+          </a:p>
+          <a:p>
+            <a:r>
+              <a:t>N1: ¿Y por qué es tan evidente?</a:t>
+            </a:r>
+          </a:p>
+          <a:p>
+            <a:r>
+              <a:t>N2: Porque sin producto en el depósito no tienes gas con el que purgar la instalación, ni presión de operación que verificar. Es como querer poner en marcha un coche sin combustible en el tanque: primero llenas, luego arrancas. Así que en instalaciones de GLP de depósito, el orden manda: primer llenado y después la puesta en servicio. Es una pregunta fácil si te acuerdas de la lógica.</a:t>
+            </a:r>
+          </a:p>
+        </p:txBody>
+      </p:sp>
+      <p:sp>
+        <p:nvSpPr>
+          <p:cNvPr id="4" name="Slide Number Placeholder 3"/>
+          <p:cNvSpPr>
+            <a:spLocks noGrp="1"/>
+          </p:cNvSpPr>
+          <p:nvPr>
+            <p:ph type="sldNum" idx="5" sz="quarter"/>
+          </p:nvPr>
+        </p:nvSpPr>
+        <p:spPr/>
+      </p:sp>
+    </p:spTree>
+  </p:cSld>
+  <p:clrMapOvr>
+    <a:masterClrMapping/>
+  </p:clrMapOvr>
+</p:notes>
+</file>
+
+<file path=ppt/notesSlides/notesSlide19.xml><?xml version="1.0" encoding="utf-8"?>
+<p:notes xmlns:a="http://schemas.openxmlformats.org/drawingml/2006/main" xmlns:p="http://schemas.openxmlformats.org/presentationml/2006/main" xmlns:r="http://schemas.openxmlformats.org/officeDocument/2006/relationships">
+  <p:cSld>
+    <p:spTree>
+      <p:nvGrpSpPr>
+        <p:cNvPr id="1" name=""/>
+        <p:cNvGrpSpPr/>
+        <p:nvPr/>
+      </p:nvGrpSpPr>
+      <p:grpSpPr>
+        <a:xfrm>
+          <a:off x="0" y="0"/>
+          <a:ext cx="0" cy="0"/>
+          <a:chOff x="0" y="0"/>
+          <a:chExt cx="0" cy="0"/>
+        </a:xfrm>
+      </p:grpSpPr>
+      <p:sp>
+        <p:nvSpPr>
+          <p:cNvPr id="2" name="Slide Image Placeholder 1"/>
+          <p:cNvSpPr>
+            <a:spLocks noGrp="1"/>
+          </p:cNvSpPr>
+          <p:nvPr>
+            <p:ph type="sldImg" idx="2"/>
+          </p:nvPr>
+        </p:nvSpPr>
+        <p:spPr/>
+      </p:sp>
+      <p:sp>
+        <p:nvSpPr>
+          <p:cNvPr id="3" name="Notes Placeholder 2"/>
+          <p:cNvSpPr>
+            <a:spLocks noGrp="1"/>
+          </p:cNvSpPr>
+          <p:nvPr>
+            <p:ph type="body" idx="3" sz="quarter"/>
+          </p:nvPr>
+        </p:nvSpPr>
+        <p:spPr/>
+        <p:txBody>
+          <a:bodyPr/>
+          <a:lstStyle/>
+          <a:p>
+            <a:r>
               <a:t>N1: Recapitulando, ¿qué es lo que de verdad tengo que dominar?</a:t>
             </a:r>
           </a:p>
@@ -1250,22 +1726,12 @@
           <a:lstStyle/>
           <a:p>
             <a:r>
-              <a:t>N1: ¿Qué son exactamente las pruebas previas?</a:t>
-            </a:r>
-          </a:p>
-          <a:p>
-            <a:r>
-              <a:t>N2: Son una inspección de entrega que hace el responsable antes de meter gas: un repaso con los ojos y con las manos. Mira cuatro cosas. Una, que los papeles estén completos, toda la documentación de la instalación. Dos, que lo visible y accesible cumpla la norma. Tres, que los locales donde van los aparatos y sus salidas de humos, los conductos de evacuación, estén bien. Y cuatro, que las válvulas se maniobren, que las llaves giren como deben.</a:t>
-            </a:r>
-          </a:p>
-          <a:p>
-            <a:r>
-              <a:t>N1: ¿Tiene que revisar toda la tubería, incluso la empotrada?</a:t>
-            </a:r>
-          </a:p>
-          <a:p>
-            <a:r>
-              <a:t>N2: No, y esto es clave: solo lo visible y accesible. Nadie pica una pared para revisar el tubo empotrado. Por eso el diseño y la ejecución previos tienen que estar bien hechos, porque en este momento ya no se revisan por dentro. Si la instalación lleva una estación de regulación, además comprueba que regula bien y que sus dispositivos de seguridad funcionan.</a:t>
+              <a:t>N1: Trampa clásica de las dos estanquidades. La de la Parte nueve, ¿con qué y a qué presión?</a:t>
+            </a:r>
+          </a:p>
+          <a:p>
+            <a:r>
+              <a:t>N2: Recuerda: una prueba la tubería vacía antes de entregar; la otra confirma ya con gas. ¿Cuál es esta?</a:t>
             </a:r>
           </a:p>
         </p:txBody>
@@ -1335,22 +1801,12 @@
           <a:lstStyle/>
           <a:p>
             <a:r>
-              <a:t>N1: La norma habla del agente responsable, ¿quién es?</a:t>
-            </a:r>
-          </a:p>
-          <a:p>
-            <a:r>
-              <a:t>N2: La norma no le pone un carné concreto; dice de acuerdo con lo que establezca la legislación vigente. En la práctica es la empresa instaladora habilitada, o el agente que corresponda según el Reglamento de gas y sus instrucciones técnicas. Para el examen quédate con la idea de fondo: hay un responsable designado que ejecuta y firma estas comprobaciones. No las hace cualquiera que pase por allí.</a:t>
-            </a:r>
-          </a:p>
-          <a:p>
-            <a:r>
-              <a:t>N1: ¿Y por qué la norma no dice un nombre fijo?</a:t>
-            </a:r>
-          </a:p>
-          <a:p>
-            <a:r>
-              <a:t>N2: Porque la norma técnica describe el cómo, y quién puede firmar lo decide el Reglamento, que es la parte legal y puede cambiar. Al remitir a la legislación vigente, la UNE se mantiene válida aunque cambie quién está habilitado. Tú piensa: persona designada, cualificada, que responde con su firma. Esa es la idea que te van a pedir.</a:t>
+              <a:t>N1: ¿Por qué la ce?</a:t>
+            </a:r>
+          </a:p>
+          <a:p>
+            <a:r>
+              <a:t>N2: La Parte ocho prueba con aire o inerte a presión de prueba, con el tubo vacío. La Parte nueve verifica ya con gas real y a la presión de operación, como paso final de la puesta en servicio. Son dos comprobaciones en dos momentos.</a:t>
             </a:r>
           </a:p>
         </p:txBody>
@@ -1420,22 +1876,22 @@
           <a:lstStyle/>
           <a:p>
             <a:r>
-              <a:t>N1: Vale, las previas salieron bien, ¿ahora qué maniobra hago?</a:t>
-            </a:r>
-          </a:p>
-          <a:p>
-            <a:r>
-              <a:t>N2: Ahora viene la puesta en servicio, y tiene un orden que conviene recitar. Primero, precintar los equipos de medida, los contadores. Segundo, dejar cerradas, bloqueadas y precintadas las llaves de las viviendas o aparatos que de momento no entran en servicio; y taponarlas si además están pendientes de instalación, pero eso lo vemos aparte. Tercero, abrir la llave de acometida y purgar las instalaciones que sí van a quedar en servicio. Cuarto, verificar la estanquidad ya con gas a la presión de operación. Y quinto, si todo va bien, dejar en servicio y extender el certificado.</a:t>
-            </a:r>
-          </a:p>
-          <a:p>
-            <a:r>
-              <a:t>N1: ¿Ese orden es importante o me lo puedo saltar?</a:t>
-            </a:r>
-          </a:p>
-          <a:p>
-            <a:r>
-              <a:t>N2: Es importante y es lógico. Precintas y aíslas lo que no entra antes de abrir el gas, para que al abrir no vaya gas a donde no debe. Luego abres y purgas. Y solo al final, con todo comprobado, certificas. Cada paso prepara al siguiente.</a:t>
+              <a:t>N1: ¿Qué son exactamente las pruebas previas?</a:t>
+            </a:r>
+          </a:p>
+          <a:p>
+            <a:r>
+              <a:t>N2: Son una inspección de entrega que hace el responsable antes de meter gas: un repaso con los ojos y con las manos. Mira cuatro cosas. Una, que los papeles estén completos, toda la documentación de la instalación. Dos, que lo visible y accesible cumpla la norma. Tres, que los locales donde van los aparatos y sus salidas de humos, los conductos de evacuación, estén bien. Y cuatro, que las válvulas se maniobren, que las llaves giren como deben.</a:t>
+            </a:r>
+          </a:p>
+          <a:p>
+            <a:r>
+              <a:t>N1: ¿Tiene que revisar toda la tubería, incluso la empotrada?</a:t>
+            </a:r>
+          </a:p>
+          <a:p>
+            <a:r>
+              <a:t>N2: No, y esto es clave: solo lo visible y accesible. Nadie pica una pared para revisar el tubo empotrado. Por eso el diseño y la ejecución previos tienen que estar bien hechos, porque en este momento ya no se revisan por dentro. Si la instalación lleva una estación de regulación, además comprueba que regula bien y que sus dispositivos de seguridad funcionan.</a:t>
             </a:r>
           </a:p>
         </p:txBody>
@@ -1505,22 +1961,22 @@
           <a:lstStyle/>
           <a:p>
             <a:r>
-              <a:t>N1: Cerrada, bloqueada, precintada y taponada, ¿no es todo lo mismo?</a:t>
-            </a:r>
-          </a:p>
-          <a:p>
-            <a:r>
-              <a:t>N2: No, son cuatro estados y cada uno añade algo. Cerrada es girada, cortando el paso del gas. Bloqueada es que además no la pueda abrir cualquiera, que quede trabada. Precintada es que lleva un precinto que se rompe si alguien la toca, o sea, que delata la manipulación. Y taponada es poner un tapón físico en la boca de la llave.</a:t>
-            </a:r>
-          </a:p>
-          <a:p>
-            <a:r>
-              <a:t>N1: ¿Y cuándo se pone el tapón y cuándo no?</a:t>
-            </a:r>
-          </a:p>
-          <a:p>
-            <a:r>
-              <a:t>N2: Aquí está la regla que te van a preguntar. Si la llave no va a servicio pero tiene algo detrás, una vivienda o un aparato ya instalado, basta con dejarla cerrada, bloqueada y precintada. Pero si la llave da a la nada, porque la instalación individual o el aparato todavía están pendientes de instalar, entonces además se tapona. El porqué es puro sentido de seguridad: si alguien forzara el precinto de una llave sin nada detrás, saldría gas al aire libre; el tapón lo impide. Regla mental: sin nada detrás, tapón; con algo detrás, basta cerrar, bloquear y precintar. Saltarte el tapón es dejar una fuga programada en el montante.</a:t>
+              <a:t>N1: La norma habla del agente responsable, ¿quién es?</a:t>
+            </a:r>
+          </a:p>
+          <a:p>
+            <a:r>
+              <a:t>N2: La norma no le pone un carné concreto; dice de acuerdo con lo que establezca la legislación vigente. En la práctica es la empresa instaladora habilitada, o el agente que corresponda según el Reglamento de gas y sus instrucciones técnicas. Para el examen quédate con la idea de fondo: hay un responsable designado que ejecuta y firma estas comprobaciones. No las hace cualquiera que pase por allí.</a:t>
+            </a:r>
+          </a:p>
+          <a:p>
+            <a:r>
+              <a:t>N1: ¿Y por qué la norma no dice un nombre fijo?</a:t>
+            </a:r>
+          </a:p>
+          <a:p>
+            <a:r>
+              <a:t>N2: Porque la norma técnica describe el cómo, y quién puede firmar lo decide el Reglamento, que es la parte legal y puede cambiar. Al remitir a la legislación vigente, la UNE se mantiene válida aunque cambie quién está habilitado. Tú piensa: persona designada, cualificada, que responde con su firma. Esa es la idea que te van a pedir.</a:t>
             </a:r>
           </a:p>
         </p:txBody>
@@ -4606,7 +5062,7 @@
       </p:sp>
       <p:sp>
         <p:nvSpPr>
-          <p:cNvPr id="4" name="Rounded Rectangle 3"/>
+          <p:cNvPr id="4" name="Rectangle 3"/>
           <p:cNvSpPr/>
           <p:nvPr/>
         </p:nvSpPr>
@@ -4615,7 +5071,7 @@
             <a:off x="868680" y="2057400"/>
             <a:ext cx="1463040" cy="82296"/>
           </a:xfrm>
-          <a:prstGeom prst="roundRect">
+          <a:prstGeom prst="rect">
             <a:avLst/>
           </a:prstGeom>
           <a:solidFill>
@@ -4732,6 +5188,18 @@
   <p:clrMapOvr>
     <a:masterClrMapping/>
   </p:clrMapOvr>
+  <mc:AlternateContent xmlns:mc="http://schemas.openxmlformats.org/markup-compatibility/2006">
+    <mc:Choice xmlns:p14="http://schemas.microsoft.com/office/powerpoint/2010/main" Requires="p14">
+      <p:transition spd="med" p14:dur="700">
+        <p14:cube dir="l"/>
+      </p:transition>
+    </mc:Choice>
+    <mc:Fallback>
+      <p:transition spd="med">
+        <p:push dir="l"/>
+      </p:transition>
+    </mc:Fallback>
+  </mc:AlternateContent>
 </p:sld>
 </file>
 
@@ -4819,7 +5287,7 @@
                 </a:solidFill>
                 <a:latin typeface="Montserrat"/>
               </a:rPr>
-              <a:t>010 / 013</a:t>
+              <a:t>010 / 019</a:t>
             </a:r>
           </a:p>
         </p:txBody>
@@ -4921,14 +5389,14 @@
                 </a:solidFill>
                 <a:latin typeface="Montserrat"/>
               </a:rPr>
-              <a:t>El purgado, el momento clave</a:t>
-            </a:r>
-          </a:p>
-        </p:txBody>
-      </p:sp>
-      <p:sp>
-        <p:nvSpPr>
-          <p:cNvPr id="7" name="Rounded Rectangle 6"/>
+              <a:t>La maniobra, paso a paso</a:t>
+            </a:r>
+          </a:p>
+        </p:txBody>
+      </p:sp>
+      <p:sp>
+        <p:nvSpPr>
+          <p:cNvPr id="7" name="Rectangle 6"/>
           <p:cNvSpPr/>
           <p:nvPr/>
         </p:nvSpPr>
@@ -4937,7 +5405,7 @@
             <a:off x="868680" y="1627632"/>
             <a:ext cx="2011680" cy="73152"/>
           </a:xfrm>
-          <a:prstGeom prst="roundRect">
+          <a:prstGeom prst="rect">
             <a:avLst/>
           </a:prstGeom>
           <a:solidFill>
@@ -4979,7 +5447,7 @@
         <p:spPr>
           <a:xfrm>
             <a:off x="822960" y="1965960"/>
-            <a:ext cx="4983480" cy="4206240"/>
+            <a:ext cx="5029200" cy="4206240"/>
           </a:xfrm>
           <a:prstGeom prst="rect">
             <a:avLst/>
@@ -5013,7 +5481,7 @@
                 </a:solidFill>
                 <a:latin typeface="Montserrat"/>
               </a:rPr>
-              <a:t>Es expulsar el aire empujándolo con gas</a:t>
+              <a:t>Precintar los equipos de medida</a:t>
             </a:r>
           </a:p>
           <a:p>
@@ -5038,7 +5506,7 @@
                 </a:solidFill>
                 <a:latin typeface="Montserrat"/>
               </a:rPr>
-              <a:t>Peligro: mezcla aire-gas explosiva</a:t>
+              <a:t>Cerrar y precintar llaves que no van a servicio</a:t>
             </a:r>
           </a:p>
           <a:p>
@@ -5063,7 +5531,7 @@
                 </a:solidFill>
                 <a:latin typeface="Montserrat"/>
               </a:rPr>
-              <a:t>Purgar a punto seguro, al exterior</a:t>
+              <a:t>Abrir acometida y purgar</a:t>
             </a:r>
           </a:p>
           <a:p>
@@ -5088,21 +5556,21 @@
                 </a:solidFill>
                 <a:latin typeface="Montserrat"/>
               </a:rPr>
-              <a:t>Sin llamas ni chispas; con detector</a:t>
-            </a:r>
-          </a:p>
-        </p:txBody>
-      </p:sp>
-      <p:sp>
-        <p:nvSpPr>
-          <p:cNvPr id="9" name="imgph" descr="IMGQ:gas purging outdoor safe point"/>
+              <a:t>Verificar estanquidad y certificar</a:t>
+            </a:r>
+          </a:p>
+        </p:txBody>
+      </p:sp>
+      <p:sp>
+        <p:nvSpPr>
+          <p:cNvPr id="9" name="imgph" descr="IMGQ:opening gas main valve meter"/>
           <p:cNvSpPr/>
           <p:nvPr/>
         </p:nvSpPr>
         <p:spPr>
           <a:xfrm>
-            <a:off x="5806440" y="1051560"/>
-            <a:ext cx="5298947" cy="4629150"/>
+            <a:off x="6080760" y="1965960"/>
+            <a:ext cx="5303520" cy="4572000"/>
           </a:xfrm>
           <a:prstGeom prst="roundRect">
             <a:avLst/>
@@ -5147,8 +5615,8 @@
         </p:nvSpPr>
         <p:spPr>
           <a:xfrm>
-            <a:off x="6080760" y="2726055"/>
-            <a:ext cx="4750307" cy="1280160"/>
+            <a:off x="6355080" y="3611880"/>
+            <a:ext cx="4754880" cy="1280160"/>
           </a:xfrm>
           <a:prstGeom prst="rect">
             <a:avLst/>
@@ -5169,7 +5637,7 @@
                 </a:solidFill>
                 <a:latin typeface="Montserrat"/>
               </a:rPr>
-              <a:t>IMAGEN REALISTA</a:t>
+              <a:t>IMAGEN</a:t>
             </a:r>
           </a:p>
           <a:p>
@@ -5181,7 +5649,7 @@
                 </a:solidFill>
                 <a:latin typeface="Montserrat"/>
               </a:rPr>
-              <a:t>gas purging outdoor safe point</a:t>
+              <a:t>opening gas main valve meter</a:t>
             </a:r>
           </a:p>
         </p:txBody>
@@ -5191,6 +5659,18 @@
   <p:clrMapOvr>
     <a:masterClrMapping/>
   </p:clrMapOvr>
+  <mc:AlternateContent xmlns:mc="http://schemas.openxmlformats.org/markup-compatibility/2006">
+    <mc:Choice xmlns:p14="http://schemas.microsoft.com/office/powerpoint/2010/main" Requires="p14">
+      <p:transition spd="med" p14:dur="700">
+        <p14:cube dir="r"/>
+      </p:transition>
+    </mc:Choice>
+    <mc:Fallback>
+      <p:transition spd="med">
+        <p:push dir="r"/>
+      </p:transition>
+    </mc:Fallback>
+  </mc:AlternateContent>
 </p:sld>
 </file>
 
@@ -5278,7 +5758,7 @@
                 </a:solidFill>
                 <a:latin typeface="Montserrat"/>
               </a:rPr>
-              <a:t>011 / 013</a:t>
+              <a:t>011 / 019</a:t>
             </a:r>
           </a:p>
         </p:txBody>
@@ -5380,14 +5860,14 @@
                 </a:solidFill>
                 <a:latin typeface="Montserrat"/>
               </a:rPr>
-              <a:t>Verificar y certificar</a:t>
-            </a:r>
-          </a:p>
-        </p:txBody>
-      </p:sp>
-      <p:sp>
-        <p:nvSpPr>
-          <p:cNvPr id="7" name="Rounded Rectangle 6"/>
+              <a:t>Cerrada, bloqueada, precintada</a:t>
+            </a:r>
+          </a:p>
+        </p:txBody>
+      </p:sp>
+      <p:sp>
+        <p:nvSpPr>
+          <p:cNvPr id="7" name="Rectangle 6"/>
           <p:cNvSpPr/>
           <p:nvPr/>
         </p:nvSpPr>
@@ -5396,7 +5876,7 @@
             <a:off x="868680" y="1627632"/>
             <a:ext cx="2011680" cy="73152"/>
           </a:xfrm>
-          <a:prstGeom prst="roundRect">
+          <a:prstGeom prst="rect">
             <a:avLst/>
           </a:prstGeom>
           <a:solidFill>
@@ -5437,8 +5917,8 @@
         </p:nvSpPr>
         <p:spPr>
           <a:xfrm>
-            <a:off x="822960" y="1965960"/>
-            <a:ext cx="4983480" cy="4206240"/>
+            <a:off x="6355080" y="1965960"/>
+            <a:ext cx="5029200" cy="4206240"/>
           </a:xfrm>
           <a:prstGeom prst="rect">
             <a:avLst/>
@@ -5472,7 +5952,7 @@
                 </a:solidFill>
                 <a:latin typeface="Montserrat"/>
               </a:rPr>
-              <a:t>Estanquidad final con gas, a presión de operación</a:t>
+              <a:t>Cerrada: girada, sin paso</a:t>
             </a:r>
           </a:p>
           <a:p>
@@ -5497,7 +5977,7 @@
                 </a:solidFill>
                 <a:latin typeface="Montserrat"/>
               </a:rPr>
-              <a:t>Si todo va bien, dejar en servicio</a:t>
+              <a:t>Bloqueada: que no la abra cualquiera</a:t>
             </a:r>
           </a:p>
           <a:p>
@@ -5522,7 +6002,7 @@
                 </a:solidFill>
                 <a:latin typeface="Montserrat"/>
               </a:rPr>
-              <a:t>Certificado de pruebas previas y puesta en servicio</a:t>
+              <a:t>Precintada: el precinto delata manipulación</a:t>
             </a:r>
           </a:p>
           <a:p>
@@ -5547,21 +6027,21 @@
                 </a:solidFill>
                 <a:latin typeface="Montserrat"/>
               </a:rPr>
-              <a:t>Entregar copia al titular o usuario</a:t>
-            </a:r>
-          </a:p>
-        </p:txBody>
-      </p:sp>
-      <p:sp>
-        <p:nvSpPr>
-          <p:cNvPr id="9" name="imgph" descr="IMGQ:signing installation certificate document"/>
+              <a:t>Taponada: cuando no hay nada detrás</a:t>
+            </a:r>
+          </a:p>
+        </p:txBody>
+      </p:sp>
+      <p:sp>
+        <p:nvSpPr>
+          <p:cNvPr id="9" name="imgph" descr="IMGQ:sealed gas valve with security seal"/>
           <p:cNvSpPr/>
           <p:nvPr/>
         </p:nvSpPr>
         <p:spPr>
           <a:xfrm>
-            <a:off x="5806440" y="1051560"/>
-            <a:ext cx="5298947" cy="4629150"/>
+            <a:off x="822960" y="1965960"/>
+            <a:ext cx="5303520" cy="4572000"/>
           </a:xfrm>
           <a:prstGeom prst="roundRect">
             <a:avLst/>
@@ -5606,8 +6086,8 @@
         </p:nvSpPr>
         <p:spPr>
           <a:xfrm>
-            <a:off x="6080760" y="2726055"/>
-            <a:ext cx="4750307" cy="1280160"/>
+            <a:off x="1097280" y="3611880"/>
+            <a:ext cx="4754880" cy="1280160"/>
           </a:xfrm>
           <a:prstGeom prst="rect">
             <a:avLst/>
@@ -5628,7 +6108,7 @@
                 </a:solidFill>
                 <a:latin typeface="Montserrat"/>
               </a:rPr>
-              <a:t>IMAGEN REALISTA</a:t>
+              <a:t>IMAGEN</a:t>
             </a:r>
           </a:p>
           <a:p>
@@ -5640,7 +6120,7 @@
                 </a:solidFill>
                 <a:latin typeface="Montserrat"/>
               </a:rPr>
-              <a:t>signing installation certificate document</a:t>
+              <a:t>sealed gas valve with security seal</a:t>
             </a:r>
           </a:p>
         </p:txBody>
@@ -5650,6 +6130,18 @@
   <p:clrMapOvr>
     <a:masterClrMapping/>
   </p:clrMapOvr>
+  <mc:AlternateContent xmlns:mc="http://schemas.openxmlformats.org/markup-compatibility/2006">
+    <mc:Choice xmlns:p14="http://schemas.microsoft.com/office/powerpoint/2010/main" Requires="p14">
+      <p:transition spd="med" p14:dur="700">
+        <p14:cube dir="l"/>
+      </p:transition>
+    </mc:Choice>
+    <mc:Fallback>
+      <p:transition spd="med">
+        <p:push dir="l"/>
+      </p:transition>
+    </mc:Fallback>
+  </mc:AlternateContent>
 </p:sld>
 </file>
 
@@ -5737,7 +6229,7 @@
                 </a:solidFill>
                 <a:latin typeface="Montserrat"/>
               </a:rPr>
-              <a:t>012 / 013</a:t>
+              <a:t>012 / 019</a:t>
             </a:r>
           </a:p>
         </p:txBody>
@@ -5778,84 +6270,16 @@
       </p:sp>
       <p:sp>
         <p:nvSpPr>
-          <p:cNvPr id="5" name="TextBox 4"/>
-          <p:cNvSpPr txBox="1"/>
-          <p:nvPr/>
-        </p:nvSpPr>
-        <p:spPr>
-          <a:xfrm>
-            <a:off x="822960" y="457200"/>
-            <a:ext cx="10058400" cy="365760"/>
-          </a:xfrm>
-          <a:prstGeom prst="rect">
-            <a:avLst/>
-          </a:prstGeom>
-          <a:noFill/>
-        </p:spPr>
-        <p:txBody>
-          <a:bodyPr wrap="square">
-            <a:spAutoFit/>
-          </a:bodyPr>
-          <a:lstStyle/>
-          <a:p>
-            <a:r>
-              <a:rPr sz="1300" b="1" i="0">
-                <a:solidFill>
-                  <a:srgbClr val="E8801A"/>
-                </a:solidFill>
-                <a:latin typeface="Montserrat"/>
-              </a:rPr>
-              <a:t>CASO ESPECIAL</a:t>
-            </a:r>
-          </a:p>
-        </p:txBody>
-      </p:sp>
-      <p:sp>
-        <p:nvSpPr>
-          <p:cNvPr id="6" name="TextBox 5"/>
-          <p:cNvSpPr txBox="1"/>
-          <p:nvPr/>
-        </p:nvSpPr>
-        <p:spPr>
-          <a:xfrm>
-            <a:off x="822960" y="868680"/>
-            <a:ext cx="10515600" cy="914400"/>
-          </a:xfrm>
-          <a:prstGeom prst="rect">
-            <a:avLst/>
-          </a:prstGeom>
-          <a:noFill/>
-        </p:spPr>
-        <p:txBody>
-          <a:bodyPr wrap="square">
-            <a:spAutoFit/>
-          </a:bodyPr>
-          <a:lstStyle/>
-          <a:p>
-            <a:r>
-              <a:rPr sz="2800" b="1" i="0">
-                <a:solidFill>
-                  <a:srgbClr val="1E2761"/>
-                </a:solidFill>
-                <a:latin typeface="Montserrat"/>
-              </a:rPr>
-              <a:t>GLP de depósito: primero llenar</a:t>
-            </a:r>
-          </a:p>
-        </p:txBody>
-      </p:sp>
-      <p:sp>
-        <p:nvSpPr>
-          <p:cNvPr id="7" name="Rounded Rectangle 6"/>
+          <p:cNvPr id="5" name="Rectangle 4"/>
           <p:cNvSpPr/>
           <p:nvPr/>
         </p:nvSpPr>
         <p:spPr>
           <a:xfrm>
-            <a:off x="868680" y="1627632"/>
-            <a:ext cx="2011680" cy="73152"/>
-          </a:xfrm>
-          <a:prstGeom prst="roundRect">
+            <a:off x="0" y="0"/>
+            <a:ext cx="12191695" cy="1143000"/>
+          </a:xfrm>
+          <a:prstGeom prst="rect">
             <a:avLst/>
           </a:prstGeom>
           <a:solidFill>
@@ -5890,14 +6314,14 @@
       </p:sp>
       <p:sp>
         <p:nvSpPr>
-          <p:cNvPr id="8" name="TextBox 7"/>
+          <p:cNvPr id="6" name="TextBox 5"/>
           <p:cNvSpPr txBox="1"/>
           <p:nvPr/>
         </p:nvSpPr>
         <p:spPr>
           <a:xfrm>
-            <a:off x="822960" y="1965960"/>
-            <a:ext cx="4983480" cy="4206240"/>
+            <a:off x="822960" y="274320"/>
+            <a:ext cx="10515600" cy="640080"/>
           </a:xfrm>
           <a:prstGeom prst="rect">
             <a:avLst/>
@@ -5910,117 +6334,62 @@
           </a:bodyPr>
           <a:lstStyle/>
           <a:p>
-            <a:pPr>
-              <a:spcAft>
-                <a:spcPts val="1100"/>
-              </a:spcAft>
-            </a:pPr>
-            <a:r>
-              <a:rPr sz="1600" b="1" i="0">
-                <a:solidFill>
-                  <a:srgbClr val="E8801A"/>
-                </a:solidFill>
-                <a:latin typeface="Montserrat"/>
-              </a:rPr>
-              <a:t>▸  </a:t>
-            </a:r>
-            <a:r>
-              <a:rPr sz="1600" b="0" i="0">
-                <a:solidFill>
-                  <a:srgbClr val="1B2330"/>
-                </a:solidFill>
-                <a:latin typeface="Montserrat"/>
-              </a:rPr>
-              <a:t>Depósito fijo de GLP en chalé o urbanización</a:t>
-            </a:r>
-          </a:p>
-          <a:p>
-            <a:pPr>
-              <a:spcAft>
-                <a:spcPts val="1100"/>
-              </a:spcAft>
-            </a:pPr>
-            <a:r>
-              <a:rPr sz="1600" b="1" i="0">
-                <a:solidFill>
-                  <a:srgbClr val="E8801A"/>
-                </a:solidFill>
-                <a:latin typeface="Montserrat"/>
-              </a:rPr>
-              <a:t>▸  </a:t>
-            </a:r>
-            <a:r>
-              <a:rPr sz="1600" b="0" i="0">
-                <a:solidFill>
-                  <a:srgbClr val="1B2330"/>
-                </a:solidFill>
-                <a:latin typeface="Montserrat"/>
-              </a:rPr>
-              <a:t>No hay servicio con el depósito vacío</a:t>
-            </a:r>
-          </a:p>
-          <a:p>
-            <a:pPr>
-              <a:spcAft>
-                <a:spcPts val="1100"/>
-              </a:spcAft>
-            </a:pPr>
-            <a:r>
-              <a:rPr sz="1600" b="1" i="0">
-                <a:solidFill>
-                  <a:srgbClr val="E8801A"/>
-                </a:solidFill>
-                <a:latin typeface="Montserrat"/>
-              </a:rPr>
-              <a:t>▸  </a:t>
-            </a:r>
-            <a:r>
-              <a:rPr sz="1600" b="0" i="0">
-                <a:solidFill>
-                  <a:srgbClr val="1B2330"/>
-                </a:solidFill>
-                <a:latin typeface="Montserrat"/>
-              </a:rPr>
-              <a:t>Puesta en servicio tras el primer llenado</a:t>
-            </a:r>
-          </a:p>
-          <a:p>
-            <a:pPr>
-              <a:spcAft>
-                <a:spcPts val="1100"/>
-              </a:spcAft>
-            </a:pPr>
-            <a:r>
-              <a:rPr sz="1600" b="1" i="0">
-                <a:solidFill>
-                  <a:srgbClr val="E8801A"/>
-                </a:solidFill>
-                <a:latin typeface="Montserrat"/>
-              </a:rPr>
-              <a:t>▸  </a:t>
-            </a:r>
-            <a:r>
-              <a:rPr sz="1600" b="0" i="0">
-                <a:solidFill>
-                  <a:srgbClr val="1B2330"/>
-                </a:solidFill>
-                <a:latin typeface="Montserrat"/>
-              </a:rPr>
-              <a:t>Sin producto no hay gas para purgar</a:t>
-            </a:r>
-          </a:p>
-        </p:txBody>
-      </p:sp>
-      <p:sp>
-        <p:nvSpPr>
-          <p:cNvPr id="9" name="imgph" descr="IMGQ:LPG storage tank residential garden"/>
+            <a:r>
+              <a:rPr sz="2400" b="1" i="0">
+                <a:solidFill>
+                  <a:srgbClr val="FFFFFF"/>
+                </a:solidFill>
+                <a:latin typeface="Montserrat"/>
+              </a:rPr>
+              <a:t>⚡  PREGUNTA RÁPIDA</a:t>
+            </a:r>
+          </a:p>
+        </p:txBody>
+      </p:sp>
+      <p:sp>
+        <p:nvSpPr>
+          <p:cNvPr id="7" name="TextBox 6"/>
+          <p:cNvSpPr txBox="1"/>
+          <p:nvPr/>
+        </p:nvSpPr>
+        <p:spPr>
+          <a:xfrm>
+            <a:off x="822960" y="1508760"/>
+            <a:ext cx="10515600" cy="1371600"/>
+          </a:xfrm>
+          <a:prstGeom prst="rect">
+            <a:avLst/>
+          </a:prstGeom>
+          <a:noFill/>
+        </p:spPr>
+        <p:txBody>
+          <a:bodyPr wrap="square">
+            <a:spAutoFit/>
+          </a:bodyPr>
+          <a:lstStyle/>
+          <a:p>
+            <a:r>
+              <a:rPr sz="2400" b="1" i="0">
+                <a:solidFill>
+                  <a:srgbClr val="1E2761"/>
+                </a:solidFill>
+                <a:latin typeface="Montserrat"/>
+              </a:rPr>
+              <a:t>Una llave que no entra en servicio y no tiene nada instalado detrás, ¿cómo queda?</a:t>
+            </a:r>
+          </a:p>
+        </p:txBody>
+      </p:sp>
+      <p:sp>
+        <p:nvSpPr>
+          <p:cNvPr id="8" name="Rounded Rectangle 7"/>
           <p:cNvSpPr/>
           <p:nvPr/>
         </p:nvSpPr>
         <p:spPr>
           <a:xfrm>
-            <a:off x="5806440" y="1051560"/>
-            <a:ext cx="5298947" cy="4629150"/>
+            <a:off x="822960" y="3291840"/>
+            <a:ext cx="4983480" cy="1143000"/>
           </a:xfrm>
           <a:prstGeom prst="roundRect">
             <a:avLst/>
@@ -6059,14 +6428,58 @@
       </p:sp>
       <p:sp>
         <p:nvSpPr>
+          <p:cNvPr id="9" name="Rectangle 8"/>
+          <p:cNvSpPr/>
+          <p:nvPr/>
+        </p:nvSpPr>
+        <p:spPr>
+          <a:xfrm>
+            <a:off x="822960" y="3291840"/>
+            <a:ext cx="640080" cy="1143000"/>
+          </a:xfrm>
+          <a:prstGeom prst="rect">
+            <a:avLst/>
+          </a:prstGeom>
+          <a:solidFill>
+            <a:srgbClr val="1E2761"/>
+          </a:solidFill>
+          <a:ln>
+            <a:noFill/>
+          </a:ln>
+          <a:effectLst/>
+        </p:spPr>
+        <p:style>
+          <a:lnRef idx="1">
+            <a:schemeClr val="accent1"/>
+          </a:lnRef>
+          <a:fillRef idx="3">
+            <a:schemeClr val="accent1"/>
+          </a:fillRef>
+          <a:effectRef idx="2">
+            <a:schemeClr val="accent1"/>
+          </a:effectRef>
+          <a:fontRef idx="minor">
+            <a:schemeClr val="lt1"/>
+          </a:fontRef>
+        </p:style>
+        <p:txBody>
+          <a:bodyPr rtlCol="0" anchor="ctr"/>
+          <a:lstStyle/>
+          <a:p>
+            <a:pPr algn="ctr"/>
+          </a:p>
+        </p:txBody>
+      </p:sp>
+      <p:sp>
+        <p:nvSpPr>
           <p:cNvPr id="10" name="TextBox 9"/>
           <p:cNvSpPr txBox="1"/>
           <p:nvPr/>
         </p:nvSpPr>
         <p:spPr>
           <a:xfrm>
-            <a:off x="6080760" y="2726055"/>
-            <a:ext cx="4750307" cy="1280160"/>
+            <a:off x="822960" y="3611880"/>
+            <a:ext cx="640080" cy="548640"/>
           </a:xfrm>
           <a:prstGeom prst="rect">
             <a:avLst/>
@@ -6081,25 +6494,524 @@
           <a:p>
             <a:pPr algn="ctr"/>
             <a:r>
-              <a:rPr sz="1400" b="1" i="0">
-                <a:solidFill>
-                  <a:srgbClr val="64748B"/>
-                </a:solidFill>
-                <a:latin typeface="Montserrat"/>
-              </a:rPr>
-              <a:t>IMAGEN REALISTA</a:t>
-            </a:r>
-          </a:p>
+              <a:rPr sz="2200" b="1" i="0">
+                <a:solidFill>
+                  <a:srgbClr val="FFFFFF"/>
+                </a:solidFill>
+                <a:latin typeface="Montserrat"/>
+              </a:rPr>
+              <a:t>A</a:t>
+            </a:r>
+          </a:p>
+        </p:txBody>
+      </p:sp>
+      <p:sp>
+        <p:nvSpPr>
+          <p:cNvPr id="11" name="TextBox 10"/>
+          <p:cNvSpPr txBox="1"/>
+          <p:nvPr/>
+        </p:nvSpPr>
+        <p:spPr>
+          <a:xfrm>
+            <a:off x="1600200" y="3474720"/>
+            <a:ext cx="4114800" cy="868680"/>
+          </a:xfrm>
+          <a:prstGeom prst="rect">
+            <a:avLst/>
+          </a:prstGeom>
+          <a:noFill/>
+        </p:spPr>
+        <p:txBody>
+          <a:bodyPr wrap="square">
+            <a:spAutoFit/>
+          </a:bodyPr>
+          <a:lstStyle/>
+          <a:p>
+            <a:r>
+              <a:rPr sz="1400" b="0" i="0">
+                <a:solidFill>
+                  <a:srgbClr val="1B2330"/>
+                </a:solidFill>
+                <a:latin typeface="Montserrat"/>
+              </a:rPr>
+              <a:t>Cerrada, bloqueada y precintada solamente</a:t>
+            </a:r>
+          </a:p>
+        </p:txBody>
+      </p:sp>
+      <p:sp>
+        <p:nvSpPr>
+          <p:cNvPr id="12" name="Rounded Rectangle 11"/>
+          <p:cNvSpPr/>
+          <p:nvPr/>
+        </p:nvSpPr>
+        <p:spPr>
+          <a:xfrm>
+            <a:off x="6355080" y="3291840"/>
+            <a:ext cx="4983480" cy="1143000"/>
+          </a:xfrm>
+          <a:prstGeom prst="roundRect">
+            <a:avLst/>
+          </a:prstGeom>
+          <a:solidFill>
+            <a:srgbClr val="F3F6FB"/>
+          </a:solidFill>
+          <a:ln w="12700">
+            <a:solidFill>
+              <a:srgbClr val="C7D2E6"/>
+            </a:solidFill>
+          </a:ln>
+          <a:effectLst/>
+        </p:spPr>
+        <p:style>
+          <a:lnRef idx="1">
+            <a:schemeClr val="accent1"/>
+          </a:lnRef>
+          <a:fillRef idx="3">
+            <a:schemeClr val="accent1"/>
+          </a:fillRef>
+          <a:effectRef idx="2">
+            <a:schemeClr val="accent1"/>
+          </a:effectRef>
+          <a:fontRef idx="minor">
+            <a:schemeClr val="lt1"/>
+          </a:fontRef>
+        </p:style>
+        <p:txBody>
+          <a:bodyPr rtlCol="0" anchor="ctr"/>
+          <a:lstStyle/>
           <a:p>
             <a:pPr algn="ctr"/>
-            <a:r>
-              <a:rPr sz="1100" b="0" i="1">
-                <a:solidFill>
-                  <a:srgbClr val="64748B"/>
-                </a:solidFill>
-                <a:latin typeface="Montserrat"/>
-              </a:rPr>
-              <a:t>LPG storage tank residential garden</a:t>
+          </a:p>
+        </p:txBody>
+      </p:sp>
+      <p:sp>
+        <p:nvSpPr>
+          <p:cNvPr id="13" name="Rectangle 12"/>
+          <p:cNvSpPr/>
+          <p:nvPr/>
+        </p:nvSpPr>
+        <p:spPr>
+          <a:xfrm>
+            <a:off x="6355080" y="3291840"/>
+            <a:ext cx="640080" cy="1143000"/>
+          </a:xfrm>
+          <a:prstGeom prst="rect">
+            <a:avLst/>
+          </a:prstGeom>
+          <a:solidFill>
+            <a:srgbClr val="1E2761"/>
+          </a:solidFill>
+          <a:ln>
+            <a:noFill/>
+          </a:ln>
+          <a:effectLst/>
+        </p:spPr>
+        <p:style>
+          <a:lnRef idx="1">
+            <a:schemeClr val="accent1"/>
+          </a:lnRef>
+          <a:fillRef idx="3">
+            <a:schemeClr val="accent1"/>
+          </a:fillRef>
+          <a:effectRef idx="2">
+            <a:schemeClr val="accent1"/>
+          </a:effectRef>
+          <a:fontRef idx="minor">
+            <a:schemeClr val="lt1"/>
+          </a:fontRef>
+        </p:style>
+        <p:txBody>
+          <a:bodyPr rtlCol="0" anchor="ctr"/>
+          <a:lstStyle/>
+          <a:p>
+            <a:pPr algn="ctr"/>
+          </a:p>
+        </p:txBody>
+      </p:sp>
+      <p:sp>
+        <p:nvSpPr>
+          <p:cNvPr id="14" name="TextBox 13"/>
+          <p:cNvSpPr txBox="1"/>
+          <p:nvPr/>
+        </p:nvSpPr>
+        <p:spPr>
+          <a:xfrm>
+            <a:off x="6355080" y="3611880"/>
+            <a:ext cx="640080" cy="548640"/>
+          </a:xfrm>
+          <a:prstGeom prst="rect">
+            <a:avLst/>
+          </a:prstGeom>
+          <a:noFill/>
+        </p:spPr>
+        <p:txBody>
+          <a:bodyPr wrap="square">
+            <a:spAutoFit/>
+          </a:bodyPr>
+          <a:lstStyle/>
+          <a:p>
+            <a:pPr algn="ctr"/>
+            <a:r>
+              <a:rPr sz="2200" b="1" i="0">
+                <a:solidFill>
+                  <a:srgbClr val="FFFFFF"/>
+                </a:solidFill>
+                <a:latin typeface="Montserrat"/>
+              </a:rPr>
+              <a:t>B</a:t>
+            </a:r>
+          </a:p>
+        </p:txBody>
+      </p:sp>
+      <p:sp>
+        <p:nvSpPr>
+          <p:cNvPr id="15" name="TextBox 14"/>
+          <p:cNvSpPr txBox="1"/>
+          <p:nvPr/>
+        </p:nvSpPr>
+        <p:spPr>
+          <a:xfrm>
+            <a:off x="7132320" y="3474720"/>
+            <a:ext cx="4114800" cy="868680"/>
+          </a:xfrm>
+          <a:prstGeom prst="rect">
+            <a:avLst/>
+          </a:prstGeom>
+          <a:noFill/>
+        </p:spPr>
+        <p:txBody>
+          <a:bodyPr wrap="square">
+            <a:spAutoFit/>
+          </a:bodyPr>
+          <a:lstStyle/>
+          <a:p>
+            <a:r>
+              <a:rPr sz="1400" b="0" i="0">
+                <a:solidFill>
+                  <a:srgbClr val="1B2330"/>
+                </a:solidFill>
+                <a:latin typeface="Montserrat"/>
+              </a:rPr>
+              <a:t>Cerrada, bloqueada, precintada y taponada</a:t>
+            </a:r>
+          </a:p>
+        </p:txBody>
+      </p:sp>
+      <p:sp>
+        <p:nvSpPr>
+          <p:cNvPr id="16" name="Rounded Rectangle 15"/>
+          <p:cNvSpPr/>
+          <p:nvPr/>
+        </p:nvSpPr>
+        <p:spPr>
+          <a:xfrm>
+            <a:off x="822960" y="4617720"/>
+            <a:ext cx="4983480" cy="1143000"/>
+          </a:xfrm>
+          <a:prstGeom prst="roundRect">
+            <a:avLst/>
+          </a:prstGeom>
+          <a:solidFill>
+            <a:srgbClr val="F3F6FB"/>
+          </a:solidFill>
+          <a:ln w="12700">
+            <a:solidFill>
+              <a:srgbClr val="C7D2E6"/>
+            </a:solidFill>
+          </a:ln>
+          <a:effectLst/>
+        </p:spPr>
+        <p:style>
+          <a:lnRef idx="1">
+            <a:schemeClr val="accent1"/>
+          </a:lnRef>
+          <a:fillRef idx="3">
+            <a:schemeClr val="accent1"/>
+          </a:fillRef>
+          <a:effectRef idx="2">
+            <a:schemeClr val="accent1"/>
+          </a:effectRef>
+          <a:fontRef idx="minor">
+            <a:schemeClr val="lt1"/>
+          </a:fontRef>
+        </p:style>
+        <p:txBody>
+          <a:bodyPr rtlCol="0" anchor="ctr"/>
+          <a:lstStyle/>
+          <a:p>
+            <a:pPr algn="ctr"/>
+          </a:p>
+        </p:txBody>
+      </p:sp>
+      <p:sp>
+        <p:nvSpPr>
+          <p:cNvPr id="17" name="Rectangle 16"/>
+          <p:cNvSpPr/>
+          <p:nvPr/>
+        </p:nvSpPr>
+        <p:spPr>
+          <a:xfrm>
+            <a:off x="822960" y="4617720"/>
+            <a:ext cx="640080" cy="1143000"/>
+          </a:xfrm>
+          <a:prstGeom prst="rect">
+            <a:avLst/>
+          </a:prstGeom>
+          <a:solidFill>
+            <a:srgbClr val="1E2761"/>
+          </a:solidFill>
+          <a:ln>
+            <a:noFill/>
+          </a:ln>
+          <a:effectLst/>
+        </p:spPr>
+        <p:style>
+          <a:lnRef idx="1">
+            <a:schemeClr val="accent1"/>
+          </a:lnRef>
+          <a:fillRef idx="3">
+            <a:schemeClr val="accent1"/>
+          </a:fillRef>
+          <a:effectRef idx="2">
+            <a:schemeClr val="accent1"/>
+          </a:effectRef>
+          <a:fontRef idx="minor">
+            <a:schemeClr val="lt1"/>
+          </a:fontRef>
+        </p:style>
+        <p:txBody>
+          <a:bodyPr rtlCol="0" anchor="ctr"/>
+          <a:lstStyle/>
+          <a:p>
+            <a:pPr algn="ctr"/>
+          </a:p>
+        </p:txBody>
+      </p:sp>
+      <p:sp>
+        <p:nvSpPr>
+          <p:cNvPr id="18" name="TextBox 17"/>
+          <p:cNvSpPr txBox="1"/>
+          <p:nvPr/>
+        </p:nvSpPr>
+        <p:spPr>
+          <a:xfrm>
+            <a:off x="822960" y="4937760"/>
+            <a:ext cx="640080" cy="548640"/>
+          </a:xfrm>
+          <a:prstGeom prst="rect">
+            <a:avLst/>
+          </a:prstGeom>
+          <a:noFill/>
+        </p:spPr>
+        <p:txBody>
+          <a:bodyPr wrap="square">
+            <a:spAutoFit/>
+          </a:bodyPr>
+          <a:lstStyle/>
+          <a:p>
+            <a:pPr algn="ctr"/>
+            <a:r>
+              <a:rPr sz="2200" b="1" i="0">
+                <a:solidFill>
+                  <a:srgbClr val="FFFFFF"/>
+                </a:solidFill>
+                <a:latin typeface="Montserrat"/>
+              </a:rPr>
+              <a:t>C</a:t>
+            </a:r>
+          </a:p>
+        </p:txBody>
+      </p:sp>
+      <p:sp>
+        <p:nvSpPr>
+          <p:cNvPr id="19" name="TextBox 18"/>
+          <p:cNvSpPr txBox="1"/>
+          <p:nvPr/>
+        </p:nvSpPr>
+        <p:spPr>
+          <a:xfrm>
+            <a:off x="1600200" y="4800600"/>
+            <a:ext cx="4114800" cy="868680"/>
+          </a:xfrm>
+          <a:prstGeom prst="rect">
+            <a:avLst/>
+          </a:prstGeom>
+          <a:noFill/>
+        </p:spPr>
+        <p:txBody>
+          <a:bodyPr wrap="square">
+            <a:spAutoFit/>
+          </a:bodyPr>
+          <a:lstStyle/>
+          <a:p>
+            <a:r>
+              <a:rPr sz="1400" b="0" i="0">
+                <a:solidFill>
+                  <a:srgbClr val="1B2330"/>
+                </a:solidFill>
+                <a:latin typeface="Montserrat"/>
+              </a:rPr>
+              <a:t>Solo precintada</a:t>
+            </a:r>
+          </a:p>
+        </p:txBody>
+      </p:sp>
+      <p:sp>
+        <p:nvSpPr>
+          <p:cNvPr id="20" name="Rounded Rectangle 19"/>
+          <p:cNvSpPr/>
+          <p:nvPr/>
+        </p:nvSpPr>
+        <p:spPr>
+          <a:xfrm>
+            <a:off x="6355080" y="4617720"/>
+            <a:ext cx="4983480" cy="1143000"/>
+          </a:xfrm>
+          <a:prstGeom prst="roundRect">
+            <a:avLst/>
+          </a:prstGeom>
+          <a:solidFill>
+            <a:srgbClr val="F3F6FB"/>
+          </a:solidFill>
+          <a:ln w="12700">
+            <a:solidFill>
+              <a:srgbClr val="C7D2E6"/>
+            </a:solidFill>
+          </a:ln>
+          <a:effectLst/>
+        </p:spPr>
+        <p:style>
+          <a:lnRef idx="1">
+            <a:schemeClr val="accent1"/>
+          </a:lnRef>
+          <a:fillRef idx="3">
+            <a:schemeClr val="accent1"/>
+          </a:fillRef>
+          <a:effectRef idx="2">
+            <a:schemeClr val="accent1"/>
+          </a:effectRef>
+          <a:fontRef idx="minor">
+            <a:schemeClr val="lt1"/>
+          </a:fontRef>
+        </p:style>
+        <p:txBody>
+          <a:bodyPr rtlCol="0" anchor="ctr"/>
+          <a:lstStyle/>
+          <a:p>
+            <a:pPr algn="ctr"/>
+          </a:p>
+        </p:txBody>
+      </p:sp>
+      <p:sp>
+        <p:nvSpPr>
+          <p:cNvPr id="21" name="Rectangle 20"/>
+          <p:cNvSpPr/>
+          <p:nvPr/>
+        </p:nvSpPr>
+        <p:spPr>
+          <a:xfrm>
+            <a:off x="6355080" y="4617720"/>
+            <a:ext cx="640080" cy="1143000"/>
+          </a:xfrm>
+          <a:prstGeom prst="rect">
+            <a:avLst/>
+          </a:prstGeom>
+          <a:solidFill>
+            <a:srgbClr val="1E2761"/>
+          </a:solidFill>
+          <a:ln>
+            <a:noFill/>
+          </a:ln>
+          <a:effectLst/>
+        </p:spPr>
+        <p:style>
+          <a:lnRef idx="1">
+            <a:schemeClr val="accent1"/>
+          </a:lnRef>
+          <a:fillRef idx="3">
+            <a:schemeClr val="accent1"/>
+          </a:fillRef>
+          <a:effectRef idx="2">
+            <a:schemeClr val="accent1"/>
+          </a:effectRef>
+          <a:fontRef idx="minor">
+            <a:schemeClr val="lt1"/>
+          </a:fontRef>
+        </p:style>
+        <p:txBody>
+          <a:bodyPr rtlCol="0" anchor="ctr"/>
+          <a:lstStyle/>
+          <a:p>
+            <a:pPr algn="ctr"/>
+          </a:p>
+        </p:txBody>
+      </p:sp>
+      <p:sp>
+        <p:nvSpPr>
+          <p:cNvPr id="22" name="TextBox 21"/>
+          <p:cNvSpPr txBox="1"/>
+          <p:nvPr/>
+        </p:nvSpPr>
+        <p:spPr>
+          <a:xfrm>
+            <a:off x="6355080" y="4937760"/>
+            <a:ext cx="640080" cy="548640"/>
+          </a:xfrm>
+          <a:prstGeom prst="rect">
+            <a:avLst/>
+          </a:prstGeom>
+          <a:noFill/>
+        </p:spPr>
+        <p:txBody>
+          <a:bodyPr wrap="square">
+            <a:spAutoFit/>
+          </a:bodyPr>
+          <a:lstStyle/>
+          <a:p>
+            <a:pPr algn="ctr"/>
+            <a:r>
+              <a:rPr sz="2200" b="1" i="0">
+                <a:solidFill>
+                  <a:srgbClr val="FFFFFF"/>
+                </a:solidFill>
+                <a:latin typeface="Montserrat"/>
+              </a:rPr>
+              <a:t>D</a:t>
+            </a:r>
+          </a:p>
+        </p:txBody>
+      </p:sp>
+      <p:sp>
+        <p:nvSpPr>
+          <p:cNvPr id="23" name="TextBox 22"/>
+          <p:cNvSpPr txBox="1"/>
+          <p:nvPr/>
+        </p:nvSpPr>
+        <p:spPr>
+          <a:xfrm>
+            <a:off x="7132320" y="4800600"/>
+            <a:ext cx="4114800" cy="868680"/>
+          </a:xfrm>
+          <a:prstGeom prst="rect">
+            <a:avLst/>
+          </a:prstGeom>
+          <a:noFill/>
+        </p:spPr>
+        <p:txBody>
+          <a:bodyPr wrap="square">
+            <a:spAutoFit/>
+          </a:bodyPr>
+          <a:lstStyle/>
+          <a:p>
+            <a:r>
+              <a:rPr sz="1400" b="0" i="0">
+                <a:solidFill>
+                  <a:srgbClr val="1B2330"/>
+                </a:solidFill>
+                <a:latin typeface="Montserrat"/>
+              </a:rPr>
+              <a:t>Abierta pero bloqueada</a:t>
             </a:r>
           </a:p>
         </p:txBody>
@@ -6109,6 +7021,18 @@
   <p:clrMapOvr>
     <a:masterClrMapping/>
   </p:clrMapOvr>
+  <mc:AlternateContent xmlns:mc="http://schemas.openxmlformats.org/markup-compatibility/2006">
+    <mc:Choice xmlns:p14="http://schemas.microsoft.com/office/powerpoint/2010/main" Requires="p14">
+      <p:transition spd="med" p14:dur="700">
+        <p14:cube dir="r"/>
+      </p:transition>
+    </mc:Choice>
+    <mc:Fallback>
+      <p:transition spd="med">
+        <p:push dir="r"/>
+      </p:transition>
+    </mc:Fallback>
+  </mc:AlternateContent>
 </p:sld>
 </file>
 
@@ -6137,7 +7061,7 @@
             <a:avLst/>
           </a:prstGeom>
           <a:solidFill>
-            <a:srgbClr val="1E2761"/>
+            <a:srgbClr val="FFFFFF"/>
           </a:solidFill>
           <a:ln>
             <a:noFill/>
@@ -6174,8 +7098,8 @@
         </p:nvSpPr>
         <p:spPr>
           <a:xfrm>
-            <a:off x="822960" y="640080"/>
-            <a:ext cx="10515600" cy="457200"/>
+            <a:off x="10607040" y="320040"/>
+            <a:ext cx="1371600" cy="365760"/>
           </a:xfrm>
           <a:prstGeom prst="rect">
             <a:avLst/>
@@ -6188,30 +7112,520 @@
           </a:bodyPr>
           <a:lstStyle/>
           <a:p>
-            <a:r>
-              <a:rPr sz="1400" b="1" i="0">
-                <a:solidFill>
-                  <a:srgbClr val="F4A24C"/>
-                </a:solidFill>
-                <a:latin typeface="Montserrat"/>
-              </a:rPr>
-              <a:t>LO QUE YA DOMINAS</a:t>
-            </a:r>
-          </a:p>
-        </p:txBody>
-      </p:sp>
-      <p:sp>
-        <p:nvSpPr>
-          <p:cNvPr id="4" name="Rounded Rectangle 3"/>
+            <a:pPr algn="r"/>
+            <a:r>
+              <a:rPr sz="1000" b="1" i="0">
+                <a:solidFill>
+                  <a:srgbClr val="64748B"/>
+                </a:solidFill>
+                <a:latin typeface="Montserrat"/>
+              </a:rPr>
+              <a:t>013 / 019</a:t>
+            </a:r>
+          </a:p>
+        </p:txBody>
+      </p:sp>
+      <p:sp>
+        <p:nvSpPr>
+          <p:cNvPr id="4" name="TextBox 3"/>
+          <p:cNvSpPr txBox="1"/>
+          <p:nvPr/>
+        </p:nvSpPr>
+        <p:spPr>
+          <a:xfrm>
+            <a:off x="457200" y="6419088"/>
+            <a:ext cx="8229600" cy="365760"/>
+          </a:xfrm>
+          <a:prstGeom prst="rect">
+            <a:avLst/>
+          </a:prstGeom>
+          <a:noFill/>
+        </p:spPr>
+        <p:txBody>
+          <a:bodyPr wrap="square">
+            <a:spAutoFit/>
+          </a:bodyPr>
+          <a:lstStyle/>
+          <a:p>
+            <a:r>
+              <a:rPr sz="900" b="0" i="0">
+                <a:solidFill>
+                  <a:srgbClr val="64748B"/>
+                </a:solidFill>
+                <a:latin typeface="Montserrat"/>
+              </a:rPr>
+              <a:t>Curso Gas B · Tema 15 · UNE 60670-9 · Pruebas previas y puesta en servicio</a:t>
+            </a:r>
+          </a:p>
+        </p:txBody>
+      </p:sp>
+      <p:sp>
+        <p:nvSpPr>
+          <p:cNvPr id="5" name="Rectangle 4"/>
           <p:cNvSpPr/>
           <p:nvPr/>
         </p:nvSpPr>
         <p:spPr>
           <a:xfrm>
-            <a:off x="868680" y="1051560"/>
-            <a:ext cx="1463040" cy="82296"/>
+            <a:off x="0" y="0"/>
+            <a:ext cx="12191695" cy="1143000"/>
+          </a:xfrm>
+          <a:prstGeom prst="rect">
+            <a:avLst/>
+          </a:prstGeom>
+          <a:solidFill>
+            <a:srgbClr val="1E8E4B"/>
+          </a:solidFill>
+          <a:ln>
+            <a:noFill/>
+          </a:ln>
+          <a:effectLst/>
+        </p:spPr>
+        <p:style>
+          <a:lnRef idx="1">
+            <a:schemeClr val="accent1"/>
+          </a:lnRef>
+          <a:fillRef idx="3">
+            <a:schemeClr val="accent1"/>
+          </a:fillRef>
+          <a:effectRef idx="2">
+            <a:schemeClr val="accent1"/>
+          </a:effectRef>
+          <a:fontRef idx="minor">
+            <a:schemeClr val="lt1"/>
+          </a:fontRef>
+        </p:style>
+        <p:txBody>
+          <a:bodyPr rtlCol="0" anchor="ctr"/>
+          <a:lstStyle/>
+          <a:p>
+            <a:pPr algn="ctr"/>
+          </a:p>
+        </p:txBody>
+      </p:sp>
+      <p:sp>
+        <p:nvSpPr>
+          <p:cNvPr id="6" name="TextBox 5"/>
+          <p:cNvSpPr txBox="1"/>
+          <p:nvPr/>
+        </p:nvSpPr>
+        <p:spPr>
+          <a:xfrm>
+            <a:off x="822960" y="274320"/>
+            <a:ext cx="10515600" cy="640080"/>
+          </a:xfrm>
+          <a:prstGeom prst="rect">
+            <a:avLst/>
+          </a:prstGeom>
+          <a:noFill/>
+        </p:spPr>
+        <p:txBody>
+          <a:bodyPr wrap="square">
+            <a:spAutoFit/>
+          </a:bodyPr>
+          <a:lstStyle/>
+          <a:p>
+            <a:r>
+              <a:rPr sz="2400" b="1" i="0">
+                <a:solidFill>
+                  <a:srgbClr val="FFFFFF"/>
+                </a:solidFill>
+                <a:latin typeface="Montserrat"/>
+              </a:rPr>
+              <a:t>✔  RESPUESTA:  B</a:t>
+            </a:r>
+          </a:p>
+        </p:txBody>
+      </p:sp>
+      <p:sp>
+        <p:nvSpPr>
+          <p:cNvPr id="7" name="TextBox 6"/>
+          <p:cNvSpPr txBox="1"/>
+          <p:nvPr/>
+        </p:nvSpPr>
+        <p:spPr>
+          <a:xfrm>
+            <a:off x="822960" y="1417320"/>
+            <a:ext cx="10515600" cy="914400"/>
+          </a:xfrm>
+          <a:prstGeom prst="rect">
+            <a:avLst/>
+          </a:prstGeom>
+          <a:noFill/>
+        </p:spPr>
+        <p:txBody>
+          <a:bodyPr wrap="square">
+            <a:spAutoFit/>
+          </a:bodyPr>
+          <a:lstStyle/>
+          <a:p>
+            <a:r>
+              <a:rPr sz="1800" b="1" i="0">
+                <a:solidFill>
+                  <a:srgbClr val="64748B"/>
+                </a:solidFill>
+                <a:latin typeface="Montserrat"/>
+              </a:rPr>
+              <a:t>Una llave que no entra en servicio y no tiene nada instalado detrás, ¿cómo queda?</a:t>
+            </a:r>
+          </a:p>
+        </p:txBody>
+      </p:sp>
+      <p:sp>
+        <p:nvSpPr>
+          <p:cNvPr id="8" name="Rounded Rectangle 7"/>
+          <p:cNvSpPr/>
+          <p:nvPr/>
+        </p:nvSpPr>
+        <p:spPr>
+          <a:xfrm>
+            <a:off x="822960" y="2514600"/>
+            <a:ext cx="10515600" cy="914400"/>
           </a:xfrm>
           <a:prstGeom prst="roundRect">
+            <a:avLst/>
+          </a:prstGeom>
+          <a:solidFill>
+            <a:srgbClr val="E9F6EE"/>
+          </a:solidFill>
+          <a:ln w="12700">
+            <a:solidFill>
+              <a:srgbClr val="1E8E4B"/>
+            </a:solidFill>
+          </a:ln>
+          <a:effectLst/>
+        </p:spPr>
+        <p:style>
+          <a:lnRef idx="1">
+            <a:schemeClr val="accent1"/>
+          </a:lnRef>
+          <a:fillRef idx="3">
+            <a:schemeClr val="accent1"/>
+          </a:fillRef>
+          <a:effectRef idx="2">
+            <a:schemeClr val="accent1"/>
+          </a:effectRef>
+          <a:fontRef idx="minor">
+            <a:schemeClr val="lt1"/>
+          </a:fontRef>
+        </p:style>
+        <p:txBody>
+          <a:bodyPr rtlCol="0" anchor="ctr"/>
+          <a:lstStyle/>
+          <a:p>
+            <a:pPr algn="ctr"/>
+          </a:p>
+        </p:txBody>
+      </p:sp>
+      <p:sp>
+        <p:nvSpPr>
+          <p:cNvPr id="9" name="TextBox 8"/>
+          <p:cNvSpPr txBox="1"/>
+          <p:nvPr/>
+        </p:nvSpPr>
+        <p:spPr>
+          <a:xfrm>
+            <a:off x="1097280" y="2697480"/>
+            <a:ext cx="10058400" cy="640080"/>
+          </a:xfrm>
+          <a:prstGeom prst="rect">
+            <a:avLst/>
+          </a:prstGeom>
+          <a:noFill/>
+        </p:spPr>
+        <p:txBody>
+          <a:bodyPr wrap="square">
+            <a:spAutoFit/>
+          </a:bodyPr>
+          <a:lstStyle/>
+          <a:p>
+            <a:r>
+              <a:rPr sz="1800" b="1" i="0">
+                <a:solidFill>
+                  <a:srgbClr val="1E8E4B"/>
+                </a:solidFill>
+                <a:latin typeface="Montserrat"/>
+              </a:rPr>
+              <a:t>B.  </a:t>
+            </a:r>
+            <a:r>
+              <a:rPr sz="1800" b="1" i="0">
+                <a:solidFill>
+                  <a:srgbClr val="1E2761"/>
+                </a:solidFill>
+                <a:latin typeface="Montserrat"/>
+              </a:rPr>
+              <a:t>Cerrada, bloqueada, precintada y taponada</a:t>
+            </a:r>
+          </a:p>
+        </p:txBody>
+      </p:sp>
+      <p:sp>
+        <p:nvSpPr>
+          <p:cNvPr id="10" name="TextBox 9"/>
+          <p:cNvSpPr txBox="1"/>
+          <p:nvPr/>
+        </p:nvSpPr>
+        <p:spPr>
+          <a:xfrm>
+            <a:off x="822960" y="3749039"/>
+            <a:ext cx="10515600" cy="2194560"/>
+          </a:xfrm>
+          <a:prstGeom prst="rect">
+            <a:avLst/>
+          </a:prstGeom>
+          <a:noFill/>
+        </p:spPr>
+        <p:txBody>
+          <a:bodyPr wrap="square">
+            <a:spAutoFit/>
+          </a:bodyPr>
+          <a:lstStyle/>
+          <a:p>
+            <a:r>
+              <a:rPr sz="1500" b="1" i="0">
+                <a:solidFill>
+                  <a:srgbClr val="E8801A"/>
+                </a:solidFill>
+                <a:latin typeface="Montserrat"/>
+              </a:rPr>
+              <a:t>Por qué:  </a:t>
+            </a:r>
+            <a:r>
+              <a:rPr sz="1500" b="0" i="0">
+                <a:solidFill>
+                  <a:srgbClr val="1B2330"/>
+                </a:solidFill>
+                <a:latin typeface="Montserrat"/>
+              </a:rPr>
+              <a:t>Si la llave da a la nada se tapona además, para que aunque fuercen el precinto no salga gas al aire.</a:t>
+            </a:r>
+          </a:p>
+        </p:txBody>
+      </p:sp>
+    </p:spTree>
+  </p:cSld>
+  <p:clrMapOvr>
+    <a:masterClrMapping/>
+  </p:clrMapOvr>
+  <mc:AlternateContent xmlns:mc="http://schemas.openxmlformats.org/markup-compatibility/2006">
+    <mc:Choice xmlns:p14="http://schemas.microsoft.com/office/powerpoint/2010/main" Requires="p14">
+      <p:transition spd="med" p14:dur="700">
+        <p14:cube dir="l"/>
+      </p:transition>
+    </mc:Choice>
+    <mc:Fallback>
+      <p:transition spd="med">
+        <p:push dir="l"/>
+      </p:transition>
+    </mc:Fallback>
+  </mc:AlternateContent>
+</p:sld>
+</file>
+
+<file path=ppt/slides/slide14.xml><?xml version="1.0" encoding="utf-8"?>
+<p:sld xmlns:a="http://schemas.openxmlformats.org/drawingml/2006/main" xmlns:p="http://schemas.openxmlformats.org/presentationml/2006/main" xmlns:r="http://schemas.openxmlformats.org/officeDocument/2006/relationships">
+  <p:cSld>
+    <p:spTree>
+      <p:nvGrpSpPr>
+        <p:cNvPr id="1" name=""/>
+        <p:cNvGrpSpPr/>
+        <p:nvPr/>
+      </p:nvGrpSpPr>
+      <p:grpSpPr/>
+      <p:sp>
+        <p:nvSpPr>
+          <p:cNvPr id="2" name="Rectangle 1"/>
+          <p:cNvSpPr/>
+          <p:nvPr/>
+        </p:nvSpPr>
+        <p:spPr>
+          <a:xfrm>
+            <a:off x="0" y="0"/>
+            <a:ext cx="12191695" cy="6858000"/>
+          </a:xfrm>
+          <a:prstGeom prst="rect">
+            <a:avLst/>
+          </a:prstGeom>
+          <a:solidFill>
+            <a:srgbClr val="FFFFFF"/>
+          </a:solidFill>
+          <a:ln>
+            <a:noFill/>
+          </a:ln>
+          <a:effectLst/>
+        </p:spPr>
+        <p:style>
+          <a:lnRef idx="1">
+            <a:schemeClr val="accent1"/>
+          </a:lnRef>
+          <a:fillRef idx="3">
+            <a:schemeClr val="accent1"/>
+          </a:fillRef>
+          <a:effectRef idx="2">
+            <a:schemeClr val="accent1"/>
+          </a:effectRef>
+          <a:fontRef idx="minor">
+            <a:schemeClr val="lt1"/>
+          </a:fontRef>
+        </p:style>
+        <p:txBody>
+          <a:bodyPr rtlCol="0" anchor="ctr"/>
+          <a:lstStyle/>
+          <a:p>
+            <a:pPr algn="ctr"/>
+          </a:p>
+        </p:txBody>
+      </p:sp>
+      <p:sp>
+        <p:nvSpPr>
+          <p:cNvPr id="3" name="TextBox 2"/>
+          <p:cNvSpPr txBox="1"/>
+          <p:nvPr/>
+        </p:nvSpPr>
+        <p:spPr>
+          <a:xfrm>
+            <a:off x="10607040" y="320040"/>
+            <a:ext cx="1371600" cy="365760"/>
+          </a:xfrm>
+          <a:prstGeom prst="rect">
+            <a:avLst/>
+          </a:prstGeom>
+          <a:noFill/>
+        </p:spPr>
+        <p:txBody>
+          <a:bodyPr wrap="square">
+            <a:spAutoFit/>
+          </a:bodyPr>
+          <a:lstStyle/>
+          <a:p>
+            <a:pPr algn="r"/>
+            <a:r>
+              <a:rPr sz="1000" b="1" i="0">
+                <a:solidFill>
+                  <a:srgbClr val="64748B"/>
+                </a:solidFill>
+                <a:latin typeface="Montserrat"/>
+              </a:rPr>
+              <a:t>014 / 019</a:t>
+            </a:r>
+          </a:p>
+        </p:txBody>
+      </p:sp>
+      <p:sp>
+        <p:nvSpPr>
+          <p:cNvPr id="4" name="TextBox 3"/>
+          <p:cNvSpPr txBox="1"/>
+          <p:nvPr/>
+        </p:nvSpPr>
+        <p:spPr>
+          <a:xfrm>
+            <a:off x="457200" y="6419088"/>
+            <a:ext cx="8229600" cy="365760"/>
+          </a:xfrm>
+          <a:prstGeom prst="rect">
+            <a:avLst/>
+          </a:prstGeom>
+          <a:noFill/>
+        </p:spPr>
+        <p:txBody>
+          <a:bodyPr wrap="square">
+            <a:spAutoFit/>
+          </a:bodyPr>
+          <a:lstStyle/>
+          <a:p>
+            <a:r>
+              <a:rPr sz="900" b="0" i="0">
+                <a:solidFill>
+                  <a:srgbClr val="64748B"/>
+                </a:solidFill>
+                <a:latin typeface="Montserrat"/>
+              </a:rPr>
+              <a:t>Curso Gas B · Tema 15 · UNE 60670-9 · Pruebas previas y puesta en servicio</a:t>
+            </a:r>
+          </a:p>
+        </p:txBody>
+      </p:sp>
+      <p:sp>
+        <p:nvSpPr>
+          <p:cNvPr id="5" name="TextBox 4"/>
+          <p:cNvSpPr txBox="1"/>
+          <p:nvPr/>
+        </p:nvSpPr>
+        <p:spPr>
+          <a:xfrm>
+            <a:off x="822960" y="457200"/>
+            <a:ext cx="10058400" cy="365760"/>
+          </a:xfrm>
+          <a:prstGeom prst="rect">
+            <a:avLst/>
+          </a:prstGeom>
+          <a:noFill/>
+        </p:spPr>
+        <p:txBody>
+          <a:bodyPr wrap="square">
+            <a:spAutoFit/>
+          </a:bodyPr>
+          <a:lstStyle/>
+          <a:p>
+            <a:r>
+              <a:rPr sz="1300" b="1" i="0">
+                <a:solidFill>
+                  <a:srgbClr val="E8801A"/>
+                </a:solidFill>
+                <a:latin typeface="Montserrat"/>
+              </a:rPr>
+              <a:t>PUESTA EN SERVICIO</a:t>
+            </a:r>
+          </a:p>
+        </p:txBody>
+      </p:sp>
+      <p:sp>
+        <p:nvSpPr>
+          <p:cNvPr id="6" name="TextBox 5"/>
+          <p:cNvSpPr txBox="1"/>
+          <p:nvPr/>
+        </p:nvSpPr>
+        <p:spPr>
+          <a:xfrm>
+            <a:off x="822960" y="868680"/>
+            <a:ext cx="10515600" cy="914400"/>
+          </a:xfrm>
+          <a:prstGeom prst="rect">
+            <a:avLst/>
+          </a:prstGeom>
+          <a:noFill/>
+        </p:spPr>
+        <p:txBody>
+          <a:bodyPr wrap="square">
+            <a:spAutoFit/>
+          </a:bodyPr>
+          <a:lstStyle/>
+          <a:p>
+            <a:r>
+              <a:rPr sz="2800" b="1" i="0">
+                <a:solidFill>
+                  <a:srgbClr val="1E2761"/>
+                </a:solidFill>
+                <a:latin typeface="Montserrat"/>
+              </a:rPr>
+              <a:t>El purgado, el momento clave</a:t>
+            </a:r>
+          </a:p>
+        </p:txBody>
+      </p:sp>
+      <p:sp>
+        <p:nvSpPr>
+          <p:cNvPr id="7" name="Rectangle 6"/>
+          <p:cNvSpPr/>
+          <p:nvPr/>
+        </p:nvSpPr>
+        <p:spPr>
+          <a:xfrm>
+            <a:off x="868680" y="1627632"/>
+            <a:ext cx="2011680" cy="73152"/>
+          </a:xfrm>
+          <a:prstGeom prst="rect">
             <a:avLst/>
           </a:prstGeom>
           <a:solidFill>
@@ -6246,14 +7660,14 @@
       </p:sp>
       <p:sp>
         <p:nvSpPr>
-          <p:cNvPr id="5" name="TextBox 4"/>
+          <p:cNvPr id="8" name="TextBox 7"/>
           <p:cNvSpPr txBox="1"/>
           <p:nvPr/>
         </p:nvSpPr>
         <p:spPr>
           <a:xfrm>
-            <a:off x="822960" y="1234440"/>
-            <a:ext cx="10515600" cy="1097280"/>
+            <a:off x="822960" y="1965960"/>
+            <a:ext cx="5029200" cy="4206240"/>
           </a:xfrm>
           <a:prstGeom prst="rect">
             <a:avLst/>
@@ -6266,28 +7680,163 @@
           </a:bodyPr>
           <a:lstStyle/>
           <a:p>
-            <a:r>
-              <a:rPr sz="3400" b="1" i="0">
-                <a:solidFill>
-                  <a:srgbClr val="FFFFFF"/>
-                </a:solidFill>
-                <a:latin typeface="Montserrat"/>
-              </a:rPr>
-              <a:t>Ya sabes dar gas sin dejarte nada</a:t>
-            </a:r>
-          </a:p>
-        </p:txBody>
-      </p:sp>
-      <p:sp>
-        <p:nvSpPr>
-          <p:cNvPr id="6" name="TextBox 5"/>
+            <a:pPr>
+              <a:spcAft>
+                <a:spcPts val="1100"/>
+              </a:spcAft>
+            </a:pPr>
+            <a:r>
+              <a:rPr sz="1600" b="1" i="0">
+                <a:solidFill>
+                  <a:srgbClr val="E8801A"/>
+                </a:solidFill>
+                <a:latin typeface="Montserrat"/>
+              </a:rPr>
+              <a:t>▸  </a:t>
+            </a:r>
+            <a:r>
+              <a:rPr sz="1600" b="0" i="0">
+                <a:solidFill>
+                  <a:srgbClr val="1B2330"/>
+                </a:solidFill>
+                <a:latin typeface="Montserrat"/>
+              </a:rPr>
+              <a:t>Es expulsar el aire empujándolo con gas</a:t>
+            </a:r>
+          </a:p>
+          <a:p>
+            <a:pPr>
+              <a:spcAft>
+                <a:spcPts val="1100"/>
+              </a:spcAft>
+            </a:pPr>
+            <a:r>
+              <a:rPr sz="1600" b="1" i="0">
+                <a:solidFill>
+                  <a:srgbClr val="E8801A"/>
+                </a:solidFill>
+                <a:latin typeface="Montserrat"/>
+              </a:rPr>
+              <a:t>▸  </a:t>
+            </a:r>
+            <a:r>
+              <a:rPr sz="1600" b="0" i="0">
+                <a:solidFill>
+                  <a:srgbClr val="1B2330"/>
+                </a:solidFill>
+                <a:latin typeface="Montserrat"/>
+              </a:rPr>
+              <a:t>Peligro: mezcla aire-gas explosiva</a:t>
+            </a:r>
+          </a:p>
+          <a:p>
+            <a:pPr>
+              <a:spcAft>
+                <a:spcPts val="1100"/>
+              </a:spcAft>
+            </a:pPr>
+            <a:r>
+              <a:rPr sz="1600" b="1" i="0">
+                <a:solidFill>
+                  <a:srgbClr val="E8801A"/>
+                </a:solidFill>
+                <a:latin typeface="Montserrat"/>
+              </a:rPr>
+              <a:t>▸  </a:t>
+            </a:r>
+            <a:r>
+              <a:rPr sz="1600" b="0" i="0">
+                <a:solidFill>
+                  <a:srgbClr val="1B2330"/>
+                </a:solidFill>
+                <a:latin typeface="Montserrat"/>
+              </a:rPr>
+              <a:t>Purgar a punto seguro, al exterior</a:t>
+            </a:r>
+          </a:p>
+          <a:p>
+            <a:pPr>
+              <a:spcAft>
+                <a:spcPts val="1100"/>
+              </a:spcAft>
+            </a:pPr>
+            <a:r>
+              <a:rPr sz="1600" b="1" i="0">
+                <a:solidFill>
+                  <a:srgbClr val="E8801A"/>
+                </a:solidFill>
+                <a:latin typeface="Montserrat"/>
+              </a:rPr>
+              <a:t>▸  </a:t>
+            </a:r>
+            <a:r>
+              <a:rPr sz="1600" b="0" i="0">
+                <a:solidFill>
+                  <a:srgbClr val="1B2330"/>
+                </a:solidFill>
+                <a:latin typeface="Montserrat"/>
+              </a:rPr>
+              <a:t>Sin llamas ni chispas; con detector</a:t>
+            </a:r>
+          </a:p>
+        </p:txBody>
+      </p:sp>
+      <p:sp>
+        <p:nvSpPr>
+          <p:cNvPr id="9" name="imgph" descr="IMGQ:gas purging outdoor safe point"/>
+          <p:cNvSpPr/>
+          <p:nvPr/>
+        </p:nvSpPr>
+        <p:spPr>
+          <a:xfrm>
+            <a:off x="6080760" y="1965960"/>
+            <a:ext cx="5303520" cy="4572000"/>
+          </a:xfrm>
+          <a:prstGeom prst="roundRect">
+            <a:avLst/>
+          </a:prstGeom>
+          <a:solidFill>
+            <a:srgbClr val="F3F6FB"/>
+          </a:solidFill>
+          <a:ln w="12700">
+            <a:solidFill>
+              <a:srgbClr val="C7D2E6"/>
+            </a:solidFill>
+          </a:ln>
+          <a:effectLst/>
+        </p:spPr>
+        <p:style>
+          <a:lnRef idx="1">
+            <a:schemeClr val="accent1"/>
+          </a:lnRef>
+          <a:fillRef idx="3">
+            <a:schemeClr val="accent1"/>
+          </a:fillRef>
+          <a:effectRef idx="2">
+            <a:schemeClr val="accent1"/>
+          </a:effectRef>
+          <a:fontRef idx="minor">
+            <a:schemeClr val="lt1"/>
+          </a:fontRef>
+        </p:style>
+        <p:txBody>
+          <a:bodyPr rtlCol="0" anchor="ctr"/>
+          <a:lstStyle/>
+          <a:p>
+            <a:pPr algn="ctr"/>
+          </a:p>
+        </p:txBody>
+      </p:sp>
+      <p:sp>
+        <p:nvSpPr>
+          <p:cNvPr id="10" name="TextBox 9"/>
           <p:cNvSpPr txBox="1"/>
           <p:nvPr/>
         </p:nvSpPr>
         <p:spPr>
           <a:xfrm>
-            <a:off x="822960" y="2606040"/>
-            <a:ext cx="10515600" cy="2743200"/>
+            <a:off x="6355080" y="3611880"/>
+            <a:ext cx="4754880" cy="1280160"/>
           </a:xfrm>
           <a:prstGeom prst="rect">
             <a:avLst/>
@@ -6300,119 +7849,186 @@
           </a:bodyPr>
           <a:lstStyle/>
           <a:p>
-            <a:pPr>
-              <a:spcAft>
-                <a:spcPts val="1200"/>
-              </a:spcAft>
-            </a:pPr>
-            <a:r>
-              <a:rPr sz="2000" b="1" i="0">
-                <a:solidFill>
-                  <a:srgbClr val="F4A24C"/>
-                </a:solidFill>
-                <a:latin typeface="Montserrat"/>
-              </a:rPr>
-              <a:t>✓  </a:t>
-            </a:r>
-            <a:r>
-              <a:rPr sz="1900" b="0" i="0">
-                <a:solidFill>
-                  <a:srgbClr val="FFFFFF"/>
-                </a:solidFill>
-                <a:latin typeface="Montserrat"/>
-              </a:rPr>
-              <a:t>Pruebas previas: repaso de lo visible y accesible</a:t>
-            </a:r>
-          </a:p>
-          <a:p>
-            <a:pPr>
-              <a:spcAft>
-                <a:spcPts val="1200"/>
-              </a:spcAft>
-            </a:pPr>
-            <a:r>
-              <a:rPr sz="2000" b="1" i="0">
-                <a:solidFill>
-                  <a:srgbClr val="F4A24C"/>
-                </a:solidFill>
-                <a:latin typeface="Montserrat"/>
-              </a:rPr>
-              <a:t>✓  </a:t>
-            </a:r>
-            <a:r>
-              <a:rPr sz="1900" b="0" i="0">
-                <a:solidFill>
-                  <a:srgbClr val="FFFFFF"/>
-                </a:solidFill>
-                <a:latin typeface="Montserrat"/>
-              </a:rPr>
-              <a:t>El purgado se hace al exterior, sin chispas, hasta gas puro</a:t>
-            </a:r>
-          </a:p>
-          <a:p>
-            <a:pPr>
-              <a:spcAft>
-                <a:spcPts val="1200"/>
-              </a:spcAft>
-            </a:pPr>
-            <a:r>
-              <a:rPr sz="2000" b="1" i="0">
-                <a:solidFill>
-                  <a:srgbClr val="F4A24C"/>
-                </a:solidFill>
-                <a:latin typeface="Montserrat"/>
-              </a:rPr>
-              <a:t>✓  </a:t>
-            </a:r>
-            <a:r>
-              <a:rPr sz="1900" b="0" i="0">
-                <a:solidFill>
-                  <a:srgbClr val="FFFFFF"/>
-                </a:solidFill>
-                <a:latin typeface="Montserrat"/>
-              </a:rPr>
-              <a:t>Sin nada detrás, tapón; con algo detrás, cerrar-bloquear-precintar</a:t>
-            </a:r>
-          </a:p>
-          <a:p>
-            <a:pPr>
-              <a:spcAft>
-                <a:spcPts val="1200"/>
-              </a:spcAft>
-            </a:pPr>
-            <a:r>
-              <a:rPr sz="2000" b="1" i="0">
-                <a:solidFill>
-                  <a:srgbClr val="F4A24C"/>
-                </a:solidFill>
-                <a:latin typeface="Montserrat"/>
-              </a:rPr>
-              <a:t>✓  </a:t>
-            </a:r>
-            <a:r>
-              <a:rPr sz="1900" b="0" i="0">
-                <a:solidFill>
-                  <a:srgbClr val="FFFFFF"/>
-                </a:solidFill>
-                <a:latin typeface="Montserrat"/>
-              </a:rPr>
-              <a:t>Termina con certificado y copia al usuario</a:t>
-            </a:r>
-          </a:p>
-        </p:txBody>
-      </p:sp>
-      <p:sp>
-        <p:nvSpPr>
-          <p:cNvPr id="7" name="Rounded Rectangle 6"/>
+            <a:pPr algn="ctr"/>
+            <a:r>
+              <a:rPr sz="1400" b="1" i="0">
+                <a:solidFill>
+                  <a:srgbClr val="64748B"/>
+                </a:solidFill>
+                <a:latin typeface="Montserrat"/>
+              </a:rPr>
+              <a:t>IMAGEN</a:t>
+            </a:r>
+          </a:p>
+          <a:p>
+            <a:pPr algn="ctr"/>
+            <a:r>
+              <a:rPr sz="1100" b="0" i="1">
+                <a:solidFill>
+                  <a:srgbClr val="64748B"/>
+                </a:solidFill>
+                <a:latin typeface="Montserrat"/>
+              </a:rPr>
+              <a:t>gas purging outdoor safe point</a:t>
+            </a:r>
+          </a:p>
+        </p:txBody>
+      </p:sp>
+    </p:spTree>
+  </p:cSld>
+  <p:clrMapOvr>
+    <a:masterClrMapping/>
+  </p:clrMapOvr>
+  <mc:AlternateContent xmlns:mc="http://schemas.openxmlformats.org/markup-compatibility/2006">
+    <mc:Choice xmlns:p14="http://schemas.microsoft.com/office/powerpoint/2010/main" Requires="p14">
+      <p:transition spd="med" p14:dur="700">
+        <p14:cube dir="r"/>
+      </p:transition>
+    </mc:Choice>
+    <mc:Fallback>
+      <p:transition spd="med">
+        <p:push dir="r"/>
+      </p:transition>
+    </mc:Fallback>
+  </mc:AlternateContent>
+</p:sld>
+</file>
+
+<file path=ppt/slides/slide15.xml><?xml version="1.0" encoding="utf-8"?>
+<p:sld xmlns:a="http://schemas.openxmlformats.org/drawingml/2006/main" xmlns:p="http://schemas.openxmlformats.org/presentationml/2006/main" xmlns:r="http://schemas.openxmlformats.org/officeDocument/2006/relationships">
+  <p:cSld>
+    <p:spTree>
+      <p:nvGrpSpPr>
+        <p:cNvPr id="1" name=""/>
+        <p:cNvGrpSpPr/>
+        <p:nvPr/>
+      </p:nvGrpSpPr>
+      <p:grpSpPr/>
+      <p:sp>
+        <p:nvSpPr>
+          <p:cNvPr id="2" name="Rectangle 1"/>
           <p:cNvSpPr/>
           <p:nvPr/>
         </p:nvSpPr>
         <p:spPr>
           <a:xfrm>
-            <a:off x="822960" y="5532120"/>
-            <a:ext cx="10515600" cy="822960"/>
-          </a:xfrm>
-          <a:prstGeom prst="roundRect">
+            <a:off x="0" y="0"/>
+            <a:ext cx="12191695" cy="6858000"/>
+          </a:xfrm>
+          <a:prstGeom prst="rect">
+            <a:avLst/>
+          </a:prstGeom>
+          <a:solidFill>
+            <a:srgbClr val="FFFFFF"/>
+          </a:solidFill>
+          <a:ln>
+            <a:noFill/>
+          </a:ln>
+          <a:effectLst/>
+        </p:spPr>
+        <p:style>
+          <a:lnRef idx="1">
+            <a:schemeClr val="accent1"/>
+          </a:lnRef>
+          <a:fillRef idx="3">
+            <a:schemeClr val="accent1"/>
+          </a:fillRef>
+          <a:effectRef idx="2">
+            <a:schemeClr val="accent1"/>
+          </a:effectRef>
+          <a:fontRef idx="minor">
+            <a:schemeClr val="lt1"/>
+          </a:fontRef>
+        </p:style>
+        <p:txBody>
+          <a:bodyPr rtlCol="0" anchor="ctr"/>
+          <a:lstStyle/>
+          <a:p>
+            <a:pPr algn="ctr"/>
+          </a:p>
+        </p:txBody>
+      </p:sp>
+      <p:sp>
+        <p:nvSpPr>
+          <p:cNvPr id="3" name="TextBox 2"/>
+          <p:cNvSpPr txBox="1"/>
+          <p:nvPr/>
+        </p:nvSpPr>
+        <p:spPr>
+          <a:xfrm>
+            <a:off x="10607040" y="320040"/>
+            <a:ext cx="1371600" cy="365760"/>
+          </a:xfrm>
+          <a:prstGeom prst="rect">
+            <a:avLst/>
+          </a:prstGeom>
+          <a:noFill/>
+        </p:spPr>
+        <p:txBody>
+          <a:bodyPr wrap="square">
+            <a:spAutoFit/>
+          </a:bodyPr>
+          <a:lstStyle/>
+          <a:p>
+            <a:pPr algn="r"/>
+            <a:r>
+              <a:rPr sz="1000" b="1" i="0">
+                <a:solidFill>
+                  <a:srgbClr val="64748B"/>
+                </a:solidFill>
+                <a:latin typeface="Montserrat"/>
+              </a:rPr>
+              <a:t>015 / 019</a:t>
+            </a:r>
+          </a:p>
+        </p:txBody>
+      </p:sp>
+      <p:sp>
+        <p:nvSpPr>
+          <p:cNvPr id="4" name="TextBox 3"/>
+          <p:cNvSpPr txBox="1"/>
+          <p:nvPr/>
+        </p:nvSpPr>
+        <p:spPr>
+          <a:xfrm>
+            <a:off x="457200" y="6419088"/>
+            <a:ext cx="8229600" cy="365760"/>
+          </a:xfrm>
+          <a:prstGeom prst="rect">
+            <a:avLst/>
+          </a:prstGeom>
+          <a:noFill/>
+        </p:spPr>
+        <p:txBody>
+          <a:bodyPr wrap="square">
+            <a:spAutoFit/>
+          </a:bodyPr>
+          <a:lstStyle/>
+          <a:p>
+            <a:r>
+              <a:rPr sz="900" b="0" i="0">
+                <a:solidFill>
+                  <a:srgbClr val="64748B"/>
+                </a:solidFill>
+                <a:latin typeface="Montserrat"/>
+              </a:rPr>
+              <a:t>Curso Gas B · Tema 15 · UNE 60670-9 · Pruebas previas y puesta en servicio</a:t>
+            </a:r>
+          </a:p>
+        </p:txBody>
+      </p:sp>
+      <p:sp>
+        <p:nvSpPr>
+          <p:cNvPr id="5" name="Rectangle 4"/>
+          <p:cNvSpPr/>
+          <p:nvPr/>
+        </p:nvSpPr>
+        <p:spPr>
+          <a:xfrm>
+            <a:off x="0" y="0"/>
+            <a:ext cx="12191695" cy="1143000"/>
+          </a:xfrm>
+          <a:prstGeom prst="rect">
             <a:avLst/>
           </a:prstGeom>
           <a:solidFill>
@@ -6447,14 +8063,14 @@
       </p:sp>
       <p:sp>
         <p:nvSpPr>
-          <p:cNvPr id="8" name="TextBox 7"/>
+          <p:cNvPr id="6" name="TextBox 5"/>
           <p:cNvSpPr txBox="1"/>
           <p:nvPr/>
         </p:nvSpPr>
         <p:spPr>
           <a:xfrm>
-            <a:off x="1051560" y="5623560"/>
-            <a:ext cx="10058400" cy="640080"/>
+            <a:off x="822960" y="274320"/>
+            <a:ext cx="10515600" cy="640080"/>
           </a:xfrm>
           <a:prstGeom prst="rect">
             <a:avLst/>
@@ -6468,13 +8084,683 @@
           <a:lstStyle/>
           <a:p>
             <a:r>
-              <a:rPr sz="1500" b="1" i="1">
+              <a:rPr sz="2400" b="1" i="0">
+                <a:solidFill>
+                  <a:srgbClr val="FFFFFF"/>
+                </a:solidFill>
+                <a:latin typeface="Montserrat"/>
+              </a:rPr>
+              <a:t>⚡  PREGUNTA RÁPIDA</a:t>
+            </a:r>
+          </a:p>
+        </p:txBody>
+      </p:sp>
+      <p:sp>
+        <p:nvSpPr>
+          <p:cNvPr id="7" name="TextBox 6"/>
+          <p:cNvSpPr txBox="1"/>
+          <p:nvPr/>
+        </p:nvSpPr>
+        <p:spPr>
+          <a:xfrm>
+            <a:off x="822960" y="1508760"/>
+            <a:ext cx="10515600" cy="1371600"/>
+          </a:xfrm>
+          <a:prstGeom prst="rect">
+            <a:avLst/>
+          </a:prstGeom>
+          <a:noFill/>
+        </p:spPr>
+        <p:txBody>
+          <a:bodyPr wrap="square">
+            <a:spAutoFit/>
+          </a:bodyPr>
+          <a:lstStyle/>
+          <a:p>
+            <a:r>
+              <a:rPr sz="2400" b="1" i="0">
                 <a:solidFill>
                   <a:srgbClr val="1E2761"/>
                 </a:solidFill>
                 <a:latin typeface="Montserrat"/>
               </a:rPr>
-              <a:t>De un tubo probado a una instalación legalmente en servicio. Ya solo faltan los aparatos.</a:t>
+              <a:t>¿Por qué es el purgado el momento más peligroso de la puesta en servicio?</a:t>
+            </a:r>
+          </a:p>
+        </p:txBody>
+      </p:sp>
+      <p:sp>
+        <p:nvSpPr>
+          <p:cNvPr id="8" name="Rounded Rectangle 7"/>
+          <p:cNvSpPr/>
+          <p:nvPr/>
+        </p:nvSpPr>
+        <p:spPr>
+          <a:xfrm>
+            <a:off x="822960" y="3291840"/>
+            <a:ext cx="4983480" cy="1143000"/>
+          </a:xfrm>
+          <a:prstGeom prst="roundRect">
+            <a:avLst/>
+          </a:prstGeom>
+          <a:solidFill>
+            <a:srgbClr val="F3F6FB"/>
+          </a:solidFill>
+          <a:ln w="12700">
+            <a:solidFill>
+              <a:srgbClr val="C7D2E6"/>
+            </a:solidFill>
+          </a:ln>
+          <a:effectLst/>
+        </p:spPr>
+        <p:style>
+          <a:lnRef idx="1">
+            <a:schemeClr val="accent1"/>
+          </a:lnRef>
+          <a:fillRef idx="3">
+            <a:schemeClr val="accent1"/>
+          </a:fillRef>
+          <a:effectRef idx="2">
+            <a:schemeClr val="accent1"/>
+          </a:effectRef>
+          <a:fontRef idx="minor">
+            <a:schemeClr val="lt1"/>
+          </a:fontRef>
+        </p:style>
+        <p:txBody>
+          <a:bodyPr rtlCol="0" anchor="ctr"/>
+          <a:lstStyle/>
+          <a:p>
+            <a:pPr algn="ctr"/>
+          </a:p>
+        </p:txBody>
+      </p:sp>
+      <p:sp>
+        <p:nvSpPr>
+          <p:cNvPr id="9" name="Rectangle 8"/>
+          <p:cNvSpPr/>
+          <p:nvPr/>
+        </p:nvSpPr>
+        <p:spPr>
+          <a:xfrm>
+            <a:off x="822960" y="3291840"/>
+            <a:ext cx="640080" cy="1143000"/>
+          </a:xfrm>
+          <a:prstGeom prst="rect">
+            <a:avLst/>
+          </a:prstGeom>
+          <a:solidFill>
+            <a:srgbClr val="1E2761"/>
+          </a:solidFill>
+          <a:ln>
+            <a:noFill/>
+          </a:ln>
+          <a:effectLst/>
+        </p:spPr>
+        <p:style>
+          <a:lnRef idx="1">
+            <a:schemeClr val="accent1"/>
+          </a:lnRef>
+          <a:fillRef idx="3">
+            <a:schemeClr val="accent1"/>
+          </a:fillRef>
+          <a:effectRef idx="2">
+            <a:schemeClr val="accent1"/>
+          </a:effectRef>
+          <a:fontRef idx="minor">
+            <a:schemeClr val="lt1"/>
+          </a:fontRef>
+        </p:style>
+        <p:txBody>
+          <a:bodyPr rtlCol="0" anchor="ctr"/>
+          <a:lstStyle/>
+          <a:p>
+            <a:pPr algn="ctr"/>
+          </a:p>
+        </p:txBody>
+      </p:sp>
+      <p:sp>
+        <p:nvSpPr>
+          <p:cNvPr id="10" name="TextBox 9"/>
+          <p:cNvSpPr txBox="1"/>
+          <p:nvPr/>
+        </p:nvSpPr>
+        <p:spPr>
+          <a:xfrm>
+            <a:off x="822960" y="3611880"/>
+            <a:ext cx="640080" cy="548640"/>
+          </a:xfrm>
+          <a:prstGeom prst="rect">
+            <a:avLst/>
+          </a:prstGeom>
+          <a:noFill/>
+        </p:spPr>
+        <p:txBody>
+          <a:bodyPr wrap="square">
+            <a:spAutoFit/>
+          </a:bodyPr>
+          <a:lstStyle/>
+          <a:p>
+            <a:pPr algn="ctr"/>
+            <a:r>
+              <a:rPr sz="2200" b="1" i="0">
+                <a:solidFill>
+                  <a:srgbClr val="FFFFFF"/>
+                </a:solidFill>
+                <a:latin typeface="Montserrat"/>
+              </a:rPr>
+              <a:t>A</a:t>
+            </a:r>
+          </a:p>
+        </p:txBody>
+      </p:sp>
+      <p:sp>
+        <p:nvSpPr>
+          <p:cNvPr id="11" name="TextBox 10"/>
+          <p:cNvSpPr txBox="1"/>
+          <p:nvPr/>
+        </p:nvSpPr>
+        <p:spPr>
+          <a:xfrm>
+            <a:off x="1600200" y="3474720"/>
+            <a:ext cx="4114800" cy="868680"/>
+          </a:xfrm>
+          <a:prstGeom prst="rect">
+            <a:avLst/>
+          </a:prstGeom>
+          <a:noFill/>
+        </p:spPr>
+        <p:txBody>
+          <a:bodyPr wrap="square">
+            <a:spAutoFit/>
+          </a:bodyPr>
+          <a:lstStyle/>
+          <a:p>
+            <a:r>
+              <a:rPr sz="1400" b="0" i="0">
+                <a:solidFill>
+                  <a:srgbClr val="1B2330"/>
+                </a:solidFill>
+                <a:latin typeface="Montserrat"/>
+              </a:rPr>
+              <a:t>Porque se trabaja a la presión de prueba más alta</a:t>
+            </a:r>
+          </a:p>
+        </p:txBody>
+      </p:sp>
+      <p:sp>
+        <p:nvSpPr>
+          <p:cNvPr id="12" name="Rounded Rectangle 11"/>
+          <p:cNvSpPr/>
+          <p:nvPr/>
+        </p:nvSpPr>
+        <p:spPr>
+          <a:xfrm>
+            <a:off x="6355080" y="3291840"/>
+            <a:ext cx="4983480" cy="1143000"/>
+          </a:xfrm>
+          <a:prstGeom prst="roundRect">
+            <a:avLst/>
+          </a:prstGeom>
+          <a:solidFill>
+            <a:srgbClr val="F3F6FB"/>
+          </a:solidFill>
+          <a:ln w="12700">
+            <a:solidFill>
+              <a:srgbClr val="C7D2E6"/>
+            </a:solidFill>
+          </a:ln>
+          <a:effectLst/>
+        </p:spPr>
+        <p:style>
+          <a:lnRef idx="1">
+            <a:schemeClr val="accent1"/>
+          </a:lnRef>
+          <a:fillRef idx="3">
+            <a:schemeClr val="accent1"/>
+          </a:fillRef>
+          <a:effectRef idx="2">
+            <a:schemeClr val="accent1"/>
+          </a:effectRef>
+          <a:fontRef idx="minor">
+            <a:schemeClr val="lt1"/>
+          </a:fontRef>
+        </p:style>
+        <p:txBody>
+          <a:bodyPr rtlCol="0" anchor="ctr"/>
+          <a:lstStyle/>
+          <a:p>
+            <a:pPr algn="ctr"/>
+          </a:p>
+        </p:txBody>
+      </p:sp>
+      <p:sp>
+        <p:nvSpPr>
+          <p:cNvPr id="13" name="Rectangle 12"/>
+          <p:cNvSpPr/>
+          <p:nvPr/>
+        </p:nvSpPr>
+        <p:spPr>
+          <a:xfrm>
+            <a:off x="6355080" y="3291840"/>
+            <a:ext cx="640080" cy="1143000"/>
+          </a:xfrm>
+          <a:prstGeom prst="rect">
+            <a:avLst/>
+          </a:prstGeom>
+          <a:solidFill>
+            <a:srgbClr val="1E2761"/>
+          </a:solidFill>
+          <a:ln>
+            <a:noFill/>
+          </a:ln>
+          <a:effectLst/>
+        </p:spPr>
+        <p:style>
+          <a:lnRef idx="1">
+            <a:schemeClr val="accent1"/>
+          </a:lnRef>
+          <a:fillRef idx="3">
+            <a:schemeClr val="accent1"/>
+          </a:fillRef>
+          <a:effectRef idx="2">
+            <a:schemeClr val="accent1"/>
+          </a:effectRef>
+          <a:fontRef idx="minor">
+            <a:schemeClr val="lt1"/>
+          </a:fontRef>
+        </p:style>
+        <p:txBody>
+          <a:bodyPr rtlCol="0" anchor="ctr"/>
+          <a:lstStyle/>
+          <a:p>
+            <a:pPr algn="ctr"/>
+          </a:p>
+        </p:txBody>
+      </p:sp>
+      <p:sp>
+        <p:nvSpPr>
+          <p:cNvPr id="14" name="TextBox 13"/>
+          <p:cNvSpPr txBox="1"/>
+          <p:nvPr/>
+        </p:nvSpPr>
+        <p:spPr>
+          <a:xfrm>
+            <a:off x="6355080" y="3611880"/>
+            <a:ext cx="640080" cy="548640"/>
+          </a:xfrm>
+          <a:prstGeom prst="rect">
+            <a:avLst/>
+          </a:prstGeom>
+          <a:noFill/>
+        </p:spPr>
+        <p:txBody>
+          <a:bodyPr wrap="square">
+            <a:spAutoFit/>
+          </a:bodyPr>
+          <a:lstStyle/>
+          <a:p>
+            <a:pPr algn="ctr"/>
+            <a:r>
+              <a:rPr sz="2200" b="1" i="0">
+                <a:solidFill>
+                  <a:srgbClr val="FFFFFF"/>
+                </a:solidFill>
+                <a:latin typeface="Montserrat"/>
+              </a:rPr>
+              <a:t>B</a:t>
+            </a:r>
+          </a:p>
+        </p:txBody>
+      </p:sp>
+      <p:sp>
+        <p:nvSpPr>
+          <p:cNvPr id="15" name="TextBox 14"/>
+          <p:cNvSpPr txBox="1"/>
+          <p:nvPr/>
+        </p:nvSpPr>
+        <p:spPr>
+          <a:xfrm>
+            <a:off x="7132320" y="3474720"/>
+            <a:ext cx="4114800" cy="868680"/>
+          </a:xfrm>
+          <a:prstGeom prst="rect">
+            <a:avLst/>
+          </a:prstGeom>
+          <a:noFill/>
+        </p:spPr>
+        <p:txBody>
+          <a:bodyPr wrap="square">
+            <a:spAutoFit/>
+          </a:bodyPr>
+          <a:lstStyle/>
+          <a:p>
+            <a:r>
+              <a:rPr sz="1400" b="0" i="0">
+                <a:solidFill>
+                  <a:srgbClr val="1B2330"/>
+                </a:solidFill>
+                <a:latin typeface="Montserrat"/>
+              </a:rPr>
+              <a:t>Porque puede formarse una mezcla aire-gas explosiva</a:t>
+            </a:r>
+          </a:p>
+        </p:txBody>
+      </p:sp>
+      <p:sp>
+        <p:nvSpPr>
+          <p:cNvPr id="16" name="Rounded Rectangle 15"/>
+          <p:cNvSpPr/>
+          <p:nvPr/>
+        </p:nvSpPr>
+        <p:spPr>
+          <a:xfrm>
+            <a:off x="822960" y="4617720"/>
+            <a:ext cx="4983480" cy="1143000"/>
+          </a:xfrm>
+          <a:prstGeom prst="roundRect">
+            <a:avLst/>
+          </a:prstGeom>
+          <a:solidFill>
+            <a:srgbClr val="F3F6FB"/>
+          </a:solidFill>
+          <a:ln w="12700">
+            <a:solidFill>
+              <a:srgbClr val="C7D2E6"/>
+            </a:solidFill>
+          </a:ln>
+          <a:effectLst/>
+        </p:spPr>
+        <p:style>
+          <a:lnRef idx="1">
+            <a:schemeClr val="accent1"/>
+          </a:lnRef>
+          <a:fillRef idx="3">
+            <a:schemeClr val="accent1"/>
+          </a:fillRef>
+          <a:effectRef idx="2">
+            <a:schemeClr val="accent1"/>
+          </a:effectRef>
+          <a:fontRef idx="minor">
+            <a:schemeClr val="lt1"/>
+          </a:fontRef>
+        </p:style>
+        <p:txBody>
+          <a:bodyPr rtlCol="0" anchor="ctr"/>
+          <a:lstStyle/>
+          <a:p>
+            <a:pPr algn="ctr"/>
+          </a:p>
+        </p:txBody>
+      </p:sp>
+      <p:sp>
+        <p:nvSpPr>
+          <p:cNvPr id="17" name="Rectangle 16"/>
+          <p:cNvSpPr/>
+          <p:nvPr/>
+        </p:nvSpPr>
+        <p:spPr>
+          <a:xfrm>
+            <a:off x="822960" y="4617720"/>
+            <a:ext cx="640080" cy="1143000"/>
+          </a:xfrm>
+          <a:prstGeom prst="rect">
+            <a:avLst/>
+          </a:prstGeom>
+          <a:solidFill>
+            <a:srgbClr val="1E2761"/>
+          </a:solidFill>
+          <a:ln>
+            <a:noFill/>
+          </a:ln>
+          <a:effectLst/>
+        </p:spPr>
+        <p:style>
+          <a:lnRef idx="1">
+            <a:schemeClr val="accent1"/>
+          </a:lnRef>
+          <a:fillRef idx="3">
+            <a:schemeClr val="accent1"/>
+          </a:fillRef>
+          <a:effectRef idx="2">
+            <a:schemeClr val="accent1"/>
+          </a:effectRef>
+          <a:fontRef idx="minor">
+            <a:schemeClr val="lt1"/>
+          </a:fontRef>
+        </p:style>
+        <p:txBody>
+          <a:bodyPr rtlCol="0" anchor="ctr"/>
+          <a:lstStyle/>
+          <a:p>
+            <a:pPr algn="ctr"/>
+          </a:p>
+        </p:txBody>
+      </p:sp>
+      <p:sp>
+        <p:nvSpPr>
+          <p:cNvPr id="18" name="TextBox 17"/>
+          <p:cNvSpPr txBox="1"/>
+          <p:nvPr/>
+        </p:nvSpPr>
+        <p:spPr>
+          <a:xfrm>
+            <a:off x="822960" y="4937760"/>
+            <a:ext cx="640080" cy="548640"/>
+          </a:xfrm>
+          <a:prstGeom prst="rect">
+            <a:avLst/>
+          </a:prstGeom>
+          <a:noFill/>
+        </p:spPr>
+        <p:txBody>
+          <a:bodyPr wrap="square">
+            <a:spAutoFit/>
+          </a:bodyPr>
+          <a:lstStyle/>
+          <a:p>
+            <a:pPr algn="ctr"/>
+            <a:r>
+              <a:rPr sz="2200" b="1" i="0">
+                <a:solidFill>
+                  <a:srgbClr val="FFFFFF"/>
+                </a:solidFill>
+                <a:latin typeface="Montserrat"/>
+              </a:rPr>
+              <a:t>C</a:t>
+            </a:r>
+          </a:p>
+        </p:txBody>
+      </p:sp>
+      <p:sp>
+        <p:nvSpPr>
+          <p:cNvPr id="19" name="TextBox 18"/>
+          <p:cNvSpPr txBox="1"/>
+          <p:nvPr/>
+        </p:nvSpPr>
+        <p:spPr>
+          <a:xfrm>
+            <a:off x="1600200" y="4800600"/>
+            <a:ext cx="4114800" cy="868680"/>
+          </a:xfrm>
+          <a:prstGeom prst="rect">
+            <a:avLst/>
+          </a:prstGeom>
+          <a:noFill/>
+        </p:spPr>
+        <p:txBody>
+          <a:bodyPr wrap="square">
+            <a:spAutoFit/>
+          </a:bodyPr>
+          <a:lstStyle/>
+          <a:p>
+            <a:r>
+              <a:rPr sz="1400" b="0" i="0">
+                <a:solidFill>
+                  <a:srgbClr val="1B2330"/>
+                </a:solidFill>
+                <a:latin typeface="Montserrat"/>
+              </a:rPr>
+              <a:t>Porque el gas sale muy frío y hiela la tubería</a:t>
+            </a:r>
+          </a:p>
+        </p:txBody>
+      </p:sp>
+      <p:sp>
+        <p:nvSpPr>
+          <p:cNvPr id="20" name="Rounded Rectangle 19"/>
+          <p:cNvSpPr/>
+          <p:nvPr/>
+        </p:nvSpPr>
+        <p:spPr>
+          <a:xfrm>
+            <a:off x="6355080" y="4617720"/>
+            <a:ext cx="4983480" cy="1143000"/>
+          </a:xfrm>
+          <a:prstGeom prst="roundRect">
+            <a:avLst/>
+          </a:prstGeom>
+          <a:solidFill>
+            <a:srgbClr val="F3F6FB"/>
+          </a:solidFill>
+          <a:ln w="12700">
+            <a:solidFill>
+              <a:srgbClr val="C7D2E6"/>
+            </a:solidFill>
+          </a:ln>
+          <a:effectLst/>
+        </p:spPr>
+        <p:style>
+          <a:lnRef idx="1">
+            <a:schemeClr val="accent1"/>
+          </a:lnRef>
+          <a:fillRef idx="3">
+            <a:schemeClr val="accent1"/>
+          </a:fillRef>
+          <a:effectRef idx="2">
+            <a:schemeClr val="accent1"/>
+          </a:effectRef>
+          <a:fontRef idx="minor">
+            <a:schemeClr val="lt1"/>
+          </a:fontRef>
+        </p:style>
+        <p:txBody>
+          <a:bodyPr rtlCol="0" anchor="ctr"/>
+          <a:lstStyle/>
+          <a:p>
+            <a:pPr algn="ctr"/>
+          </a:p>
+        </p:txBody>
+      </p:sp>
+      <p:sp>
+        <p:nvSpPr>
+          <p:cNvPr id="21" name="Rectangle 20"/>
+          <p:cNvSpPr/>
+          <p:nvPr/>
+        </p:nvSpPr>
+        <p:spPr>
+          <a:xfrm>
+            <a:off x="6355080" y="4617720"/>
+            <a:ext cx="640080" cy="1143000"/>
+          </a:xfrm>
+          <a:prstGeom prst="rect">
+            <a:avLst/>
+          </a:prstGeom>
+          <a:solidFill>
+            <a:srgbClr val="1E2761"/>
+          </a:solidFill>
+          <a:ln>
+            <a:noFill/>
+          </a:ln>
+          <a:effectLst/>
+        </p:spPr>
+        <p:style>
+          <a:lnRef idx="1">
+            <a:schemeClr val="accent1"/>
+          </a:lnRef>
+          <a:fillRef idx="3">
+            <a:schemeClr val="accent1"/>
+          </a:fillRef>
+          <a:effectRef idx="2">
+            <a:schemeClr val="accent1"/>
+          </a:effectRef>
+          <a:fontRef idx="minor">
+            <a:schemeClr val="lt1"/>
+          </a:fontRef>
+        </p:style>
+        <p:txBody>
+          <a:bodyPr rtlCol="0" anchor="ctr"/>
+          <a:lstStyle/>
+          <a:p>
+            <a:pPr algn="ctr"/>
+          </a:p>
+        </p:txBody>
+      </p:sp>
+      <p:sp>
+        <p:nvSpPr>
+          <p:cNvPr id="22" name="TextBox 21"/>
+          <p:cNvSpPr txBox="1"/>
+          <p:nvPr/>
+        </p:nvSpPr>
+        <p:spPr>
+          <a:xfrm>
+            <a:off x="6355080" y="4937760"/>
+            <a:ext cx="640080" cy="548640"/>
+          </a:xfrm>
+          <a:prstGeom prst="rect">
+            <a:avLst/>
+          </a:prstGeom>
+          <a:noFill/>
+        </p:spPr>
+        <p:txBody>
+          <a:bodyPr wrap="square">
+            <a:spAutoFit/>
+          </a:bodyPr>
+          <a:lstStyle/>
+          <a:p>
+            <a:pPr algn="ctr"/>
+            <a:r>
+              <a:rPr sz="2200" b="1" i="0">
+                <a:solidFill>
+                  <a:srgbClr val="FFFFFF"/>
+                </a:solidFill>
+                <a:latin typeface="Montserrat"/>
+              </a:rPr>
+              <a:t>D</a:t>
+            </a:r>
+          </a:p>
+        </p:txBody>
+      </p:sp>
+      <p:sp>
+        <p:nvSpPr>
+          <p:cNvPr id="23" name="TextBox 22"/>
+          <p:cNvSpPr txBox="1"/>
+          <p:nvPr/>
+        </p:nvSpPr>
+        <p:spPr>
+          <a:xfrm>
+            <a:off x="7132320" y="4800600"/>
+            <a:ext cx="4114800" cy="868680"/>
+          </a:xfrm>
+          <a:prstGeom prst="rect">
+            <a:avLst/>
+          </a:prstGeom>
+          <a:noFill/>
+        </p:spPr>
+        <p:txBody>
+          <a:bodyPr wrap="square">
+            <a:spAutoFit/>
+          </a:bodyPr>
+          <a:lstStyle/>
+          <a:p>
+            <a:r>
+              <a:rPr sz="1400" b="0" i="0">
+                <a:solidFill>
+                  <a:srgbClr val="1B2330"/>
+                </a:solidFill>
+                <a:latin typeface="Montserrat"/>
+              </a:rPr>
+              <a:t>Porque hay que desmontar el contador</a:t>
             </a:r>
           </a:p>
         </p:txBody>
@@ -6484,6 +8770,1734 @@
   <p:clrMapOvr>
     <a:masterClrMapping/>
   </p:clrMapOvr>
+  <mc:AlternateContent xmlns:mc="http://schemas.openxmlformats.org/markup-compatibility/2006">
+    <mc:Choice xmlns:p14="http://schemas.microsoft.com/office/powerpoint/2010/main" Requires="p14">
+      <p:transition spd="med" p14:dur="700">
+        <p14:cube dir="l"/>
+      </p:transition>
+    </mc:Choice>
+    <mc:Fallback>
+      <p:transition spd="med">
+        <p:push dir="l"/>
+      </p:transition>
+    </mc:Fallback>
+  </mc:AlternateContent>
+</p:sld>
+</file>
+
+<file path=ppt/slides/slide16.xml><?xml version="1.0" encoding="utf-8"?>
+<p:sld xmlns:a="http://schemas.openxmlformats.org/drawingml/2006/main" xmlns:p="http://schemas.openxmlformats.org/presentationml/2006/main" xmlns:r="http://schemas.openxmlformats.org/officeDocument/2006/relationships">
+  <p:cSld>
+    <p:spTree>
+      <p:nvGrpSpPr>
+        <p:cNvPr id="1" name=""/>
+        <p:cNvGrpSpPr/>
+        <p:nvPr/>
+      </p:nvGrpSpPr>
+      <p:grpSpPr/>
+      <p:sp>
+        <p:nvSpPr>
+          <p:cNvPr id="2" name="Rectangle 1"/>
+          <p:cNvSpPr/>
+          <p:nvPr/>
+        </p:nvSpPr>
+        <p:spPr>
+          <a:xfrm>
+            <a:off x="0" y="0"/>
+            <a:ext cx="12191695" cy="6858000"/>
+          </a:xfrm>
+          <a:prstGeom prst="rect">
+            <a:avLst/>
+          </a:prstGeom>
+          <a:solidFill>
+            <a:srgbClr val="FFFFFF"/>
+          </a:solidFill>
+          <a:ln>
+            <a:noFill/>
+          </a:ln>
+          <a:effectLst/>
+        </p:spPr>
+        <p:style>
+          <a:lnRef idx="1">
+            <a:schemeClr val="accent1"/>
+          </a:lnRef>
+          <a:fillRef idx="3">
+            <a:schemeClr val="accent1"/>
+          </a:fillRef>
+          <a:effectRef idx="2">
+            <a:schemeClr val="accent1"/>
+          </a:effectRef>
+          <a:fontRef idx="minor">
+            <a:schemeClr val="lt1"/>
+          </a:fontRef>
+        </p:style>
+        <p:txBody>
+          <a:bodyPr rtlCol="0" anchor="ctr"/>
+          <a:lstStyle/>
+          <a:p>
+            <a:pPr algn="ctr"/>
+          </a:p>
+        </p:txBody>
+      </p:sp>
+      <p:sp>
+        <p:nvSpPr>
+          <p:cNvPr id="3" name="TextBox 2"/>
+          <p:cNvSpPr txBox="1"/>
+          <p:nvPr/>
+        </p:nvSpPr>
+        <p:spPr>
+          <a:xfrm>
+            <a:off x="10607040" y="320040"/>
+            <a:ext cx="1371600" cy="365760"/>
+          </a:xfrm>
+          <a:prstGeom prst="rect">
+            <a:avLst/>
+          </a:prstGeom>
+          <a:noFill/>
+        </p:spPr>
+        <p:txBody>
+          <a:bodyPr wrap="square">
+            <a:spAutoFit/>
+          </a:bodyPr>
+          <a:lstStyle/>
+          <a:p>
+            <a:pPr algn="r"/>
+            <a:r>
+              <a:rPr sz="1000" b="1" i="0">
+                <a:solidFill>
+                  <a:srgbClr val="64748B"/>
+                </a:solidFill>
+                <a:latin typeface="Montserrat"/>
+              </a:rPr>
+              <a:t>016 / 019</a:t>
+            </a:r>
+          </a:p>
+        </p:txBody>
+      </p:sp>
+      <p:sp>
+        <p:nvSpPr>
+          <p:cNvPr id="4" name="TextBox 3"/>
+          <p:cNvSpPr txBox="1"/>
+          <p:nvPr/>
+        </p:nvSpPr>
+        <p:spPr>
+          <a:xfrm>
+            <a:off x="457200" y="6419088"/>
+            <a:ext cx="8229600" cy="365760"/>
+          </a:xfrm>
+          <a:prstGeom prst="rect">
+            <a:avLst/>
+          </a:prstGeom>
+          <a:noFill/>
+        </p:spPr>
+        <p:txBody>
+          <a:bodyPr wrap="square">
+            <a:spAutoFit/>
+          </a:bodyPr>
+          <a:lstStyle/>
+          <a:p>
+            <a:r>
+              <a:rPr sz="900" b="0" i="0">
+                <a:solidFill>
+                  <a:srgbClr val="64748B"/>
+                </a:solidFill>
+                <a:latin typeface="Montserrat"/>
+              </a:rPr>
+              <a:t>Curso Gas B · Tema 15 · UNE 60670-9 · Pruebas previas y puesta en servicio</a:t>
+            </a:r>
+          </a:p>
+        </p:txBody>
+      </p:sp>
+      <p:sp>
+        <p:nvSpPr>
+          <p:cNvPr id="5" name="Rectangle 4"/>
+          <p:cNvSpPr/>
+          <p:nvPr/>
+        </p:nvSpPr>
+        <p:spPr>
+          <a:xfrm>
+            <a:off x="0" y="0"/>
+            <a:ext cx="12191695" cy="1143000"/>
+          </a:xfrm>
+          <a:prstGeom prst="rect">
+            <a:avLst/>
+          </a:prstGeom>
+          <a:solidFill>
+            <a:srgbClr val="1E8E4B"/>
+          </a:solidFill>
+          <a:ln>
+            <a:noFill/>
+          </a:ln>
+          <a:effectLst/>
+        </p:spPr>
+        <p:style>
+          <a:lnRef idx="1">
+            <a:schemeClr val="accent1"/>
+          </a:lnRef>
+          <a:fillRef idx="3">
+            <a:schemeClr val="accent1"/>
+          </a:fillRef>
+          <a:effectRef idx="2">
+            <a:schemeClr val="accent1"/>
+          </a:effectRef>
+          <a:fontRef idx="minor">
+            <a:schemeClr val="lt1"/>
+          </a:fontRef>
+        </p:style>
+        <p:txBody>
+          <a:bodyPr rtlCol="0" anchor="ctr"/>
+          <a:lstStyle/>
+          <a:p>
+            <a:pPr algn="ctr"/>
+          </a:p>
+        </p:txBody>
+      </p:sp>
+      <p:sp>
+        <p:nvSpPr>
+          <p:cNvPr id="6" name="TextBox 5"/>
+          <p:cNvSpPr txBox="1"/>
+          <p:nvPr/>
+        </p:nvSpPr>
+        <p:spPr>
+          <a:xfrm>
+            <a:off x="822960" y="274320"/>
+            <a:ext cx="10515600" cy="640080"/>
+          </a:xfrm>
+          <a:prstGeom prst="rect">
+            <a:avLst/>
+          </a:prstGeom>
+          <a:noFill/>
+        </p:spPr>
+        <p:txBody>
+          <a:bodyPr wrap="square">
+            <a:spAutoFit/>
+          </a:bodyPr>
+          <a:lstStyle/>
+          <a:p>
+            <a:r>
+              <a:rPr sz="2400" b="1" i="0">
+                <a:solidFill>
+                  <a:srgbClr val="FFFFFF"/>
+                </a:solidFill>
+                <a:latin typeface="Montserrat"/>
+              </a:rPr>
+              <a:t>✔  RESPUESTA:  B</a:t>
+            </a:r>
+          </a:p>
+        </p:txBody>
+      </p:sp>
+      <p:sp>
+        <p:nvSpPr>
+          <p:cNvPr id="7" name="TextBox 6"/>
+          <p:cNvSpPr txBox="1"/>
+          <p:nvPr/>
+        </p:nvSpPr>
+        <p:spPr>
+          <a:xfrm>
+            <a:off x="822960" y="1417320"/>
+            <a:ext cx="10515600" cy="914400"/>
+          </a:xfrm>
+          <a:prstGeom prst="rect">
+            <a:avLst/>
+          </a:prstGeom>
+          <a:noFill/>
+        </p:spPr>
+        <p:txBody>
+          <a:bodyPr wrap="square">
+            <a:spAutoFit/>
+          </a:bodyPr>
+          <a:lstStyle/>
+          <a:p>
+            <a:r>
+              <a:rPr sz="1800" b="1" i="0">
+                <a:solidFill>
+                  <a:srgbClr val="64748B"/>
+                </a:solidFill>
+                <a:latin typeface="Montserrat"/>
+              </a:rPr>
+              <a:t>¿Por qué es el purgado el momento más peligroso de la puesta en servicio?</a:t>
+            </a:r>
+          </a:p>
+        </p:txBody>
+      </p:sp>
+      <p:sp>
+        <p:nvSpPr>
+          <p:cNvPr id="8" name="Rounded Rectangle 7"/>
+          <p:cNvSpPr/>
+          <p:nvPr/>
+        </p:nvSpPr>
+        <p:spPr>
+          <a:xfrm>
+            <a:off x="822960" y="2514600"/>
+            <a:ext cx="10515600" cy="914400"/>
+          </a:xfrm>
+          <a:prstGeom prst="roundRect">
+            <a:avLst/>
+          </a:prstGeom>
+          <a:solidFill>
+            <a:srgbClr val="E9F6EE"/>
+          </a:solidFill>
+          <a:ln w="12700">
+            <a:solidFill>
+              <a:srgbClr val="1E8E4B"/>
+            </a:solidFill>
+          </a:ln>
+          <a:effectLst/>
+        </p:spPr>
+        <p:style>
+          <a:lnRef idx="1">
+            <a:schemeClr val="accent1"/>
+          </a:lnRef>
+          <a:fillRef idx="3">
+            <a:schemeClr val="accent1"/>
+          </a:fillRef>
+          <a:effectRef idx="2">
+            <a:schemeClr val="accent1"/>
+          </a:effectRef>
+          <a:fontRef idx="minor">
+            <a:schemeClr val="lt1"/>
+          </a:fontRef>
+        </p:style>
+        <p:txBody>
+          <a:bodyPr rtlCol="0" anchor="ctr"/>
+          <a:lstStyle/>
+          <a:p>
+            <a:pPr algn="ctr"/>
+          </a:p>
+        </p:txBody>
+      </p:sp>
+      <p:sp>
+        <p:nvSpPr>
+          <p:cNvPr id="9" name="TextBox 8"/>
+          <p:cNvSpPr txBox="1"/>
+          <p:nvPr/>
+        </p:nvSpPr>
+        <p:spPr>
+          <a:xfrm>
+            <a:off x="1097280" y="2697480"/>
+            <a:ext cx="10058400" cy="640080"/>
+          </a:xfrm>
+          <a:prstGeom prst="rect">
+            <a:avLst/>
+          </a:prstGeom>
+          <a:noFill/>
+        </p:spPr>
+        <p:txBody>
+          <a:bodyPr wrap="square">
+            <a:spAutoFit/>
+          </a:bodyPr>
+          <a:lstStyle/>
+          <a:p>
+            <a:r>
+              <a:rPr sz="1800" b="1" i="0">
+                <a:solidFill>
+                  <a:srgbClr val="1E8E4B"/>
+                </a:solidFill>
+                <a:latin typeface="Montserrat"/>
+              </a:rPr>
+              <a:t>B.  </a:t>
+            </a:r>
+            <a:r>
+              <a:rPr sz="1800" b="1" i="0">
+                <a:solidFill>
+                  <a:srgbClr val="1E2761"/>
+                </a:solidFill>
+                <a:latin typeface="Montserrat"/>
+              </a:rPr>
+              <a:t>Porque puede formarse una mezcla aire-gas explosiva</a:t>
+            </a:r>
+          </a:p>
+        </p:txBody>
+      </p:sp>
+      <p:sp>
+        <p:nvSpPr>
+          <p:cNvPr id="10" name="TextBox 9"/>
+          <p:cNvSpPr txBox="1"/>
+          <p:nvPr/>
+        </p:nvSpPr>
+        <p:spPr>
+          <a:xfrm>
+            <a:off x="822960" y="3749039"/>
+            <a:ext cx="10515600" cy="2194560"/>
+          </a:xfrm>
+          <a:prstGeom prst="rect">
+            <a:avLst/>
+          </a:prstGeom>
+          <a:noFill/>
+        </p:spPr>
+        <p:txBody>
+          <a:bodyPr wrap="square">
+            <a:spAutoFit/>
+          </a:bodyPr>
+          <a:lstStyle/>
+          <a:p>
+            <a:r>
+              <a:rPr sz="1500" b="1" i="0">
+                <a:solidFill>
+                  <a:srgbClr val="E8801A"/>
+                </a:solidFill>
+                <a:latin typeface="Montserrat"/>
+              </a:rPr>
+              <a:t>Por qué:  </a:t>
+            </a:r>
+            <a:r>
+              <a:rPr sz="1500" b="0" i="0">
+                <a:solidFill>
+                  <a:srgbClr val="1B2330"/>
+                </a:solidFill>
+                <a:latin typeface="Montserrat"/>
+              </a:rPr>
+              <a:t>Al expulsar el aire con gas, en el punto intermedio conviven aire y gas y esa mezcla, en cierta proporción, es explosiva.</a:t>
+            </a:r>
+          </a:p>
+        </p:txBody>
+      </p:sp>
+    </p:spTree>
+  </p:cSld>
+  <p:clrMapOvr>
+    <a:masterClrMapping/>
+  </p:clrMapOvr>
+  <mc:AlternateContent xmlns:mc="http://schemas.openxmlformats.org/markup-compatibility/2006">
+    <mc:Choice xmlns:p14="http://schemas.microsoft.com/office/powerpoint/2010/main" Requires="p14">
+      <p:transition spd="med" p14:dur="700">
+        <p14:cube dir="r"/>
+      </p:transition>
+    </mc:Choice>
+    <mc:Fallback>
+      <p:transition spd="med">
+        <p:push dir="r"/>
+      </p:transition>
+    </mc:Fallback>
+  </mc:AlternateContent>
+</p:sld>
+</file>
+
+<file path=ppt/slides/slide17.xml><?xml version="1.0" encoding="utf-8"?>
+<p:sld xmlns:a="http://schemas.openxmlformats.org/drawingml/2006/main" xmlns:p="http://schemas.openxmlformats.org/presentationml/2006/main" xmlns:r="http://schemas.openxmlformats.org/officeDocument/2006/relationships">
+  <p:cSld>
+    <p:spTree>
+      <p:nvGrpSpPr>
+        <p:cNvPr id="1" name=""/>
+        <p:cNvGrpSpPr/>
+        <p:nvPr/>
+      </p:nvGrpSpPr>
+      <p:grpSpPr/>
+      <p:sp>
+        <p:nvSpPr>
+          <p:cNvPr id="2" name="Rectangle 1"/>
+          <p:cNvSpPr/>
+          <p:nvPr/>
+        </p:nvSpPr>
+        <p:spPr>
+          <a:xfrm>
+            <a:off x="0" y="0"/>
+            <a:ext cx="12191695" cy="6858000"/>
+          </a:xfrm>
+          <a:prstGeom prst="rect">
+            <a:avLst/>
+          </a:prstGeom>
+          <a:solidFill>
+            <a:srgbClr val="FFFFFF"/>
+          </a:solidFill>
+          <a:ln>
+            <a:noFill/>
+          </a:ln>
+          <a:effectLst/>
+        </p:spPr>
+        <p:style>
+          <a:lnRef idx="1">
+            <a:schemeClr val="accent1"/>
+          </a:lnRef>
+          <a:fillRef idx="3">
+            <a:schemeClr val="accent1"/>
+          </a:fillRef>
+          <a:effectRef idx="2">
+            <a:schemeClr val="accent1"/>
+          </a:effectRef>
+          <a:fontRef idx="minor">
+            <a:schemeClr val="lt1"/>
+          </a:fontRef>
+        </p:style>
+        <p:txBody>
+          <a:bodyPr rtlCol="0" anchor="ctr"/>
+          <a:lstStyle/>
+          <a:p>
+            <a:pPr algn="ctr"/>
+          </a:p>
+        </p:txBody>
+      </p:sp>
+      <p:sp>
+        <p:nvSpPr>
+          <p:cNvPr id="3" name="TextBox 2"/>
+          <p:cNvSpPr txBox="1"/>
+          <p:nvPr/>
+        </p:nvSpPr>
+        <p:spPr>
+          <a:xfrm>
+            <a:off x="10607040" y="320040"/>
+            <a:ext cx="1371600" cy="365760"/>
+          </a:xfrm>
+          <a:prstGeom prst="rect">
+            <a:avLst/>
+          </a:prstGeom>
+          <a:noFill/>
+        </p:spPr>
+        <p:txBody>
+          <a:bodyPr wrap="square">
+            <a:spAutoFit/>
+          </a:bodyPr>
+          <a:lstStyle/>
+          <a:p>
+            <a:pPr algn="r"/>
+            <a:r>
+              <a:rPr sz="1000" b="1" i="0">
+                <a:solidFill>
+                  <a:srgbClr val="64748B"/>
+                </a:solidFill>
+                <a:latin typeface="Montserrat"/>
+              </a:rPr>
+              <a:t>017 / 019</a:t>
+            </a:r>
+          </a:p>
+        </p:txBody>
+      </p:sp>
+      <p:sp>
+        <p:nvSpPr>
+          <p:cNvPr id="4" name="TextBox 3"/>
+          <p:cNvSpPr txBox="1"/>
+          <p:nvPr/>
+        </p:nvSpPr>
+        <p:spPr>
+          <a:xfrm>
+            <a:off x="457200" y="6419088"/>
+            <a:ext cx="8229600" cy="365760"/>
+          </a:xfrm>
+          <a:prstGeom prst="rect">
+            <a:avLst/>
+          </a:prstGeom>
+          <a:noFill/>
+        </p:spPr>
+        <p:txBody>
+          <a:bodyPr wrap="square">
+            <a:spAutoFit/>
+          </a:bodyPr>
+          <a:lstStyle/>
+          <a:p>
+            <a:r>
+              <a:rPr sz="900" b="0" i="0">
+                <a:solidFill>
+                  <a:srgbClr val="64748B"/>
+                </a:solidFill>
+                <a:latin typeface="Montserrat"/>
+              </a:rPr>
+              <a:t>Curso Gas B · Tema 15 · UNE 60670-9 · Pruebas previas y puesta en servicio</a:t>
+            </a:r>
+          </a:p>
+        </p:txBody>
+      </p:sp>
+      <p:sp>
+        <p:nvSpPr>
+          <p:cNvPr id="5" name="TextBox 4"/>
+          <p:cNvSpPr txBox="1"/>
+          <p:nvPr/>
+        </p:nvSpPr>
+        <p:spPr>
+          <a:xfrm>
+            <a:off x="822960" y="457200"/>
+            <a:ext cx="10058400" cy="365760"/>
+          </a:xfrm>
+          <a:prstGeom prst="rect">
+            <a:avLst/>
+          </a:prstGeom>
+          <a:noFill/>
+        </p:spPr>
+        <p:txBody>
+          <a:bodyPr wrap="square">
+            <a:spAutoFit/>
+          </a:bodyPr>
+          <a:lstStyle/>
+          <a:p>
+            <a:r>
+              <a:rPr sz="1300" b="1" i="0">
+                <a:solidFill>
+                  <a:srgbClr val="E8801A"/>
+                </a:solidFill>
+                <a:latin typeface="Montserrat"/>
+              </a:rPr>
+              <a:t>PUESTA EN SERVICIO</a:t>
+            </a:r>
+          </a:p>
+        </p:txBody>
+      </p:sp>
+      <p:sp>
+        <p:nvSpPr>
+          <p:cNvPr id="6" name="TextBox 5"/>
+          <p:cNvSpPr txBox="1"/>
+          <p:nvPr/>
+        </p:nvSpPr>
+        <p:spPr>
+          <a:xfrm>
+            <a:off x="822960" y="868680"/>
+            <a:ext cx="10515600" cy="914400"/>
+          </a:xfrm>
+          <a:prstGeom prst="rect">
+            <a:avLst/>
+          </a:prstGeom>
+          <a:noFill/>
+        </p:spPr>
+        <p:txBody>
+          <a:bodyPr wrap="square">
+            <a:spAutoFit/>
+          </a:bodyPr>
+          <a:lstStyle/>
+          <a:p>
+            <a:r>
+              <a:rPr sz="2800" b="1" i="0">
+                <a:solidFill>
+                  <a:srgbClr val="1E2761"/>
+                </a:solidFill>
+                <a:latin typeface="Montserrat"/>
+              </a:rPr>
+              <a:t>Verificar y certificar</a:t>
+            </a:r>
+          </a:p>
+        </p:txBody>
+      </p:sp>
+      <p:sp>
+        <p:nvSpPr>
+          <p:cNvPr id="7" name="Rectangle 6"/>
+          <p:cNvSpPr/>
+          <p:nvPr/>
+        </p:nvSpPr>
+        <p:spPr>
+          <a:xfrm>
+            <a:off x="868680" y="1627632"/>
+            <a:ext cx="2011680" cy="73152"/>
+          </a:xfrm>
+          <a:prstGeom prst="rect">
+            <a:avLst/>
+          </a:prstGeom>
+          <a:solidFill>
+            <a:srgbClr val="E8801A"/>
+          </a:solidFill>
+          <a:ln>
+            <a:noFill/>
+          </a:ln>
+          <a:effectLst/>
+        </p:spPr>
+        <p:style>
+          <a:lnRef idx="1">
+            <a:schemeClr val="accent1"/>
+          </a:lnRef>
+          <a:fillRef idx="3">
+            <a:schemeClr val="accent1"/>
+          </a:fillRef>
+          <a:effectRef idx="2">
+            <a:schemeClr val="accent1"/>
+          </a:effectRef>
+          <a:fontRef idx="minor">
+            <a:schemeClr val="lt1"/>
+          </a:fontRef>
+        </p:style>
+        <p:txBody>
+          <a:bodyPr rtlCol="0" anchor="ctr"/>
+          <a:lstStyle/>
+          <a:p>
+            <a:pPr algn="ctr"/>
+          </a:p>
+        </p:txBody>
+      </p:sp>
+      <p:sp>
+        <p:nvSpPr>
+          <p:cNvPr id="8" name="TextBox 7"/>
+          <p:cNvSpPr txBox="1"/>
+          <p:nvPr/>
+        </p:nvSpPr>
+        <p:spPr>
+          <a:xfrm>
+            <a:off x="6355080" y="1965960"/>
+            <a:ext cx="5029200" cy="4206240"/>
+          </a:xfrm>
+          <a:prstGeom prst="rect">
+            <a:avLst/>
+          </a:prstGeom>
+          <a:noFill/>
+        </p:spPr>
+        <p:txBody>
+          <a:bodyPr wrap="square">
+            <a:spAutoFit/>
+          </a:bodyPr>
+          <a:lstStyle/>
+          <a:p>
+            <a:pPr>
+              <a:spcAft>
+                <a:spcPts val="1100"/>
+              </a:spcAft>
+            </a:pPr>
+            <a:r>
+              <a:rPr sz="1600" b="1" i="0">
+                <a:solidFill>
+                  <a:srgbClr val="E8801A"/>
+                </a:solidFill>
+                <a:latin typeface="Montserrat"/>
+              </a:rPr>
+              <a:t>▸  </a:t>
+            </a:r>
+            <a:r>
+              <a:rPr sz="1600" b="0" i="0">
+                <a:solidFill>
+                  <a:srgbClr val="1B2330"/>
+                </a:solidFill>
+                <a:latin typeface="Montserrat"/>
+              </a:rPr>
+              <a:t>Estanquidad final con gas, a presión de operación</a:t>
+            </a:r>
+          </a:p>
+          <a:p>
+            <a:pPr>
+              <a:spcAft>
+                <a:spcPts val="1100"/>
+              </a:spcAft>
+            </a:pPr>
+            <a:r>
+              <a:rPr sz="1600" b="1" i="0">
+                <a:solidFill>
+                  <a:srgbClr val="E8801A"/>
+                </a:solidFill>
+                <a:latin typeface="Montserrat"/>
+              </a:rPr>
+              <a:t>▸  </a:t>
+            </a:r>
+            <a:r>
+              <a:rPr sz="1600" b="0" i="0">
+                <a:solidFill>
+                  <a:srgbClr val="1B2330"/>
+                </a:solidFill>
+                <a:latin typeface="Montserrat"/>
+              </a:rPr>
+              <a:t>Si todo va bien, dejar en servicio</a:t>
+            </a:r>
+          </a:p>
+          <a:p>
+            <a:pPr>
+              <a:spcAft>
+                <a:spcPts val="1100"/>
+              </a:spcAft>
+            </a:pPr>
+            <a:r>
+              <a:rPr sz="1600" b="1" i="0">
+                <a:solidFill>
+                  <a:srgbClr val="E8801A"/>
+                </a:solidFill>
+                <a:latin typeface="Montserrat"/>
+              </a:rPr>
+              <a:t>▸  </a:t>
+            </a:r>
+            <a:r>
+              <a:rPr sz="1600" b="0" i="0">
+                <a:solidFill>
+                  <a:srgbClr val="1B2330"/>
+                </a:solidFill>
+                <a:latin typeface="Montserrat"/>
+              </a:rPr>
+              <a:t>Certificado de pruebas previas y puesta en servicio</a:t>
+            </a:r>
+          </a:p>
+          <a:p>
+            <a:pPr>
+              <a:spcAft>
+                <a:spcPts val="1100"/>
+              </a:spcAft>
+            </a:pPr>
+            <a:r>
+              <a:rPr sz="1600" b="1" i="0">
+                <a:solidFill>
+                  <a:srgbClr val="E8801A"/>
+                </a:solidFill>
+                <a:latin typeface="Montserrat"/>
+              </a:rPr>
+              <a:t>▸  </a:t>
+            </a:r>
+            <a:r>
+              <a:rPr sz="1600" b="0" i="0">
+                <a:solidFill>
+                  <a:srgbClr val="1B2330"/>
+                </a:solidFill>
+                <a:latin typeface="Montserrat"/>
+              </a:rPr>
+              <a:t>Entregar copia al titular o usuario</a:t>
+            </a:r>
+          </a:p>
+        </p:txBody>
+      </p:sp>
+      <p:sp>
+        <p:nvSpPr>
+          <p:cNvPr id="9" name="imgph" descr="IMGQ:signing installation certificate document"/>
+          <p:cNvSpPr/>
+          <p:nvPr/>
+        </p:nvSpPr>
+        <p:spPr>
+          <a:xfrm>
+            <a:off x="822960" y="1965960"/>
+            <a:ext cx="5303520" cy="4572000"/>
+          </a:xfrm>
+          <a:prstGeom prst="roundRect">
+            <a:avLst/>
+          </a:prstGeom>
+          <a:solidFill>
+            <a:srgbClr val="F3F6FB"/>
+          </a:solidFill>
+          <a:ln w="12700">
+            <a:solidFill>
+              <a:srgbClr val="C7D2E6"/>
+            </a:solidFill>
+          </a:ln>
+          <a:effectLst/>
+        </p:spPr>
+        <p:style>
+          <a:lnRef idx="1">
+            <a:schemeClr val="accent1"/>
+          </a:lnRef>
+          <a:fillRef idx="3">
+            <a:schemeClr val="accent1"/>
+          </a:fillRef>
+          <a:effectRef idx="2">
+            <a:schemeClr val="accent1"/>
+          </a:effectRef>
+          <a:fontRef idx="minor">
+            <a:schemeClr val="lt1"/>
+          </a:fontRef>
+        </p:style>
+        <p:txBody>
+          <a:bodyPr rtlCol="0" anchor="ctr"/>
+          <a:lstStyle/>
+          <a:p>
+            <a:pPr algn="ctr"/>
+          </a:p>
+        </p:txBody>
+      </p:sp>
+      <p:sp>
+        <p:nvSpPr>
+          <p:cNvPr id="10" name="TextBox 9"/>
+          <p:cNvSpPr txBox="1"/>
+          <p:nvPr/>
+        </p:nvSpPr>
+        <p:spPr>
+          <a:xfrm>
+            <a:off x="1097280" y="3611880"/>
+            <a:ext cx="4754880" cy="1280160"/>
+          </a:xfrm>
+          <a:prstGeom prst="rect">
+            <a:avLst/>
+          </a:prstGeom>
+          <a:noFill/>
+        </p:spPr>
+        <p:txBody>
+          <a:bodyPr wrap="square">
+            <a:spAutoFit/>
+          </a:bodyPr>
+          <a:lstStyle/>
+          <a:p>
+            <a:pPr algn="ctr"/>
+            <a:r>
+              <a:rPr sz="1400" b="1" i="0">
+                <a:solidFill>
+                  <a:srgbClr val="64748B"/>
+                </a:solidFill>
+                <a:latin typeface="Montserrat"/>
+              </a:rPr>
+              <a:t>IMAGEN</a:t>
+            </a:r>
+          </a:p>
+          <a:p>
+            <a:pPr algn="ctr"/>
+            <a:r>
+              <a:rPr sz="1100" b="0" i="1">
+                <a:solidFill>
+                  <a:srgbClr val="64748B"/>
+                </a:solidFill>
+                <a:latin typeface="Montserrat"/>
+              </a:rPr>
+              <a:t>signing installation certificate document</a:t>
+            </a:r>
+          </a:p>
+        </p:txBody>
+      </p:sp>
+    </p:spTree>
+  </p:cSld>
+  <p:clrMapOvr>
+    <a:masterClrMapping/>
+  </p:clrMapOvr>
+  <mc:AlternateContent xmlns:mc="http://schemas.openxmlformats.org/markup-compatibility/2006">
+    <mc:Choice xmlns:p14="http://schemas.microsoft.com/office/powerpoint/2010/main" Requires="p14">
+      <p:transition spd="med" p14:dur="700">
+        <p14:cube dir="l"/>
+      </p:transition>
+    </mc:Choice>
+    <mc:Fallback>
+      <p:transition spd="med">
+        <p:push dir="l"/>
+      </p:transition>
+    </mc:Fallback>
+  </mc:AlternateContent>
+</p:sld>
+</file>
+
+<file path=ppt/slides/slide18.xml><?xml version="1.0" encoding="utf-8"?>
+<p:sld xmlns:a="http://schemas.openxmlformats.org/drawingml/2006/main" xmlns:p="http://schemas.openxmlformats.org/presentationml/2006/main" xmlns:r="http://schemas.openxmlformats.org/officeDocument/2006/relationships">
+  <p:cSld>
+    <p:spTree>
+      <p:nvGrpSpPr>
+        <p:cNvPr id="1" name=""/>
+        <p:cNvGrpSpPr/>
+        <p:nvPr/>
+      </p:nvGrpSpPr>
+      <p:grpSpPr/>
+      <p:sp>
+        <p:nvSpPr>
+          <p:cNvPr id="2" name="Rectangle 1"/>
+          <p:cNvSpPr/>
+          <p:nvPr/>
+        </p:nvSpPr>
+        <p:spPr>
+          <a:xfrm>
+            <a:off x="0" y="0"/>
+            <a:ext cx="12191695" cy="6858000"/>
+          </a:xfrm>
+          <a:prstGeom prst="rect">
+            <a:avLst/>
+          </a:prstGeom>
+          <a:solidFill>
+            <a:srgbClr val="FFFFFF"/>
+          </a:solidFill>
+          <a:ln>
+            <a:noFill/>
+          </a:ln>
+          <a:effectLst/>
+        </p:spPr>
+        <p:style>
+          <a:lnRef idx="1">
+            <a:schemeClr val="accent1"/>
+          </a:lnRef>
+          <a:fillRef idx="3">
+            <a:schemeClr val="accent1"/>
+          </a:fillRef>
+          <a:effectRef idx="2">
+            <a:schemeClr val="accent1"/>
+          </a:effectRef>
+          <a:fontRef idx="minor">
+            <a:schemeClr val="lt1"/>
+          </a:fontRef>
+        </p:style>
+        <p:txBody>
+          <a:bodyPr rtlCol="0" anchor="ctr"/>
+          <a:lstStyle/>
+          <a:p>
+            <a:pPr algn="ctr"/>
+          </a:p>
+        </p:txBody>
+      </p:sp>
+      <p:sp>
+        <p:nvSpPr>
+          <p:cNvPr id="3" name="TextBox 2"/>
+          <p:cNvSpPr txBox="1"/>
+          <p:nvPr/>
+        </p:nvSpPr>
+        <p:spPr>
+          <a:xfrm>
+            <a:off x="10607040" y="320040"/>
+            <a:ext cx="1371600" cy="365760"/>
+          </a:xfrm>
+          <a:prstGeom prst="rect">
+            <a:avLst/>
+          </a:prstGeom>
+          <a:noFill/>
+        </p:spPr>
+        <p:txBody>
+          <a:bodyPr wrap="square">
+            <a:spAutoFit/>
+          </a:bodyPr>
+          <a:lstStyle/>
+          <a:p>
+            <a:pPr algn="r"/>
+            <a:r>
+              <a:rPr sz="1000" b="1" i="0">
+                <a:solidFill>
+                  <a:srgbClr val="64748B"/>
+                </a:solidFill>
+                <a:latin typeface="Montserrat"/>
+              </a:rPr>
+              <a:t>018 / 019</a:t>
+            </a:r>
+          </a:p>
+        </p:txBody>
+      </p:sp>
+      <p:sp>
+        <p:nvSpPr>
+          <p:cNvPr id="4" name="TextBox 3"/>
+          <p:cNvSpPr txBox="1"/>
+          <p:nvPr/>
+        </p:nvSpPr>
+        <p:spPr>
+          <a:xfrm>
+            <a:off x="457200" y="6419088"/>
+            <a:ext cx="8229600" cy="365760"/>
+          </a:xfrm>
+          <a:prstGeom prst="rect">
+            <a:avLst/>
+          </a:prstGeom>
+          <a:noFill/>
+        </p:spPr>
+        <p:txBody>
+          <a:bodyPr wrap="square">
+            <a:spAutoFit/>
+          </a:bodyPr>
+          <a:lstStyle/>
+          <a:p>
+            <a:r>
+              <a:rPr sz="900" b="0" i="0">
+                <a:solidFill>
+                  <a:srgbClr val="64748B"/>
+                </a:solidFill>
+                <a:latin typeface="Montserrat"/>
+              </a:rPr>
+              <a:t>Curso Gas B · Tema 15 · UNE 60670-9 · Pruebas previas y puesta en servicio</a:t>
+            </a:r>
+          </a:p>
+        </p:txBody>
+      </p:sp>
+      <p:sp>
+        <p:nvSpPr>
+          <p:cNvPr id="5" name="TextBox 4"/>
+          <p:cNvSpPr txBox="1"/>
+          <p:nvPr/>
+        </p:nvSpPr>
+        <p:spPr>
+          <a:xfrm>
+            <a:off x="822960" y="457200"/>
+            <a:ext cx="10058400" cy="365760"/>
+          </a:xfrm>
+          <a:prstGeom prst="rect">
+            <a:avLst/>
+          </a:prstGeom>
+          <a:noFill/>
+        </p:spPr>
+        <p:txBody>
+          <a:bodyPr wrap="square">
+            <a:spAutoFit/>
+          </a:bodyPr>
+          <a:lstStyle/>
+          <a:p>
+            <a:r>
+              <a:rPr sz="1300" b="1" i="0">
+                <a:solidFill>
+                  <a:srgbClr val="E8801A"/>
+                </a:solidFill>
+                <a:latin typeface="Montserrat"/>
+              </a:rPr>
+              <a:t>CASO ESPECIAL</a:t>
+            </a:r>
+          </a:p>
+        </p:txBody>
+      </p:sp>
+      <p:sp>
+        <p:nvSpPr>
+          <p:cNvPr id="6" name="TextBox 5"/>
+          <p:cNvSpPr txBox="1"/>
+          <p:nvPr/>
+        </p:nvSpPr>
+        <p:spPr>
+          <a:xfrm>
+            <a:off x="822960" y="868680"/>
+            <a:ext cx="10515600" cy="914400"/>
+          </a:xfrm>
+          <a:prstGeom prst="rect">
+            <a:avLst/>
+          </a:prstGeom>
+          <a:noFill/>
+        </p:spPr>
+        <p:txBody>
+          <a:bodyPr wrap="square">
+            <a:spAutoFit/>
+          </a:bodyPr>
+          <a:lstStyle/>
+          <a:p>
+            <a:r>
+              <a:rPr sz="2800" b="1" i="0">
+                <a:solidFill>
+                  <a:srgbClr val="1E2761"/>
+                </a:solidFill>
+                <a:latin typeface="Montserrat"/>
+              </a:rPr>
+              <a:t>GLP de depósito: primero llenar</a:t>
+            </a:r>
+          </a:p>
+        </p:txBody>
+      </p:sp>
+      <p:sp>
+        <p:nvSpPr>
+          <p:cNvPr id="7" name="Rectangle 6"/>
+          <p:cNvSpPr/>
+          <p:nvPr/>
+        </p:nvSpPr>
+        <p:spPr>
+          <a:xfrm>
+            <a:off x="868680" y="1627632"/>
+            <a:ext cx="2011680" cy="73152"/>
+          </a:xfrm>
+          <a:prstGeom prst="rect">
+            <a:avLst/>
+          </a:prstGeom>
+          <a:solidFill>
+            <a:srgbClr val="E8801A"/>
+          </a:solidFill>
+          <a:ln>
+            <a:noFill/>
+          </a:ln>
+          <a:effectLst/>
+        </p:spPr>
+        <p:style>
+          <a:lnRef idx="1">
+            <a:schemeClr val="accent1"/>
+          </a:lnRef>
+          <a:fillRef idx="3">
+            <a:schemeClr val="accent1"/>
+          </a:fillRef>
+          <a:effectRef idx="2">
+            <a:schemeClr val="accent1"/>
+          </a:effectRef>
+          <a:fontRef idx="minor">
+            <a:schemeClr val="lt1"/>
+          </a:fontRef>
+        </p:style>
+        <p:txBody>
+          <a:bodyPr rtlCol="0" anchor="ctr"/>
+          <a:lstStyle/>
+          <a:p>
+            <a:pPr algn="ctr"/>
+          </a:p>
+        </p:txBody>
+      </p:sp>
+      <p:sp>
+        <p:nvSpPr>
+          <p:cNvPr id="8" name="TextBox 7"/>
+          <p:cNvSpPr txBox="1"/>
+          <p:nvPr/>
+        </p:nvSpPr>
+        <p:spPr>
+          <a:xfrm>
+            <a:off x="822960" y="1965960"/>
+            <a:ext cx="5029200" cy="4206240"/>
+          </a:xfrm>
+          <a:prstGeom prst="rect">
+            <a:avLst/>
+          </a:prstGeom>
+          <a:noFill/>
+        </p:spPr>
+        <p:txBody>
+          <a:bodyPr wrap="square">
+            <a:spAutoFit/>
+          </a:bodyPr>
+          <a:lstStyle/>
+          <a:p>
+            <a:pPr>
+              <a:spcAft>
+                <a:spcPts val="1100"/>
+              </a:spcAft>
+            </a:pPr>
+            <a:r>
+              <a:rPr sz="1600" b="1" i="0">
+                <a:solidFill>
+                  <a:srgbClr val="E8801A"/>
+                </a:solidFill>
+                <a:latin typeface="Montserrat"/>
+              </a:rPr>
+              <a:t>▸  </a:t>
+            </a:r>
+            <a:r>
+              <a:rPr sz="1600" b="0" i="0">
+                <a:solidFill>
+                  <a:srgbClr val="1B2330"/>
+                </a:solidFill>
+                <a:latin typeface="Montserrat"/>
+              </a:rPr>
+              <a:t>Depósito fijo de GLP en chalé o urbanización</a:t>
+            </a:r>
+          </a:p>
+          <a:p>
+            <a:pPr>
+              <a:spcAft>
+                <a:spcPts val="1100"/>
+              </a:spcAft>
+            </a:pPr>
+            <a:r>
+              <a:rPr sz="1600" b="1" i="0">
+                <a:solidFill>
+                  <a:srgbClr val="E8801A"/>
+                </a:solidFill>
+                <a:latin typeface="Montserrat"/>
+              </a:rPr>
+              <a:t>▸  </a:t>
+            </a:r>
+            <a:r>
+              <a:rPr sz="1600" b="0" i="0">
+                <a:solidFill>
+                  <a:srgbClr val="1B2330"/>
+                </a:solidFill>
+                <a:latin typeface="Montserrat"/>
+              </a:rPr>
+              <a:t>No hay servicio con el depósito vacío</a:t>
+            </a:r>
+          </a:p>
+          <a:p>
+            <a:pPr>
+              <a:spcAft>
+                <a:spcPts val="1100"/>
+              </a:spcAft>
+            </a:pPr>
+            <a:r>
+              <a:rPr sz="1600" b="1" i="0">
+                <a:solidFill>
+                  <a:srgbClr val="E8801A"/>
+                </a:solidFill>
+                <a:latin typeface="Montserrat"/>
+              </a:rPr>
+              <a:t>▸  </a:t>
+            </a:r>
+            <a:r>
+              <a:rPr sz="1600" b="0" i="0">
+                <a:solidFill>
+                  <a:srgbClr val="1B2330"/>
+                </a:solidFill>
+                <a:latin typeface="Montserrat"/>
+              </a:rPr>
+              <a:t>Puesta en servicio tras el primer llenado</a:t>
+            </a:r>
+          </a:p>
+          <a:p>
+            <a:pPr>
+              <a:spcAft>
+                <a:spcPts val="1100"/>
+              </a:spcAft>
+            </a:pPr>
+            <a:r>
+              <a:rPr sz="1600" b="1" i="0">
+                <a:solidFill>
+                  <a:srgbClr val="E8801A"/>
+                </a:solidFill>
+                <a:latin typeface="Montserrat"/>
+              </a:rPr>
+              <a:t>▸  </a:t>
+            </a:r>
+            <a:r>
+              <a:rPr sz="1600" b="0" i="0">
+                <a:solidFill>
+                  <a:srgbClr val="1B2330"/>
+                </a:solidFill>
+                <a:latin typeface="Montserrat"/>
+              </a:rPr>
+              <a:t>Sin producto no hay gas para purgar</a:t>
+            </a:r>
+          </a:p>
+        </p:txBody>
+      </p:sp>
+      <p:sp>
+        <p:nvSpPr>
+          <p:cNvPr id="9" name="imgph" descr="IMGQ:LPG storage tank residential garden"/>
+          <p:cNvSpPr/>
+          <p:nvPr/>
+        </p:nvSpPr>
+        <p:spPr>
+          <a:xfrm>
+            <a:off x="6080760" y="1965960"/>
+            <a:ext cx="5303520" cy="4572000"/>
+          </a:xfrm>
+          <a:prstGeom prst="roundRect">
+            <a:avLst/>
+          </a:prstGeom>
+          <a:solidFill>
+            <a:srgbClr val="F3F6FB"/>
+          </a:solidFill>
+          <a:ln w="12700">
+            <a:solidFill>
+              <a:srgbClr val="C7D2E6"/>
+            </a:solidFill>
+          </a:ln>
+          <a:effectLst/>
+        </p:spPr>
+        <p:style>
+          <a:lnRef idx="1">
+            <a:schemeClr val="accent1"/>
+          </a:lnRef>
+          <a:fillRef idx="3">
+            <a:schemeClr val="accent1"/>
+          </a:fillRef>
+          <a:effectRef idx="2">
+            <a:schemeClr val="accent1"/>
+          </a:effectRef>
+          <a:fontRef idx="minor">
+            <a:schemeClr val="lt1"/>
+          </a:fontRef>
+        </p:style>
+        <p:txBody>
+          <a:bodyPr rtlCol="0" anchor="ctr"/>
+          <a:lstStyle/>
+          <a:p>
+            <a:pPr algn="ctr"/>
+          </a:p>
+        </p:txBody>
+      </p:sp>
+      <p:sp>
+        <p:nvSpPr>
+          <p:cNvPr id="10" name="TextBox 9"/>
+          <p:cNvSpPr txBox="1"/>
+          <p:nvPr/>
+        </p:nvSpPr>
+        <p:spPr>
+          <a:xfrm>
+            <a:off x="6355080" y="3611880"/>
+            <a:ext cx="4754880" cy="1280160"/>
+          </a:xfrm>
+          <a:prstGeom prst="rect">
+            <a:avLst/>
+          </a:prstGeom>
+          <a:noFill/>
+        </p:spPr>
+        <p:txBody>
+          <a:bodyPr wrap="square">
+            <a:spAutoFit/>
+          </a:bodyPr>
+          <a:lstStyle/>
+          <a:p>
+            <a:pPr algn="ctr"/>
+            <a:r>
+              <a:rPr sz="1400" b="1" i="0">
+                <a:solidFill>
+                  <a:srgbClr val="64748B"/>
+                </a:solidFill>
+                <a:latin typeface="Montserrat"/>
+              </a:rPr>
+              <a:t>IMAGEN</a:t>
+            </a:r>
+          </a:p>
+          <a:p>
+            <a:pPr algn="ctr"/>
+            <a:r>
+              <a:rPr sz="1100" b="0" i="1">
+                <a:solidFill>
+                  <a:srgbClr val="64748B"/>
+                </a:solidFill>
+                <a:latin typeface="Montserrat"/>
+              </a:rPr>
+              <a:t>LPG storage tank residential garden</a:t>
+            </a:r>
+          </a:p>
+        </p:txBody>
+      </p:sp>
+    </p:spTree>
+  </p:cSld>
+  <p:clrMapOvr>
+    <a:masterClrMapping/>
+  </p:clrMapOvr>
+  <mc:AlternateContent xmlns:mc="http://schemas.openxmlformats.org/markup-compatibility/2006">
+    <mc:Choice xmlns:p14="http://schemas.microsoft.com/office/powerpoint/2010/main" Requires="p14">
+      <p:transition spd="med" p14:dur="700">
+        <p14:cube dir="r"/>
+      </p:transition>
+    </mc:Choice>
+    <mc:Fallback>
+      <p:transition spd="med">
+        <p:push dir="r"/>
+      </p:transition>
+    </mc:Fallback>
+  </mc:AlternateContent>
+</p:sld>
+</file>
+
+<file path=ppt/slides/slide19.xml><?xml version="1.0" encoding="utf-8"?>
+<p:sld xmlns:a="http://schemas.openxmlformats.org/drawingml/2006/main" xmlns:p="http://schemas.openxmlformats.org/presentationml/2006/main" xmlns:r="http://schemas.openxmlformats.org/officeDocument/2006/relationships">
+  <p:cSld>
+    <p:spTree>
+      <p:nvGrpSpPr>
+        <p:cNvPr id="1" name=""/>
+        <p:cNvGrpSpPr/>
+        <p:nvPr/>
+      </p:nvGrpSpPr>
+      <p:grpSpPr/>
+      <p:sp>
+        <p:nvSpPr>
+          <p:cNvPr id="2" name="Rectangle 1"/>
+          <p:cNvSpPr/>
+          <p:nvPr/>
+        </p:nvSpPr>
+        <p:spPr>
+          <a:xfrm>
+            <a:off x="0" y="0"/>
+            <a:ext cx="12191695" cy="6858000"/>
+          </a:xfrm>
+          <a:prstGeom prst="rect">
+            <a:avLst/>
+          </a:prstGeom>
+          <a:solidFill>
+            <a:srgbClr val="1E2761"/>
+          </a:solidFill>
+          <a:ln>
+            <a:noFill/>
+          </a:ln>
+          <a:effectLst/>
+        </p:spPr>
+        <p:style>
+          <a:lnRef idx="1">
+            <a:schemeClr val="accent1"/>
+          </a:lnRef>
+          <a:fillRef idx="3">
+            <a:schemeClr val="accent1"/>
+          </a:fillRef>
+          <a:effectRef idx="2">
+            <a:schemeClr val="accent1"/>
+          </a:effectRef>
+          <a:fontRef idx="minor">
+            <a:schemeClr val="lt1"/>
+          </a:fontRef>
+        </p:style>
+        <p:txBody>
+          <a:bodyPr rtlCol="0" anchor="ctr"/>
+          <a:lstStyle/>
+          <a:p>
+            <a:pPr algn="ctr"/>
+          </a:p>
+        </p:txBody>
+      </p:sp>
+      <p:sp>
+        <p:nvSpPr>
+          <p:cNvPr id="3" name="TextBox 2"/>
+          <p:cNvSpPr txBox="1"/>
+          <p:nvPr/>
+        </p:nvSpPr>
+        <p:spPr>
+          <a:xfrm>
+            <a:off x="822960" y="640080"/>
+            <a:ext cx="10515600" cy="457200"/>
+          </a:xfrm>
+          <a:prstGeom prst="rect">
+            <a:avLst/>
+          </a:prstGeom>
+          <a:noFill/>
+        </p:spPr>
+        <p:txBody>
+          <a:bodyPr wrap="square">
+            <a:spAutoFit/>
+          </a:bodyPr>
+          <a:lstStyle/>
+          <a:p>
+            <a:r>
+              <a:rPr sz="1400" b="1" i="0">
+                <a:solidFill>
+                  <a:srgbClr val="F4A24C"/>
+                </a:solidFill>
+                <a:latin typeface="Montserrat"/>
+              </a:rPr>
+              <a:t>LO QUE YA DOMINAS</a:t>
+            </a:r>
+          </a:p>
+        </p:txBody>
+      </p:sp>
+      <p:sp>
+        <p:nvSpPr>
+          <p:cNvPr id="4" name="Rectangle 3"/>
+          <p:cNvSpPr/>
+          <p:nvPr/>
+        </p:nvSpPr>
+        <p:spPr>
+          <a:xfrm>
+            <a:off x="868680" y="1051560"/>
+            <a:ext cx="1463040" cy="82296"/>
+          </a:xfrm>
+          <a:prstGeom prst="rect">
+            <a:avLst/>
+          </a:prstGeom>
+          <a:solidFill>
+            <a:srgbClr val="E8801A"/>
+          </a:solidFill>
+          <a:ln>
+            <a:noFill/>
+          </a:ln>
+          <a:effectLst/>
+        </p:spPr>
+        <p:style>
+          <a:lnRef idx="1">
+            <a:schemeClr val="accent1"/>
+          </a:lnRef>
+          <a:fillRef idx="3">
+            <a:schemeClr val="accent1"/>
+          </a:fillRef>
+          <a:effectRef idx="2">
+            <a:schemeClr val="accent1"/>
+          </a:effectRef>
+          <a:fontRef idx="minor">
+            <a:schemeClr val="lt1"/>
+          </a:fontRef>
+        </p:style>
+        <p:txBody>
+          <a:bodyPr rtlCol="0" anchor="ctr"/>
+          <a:lstStyle/>
+          <a:p>
+            <a:pPr algn="ctr"/>
+          </a:p>
+        </p:txBody>
+      </p:sp>
+      <p:sp>
+        <p:nvSpPr>
+          <p:cNvPr id="5" name="TextBox 4"/>
+          <p:cNvSpPr txBox="1"/>
+          <p:nvPr/>
+        </p:nvSpPr>
+        <p:spPr>
+          <a:xfrm>
+            <a:off x="822960" y="1234440"/>
+            <a:ext cx="10515600" cy="1097280"/>
+          </a:xfrm>
+          <a:prstGeom prst="rect">
+            <a:avLst/>
+          </a:prstGeom>
+          <a:noFill/>
+        </p:spPr>
+        <p:txBody>
+          <a:bodyPr wrap="square">
+            <a:spAutoFit/>
+          </a:bodyPr>
+          <a:lstStyle/>
+          <a:p>
+            <a:r>
+              <a:rPr sz="3400" b="1" i="0">
+                <a:solidFill>
+                  <a:srgbClr val="FFFFFF"/>
+                </a:solidFill>
+                <a:latin typeface="Montserrat"/>
+              </a:rPr>
+              <a:t>Ya sabes dar gas sin dejarte nada</a:t>
+            </a:r>
+          </a:p>
+        </p:txBody>
+      </p:sp>
+      <p:sp>
+        <p:nvSpPr>
+          <p:cNvPr id="6" name="TextBox 5"/>
+          <p:cNvSpPr txBox="1"/>
+          <p:nvPr/>
+        </p:nvSpPr>
+        <p:spPr>
+          <a:xfrm>
+            <a:off x="822960" y="2606040"/>
+            <a:ext cx="10515600" cy="2743200"/>
+          </a:xfrm>
+          <a:prstGeom prst="rect">
+            <a:avLst/>
+          </a:prstGeom>
+          <a:noFill/>
+        </p:spPr>
+        <p:txBody>
+          <a:bodyPr wrap="square">
+            <a:spAutoFit/>
+          </a:bodyPr>
+          <a:lstStyle/>
+          <a:p>
+            <a:pPr>
+              <a:spcAft>
+                <a:spcPts val="1200"/>
+              </a:spcAft>
+            </a:pPr>
+            <a:r>
+              <a:rPr sz="2000" b="1" i="0">
+                <a:solidFill>
+                  <a:srgbClr val="F4A24C"/>
+                </a:solidFill>
+                <a:latin typeface="Montserrat"/>
+              </a:rPr>
+              <a:t>✓  </a:t>
+            </a:r>
+            <a:r>
+              <a:rPr sz="1900" b="0" i="0">
+                <a:solidFill>
+                  <a:srgbClr val="FFFFFF"/>
+                </a:solidFill>
+                <a:latin typeface="Montserrat"/>
+              </a:rPr>
+              <a:t>Pruebas previas: repaso de lo visible y accesible</a:t>
+            </a:r>
+          </a:p>
+          <a:p>
+            <a:pPr>
+              <a:spcAft>
+                <a:spcPts val="1200"/>
+              </a:spcAft>
+            </a:pPr>
+            <a:r>
+              <a:rPr sz="2000" b="1" i="0">
+                <a:solidFill>
+                  <a:srgbClr val="F4A24C"/>
+                </a:solidFill>
+                <a:latin typeface="Montserrat"/>
+              </a:rPr>
+              <a:t>✓  </a:t>
+            </a:r>
+            <a:r>
+              <a:rPr sz="1900" b="0" i="0">
+                <a:solidFill>
+                  <a:srgbClr val="FFFFFF"/>
+                </a:solidFill>
+                <a:latin typeface="Montserrat"/>
+              </a:rPr>
+              <a:t>El purgado se hace al exterior, sin chispas, hasta gas puro</a:t>
+            </a:r>
+          </a:p>
+          <a:p>
+            <a:pPr>
+              <a:spcAft>
+                <a:spcPts val="1200"/>
+              </a:spcAft>
+            </a:pPr>
+            <a:r>
+              <a:rPr sz="2000" b="1" i="0">
+                <a:solidFill>
+                  <a:srgbClr val="F4A24C"/>
+                </a:solidFill>
+                <a:latin typeface="Montserrat"/>
+              </a:rPr>
+              <a:t>✓  </a:t>
+            </a:r>
+            <a:r>
+              <a:rPr sz="1900" b="0" i="0">
+                <a:solidFill>
+                  <a:srgbClr val="FFFFFF"/>
+                </a:solidFill>
+                <a:latin typeface="Montserrat"/>
+              </a:rPr>
+              <a:t>Sin nada detrás, tapón; con algo detrás, cerrar-bloquear-precintar</a:t>
+            </a:r>
+          </a:p>
+          <a:p>
+            <a:pPr>
+              <a:spcAft>
+                <a:spcPts val="1200"/>
+              </a:spcAft>
+            </a:pPr>
+            <a:r>
+              <a:rPr sz="2000" b="1" i="0">
+                <a:solidFill>
+                  <a:srgbClr val="F4A24C"/>
+                </a:solidFill>
+                <a:latin typeface="Montserrat"/>
+              </a:rPr>
+              <a:t>✓  </a:t>
+            </a:r>
+            <a:r>
+              <a:rPr sz="1900" b="0" i="0">
+                <a:solidFill>
+                  <a:srgbClr val="FFFFFF"/>
+                </a:solidFill>
+                <a:latin typeface="Montserrat"/>
+              </a:rPr>
+              <a:t>Termina con certificado y copia al usuario</a:t>
+            </a:r>
+          </a:p>
+        </p:txBody>
+      </p:sp>
+      <p:sp>
+        <p:nvSpPr>
+          <p:cNvPr id="7" name="Rounded Rectangle 6"/>
+          <p:cNvSpPr/>
+          <p:nvPr/>
+        </p:nvSpPr>
+        <p:spPr>
+          <a:xfrm>
+            <a:off x="822960" y="5532120"/>
+            <a:ext cx="10515600" cy="822960"/>
+          </a:xfrm>
+          <a:prstGeom prst="roundRect">
+            <a:avLst/>
+          </a:prstGeom>
+          <a:solidFill>
+            <a:srgbClr val="E8801A"/>
+          </a:solidFill>
+          <a:ln>
+            <a:noFill/>
+          </a:ln>
+          <a:effectLst/>
+        </p:spPr>
+        <p:style>
+          <a:lnRef idx="1">
+            <a:schemeClr val="accent1"/>
+          </a:lnRef>
+          <a:fillRef idx="3">
+            <a:schemeClr val="accent1"/>
+          </a:fillRef>
+          <a:effectRef idx="2">
+            <a:schemeClr val="accent1"/>
+          </a:effectRef>
+          <a:fontRef idx="minor">
+            <a:schemeClr val="lt1"/>
+          </a:fontRef>
+        </p:style>
+        <p:txBody>
+          <a:bodyPr rtlCol="0" anchor="ctr"/>
+          <a:lstStyle/>
+          <a:p>
+            <a:pPr algn="ctr"/>
+          </a:p>
+        </p:txBody>
+      </p:sp>
+      <p:sp>
+        <p:nvSpPr>
+          <p:cNvPr id="8" name="TextBox 7"/>
+          <p:cNvSpPr txBox="1"/>
+          <p:nvPr/>
+        </p:nvSpPr>
+        <p:spPr>
+          <a:xfrm>
+            <a:off x="1051560" y="5623560"/>
+            <a:ext cx="10058400" cy="640080"/>
+          </a:xfrm>
+          <a:prstGeom prst="rect">
+            <a:avLst/>
+          </a:prstGeom>
+          <a:noFill/>
+        </p:spPr>
+        <p:txBody>
+          <a:bodyPr wrap="square">
+            <a:spAutoFit/>
+          </a:bodyPr>
+          <a:lstStyle/>
+          <a:p>
+            <a:r>
+              <a:rPr sz="1500" b="1" i="1">
+                <a:solidFill>
+                  <a:srgbClr val="1E2761"/>
+                </a:solidFill>
+                <a:latin typeface="Montserrat"/>
+              </a:rPr>
+              <a:t>De un tubo probado a una instalación legalmente en servicio. Ya solo faltan los aparatos.</a:t>
+            </a:r>
+          </a:p>
+        </p:txBody>
+      </p:sp>
+    </p:spTree>
+  </p:cSld>
+  <p:clrMapOvr>
+    <a:masterClrMapping/>
+  </p:clrMapOvr>
+  <mc:AlternateContent xmlns:mc="http://schemas.openxmlformats.org/markup-compatibility/2006">
+    <mc:Choice xmlns:p14="http://schemas.microsoft.com/office/powerpoint/2010/main" Requires="p14">
+      <p:transition spd="med" p14:dur="700">
+        <p14:cube dir="l"/>
+      </p:transition>
+    </mc:Choice>
+    <mc:Fallback>
+      <p:transition spd="med">
+        <p:push dir="l"/>
+      </p:transition>
+    </mc:Fallback>
+  </mc:AlternateContent>
 </p:sld>
 </file>
 
@@ -6571,7 +10585,7 @@
                 </a:solidFill>
                 <a:latin typeface="Montserrat"/>
               </a:rPr>
-              <a:t>002 / 013</a:t>
+              <a:t>002 / 019</a:t>
             </a:r>
           </a:p>
         </p:txBody>
@@ -6646,7 +10660,7 @@
       </p:sp>
       <p:sp>
         <p:nvSpPr>
-          <p:cNvPr id="6" name="Rounded Rectangle 5"/>
+          <p:cNvPr id="6" name="Rectangle 5"/>
           <p:cNvSpPr/>
           <p:nvPr/>
         </p:nvSpPr>
@@ -6655,7 +10669,7 @@
             <a:off x="868680" y="1234440"/>
             <a:ext cx="1463040" cy="73152"/>
           </a:xfrm>
-          <a:prstGeom prst="roundRect">
+          <a:prstGeom prst="rect">
             <a:avLst/>
           </a:prstGeom>
           <a:solidFill>
@@ -6736,14 +10750,58 @@
       </p:sp>
       <p:sp>
         <p:nvSpPr>
-          <p:cNvPr id="8" name="TextBox 7"/>
+          <p:cNvPr id="8" name="Rectangle 7"/>
+          <p:cNvSpPr/>
+          <p:nvPr/>
+        </p:nvSpPr>
+        <p:spPr>
+          <a:xfrm>
+            <a:off x="822960" y="2011680"/>
+            <a:ext cx="3017520" cy="128016"/>
+          </a:xfrm>
+          <a:prstGeom prst="rect">
+            <a:avLst/>
+          </a:prstGeom>
+          <a:solidFill>
+            <a:srgbClr val="E8801A"/>
+          </a:solidFill>
+          <a:ln>
+            <a:noFill/>
+          </a:ln>
+          <a:effectLst/>
+        </p:spPr>
+        <p:style>
+          <a:lnRef idx="1">
+            <a:schemeClr val="accent1"/>
+          </a:lnRef>
+          <a:fillRef idx="3">
+            <a:schemeClr val="accent1"/>
+          </a:fillRef>
+          <a:effectRef idx="2">
+            <a:schemeClr val="accent1"/>
+          </a:effectRef>
+          <a:fontRef idx="minor">
+            <a:schemeClr val="lt1"/>
+          </a:fontRef>
+        </p:style>
+        <p:txBody>
+          <a:bodyPr rtlCol="0" anchor="ctr"/>
+          <a:lstStyle/>
+          <a:p>
+            <a:pPr algn="ctr"/>
+          </a:p>
+        </p:txBody>
+      </p:sp>
+      <p:sp>
+        <p:nvSpPr>
+          <p:cNvPr id="9" name="TextBox 8"/>
           <p:cNvSpPr txBox="1"/>
           <p:nvPr/>
         </p:nvSpPr>
         <p:spPr>
           <a:xfrm>
-            <a:off x="822960" y="2331720"/>
-            <a:ext cx="3017520" cy="1463040"/>
+            <a:off x="822960" y="2377440"/>
+            <a:ext cx="3017520" cy="1371600"/>
           </a:xfrm>
           <a:prstGeom prst="rect">
             <a:avLst/>
@@ -6758,7 +10816,7 @@
           <a:p>
             <a:pPr algn="ctr"/>
             <a:r>
-              <a:rPr sz="6000" b="1" i="0">
+              <a:rPr sz="5800" b="1" i="0">
                 <a:solidFill>
                   <a:srgbClr val="1E2761"/>
                 </a:solidFill>
@@ -6771,13 +10829,13 @@
       </p:sp>
       <p:sp>
         <p:nvSpPr>
-          <p:cNvPr id="9" name="TextBox 8"/>
+          <p:cNvPr id="10" name="TextBox 9"/>
           <p:cNvSpPr txBox="1"/>
           <p:nvPr/>
         </p:nvSpPr>
         <p:spPr>
           <a:xfrm>
-            <a:off x="1051560" y="3611880"/>
+            <a:off x="1051560" y="3657600"/>
             <a:ext cx="2560320" cy="1005840"/>
           </a:xfrm>
           <a:prstGeom prst="rect">
@@ -6806,7 +10864,7 @@
       </p:sp>
       <p:sp>
         <p:nvSpPr>
-          <p:cNvPr id="10" name="Rounded Rectangle 9"/>
+          <p:cNvPr id="11" name="Rounded Rectangle 10"/>
           <p:cNvSpPr/>
           <p:nvPr/>
         </p:nvSpPr>
@@ -6852,14 +10910,58 @@
       </p:sp>
       <p:sp>
         <p:nvSpPr>
-          <p:cNvPr id="11" name="TextBox 10"/>
+          <p:cNvPr id="12" name="Rectangle 11"/>
+          <p:cNvSpPr/>
+          <p:nvPr/>
+        </p:nvSpPr>
+        <p:spPr>
+          <a:xfrm>
+            <a:off x="4617720" y="2011680"/>
+            <a:ext cx="3017520" cy="128016"/>
+          </a:xfrm>
+          <a:prstGeom prst="rect">
+            <a:avLst/>
+          </a:prstGeom>
+          <a:solidFill>
+            <a:srgbClr val="E8801A"/>
+          </a:solidFill>
+          <a:ln>
+            <a:noFill/>
+          </a:ln>
+          <a:effectLst/>
+        </p:spPr>
+        <p:style>
+          <a:lnRef idx="1">
+            <a:schemeClr val="accent1"/>
+          </a:lnRef>
+          <a:fillRef idx="3">
+            <a:schemeClr val="accent1"/>
+          </a:fillRef>
+          <a:effectRef idx="2">
+            <a:schemeClr val="accent1"/>
+          </a:effectRef>
+          <a:fontRef idx="minor">
+            <a:schemeClr val="lt1"/>
+          </a:fontRef>
+        </p:style>
+        <p:txBody>
+          <a:bodyPr rtlCol="0" anchor="ctr"/>
+          <a:lstStyle/>
+          <a:p>
+            <a:pPr algn="ctr"/>
+          </a:p>
+        </p:txBody>
+      </p:sp>
+      <p:sp>
+        <p:nvSpPr>
+          <p:cNvPr id="13" name="TextBox 12"/>
           <p:cNvSpPr txBox="1"/>
           <p:nvPr/>
         </p:nvSpPr>
         <p:spPr>
           <a:xfrm>
-            <a:off x="4617720" y="2331720"/>
-            <a:ext cx="3017520" cy="1463040"/>
+            <a:off x="4617720" y="2377440"/>
+            <a:ext cx="3017520" cy="1371600"/>
           </a:xfrm>
           <a:prstGeom prst="rect">
             <a:avLst/>
@@ -6874,7 +10976,7 @@
           <a:p>
             <a:pPr algn="ctr"/>
             <a:r>
-              <a:rPr sz="6000" b="1" i="0">
+              <a:rPr sz="5800" b="1" i="0">
                 <a:solidFill>
                   <a:srgbClr val="1E2761"/>
                 </a:solidFill>
@@ -6887,13 +10989,13 @@
       </p:sp>
       <p:sp>
         <p:nvSpPr>
-          <p:cNvPr id="12" name="TextBox 11"/>
+          <p:cNvPr id="14" name="TextBox 13"/>
           <p:cNvSpPr txBox="1"/>
           <p:nvPr/>
         </p:nvSpPr>
         <p:spPr>
           <a:xfrm>
-            <a:off x="4846320" y="3611880"/>
+            <a:off x="4846320" y="3657600"/>
             <a:ext cx="2560320" cy="1005840"/>
           </a:xfrm>
           <a:prstGeom prst="rect">
@@ -6922,7 +11024,7 @@
       </p:sp>
       <p:sp>
         <p:nvSpPr>
-          <p:cNvPr id="13" name="Rounded Rectangle 12"/>
+          <p:cNvPr id="15" name="Rounded Rectangle 14"/>
           <p:cNvSpPr/>
           <p:nvPr/>
         </p:nvSpPr>
@@ -6968,14 +11070,58 @@
       </p:sp>
       <p:sp>
         <p:nvSpPr>
-          <p:cNvPr id="14" name="TextBox 13"/>
+          <p:cNvPr id="16" name="Rectangle 15"/>
+          <p:cNvSpPr/>
+          <p:nvPr/>
+        </p:nvSpPr>
+        <p:spPr>
+          <a:xfrm>
+            <a:off x="8412480" y="2011680"/>
+            <a:ext cx="3017520" cy="128016"/>
+          </a:xfrm>
+          <a:prstGeom prst="rect">
+            <a:avLst/>
+          </a:prstGeom>
+          <a:solidFill>
+            <a:srgbClr val="E8801A"/>
+          </a:solidFill>
+          <a:ln>
+            <a:noFill/>
+          </a:ln>
+          <a:effectLst/>
+        </p:spPr>
+        <p:style>
+          <a:lnRef idx="1">
+            <a:schemeClr val="accent1"/>
+          </a:lnRef>
+          <a:fillRef idx="3">
+            <a:schemeClr val="accent1"/>
+          </a:fillRef>
+          <a:effectRef idx="2">
+            <a:schemeClr val="accent1"/>
+          </a:effectRef>
+          <a:fontRef idx="minor">
+            <a:schemeClr val="lt1"/>
+          </a:fontRef>
+        </p:style>
+        <p:txBody>
+          <a:bodyPr rtlCol="0" anchor="ctr"/>
+          <a:lstStyle/>
+          <a:p>
+            <a:pPr algn="ctr"/>
+          </a:p>
+        </p:txBody>
+      </p:sp>
+      <p:sp>
+        <p:nvSpPr>
+          <p:cNvPr id="17" name="TextBox 16"/>
           <p:cNvSpPr txBox="1"/>
           <p:nvPr/>
         </p:nvSpPr>
         <p:spPr>
           <a:xfrm>
-            <a:off x="8412480" y="2331720"/>
-            <a:ext cx="3017520" cy="1463040"/>
+            <a:off x="8412480" y="2377440"/>
+            <a:ext cx="3017520" cy="1371600"/>
           </a:xfrm>
           <a:prstGeom prst="rect">
             <a:avLst/>
@@ -6990,7 +11136,7 @@
           <a:p>
             <a:pPr algn="ctr"/>
             <a:r>
-              <a:rPr sz="6000" b="1" i="0">
+              <a:rPr sz="5800" b="1" i="0">
                 <a:solidFill>
                   <a:srgbClr val="1E2761"/>
                 </a:solidFill>
@@ -7003,13 +11149,13 @@
       </p:sp>
       <p:sp>
         <p:nvSpPr>
-          <p:cNvPr id="15" name="TextBox 14"/>
+          <p:cNvPr id="18" name="TextBox 17"/>
           <p:cNvSpPr txBox="1"/>
           <p:nvPr/>
         </p:nvSpPr>
         <p:spPr>
           <a:xfrm>
-            <a:off x="8641080" y="3611880"/>
+            <a:off x="8641080" y="3657600"/>
             <a:ext cx="2560320" cy="1005840"/>
           </a:xfrm>
           <a:prstGeom prst="rect">
@@ -7041,6 +11187,18 @@
   <p:clrMapOvr>
     <a:masterClrMapping/>
   </p:clrMapOvr>
+  <mc:AlternateContent xmlns:mc="http://schemas.openxmlformats.org/markup-compatibility/2006">
+    <mc:Choice xmlns:p14="http://schemas.microsoft.com/office/powerpoint/2010/main" Requires="p14">
+      <p:transition spd="med" p14:dur="700">
+        <p14:cube dir="r"/>
+      </p:transition>
+    </mc:Choice>
+    <mc:Fallback>
+      <p:transition spd="med">
+        <p:push dir="r"/>
+      </p:transition>
+    </mc:Fallback>
+  </mc:AlternateContent>
 </p:sld>
 </file>
 
@@ -7128,7 +11286,7 @@
                 </a:solidFill>
                 <a:latin typeface="Montserrat"/>
               </a:rPr>
-              <a:t>003 / 013</a:t>
+              <a:t>003 / 019</a:t>
             </a:r>
           </a:p>
         </p:txBody>
@@ -7237,7 +11395,7 @@
       </p:sp>
       <p:sp>
         <p:nvSpPr>
-          <p:cNvPr id="7" name="Rounded Rectangle 6"/>
+          <p:cNvPr id="7" name="Rectangle 6"/>
           <p:cNvSpPr/>
           <p:nvPr/>
         </p:nvSpPr>
@@ -7246,7 +11404,7 @@
             <a:off x="868680" y="1673352"/>
             <a:ext cx="2011680" cy="73152"/>
           </a:xfrm>
-          <a:prstGeom prst="roundRect">
+          <a:prstGeom prst="rect">
             <a:avLst/>
           </a:prstGeom>
           <a:solidFill>
@@ -7432,6 +11590,18 @@
   <p:clrMapOvr>
     <a:masterClrMapping/>
   </p:clrMapOvr>
+  <mc:AlternateContent xmlns:mc="http://schemas.openxmlformats.org/markup-compatibility/2006">
+    <mc:Choice xmlns:p14="http://schemas.microsoft.com/office/powerpoint/2010/main" Requires="p14">
+      <p:transition spd="med" p14:dur="700">
+        <p14:cube dir="l"/>
+      </p:transition>
+    </mc:Choice>
+    <mc:Fallback>
+      <p:transition spd="med">
+        <p:push dir="l"/>
+      </p:transition>
+    </mc:Fallback>
+  </mc:AlternateContent>
 </p:sld>
 </file>
 
@@ -7519,7 +11689,7 @@
                 </a:solidFill>
                 <a:latin typeface="Montserrat"/>
               </a:rPr>
-              <a:t>004 / 013</a:t>
+              <a:t>004 / 019</a:t>
             </a:r>
           </a:p>
         </p:txBody>
@@ -7628,7 +11798,7 @@
       </p:sp>
       <p:sp>
         <p:nvSpPr>
-          <p:cNvPr id="7" name="Rounded Rectangle 6"/>
+          <p:cNvPr id="7" name="Rectangle 6"/>
           <p:cNvSpPr/>
           <p:nvPr/>
         </p:nvSpPr>
@@ -7637,7 +11807,7 @@
             <a:off x="868680" y="1627632"/>
             <a:ext cx="2011680" cy="73152"/>
           </a:xfrm>
-          <a:prstGeom prst="roundRect">
+          <a:prstGeom prst="rect">
             <a:avLst/>
           </a:prstGeom>
           <a:solidFill>
@@ -7679,7 +11849,7 @@
         <p:spPr>
           <a:xfrm>
             <a:off x="822960" y="1965960"/>
-            <a:ext cx="4983480" cy="4206240"/>
+            <a:ext cx="5029200" cy="4206240"/>
           </a:xfrm>
           <a:prstGeom prst="rect">
             <a:avLst/>
@@ -7801,8 +11971,8 @@
         </p:nvSpPr>
         <p:spPr>
           <a:xfrm>
-            <a:off x="5806440" y="1051560"/>
-            <a:ext cx="5298947" cy="4629150"/>
+            <a:off x="6080760" y="1965960"/>
+            <a:ext cx="5303520" cy="4572000"/>
           </a:xfrm>
           <a:prstGeom prst="roundRect">
             <a:avLst/>
@@ -7847,8 +12017,8 @@
         </p:nvSpPr>
         <p:spPr>
           <a:xfrm>
-            <a:off x="6080760" y="2726055"/>
-            <a:ext cx="4750307" cy="1280160"/>
+            <a:off x="6355080" y="3611880"/>
+            <a:ext cx="4754880" cy="1280160"/>
           </a:xfrm>
           <a:prstGeom prst="rect">
             <a:avLst/>
@@ -7869,7 +12039,7 @@
                 </a:solidFill>
                 <a:latin typeface="Montserrat"/>
               </a:rPr>
-              <a:t>IMAGEN REALISTA</a:t>
+              <a:t>IMAGEN</a:t>
             </a:r>
           </a:p>
           <a:p>
@@ -7891,6 +12061,18 @@
   <p:clrMapOvr>
     <a:masterClrMapping/>
   </p:clrMapOvr>
+  <mc:AlternateContent xmlns:mc="http://schemas.openxmlformats.org/markup-compatibility/2006">
+    <mc:Choice xmlns:p14="http://schemas.microsoft.com/office/powerpoint/2010/main" Requires="p14">
+      <p:transition spd="med" p14:dur="700">
+        <p14:cube dir="r"/>
+      </p:transition>
+    </mc:Choice>
+    <mc:Fallback>
+      <p:transition spd="med">
+        <p:push dir="r"/>
+      </p:transition>
+    </mc:Fallback>
+  </mc:AlternateContent>
 </p:sld>
 </file>
 
@@ -7978,7 +12160,7 @@
                 </a:solidFill>
                 <a:latin typeface="Montserrat"/>
               </a:rPr>
-              <a:t>005 / 013</a:t>
+              <a:t>005 / 019</a:t>
             </a:r>
           </a:p>
         </p:txBody>
@@ -8087,7 +12269,7 @@
       </p:sp>
       <p:sp>
         <p:nvSpPr>
-          <p:cNvPr id="7" name="Rounded Rectangle 6"/>
+          <p:cNvPr id="7" name="Rectangle 6"/>
           <p:cNvSpPr/>
           <p:nvPr/>
         </p:nvSpPr>
@@ -8096,7 +12278,7 @@
             <a:off x="868680" y="1627632"/>
             <a:ext cx="2011680" cy="73152"/>
           </a:xfrm>
-          <a:prstGeom prst="roundRect">
+          <a:prstGeom prst="rect">
             <a:avLst/>
           </a:prstGeom>
           <a:solidFill>
@@ -8137,8 +12319,8 @@
         </p:nvSpPr>
         <p:spPr>
           <a:xfrm>
-            <a:off x="822960" y="1965960"/>
-            <a:ext cx="4983480" cy="4206240"/>
+            <a:off x="6355080" y="1965960"/>
+            <a:ext cx="5029200" cy="4206240"/>
           </a:xfrm>
           <a:prstGeom prst="rect">
             <a:avLst/>
@@ -8260,8 +12442,8 @@
         </p:nvSpPr>
         <p:spPr>
           <a:xfrm>
-            <a:off x="5806440" y="1051560"/>
-            <a:ext cx="5298947" cy="4629150"/>
+            <a:off x="822960" y="1965960"/>
+            <a:ext cx="5303520" cy="4572000"/>
           </a:xfrm>
           <a:prstGeom prst="roundRect">
             <a:avLst/>
@@ -8306,8 +12488,8 @@
         </p:nvSpPr>
         <p:spPr>
           <a:xfrm>
-            <a:off x="6080760" y="2726055"/>
-            <a:ext cx="4750307" cy="1280160"/>
+            <a:off x="1097280" y="3611880"/>
+            <a:ext cx="4754880" cy="1280160"/>
           </a:xfrm>
           <a:prstGeom prst="rect">
             <a:avLst/>
@@ -8328,7 +12510,7 @@
                 </a:solidFill>
                 <a:latin typeface="Montserrat"/>
               </a:rPr>
-              <a:t>IMAGEN REALISTA</a:t>
+              <a:t>IMAGEN</a:t>
             </a:r>
           </a:p>
           <a:p>
@@ -8350,6 +12532,18 @@
   <p:clrMapOvr>
     <a:masterClrMapping/>
   </p:clrMapOvr>
+  <mc:AlternateContent xmlns:mc="http://schemas.openxmlformats.org/markup-compatibility/2006">
+    <mc:Choice xmlns:p14="http://schemas.microsoft.com/office/powerpoint/2010/main" Requires="p14">
+      <p:transition spd="med" p14:dur="700">
+        <p14:cube dir="l"/>
+      </p:transition>
+    </mc:Choice>
+    <mc:Fallback>
+      <p:transition spd="med">
+        <p:push dir="l"/>
+      </p:transition>
+    </mc:Fallback>
+  </mc:AlternateContent>
 </p:sld>
 </file>
 
@@ -8437,7 +12631,7 @@
                 </a:solidFill>
                 <a:latin typeface="Montserrat"/>
               </a:rPr>
-              <a:t>006 / 013</a:t>
+              <a:t>006 / 019</a:t>
             </a:r>
           </a:p>
         </p:txBody>
@@ -8478,84 +12672,16 @@
       </p:sp>
       <p:sp>
         <p:nvSpPr>
-          <p:cNvPr id="5" name="TextBox 4"/>
-          <p:cNvSpPr txBox="1"/>
-          <p:nvPr/>
-        </p:nvSpPr>
-        <p:spPr>
-          <a:xfrm>
-            <a:off x="822960" y="457200"/>
-            <a:ext cx="10058400" cy="365760"/>
-          </a:xfrm>
-          <a:prstGeom prst="rect">
-            <a:avLst/>
-          </a:prstGeom>
-          <a:noFill/>
-        </p:spPr>
-        <p:txBody>
-          <a:bodyPr wrap="square">
-            <a:spAutoFit/>
-          </a:bodyPr>
-          <a:lstStyle/>
-          <a:p>
-            <a:r>
-              <a:rPr sz="1300" b="1" i="0">
-                <a:solidFill>
-                  <a:srgbClr val="E8801A"/>
-                </a:solidFill>
-                <a:latin typeface="Montserrat"/>
-              </a:rPr>
-              <a:t>PRUEBAS PREVIAS</a:t>
-            </a:r>
-          </a:p>
-        </p:txBody>
-      </p:sp>
-      <p:sp>
-        <p:nvSpPr>
-          <p:cNvPr id="6" name="TextBox 5"/>
-          <p:cNvSpPr txBox="1"/>
-          <p:nvPr/>
-        </p:nvSpPr>
-        <p:spPr>
-          <a:xfrm>
-            <a:off x="822960" y="868680"/>
-            <a:ext cx="10515600" cy="914400"/>
-          </a:xfrm>
-          <a:prstGeom prst="rect">
-            <a:avLst/>
-          </a:prstGeom>
-          <a:noFill/>
-        </p:spPr>
-        <p:txBody>
-          <a:bodyPr wrap="square">
-            <a:spAutoFit/>
-          </a:bodyPr>
-          <a:lstStyle/>
-          <a:p>
-            <a:r>
-              <a:rPr sz="2800" b="1" i="0">
-                <a:solidFill>
-                  <a:srgbClr val="1E2761"/>
-                </a:solidFill>
-                <a:latin typeface="Montserrat"/>
-              </a:rPr>
-              <a:t>El repaso antes de dar gas</a:t>
-            </a:r>
-          </a:p>
-        </p:txBody>
-      </p:sp>
-      <p:sp>
-        <p:nvSpPr>
-          <p:cNvPr id="7" name="Rounded Rectangle 6"/>
+          <p:cNvPr id="5" name="Rectangle 4"/>
           <p:cNvSpPr/>
           <p:nvPr/>
         </p:nvSpPr>
         <p:spPr>
           <a:xfrm>
-            <a:off x="868680" y="1627632"/>
-            <a:ext cx="2011680" cy="73152"/>
-          </a:xfrm>
-          <a:prstGeom prst="roundRect">
+            <a:off x="0" y="0"/>
+            <a:ext cx="12191695" cy="1143000"/>
+          </a:xfrm>
+          <a:prstGeom prst="rect">
             <a:avLst/>
           </a:prstGeom>
           <a:solidFill>
@@ -8590,14 +12716,14 @@
       </p:sp>
       <p:sp>
         <p:nvSpPr>
-          <p:cNvPr id="8" name="TextBox 7"/>
+          <p:cNvPr id="6" name="TextBox 5"/>
           <p:cNvSpPr txBox="1"/>
           <p:nvPr/>
         </p:nvSpPr>
         <p:spPr>
           <a:xfrm>
-            <a:off x="822960" y="1965960"/>
-            <a:ext cx="4983480" cy="4206240"/>
+            <a:off x="822960" y="274320"/>
+            <a:ext cx="10515600" cy="640080"/>
           </a:xfrm>
           <a:prstGeom prst="rect">
             <a:avLst/>
@@ -8610,117 +12736,62 @@
           </a:bodyPr>
           <a:lstStyle/>
           <a:p>
-            <a:pPr>
-              <a:spcAft>
-                <a:spcPts val="1100"/>
-              </a:spcAft>
-            </a:pPr>
-            <a:r>
-              <a:rPr sz="1600" b="1" i="0">
-                <a:solidFill>
-                  <a:srgbClr val="E8801A"/>
-                </a:solidFill>
-                <a:latin typeface="Montserrat"/>
-              </a:rPr>
-              <a:t>▸  </a:t>
-            </a:r>
-            <a:r>
-              <a:rPr sz="1600" b="0" i="0">
-                <a:solidFill>
-                  <a:srgbClr val="1B2330"/>
-                </a:solidFill>
-                <a:latin typeface="Montserrat"/>
-              </a:rPr>
-              <a:t>Documentación completa</a:t>
-            </a:r>
-          </a:p>
-          <a:p>
-            <a:pPr>
-              <a:spcAft>
-                <a:spcPts val="1100"/>
-              </a:spcAft>
-            </a:pPr>
-            <a:r>
-              <a:rPr sz="1600" b="1" i="0">
-                <a:solidFill>
-                  <a:srgbClr val="E8801A"/>
-                </a:solidFill>
-                <a:latin typeface="Montserrat"/>
-              </a:rPr>
-              <a:t>▸  </a:t>
-            </a:r>
-            <a:r>
-              <a:rPr sz="1600" b="0" i="0">
-                <a:solidFill>
-                  <a:srgbClr val="1B2330"/>
-                </a:solidFill>
-                <a:latin typeface="Montserrat"/>
-              </a:rPr>
-              <a:t>Lo visible y accesible cumple la norma</a:t>
-            </a:r>
-          </a:p>
-          <a:p>
-            <a:pPr>
-              <a:spcAft>
-                <a:spcPts val="1100"/>
-              </a:spcAft>
-            </a:pPr>
-            <a:r>
-              <a:rPr sz="1600" b="1" i="0">
-                <a:solidFill>
-                  <a:srgbClr val="E8801A"/>
-                </a:solidFill>
-                <a:latin typeface="Montserrat"/>
-              </a:rPr>
-              <a:t>▸  </a:t>
-            </a:r>
-            <a:r>
-              <a:rPr sz="1600" b="0" i="0">
-                <a:solidFill>
-                  <a:srgbClr val="1B2330"/>
-                </a:solidFill>
-                <a:latin typeface="Montserrat"/>
-              </a:rPr>
-              <a:t>Locales y salidas de humos correctos</a:t>
-            </a:r>
-          </a:p>
-          <a:p>
-            <a:pPr>
-              <a:spcAft>
-                <a:spcPts val="1100"/>
-              </a:spcAft>
-            </a:pPr>
-            <a:r>
-              <a:rPr sz="1600" b="1" i="0">
-                <a:solidFill>
-                  <a:srgbClr val="E8801A"/>
-                </a:solidFill>
-                <a:latin typeface="Montserrat"/>
-              </a:rPr>
-              <a:t>▸  </a:t>
-            </a:r>
-            <a:r>
-              <a:rPr sz="1600" b="0" i="0">
-                <a:solidFill>
-                  <a:srgbClr val="1B2330"/>
-                </a:solidFill>
-                <a:latin typeface="Montserrat"/>
-              </a:rPr>
-              <a:t>Maniobrabilidad de las válvulas</a:t>
-            </a:r>
-          </a:p>
-        </p:txBody>
-      </p:sp>
-      <p:sp>
-        <p:nvSpPr>
-          <p:cNvPr id="9" name="imgph" descr="IMGQ:inspector with clipboard gas installation"/>
+            <a:r>
+              <a:rPr sz="2400" b="1" i="0">
+                <a:solidFill>
+                  <a:srgbClr val="FFFFFF"/>
+                </a:solidFill>
+                <a:latin typeface="Montserrat"/>
+              </a:rPr>
+              <a:t>⚡  PREGUNTA RÁPIDA</a:t>
+            </a:r>
+          </a:p>
+        </p:txBody>
+      </p:sp>
+      <p:sp>
+        <p:nvSpPr>
+          <p:cNvPr id="7" name="TextBox 6"/>
+          <p:cNvSpPr txBox="1"/>
+          <p:nvPr/>
+        </p:nvSpPr>
+        <p:spPr>
+          <a:xfrm>
+            <a:off x="822960" y="1508760"/>
+            <a:ext cx="10515600" cy="1371600"/>
+          </a:xfrm>
+          <a:prstGeom prst="rect">
+            <a:avLst/>
+          </a:prstGeom>
+          <a:noFill/>
+        </p:spPr>
+        <p:txBody>
+          <a:bodyPr wrap="square">
+            <a:spAutoFit/>
+          </a:bodyPr>
+          <a:lstStyle/>
+          <a:p>
+            <a:r>
+              <a:rPr sz="2400" b="1" i="0">
+                <a:solidFill>
+                  <a:srgbClr val="1E2761"/>
+                </a:solidFill>
+                <a:latin typeface="Montserrat"/>
+              </a:rPr>
+              <a:t>La verificación de estanquidad de la Parte nueve, ¿cómo se hace?</a:t>
+            </a:r>
+          </a:p>
+        </p:txBody>
+      </p:sp>
+      <p:sp>
+        <p:nvSpPr>
+          <p:cNvPr id="8" name="Rounded Rectangle 7"/>
           <p:cNvSpPr/>
           <p:nvPr/>
         </p:nvSpPr>
         <p:spPr>
           <a:xfrm>
-            <a:off x="5806440" y="1051560"/>
-            <a:ext cx="5298947" cy="4629150"/>
+            <a:off x="822960" y="3291840"/>
+            <a:ext cx="4983480" cy="1143000"/>
           </a:xfrm>
           <a:prstGeom prst="roundRect">
             <a:avLst/>
@@ -8759,14 +12830,58 @@
       </p:sp>
       <p:sp>
         <p:nvSpPr>
+          <p:cNvPr id="9" name="Rectangle 8"/>
+          <p:cNvSpPr/>
+          <p:nvPr/>
+        </p:nvSpPr>
+        <p:spPr>
+          <a:xfrm>
+            <a:off x="822960" y="3291840"/>
+            <a:ext cx="640080" cy="1143000"/>
+          </a:xfrm>
+          <a:prstGeom prst="rect">
+            <a:avLst/>
+          </a:prstGeom>
+          <a:solidFill>
+            <a:srgbClr val="1E2761"/>
+          </a:solidFill>
+          <a:ln>
+            <a:noFill/>
+          </a:ln>
+          <a:effectLst/>
+        </p:spPr>
+        <p:style>
+          <a:lnRef idx="1">
+            <a:schemeClr val="accent1"/>
+          </a:lnRef>
+          <a:fillRef idx="3">
+            <a:schemeClr val="accent1"/>
+          </a:fillRef>
+          <a:effectRef idx="2">
+            <a:schemeClr val="accent1"/>
+          </a:effectRef>
+          <a:fontRef idx="minor">
+            <a:schemeClr val="lt1"/>
+          </a:fontRef>
+        </p:style>
+        <p:txBody>
+          <a:bodyPr rtlCol="0" anchor="ctr"/>
+          <a:lstStyle/>
+          <a:p>
+            <a:pPr algn="ctr"/>
+          </a:p>
+        </p:txBody>
+      </p:sp>
+      <p:sp>
+        <p:nvSpPr>
           <p:cNvPr id="10" name="TextBox 9"/>
           <p:cNvSpPr txBox="1"/>
           <p:nvPr/>
         </p:nvSpPr>
         <p:spPr>
           <a:xfrm>
-            <a:off x="6080760" y="2726055"/>
-            <a:ext cx="4750307" cy="1280160"/>
+            <a:off x="822960" y="3611880"/>
+            <a:ext cx="640080" cy="548640"/>
           </a:xfrm>
           <a:prstGeom prst="rect">
             <a:avLst/>
@@ -8781,25 +12896,524 @@
           <a:p>
             <a:pPr algn="ctr"/>
             <a:r>
-              <a:rPr sz="1400" b="1" i="0">
-                <a:solidFill>
-                  <a:srgbClr val="64748B"/>
-                </a:solidFill>
-                <a:latin typeface="Montserrat"/>
-              </a:rPr>
-              <a:t>IMAGEN REALISTA</a:t>
-            </a:r>
-          </a:p>
+              <a:rPr sz="2200" b="1" i="0">
+                <a:solidFill>
+                  <a:srgbClr val="FFFFFF"/>
+                </a:solidFill>
+                <a:latin typeface="Montserrat"/>
+              </a:rPr>
+              <a:t>A</a:t>
+            </a:r>
+          </a:p>
+        </p:txBody>
+      </p:sp>
+      <p:sp>
+        <p:nvSpPr>
+          <p:cNvPr id="11" name="TextBox 10"/>
+          <p:cNvSpPr txBox="1"/>
+          <p:nvPr/>
+        </p:nvSpPr>
+        <p:spPr>
+          <a:xfrm>
+            <a:off x="1600200" y="3474720"/>
+            <a:ext cx="4114800" cy="868680"/>
+          </a:xfrm>
+          <a:prstGeom prst="rect">
+            <a:avLst/>
+          </a:prstGeom>
+          <a:noFill/>
+        </p:spPr>
+        <p:txBody>
+          <a:bodyPr wrap="square">
+            <a:spAutoFit/>
+          </a:bodyPr>
+          <a:lstStyle/>
+          <a:p>
+            <a:r>
+              <a:rPr sz="1400" b="0" i="0">
+                <a:solidFill>
+                  <a:srgbClr val="1B2330"/>
+                </a:solidFill>
+                <a:latin typeface="Montserrat"/>
+              </a:rPr>
+              <a:t>Con aire, a la presión de prueba alta</a:t>
+            </a:r>
+          </a:p>
+        </p:txBody>
+      </p:sp>
+      <p:sp>
+        <p:nvSpPr>
+          <p:cNvPr id="12" name="Rounded Rectangle 11"/>
+          <p:cNvSpPr/>
+          <p:nvPr/>
+        </p:nvSpPr>
+        <p:spPr>
+          <a:xfrm>
+            <a:off x="6355080" y="3291840"/>
+            <a:ext cx="4983480" cy="1143000"/>
+          </a:xfrm>
+          <a:prstGeom prst="roundRect">
+            <a:avLst/>
+          </a:prstGeom>
+          <a:solidFill>
+            <a:srgbClr val="F3F6FB"/>
+          </a:solidFill>
+          <a:ln w="12700">
+            <a:solidFill>
+              <a:srgbClr val="C7D2E6"/>
+            </a:solidFill>
+          </a:ln>
+          <a:effectLst/>
+        </p:spPr>
+        <p:style>
+          <a:lnRef idx="1">
+            <a:schemeClr val="accent1"/>
+          </a:lnRef>
+          <a:fillRef idx="3">
+            <a:schemeClr val="accent1"/>
+          </a:fillRef>
+          <a:effectRef idx="2">
+            <a:schemeClr val="accent1"/>
+          </a:effectRef>
+          <a:fontRef idx="minor">
+            <a:schemeClr val="lt1"/>
+          </a:fontRef>
+        </p:style>
+        <p:txBody>
+          <a:bodyPr rtlCol="0" anchor="ctr"/>
+          <a:lstStyle/>
           <a:p>
             <a:pPr algn="ctr"/>
-            <a:r>
-              <a:rPr sz="1100" b="0" i="1">
-                <a:solidFill>
-                  <a:srgbClr val="64748B"/>
-                </a:solidFill>
-                <a:latin typeface="Montserrat"/>
-              </a:rPr>
-              <a:t>inspector with clipboard gas installation</a:t>
+          </a:p>
+        </p:txBody>
+      </p:sp>
+      <p:sp>
+        <p:nvSpPr>
+          <p:cNvPr id="13" name="Rectangle 12"/>
+          <p:cNvSpPr/>
+          <p:nvPr/>
+        </p:nvSpPr>
+        <p:spPr>
+          <a:xfrm>
+            <a:off x="6355080" y="3291840"/>
+            <a:ext cx="640080" cy="1143000"/>
+          </a:xfrm>
+          <a:prstGeom prst="rect">
+            <a:avLst/>
+          </a:prstGeom>
+          <a:solidFill>
+            <a:srgbClr val="1E2761"/>
+          </a:solidFill>
+          <a:ln>
+            <a:noFill/>
+          </a:ln>
+          <a:effectLst/>
+        </p:spPr>
+        <p:style>
+          <a:lnRef idx="1">
+            <a:schemeClr val="accent1"/>
+          </a:lnRef>
+          <a:fillRef idx="3">
+            <a:schemeClr val="accent1"/>
+          </a:fillRef>
+          <a:effectRef idx="2">
+            <a:schemeClr val="accent1"/>
+          </a:effectRef>
+          <a:fontRef idx="minor">
+            <a:schemeClr val="lt1"/>
+          </a:fontRef>
+        </p:style>
+        <p:txBody>
+          <a:bodyPr rtlCol="0" anchor="ctr"/>
+          <a:lstStyle/>
+          <a:p>
+            <a:pPr algn="ctr"/>
+          </a:p>
+        </p:txBody>
+      </p:sp>
+      <p:sp>
+        <p:nvSpPr>
+          <p:cNvPr id="14" name="TextBox 13"/>
+          <p:cNvSpPr txBox="1"/>
+          <p:nvPr/>
+        </p:nvSpPr>
+        <p:spPr>
+          <a:xfrm>
+            <a:off x="6355080" y="3611880"/>
+            <a:ext cx="640080" cy="548640"/>
+          </a:xfrm>
+          <a:prstGeom prst="rect">
+            <a:avLst/>
+          </a:prstGeom>
+          <a:noFill/>
+        </p:spPr>
+        <p:txBody>
+          <a:bodyPr wrap="square">
+            <a:spAutoFit/>
+          </a:bodyPr>
+          <a:lstStyle/>
+          <a:p>
+            <a:pPr algn="ctr"/>
+            <a:r>
+              <a:rPr sz="2200" b="1" i="0">
+                <a:solidFill>
+                  <a:srgbClr val="FFFFFF"/>
+                </a:solidFill>
+                <a:latin typeface="Montserrat"/>
+              </a:rPr>
+              <a:t>B</a:t>
+            </a:r>
+          </a:p>
+        </p:txBody>
+      </p:sp>
+      <p:sp>
+        <p:nvSpPr>
+          <p:cNvPr id="15" name="TextBox 14"/>
+          <p:cNvSpPr txBox="1"/>
+          <p:nvPr/>
+        </p:nvSpPr>
+        <p:spPr>
+          <a:xfrm>
+            <a:off x="7132320" y="3474720"/>
+            <a:ext cx="4114800" cy="868680"/>
+          </a:xfrm>
+          <a:prstGeom prst="rect">
+            <a:avLst/>
+          </a:prstGeom>
+          <a:noFill/>
+        </p:spPr>
+        <p:txBody>
+          <a:bodyPr wrap="square">
+            <a:spAutoFit/>
+          </a:bodyPr>
+          <a:lstStyle/>
+          <a:p>
+            <a:r>
+              <a:rPr sz="1400" b="0" i="0">
+                <a:solidFill>
+                  <a:srgbClr val="1B2330"/>
+                </a:solidFill>
+                <a:latin typeface="Montserrat"/>
+              </a:rPr>
+              <a:t>Con gas inerte y la tubería vacía</a:t>
+            </a:r>
+          </a:p>
+        </p:txBody>
+      </p:sp>
+      <p:sp>
+        <p:nvSpPr>
+          <p:cNvPr id="16" name="Rounded Rectangle 15"/>
+          <p:cNvSpPr/>
+          <p:nvPr/>
+        </p:nvSpPr>
+        <p:spPr>
+          <a:xfrm>
+            <a:off x="822960" y="4617720"/>
+            <a:ext cx="4983480" cy="1143000"/>
+          </a:xfrm>
+          <a:prstGeom prst="roundRect">
+            <a:avLst/>
+          </a:prstGeom>
+          <a:solidFill>
+            <a:srgbClr val="F3F6FB"/>
+          </a:solidFill>
+          <a:ln w="12700">
+            <a:solidFill>
+              <a:srgbClr val="C7D2E6"/>
+            </a:solidFill>
+          </a:ln>
+          <a:effectLst/>
+        </p:spPr>
+        <p:style>
+          <a:lnRef idx="1">
+            <a:schemeClr val="accent1"/>
+          </a:lnRef>
+          <a:fillRef idx="3">
+            <a:schemeClr val="accent1"/>
+          </a:fillRef>
+          <a:effectRef idx="2">
+            <a:schemeClr val="accent1"/>
+          </a:effectRef>
+          <a:fontRef idx="minor">
+            <a:schemeClr val="lt1"/>
+          </a:fontRef>
+        </p:style>
+        <p:txBody>
+          <a:bodyPr rtlCol="0" anchor="ctr"/>
+          <a:lstStyle/>
+          <a:p>
+            <a:pPr algn="ctr"/>
+          </a:p>
+        </p:txBody>
+      </p:sp>
+      <p:sp>
+        <p:nvSpPr>
+          <p:cNvPr id="17" name="Rectangle 16"/>
+          <p:cNvSpPr/>
+          <p:nvPr/>
+        </p:nvSpPr>
+        <p:spPr>
+          <a:xfrm>
+            <a:off x="822960" y="4617720"/>
+            <a:ext cx="640080" cy="1143000"/>
+          </a:xfrm>
+          <a:prstGeom prst="rect">
+            <a:avLst/>
+          </a:prstGeom>
+          <a:solidFill>
+            <a:srgbClr val="1E2761"/>
+          </a:solidFill>
+          <a:ln>
+            <a:noFill/>
+          </a:ln>
+          <a:effectLst/>
+        </p:spPr>
+        <p:style>
+          <a:lnRef idx="1">
+            <a:schemeClr val="accent1"/>
+          </a:lnRef>
+          <a:fillRef idx="3">
+            <a:schemeClr val="accent1"/>
+          </a:fillRef>
+          <a:effectRef idx="2">
+            <a:schemeClr val="accent1"/>
+          </a:effectRef>
+          <a:fontRef idx="minor">
+            <a:schemeClr val="lt1"/>
+          </a:fontRef>
+        </p:style>
+        <p:txBody>
+          <a:bodyPr rtlCol="0" anchor="ctr"/>
+          <a:lstStyle/>
+          <a:p>
+            <a:pPr algn="ctr"/>
+          </a:p>
+        </p:txBody>
+      </p:sp>
+      <p:sp>
+        <p:nvSpPr>
+          <p:cNvPr id="18" name="TextBox 17"/>
+          <p:cNvSpPr txBox="1"/>
+          <p:nvPr/>
+        </p:nvSpPr>
+        <p:spPr>
+          <a:xfrm>
+            <a:off x="822960" y="4937760"/>
+            <a:ext cx="640080" cy="548640"/>
+          </a:xfrm>
+          <a:prstGeom prst="rect">
+            <a:avLst/>
+          </a:prstGeom>
+          <a:noFill/>
+        </p:spPr>
+        <p:txBody>
+          <a:bodyPr wrap="square">
+            <a:spAutoFit/>
+          </a:bodyPr>
+          <a:lstStyle/>
+          <a:p>
+            <a:pPr algn="ctr"/>
+            <a:r>
+              <a:rPr sz="2200" b="1" i="0">
+                <a:solidFill>
+                  <a:srgbClr val="FFFFFF"/>
+                </a:solidFill>
+                <a:latin typeface="Montserrat"/>
+              </a:rPr>
+              <a:t>C</a:t>
+            </a:r>
+          </a:p>
+        </p:txBody>
+      </p:sp>
+      <p:sp>
+        <p:nvSpPr>
+          <p:cNvPr id="19" name="TextBox 18"/>
+          <p:cNvSpPr txBox="1"/>
+          <p:nvPr/>
+        </p:nvSpPr>
+        <p:spPr>
+          <a:xfrm>
+            <a:off x="1600200" y="4800600"/>
+            <a:ext cx="4114800" cy="868680"/>
+          </a:xfrm>
+          <a:prstGeom prst="rect">
+            <a:avLst/>
+          </a:prstGeom>
+          <a:noFill/>
+        </p:spPr>
+        <p:txBody>
+          <a:bodyPr wrap="square">
+            <a:spAutoFit/>
+          </a:bodyPr>
+          <a:lstStyle/>
+          <a:p>
+            <a:r>
+              <a:rPr sz="1400" b="0" i="0">
+                <a:solidFill>
+                  <a:srgbClr val="1B2330"/>
+                </a:solidFill>
+                <a:latin typeface="Montserrat"/>
+              </a:rPr>
+              <a:t>Con gas real, a la presión de operación</a:t>
+            </a:r>
+          </a:p>
+        </p:txBody>
+      </p:sp>
+      <p:sp>
+        <p:nvSpPr>
+          <p:cNvPr id="20" name="Rounded Rectangle 19"/>
+          <p:cNvSpPr/>
+          <p:nvPr/>
+        </p:nvSpPr>
+        <p:spPr>
+          <a:xfrm>
+            <a:off x="6355080" y="4617720"/>
+            <a:ext cx="4983480" cy="1143000"/>
+          </a:xfrm>
+          <a:prstGeom prst="roundRect">
+            <a:avLst/>
+          </a:prstGeom>
+          <a:solidFill>
+            <a:srgbClr val="F3F6FB"/>
+          </a:solidFill>
+          <a:ln w="12700">
+            <a:solidFill>
+              <a:srgbClr val="C7D2E6"/>
+            </a:solidFill>
+          </a:ln>
+          <a:effectLst/>
+        </p:spPr>
+        <p:style>
+          <a:lnRef idx="1">
+            <a:schemeClr val="accent1"/>
+          </a:lnRef>
+          <a:fillRef idx="3">
+            <a:schemeClr val="accent1"/>
+          </a:fillRef>
+          <a:effectRef idx="2">
+            <a:schemeClr val="accent1"/>
+          </a:effectRef>
+          <a:fontRef idx="minor">
+            <a:schemeClr val="lt1"/>
+          </a:fontRef>
+        </p:style>
+        <p:txBody>
+          <a:bodyPr rtlCol="0" anchor="ctr"/>
+          <a:lstStyle/>
+          <a:p>
+            <a:pPr algn="ctr"/>
+          </a:p>
+        </p:txBody>
+      </p:sp>
+      <p:sp>
+        <p:nvSpPr>
+          <p:cNvPr id="21" name="Rectangle 20"/>
+          <p:cNvSpPr/>
+          <p:nvPr/>
+        </p:nvSpPr>
+        <p:spPr>
+          <a:xfrm>
+            <a:off x="6355080" y="4617720"/>
+            <a:ext cx="640080" cy="1143000"/>
+          </a:xfrm>
+          <a:prstGeom prst="rect">
+            <a:avLst/>
+          </a:prstGeom>
+          <a:solidFill>
+            <a:srgbClr val="1E2761"/>
+          </a:solidFill>
+          <a:ln>
+            <a:noFill/>
+          </a:ln>
+          <a:effectLst/>
+        </p:spPr>
+        <p:style>
+          <a:lnRef idx="1">
+            <a:schemeClr val="accent1"/>
+          </a:lnRef>
+          <a:fillRef idx="3">
+            <a:schemeClr val="accent1"/>
+          </a:fillRef>
+          <a:effectRef idx="2">
+            <a:schemeClr val="accent1"/>
+          </a:effectRef>
+          <a:fontRef idx="minor">
+            <a:schemeClr val="lt1"/>
+          </a:fontRef>
+        </p:style>
+        <p:txBody>
+          <a:bodyPr rtlCol="0" anchor="ctr"/>
+          <a:lstStyle/>
+          <a:p>
+            <a:pPr algn="ctr"/>
+          </a:p>
+        </p:txBody>
+      </p:sp>
+      <p:sp>
+        <p:nvSpPr>
+          <p:cNvPr id="22" name="TextBox 21"/>
+          <p:cNvSpPr txBox="1"/>
+          <p:nvPr/>
+        </p:nvSpPr>
+        <p:spPr>
+          <a:xfrm>
+            <a:off x="6355080" y="4937760"/>
+            <a:ext cx="640080" cy="548640"/>
+          </a:xfrm>
+          <a:prstGeom prst="rect">
+            <a:avLst/>
+          </a:prstGeom>
+          <a:noFill/>
+        </p:spPr>
+        <p:txBody>
+          <a:bodyPr wrap="square">
+            <a:spAutoFit/>
+          </a:bodyPr>
+          <a:lstStyle/>
+          <a:p>
+            <a:pPr algn="ctr"/>
+            <a:r>
+              <a:rPr sz="2200" b="1" i="0">
+                <a:solidFill>
+                  <a:srgbClr val="FFFFFF"/>
+                </a:solidFill>
+                <a:latin typeface="Montserrat"/>
+              </a:rPr>
+              <a:t>D</a:t>
+            </a:r>
+          </a:p>
+        </p:txBody>
+      </p:sp>
+      <p:sp>
+        <p:nvSpPr>
+          <p:cNvPr id="23" name="TextBox 22"/>
+          <p:cNvSpPr txBox="1"/>
+          <p:nvPr/>
+        </p:nvSpPr>
+        <p:spPr>
+          <a:xfrm>
+            <a:off x="7132320" y="4800600"/>
+            <a:ext cx="4114800" cy="868680"/>
+          </a:xfrm>
+          <a:prstGeom prst="rect">
+            <a:avLst/>
+          </a:prstGeom>
+          <a:noFill/>
+        </p:spPr>
+        <p:txBody>
+          <a:bodyPr wrap="square">
+            <a:spAutoFit/>
+          </a:bodyPr>
+          <a:lstStyle/>
+          <a:p>
+            <a:r>
+              <a:rPr sz="1400" b="0" i="0">
+                <a:solidFill>
+                  <a:srgbClr val="1B2330"/>
+                </a:solidFill>
+                <a:latin typeface="Montserrat"/>
+              </a:rPr>
+              <a:t>Con agua jabonosa, a la presión de prueba</a:t>
             </a:r>
           </a:p>
         </p:txBody>
@@ -8809,6 +13423,18 @@
   <p:clrMapOvr>
     <a:masterClrMapping/>
   </p:clrMapOvr>
+  <mc:AlternateContent xmlns:mc="http://schemas.openxmlformats.org/markup-compatibility/2006">
+    <mc:Choice xmlns:p14="http://schemas.microsoft.com/office/powerpoint/2010/main" Requires="p14">
+      <p:transition spd="med" p14:dur="700">
+        <p14:cube dir="r"/>
+      </p:transition>
+    </mc:Choice>
+    <mc:Fallback>
+      <p:transition spd="med">
+        <p:push dir="r"/>
+      </p:transition>
+    </mc:Fallback>
+  </mc:AlternateContent>
 </p:sld>
 </file>
 
@@ -8896,7 +13522,7 @@
                 </a:solidFill>
                 <a:latin typeface="Montserrat"/>
               </a:rPr>
-              <a:t>007 / 013</a:t>
+              <a:t>007 / 019</a:t>
             </a:r>
           </a:p>
         </p:txBody>
@@ -8937,88 +13563,20 @@
       </p:sp>
       <p:sp>
         <p:nvSpPr>
-          <p:cNvPr id="5" name="TextBox 4"/>
-          <p:cNvSpPr txBox="1"/>
-          <p:nvPr/>
-        </p:nvSpPr>
-        <p:spPr>
-          <a:xfrm>
-            <a:off x="822960" y="457200"/>
-            <a:ext cx="10058400" cy="365760"/>
-          </a:xfrm>
-          <a:prstGeom prst="rect">
-            <a:avLst/>
-          </a:prstGeom>
-          <a:noFill/>
-        </p:spPr>
-        <p:txBody>
-          <a:bodyPr wrap="square">
-            <a:spAutoFit/>
-          </a:bodyPr>
-          <a:lstStyle/>
-          <a:p>
-            <a:r>
-              <a:rPr sz="1300" b="1" i="0">
-                <a:solidFill>
-                  <a:srgbClr val="E8801A"/>
-                </a:solidFill>
-                <a:latin typeface="Montserrat"/>
-              </a:rPr>
-              <a:t>PRUEBAS PREVIAS</a:t>
-            </a:r>
-          </a:p>
-        </p:txBody>
-      </p:sp>
-      <p:sp>
-        <p:nvSpPr>
-          <p:cNvPr id="6" name="TextBox 5"/>
-          <p:cNvSpPr txBox="1"/>
-          <p:nvPr/>
-        </p:nvSpPr>
-        <p:spPr>
-          <a:xfrm>
-            <a:off x="822960" y="868680"/>
-            <a:ext cx="10515600" cy="914400"/>
-          </a:xfrm>
-          <a:prstGeom prst="rect">
-            <a:avLst/>
-          </a:prstGeom>
-          <a:noFill/>
-        </p:spPr>
-        <p:txBody>
-          <a:bodyPr wrap="square">
-            <a:spAutoFit/>
-          </a:bodyPr>
-          <a:lstStyle/>
-          <a:p>
-            <a:r>
-              <a:rPr sz="2800" b="1" i="0">
-                <a:solidFill>
-                  <a:srgbClr val="1E2761"/>
-                </a:solidFill>
-                <a:latin typeface="Montserrat"/>
-              </a:rPr>
-              <a:t>Quién es el agente responsable</a:t>
-            </a:r>
-          </a:p>
-        </p:txBody>
-      </p:sp>
-      <p:sp>
-        <p:nvSpPr>
-          <p:cNvPr id="7" name="Rounded Rectangle 6"/>
+          <p:cNvPr id="5" name="Rectangle 4"/>
           <p:cNvSpPr/>
           <p:nvPr/>
         </p:nvSpPr>
         <p:spPr>
           <a:xfrm>
-            <a:off x="868680" y="1627632"/>
-            <a:ext cx="2011680" cy="73152"/>
-          </a:xfrm>
-          <a:prstGeom prst="roundRect">
+            <a:off x="0" y="0"/>
+            <a:ext cx="12191695" cy="1143000"/>
+          </a:xfrm>
+          <a:prstGeom prst="rect">
             <a:avLst/>
           </a:prstGeom>
           <a:solidFill>
-            <a:srgbClr val="E8801A"/>
+            <a:srgbClr val="1E8E4B"/>
           </a:solidFill>
           <a:ln>
             <a:noFill/>
@@ -9049,14 +13607,14 @@
       </p:sp>
       <p:sp>
         <p:nvSpPr>
-          <p:cNvPr id="8" name="TextBox 7"/>
+          <p:cNvPr id="6" name="TextBox 5"/>
           <p:cNvSpPr txBox="1"/>
           <p:nvPr/>
         </p:nvSpPr>
         <p:spPr>
           <a:xfrm>
-            <a:off x="822960" y="1965960"/>
-            <a:ext cx="4983480" cy="4206240"/>
+            <a:off x="822960" y="274320"/>
+            <a:ext cx="10515600" cy="640080"/>
           </a:xfrm>
           <a:prstGeom prst="rect">
             <a:avLst/>
@@ -9069,127 +13627,72 @@
           </a:bodyPr>
           <a:lstStyle/>
           <a:p>
-            <a:pPr>
-              <a:spcAft>
-                <a:spcPts val="1100"/>
-              </a:spcAft>
-            </a:pPr>
-            <a:r>
-              <a:rPr sz="1600" b="1" i="0">
-                <a:solidFill>
-                  <a:srgbClr val="E8801A"/>
-                </a:solidFill>
-                <a:latin typeface="Montserrat"/>
-              </a:rPr>
-              <a:t>▸  </a:t>
-            </a:r>
-            <a:r>
-              <a:rPr sz="1600" b="0" i="0">
-                <a:solidFill>
-                  <a:srgbClr val="1B2330"/>
-                </a:solidFill>
-                <a:latin typeface="Montserrat"/>
-              </a:rPr>
-              <a:t>La norma remite a la legislación vigente</a:t>
-            </a:r>
-          </a:p>
-          <a:p>
-            <a:pPr>
-              <a:spcAft>
-                <a:spcPts val="1100"/>
-              </a:spcAft>
-            </a:pPr>
-            <a:r>
-              <a:rPr sz="1600" b="1" i="0">
-                <a:solidFill>
-                  <a:srgbClr val="E8801A"/>
-                </a:solidFill>
-                <a:latin typeface="Montserrat"/>
-              </a:rPr>
-              <a:t>▸  </a:t>
-            </a:r>
-            <a:r>
-              <a:rPr sz="1600" b="0" i="0">
-                <a:solidFill>
-                  <a:srgbClr val="1B2330"/>
-                </a:solidFill>
-                <a:latin typeface="Montserrat"/>
-              </a:rPr>
-              <a:t>En la práctica: empresa instaladora habilitada</a:t>
-            </a:r>
-          </a:p>
-          <a:p>
-            <a:pPr>
-              <a:spcAft>
-                <a:spcPts val="1100"/>
-              </a:spcAft>
-            </a:pPr>
-            <a:r>
-              <a:rPr sz="1600" b="1" i="0">
-                <a:solidFill>
-                  <a:srgbClr val="E8801A"/>
-                </a:solidFill>
-                <a:latin typeface="Montserrat"/>
-              </a:rPr>
-              <a:t>▸  </a:t>
-            </a:r>
-            <a:r>
-              <a:rPr sz="1600" b="0" i="0">
-                <a:solidFill>
-                  <a:srgbClr val="1B2330"/>
-                </a:solidFill>
-                <a:latin typeface="Montserrat"/>
-              </a:rPr>
-              <a:t>Hay un responsable designado</a:t>
-            </a:r>
-          </a:p>
-          <a:p>
-            <a:pPr>
-              <a:spcAft>
-                <a:spcPts val="1100"/>
-              </a:spcAft>
-            </a:pPr>
-            <a:r>
-              <a:rPr sz="1600" b="1" i="0">
-                <a:solidFill>
-                  <a:srgbClr val="E8801A"/>
-                </a:solidFill>
-                <a:latin typeface="Montserrat"/>
-              </a:rPr>
-              <a:t>▸  </a:t>
-            </a:r>
-            <a:r>
-              <a:rPr sz="1600" b="0" i="0">
-                <a:solidFill>
-                  <a:srgbClr val="1B2330"/>
-                </a:solidFill>
-                <a:latin typeface="Montserrat"/>
-              </a:rPr>
-              <a:t>No lo hace cualquiera</a:t>
-            </a:r>
-          </a:p>
-        </p:txBody>
-      </p:sp>
-      <p:sp>
-        <p:nvSpPr>
-          <p:cNvPr id="9" name="imgph" descr="IMGQ:certified gas technician working"/>
+            <a:r>
+              <a:rPr sz="2400" b="1" i="0">
+                <a:solidFill>
+                  <a:srgbClr val="FFFFFF"/>
+                </a:solidFill>
+                <a:latin typeface="Montserrat"/>
+              </a:rPr>
+              <a:t>✔  RESPUESTA:  C</a:t>
+            </a:r>
+          </a:p>
+        </p:txBody>
+      </p:sp>
+      <p:sp>
+        <p:nvSpPr>
+          <p:cNvPr id="7" name="TextBox 6"/>
+          <p:cNvSpPr txBox="1"/>
+          <p:nvPr/>
+        </p:nvSpPr>
+        <p:spPr>
+          <a:xfrm>
+            <a:off x="822960" y="1417320"/>
+            <a:ext cx="10515600" cy="914400"/>
+          </a:xfrm>
+          <a:prstGeom prst="rect">
+            <a:avLst/>
+          </a:prstGeom>
+          <a:noFill/>
+        </p:spPr>
+        <p:txBody>
+          <a:bodyPr wrap="square">
+            <a:spAutoFit/>
+          </a:bodyPr>
+          <a:lstStyle/>
+          <a:p>
+            <a:r>
+              <a:rPr sz="1800" b="1" i="0">
+                <a:solidFill>
+                  <a:srgbClr val="64748B"/>
+                </a:solidFill>
+                <a:latin typeface="Montserrat"/>
+              </a:rPr>
+              <a:t>La verificación de estanquidad de la Parte nueve, ¿cómo se hace?</a:t>
+            </a:r>
+          </a:p>
+        </p:txBody>
+      </p:sp>
+      <p:sp>
+        <p:nvSpPr>
+          <p:cNvPr id="8" name="Rounded Rectangle 7"/>
           <p:cNvSpPr/>
           <p:nvPr/>
         </p:nvSpPr>
         <p:spPr>
           <a:xfrm>
-            <a:off x="5806440" y="1051560"/>
-            <a:ext cx="5298947" cy="4629150"/>
+            <a:off x="822960" y="2514600"/>
+            <a:ext cx="10515600" cy="914400"/>
           </a:xfrm>
           <a:prstGeom prst="roundRect">
             <a:avLst/>
           </a:prstGeom>
           <a:solidFill>
-            <a:srgbClr val="F3F6FB"/>
+            <a:srgbClr val="E9F6EE"/>
           </a:solidFill>
           <a:ln w="12700">
             <a:solidFill>
-              <a:srgbClr val="C7D2E6"/>
+              <a:srgbClr val="1E8E4B"/>
             </a:solidFill>
           </a:ln>
           <a:effectLst/>
@@ -9218,14 +13721,14 @@
       </p:sp>
       <p:sp>
         <p:nvSpPr>
-          <p:cNvPr id="10" name="TextBox 9"/>
+          <p:cNvPr id="9" name="TextBox 8"/>
           <p:cNvSpPr txBox="1"/>
           <p:nvPr/>
         </p:nvSpPr>
         <p:spPr>
           <a:xfrm>
-            <a:off x="6080760" y="2726055"/>
-            <a:ext cx="4750307" cy="1280160"/>
+            <a:off x="1097280" y="2697480"/>
+            <a:ext cx="10058400" cy="640080"/>
           </a:xfrm>
           <a:prstGeom prst="rect">
             <a:avLst/>
@@ -9238,27 +13741,66 @@
           </a:bodyPr>
           <a:lstStyle/>
           <a:p>
-            <a:pPr algn="ctr"/>
-            <a:r>
-              <a:rPr sz="1400" b="1" i="0">
-                <a:solidFill>
-                  <a:srgbClr val="64748B"/>
-                </a:solidFill>
-                <a:latin typeface="Montserrat"/>
-              </a:rPr>
-              <a:t>IMAGEN REALISTA</a:t>
-            </a:r>
-          </a:p>
-          <a:p>
-            <a:pPr algn="ctr"/>
-            <a:r>
-              <a:rPr sz="1100" b="0" i="1">
-                <a:solidFill>
-                  <a:srgbClr val="64748B"/>
-                </a:solidFill>
-                <a:latin typeface="Montserrat"/>
-              </a:rPr>
-              <a:t>certified gas technician working</a:t>
+            <a:r>
+              <a:rPr sz="1800" b="1" i="0">
+                <a:solidFill>
+                  <a:srgbClr val="1E8E4B"/>
+                </a:solidFill>
+                <a:latin typeface="Montserrat"/>
+              </a:rPr>
+              <a:t>C.  </a:t>
+            </a:r>
+            <a:r>
+              <a:rPr sz="1800" b="1" i="0">
+                <a:solidFill>
+                  <a:srgbClr val="1E2761"/>
+                </a:solidFill>
+                <a:latin typeface="Montserrat"/>
+              </a:rPr>
+              <a:t>Con gas real, a la presión de operación</a:t>
+            </a:r>
+          </a:p>
+        </p:txBody>
+      </p:sp>
+      <p:sp>
+        <p:nvSpPr>
+          <p:cNvPr id="10" name="TextBox 9"/>
+          <p:cNvSpPr txBox="1"/>
+          <p:nvPr/>
+        </p:nvSpPr>
+        <p:spPr>
+          <a:xfrm>
+            <a:off x="822960" y="3749039"/>
+            <a:ext cx="10515600" cy="2194560"/>
+          </a:xfrm>
+          <a:prstGeom prst="rect">
+            <a:avLst/>
+          </a:prstGeom>
+          <a:noFill/>
+        </p:spPr>
+        <p:txBody>
+          <a:bodyPr wrap="square">
+            <a:spAutoFit/>
+          </a:bodyPr>
+          <a:lstStyle/>
+          <a:p>
+            <a:r>
+              <a:rPr sz="1500" b="1" i="0">
+                <a:solidFill>
+                  <a:srgbClr val="E8801A"/>
+                </a:solidFill>
+                <a:latin typeface="Montserrat"/>
+              </a:rPr>
+              <a:t>Por qué:  </a:t>
+            </a:r>
+            <a:r>
+              <a:rPr sz="1500" b="0" i="0">
+                <a:solidFill>
+                  <a:srgbClr val="1B2330"/>
+                </a:solidFill>
+                <a:latin typeface="Montserrat"/>
+              </a:rPr>
+              <a:t>En la Parte nueve se verifica ya con gas real y a la presión de operación, distinto de la prueba con aire de la Parte ocho.</a:t>
             </a:r>
           </a:p>
         </p:txBody>
@@ -9268,6 +13810,18 @@
   <p:clrMapOvr>
     <a:masterClrMapping/>
   </p:clrMapOvr>
+  <mc:AlternateContent xmlns:mc="http://schemas.openxmlformats.org/markup-compatibility/2006">
+    <mc:Choice xmlns:p14="http://schemas.microsoft.com/office/powerpoint/2010/main" Requires="p14">
+      <p:transition spd="med" p14:dur="700">
+        <p14:cube dir="l"/>
+      </p:transition>
+    </mc:Choice>
+    <mc:Fallback>
+      <p:transition spd="med">
+        <p:push dir="l"/>
+      </p:transition>
+    </mc:Fallback>
+  </mc:AlternateContent>
 </p:sld>
 </file>
 
@@ -9355,7 +13909,7 @@
                 </a:solidFill>
                 <a:latin typeface="Montserrat"/>
               </a:rPr>
-              <a:t>008 / 013</a:t>
+              <a:t>008 / 019</a:t>
             </a:r>
           </a:p>
         </p:txBody>
@@ -9423,7 +13977,7 @@
                 </a:solidFill>
                 <a:latin typeface="Montserrat"/>
               </a:rPr>
-              <a:t>PUESTA EN SERVICIO</a:t>
+              <a:t>PRUEBAS PREVIAS</a:t>
             </a:r>
           </a:p>
         </p:txBody>
@@ -9457,14 +14011,14 @@
                 </a:solidFill>
                 <a:latin typeface="Montserrat"/>
               </a:rPr>
-              <a:t>La maniobra, paso a paso</a:t>
-            </a:r>
-          </a:p>
-        </p:txBody>
-      </p:sp>
-      <p:sp>
-        <p:nvSpPr>
-          <p:cNvPr id="7" name="Rounded Rectangle 6"/>
+              <a:t>El repaso antes de dar gas</a:t>
+            </a:r>
+          </a:p>
+        </p:txBody>
+      </p:sp>
+      <p:sp>
+        <p:nvSpPr>
+          <p:cNvPr id="7" name="Rectangle 6"/>
           <p:cNvSpPr/>
           <p:nvPr/>
         </p:nvSpPr>
@@ -9473,7 +14027,7 @@
             <a:off x="868680" y="1627632"/>
             <a:ext cx="2011680" cy="73152"/>
           </a:xfrm>
-          <a:prstGeom prst="roundRect">
+          <a:prstGeom prst="rect">
             <a:avLst/>
           </a:prstGeom>
           <a:solidFill>
@@ -9515,7 +14069,7 @@
         <p:spPr>
           <a:xfrm>
             <a:off x="822960" y="1965960"/>
-            <a:ext cx="4983480" cy="4206240"/>
+            <a:ext cx="5029200" cy="4206240"/>
           </a:xfrm>
           <a:prstGeom prst="rect">
             <a:avLst/>
@@ -9549,7 +14103,7 @@
                 </a:solidFill>
                 <a:latin typeface="Montserrat"/>
               </a:rPr>
-              <a:t>Precintar los equipos de medida</a:t>
+              <a:t>Documentación completa</a:t>
             </a:r>
           </a:p>
           <a:p>
@@ -9574,7 +14128,7 @@
                 </a:solidFill>
                 <a:latin typeface="Montserrat"/>
               </a:rPr>
-              <a:t>Cerrar y precintar llaves que no van a servicio</a:t>
+              <a:t>Lo visible y accesible cumple la norma</a:t>
             </a:r>
           </a:p>
           <a:p>
@@ -9599,7 +14153,7 @@
                 </a:solidFill>
                 <a:latin typeface="Montserrat"/>
               </a:rPr>
-              <a:t>Abrir acometida y purgar</a:t>
+              <a:t>Locales y salidas de humos correctos</a:t>
             </a:r>
           </a:p>
           <a:p>
@@ -9624,21 +14178,21 @@
                 </a:solidFill>
                 <a:latin typeface="Montserrat"/>
               </a:rPr>
-              <a:t>Verificar estanquidad y certificar</a:t>
-            </a:r>
-          </a:p>
-        </p:txBody>
-      </p:sp>
-      <p:sp>
-        <p:nvSpPr>
-          <p:cNvPr id="9" name="imgph" descr="IMGQ:opening gas main valve meter"/>
+              <a:t>Maniobrabilidad de las válvulas</a:t>
+            </a:r>
+          </a:p>
+        </p:txBody>
+      </p:sp>
+      <p:sp>
+        <p:nvSpPr>
+          <p:cNvPr id="9" name="imgph" descr="IMGQ:inspector with clipboard gas installation"/>
           <p:cNvSpPr/>
           <p:nvPr/>
         </p:nvSpPr>
         <p:spPr>
           <a:xfrm>
-            <a:off x="5806440" y="1051560"/>
-            <a:ext cx="5298947" cy="4629150"/>
+            <a:off x="6080760" y="1965960"/>
+            <a:ext cx="5303520" cy="4572000"/>
           </a:xfrm>
           <a:prstGeom prst="roundRect">
             <a:avLst/>
@@ -9683,8 +14237,8 @@
         </p:nvSpPr>
         <p:spPr>
           <a:xfrm>
-            <a:off x="6080760" y="2726055"/>
-            <a:ext cx="4750307" cy="1280160"/>
+            <a:off x="6355080" y="3611880"/>
+            <a:ext cx="4754880" cy="1280160"/>
           </a:xfrm>
           <a:prstGeom prst="rect">
             <a:avLst/>
@@ -9705,7 +14259,7 @@
                 </a:solidFill>
                 <a:latin typeface="Montserrat"/>
               </a:rPr>
-              <a:t>IMAGEN REALISTA</a:t>
+              <a:t>IMAGEN</a:t>
             </a:r>
           </a:p>
           <a:p>
@@ -9717,7 +14271,7 @@
                 </a:solidFill>
                 <a:latin typeface="Montserrat"/>
               </a:rPr>
-              <a:t>opening gas main valve meter</a:t>
+              <a:t>inspector with clipboard gas installation</a:t>
             </a:r>
           </a:p>
         </p:txBody>
@@ -9727,6 +14281,18 @@
   <p:clrMapOvr>
     <a:masterClrMapping/>
   </p:clrMapOvr>
+  <mc:AlternateContent xmlns:mc="http://schemas.openxmlformats.org/markup-compatibility/2006">
+    <mc:Choice xmlns:p14="http://schemas.microsoft.com/office/powerpoint/2010/main" Requires="p14">
+      <p:transition spd="med" p14:dur="700">
+        <p14:cube dir="r"/>
+      </p:transition>
+    </mc:Choice>
+    <mc:Fallback>
+      <p:transition spd="med">
+        <p:push dir="r"/>
+      </p:transition>
+    </mc:Fallback>
+  </mc:AlternateContent>
 </p:sld>
 </file>
 
@@ -9814,7 +14380,7 @@
                 </a:solidFill>
                 <a:latin typeface="Montserrat"/>
               </a:rPr>
-              <a:t>009 / 013</a:t>
+              <a:t>009 / 019</a:t>
             </a:r>
           </a:p>
         </p:txBody>
@@ -9882,7 +14448,7 @@
                 </a:solidFill>
                 <a:latin typeface="Montserrat"/>
               </a:rPr>
-              <a:t>PUESTA EN SERVICIO</a:t>
+              <a:t>PRUEBAS PREVIAS</a:t>
             </a:r>
           </a:p>
         </p:txBody>
@@ -9916,14 +14482,14 @@
                 </a:solidFill>
                 <a:latin typeface="Montserrat"/>
               </a:rPr>
-              <a:t>Cerrada, bloqueada, precintada</a:t>
-            </a:r>
-          </a:p>
-        </p:txBody>
-      </p:sp>
-      <p:sp>
-        <p:nvSpPr>
-          <p:cNvPr id="7" name="Rounded Rectangle 6"/>
+              <a:t>Quién es el agente responsable</a:t>
+            </a:r>
+          </a:p>
+        </p:txBody>
+      </p:sp>
+      <p:sp>
+        <p:nvSpPr>
+          <p:cNvPr id="7" name="Rectangle 6"/>
           <p:cNvSpPr/>
           <p:nvPr/>
         </p:nvSpPr>
@@ -9932,7 +14498,7 @@
             <a:off x="868680" y="1627632"/>
             <a:ext cx="2011680" cy="73152"/>
           </a:xfrm>
-          <a:prstGeom prst="roundRect">
+          <a:prstGeom prst="rect">
             <a:avLst/>
           </a:prstGeom>
           <a:solidFill>
@@ -9973,8 +14539,8 @@
         </p:nvSpPr>
         <p:spPr>
           <a:xfrm>
-            <a:off x="822960" y="1965960"/>
-            <a:ext cx="4983480" cy="4206240"/>
+            <a:off x="6355080" y="1965960"/>
+            <a:ext cx="5029200" cy="4206240"/>
           </a:xfrm>
           <a:prstGeom prst="rect">
             <a:avLst/>
@@ -10008,7 +14574,7 @@
                 </a:solidFill>
                 <a:latin typeface="Montserrat"/>
               </a:rPr>
-              <a:t>Cerrada: girada, sin paso</a:t>
+              <a:t>La norma remite a la legislación vigente</a:t>
             </a:r>
           </a:p>
           <a:p>
@@ -10033,7 +14599,7 @@
                 </a:solidFill>
                 <a:latin typeface="Montserrat"/>
               </a:rPr>
-              <a:t>Bloqueada: que no la abra cualquiera</a:t>
+              <a:t>En la práctica: empresa instaladora habilitada</a:t>
             </a:r>
           </a:p>
           <a:p>
@@ -10058,7 +14624,7 @@
                 </a:solidFill>
                 <a:latin typeface="Montserrat"/>
               </a:rPr>
-              <a:t>Precintada: el precinto delata manipulación</a:t>
+              <a:t>Hay un responsable designado</a:t>
             </a:r>
           </a:p>
           <a:p>
@@ -10083,21 +14649,21 @@
                 </a:solidFill>
                 <a:latin typeface="Montserrat"/>
               </a:rPr>
-              <a:t>Taponada: cuando no hay nada detrás</a:t>
-            </a:r>
-          </a:p>
-        </p:txBody>
-      </p:sp>
-      <p:sp>
-        <p:nvSpPr>
-          <p:cNvPr id="9" name="imgph" descr="IMGQ:sealed gas valve with security seal"/>
+              <a:t>No lo hace cualquiera</a:t>
+            </a:r>
+          </a:p>
+        </p:txBody>
+      </p:sp>
+      <p:sp>
+        <p:nvSpPr>
+          <p:cNvPr id="9" name="imgph" descr="IMGQ:certified gas technician working"/>
           <p:cNvSpPr/>
           <p:nvPr/>
         </p:nvSpPr>
         <p:spPr>
           <a:xfrm>
-            <a:off x="5806440" y="1051560"/>
-            <a:ext cx="5298947" cy="4629150"/>
+            <a:off x="822960" y="1965960"/>
+            <a:ext cx="5303520" cy="4572000"/>
           </a:xfrm>
           <a:prstGeom prst="roundRect">
             <a:avLst/>
@@ -10142,8 +14708,8 @@
         </p:nvSpPr>
         <p:spPr>
           <a:xfrm>
-            <a:off x="6080760" y="2726055"/>
-            <a:ext cx="4750307" cy="1280160"/>
+            <a:off x="1097280" y="3611880"/>
+            <a:ext cx="4754880" cy="1280160"/>
           </a:xfrm>
           <a:prstGeom prst="rect">
             <a:avLst/>
@@ -10164,7 +14730,7 @@
                 </a:solidFill>
                 <a:latin typeface="Montserrat"/>
               </a:rPr>
-              <a:t>IMAGEN REALISTA</a:t>
+              <a:t>IMAGEN</a:t>
             </a:r>
           </a:p>
           <a:p>
@@ -10176,7 +14742,7 @@
                 </a:solidFill>
                 <a:latin typeface="Montserrat"/>
               </a:rPr>
-              <a:t>sealed gas valve with security seal</a:t>
+              <a:t>certified gas technician working</a:t>
             </a:r>
           </a:p>
         </p:txBody>
@@ -10186,6 +14752,18 @@
   <p:clrMapOvr>
     <a:masterClrMapping/>
   </p:clrMapOvr>
+  <mc:AlternateContent xmlns:mc="http://schemas.openxmlformats.org/markup-compatibility/2006">
+    <mc:Choice xmlns:p14="http://schemas.microsoft.com/office/powerpoint/2010/main" Requires="p14">
+      <p:transition spd="med" p14:dur="700">
+        <p14:cube dir="l"/>
+      </p:transition>
+    </mc:Choice>
+    <mc:Fallback>
+      <p:transition spd="med">
+        <p:push dir="l"/>
+      </p:transition>
+    </mc:Fallback>
+  </mc:AlternateContent>
 </p:sld>
 </file>
 

--- a/Curso Gas B/15 - UNE 60670 - Pruebas y puesta en servicio/15 - UNE 60670 - Pruebas y puesta en servicio - Vídeo 2.pptx
+++ b/Curso Gas B/15 - UNE 60670 - Pruebas y puesta en servicio/15 - UNE 60670 - Pruebas y puesta en servicio - Vídeo 2.pptx
@@ -775,12 +775,12 @@
           <a:lstStyle/>
           <a:p>
             <a:r>
-              <a:t>N1: Las cuatro palabras de la llave, que caen juntas. Llave sin nada detrás, ¿cómo la dejas?</a:t>
-            </a:r>
-          </a:p>
-          <a:p>
-            <a:r>
-              <a:t>N2: Piensa qué pasaría si alguien forzara el precinto y detrás no hubiera ni vivienda ni aparato.</a:t>
+              <a:t>N1: Las cuatro palabras de la llave, que caen juntas. Escucha la pregunta y las cuatro opciones. Una llave que no entra en servicio y no tiene nada instalado detrás, ¿cómo queda? Opción A, cerrada, bloqueada y precintada solamente. Opción B, cerrada, bloqueada, precintada y taponada. Opción C, solo precintada. Opción D, abierta pero bloqueada. Piénsalo un momento.</a:t>
+            </a:r>
+          </a:p>
+          <a:p>
+            <a:r>
+              <a:t>N2: Pista: imagina que alguien fuerza el precinto y detrás no hay ni vivienda ni aparato. ¿Qué falta para que no salga gas?</a:t>
             </a:r>
           </a:p>
         </p:txBody>
@@ -850,12 +850,12 @@
           <a:lstStyle/>
           <a:p>
             <a:r>
-              <a:t>N1: ¿Por qué la be?</a:t>
-            </a:r>
-          </a:p>
-          <a:p>
-            <a:r>
-              <a:t>N2: Sin nada detrás, tapón; con algo detrás, basta cerrar, bloquear y precintar. El tapón evita que salga gas al aire si alguien manipula el precinto de una llave que da a la nada.</a:t>
+              <a:t>N2: La respuesta correcta es la opción B: cerrada, bloqueada, precintada y taponada. Si la llave da a la nada se tapona además, para que aunque alguien fuerce el precinto no salga gas al aire. El truco para no fallar: sin nada detrás, tapón; con algo detrás, basta cerrar, bloquear y precintar.</a:t>
+            </a:r>
+          </a:p>
+          <a:p>
+            <a:r>
+              <a:t>N1: Sin nada detrás, siempre el tapón.</a:t>
             </a:r>
           </a:p>
         </p:txBody>
@@ -1010,12 +1010,12 @@
           <a:lstStyle/>
           <a:p>
             <a:r>
-              <a:t>N1: Con chispa. ¿Qué hace del purgado el momento más delicado de todo el tema?</a:t>
-            </a:r>
-          </a:p>
-          <a:p>
-            <a:r>
-              <a:t>N2: Piensa en qué hay dentro del tubo justo cuando el gas va empujando al aire hacia fuera.</a:t>
+              <a:t>N1: Con chispa, nunca mejor dicho. Atento a la pregunta y a las cuatro opciones. ¿Por qué es el purgado el momento más peligroso de la puesta en servicio? Opción A, porque se trabaja a la presión de prueba más alta. Opción B, porque puede formarse una mezcla aire-gas explosiva. Opción C, porque el gas sale muy frío y hiela la tubería. Opción D, porque hay que desmontar el contador. Tómate un segundo.</a:t>
+            </a:r>
+          </a:p>
+          <a:p>
+            <a:r>
+              <a:t>N2: Pista: piensa en qué hay dentro del tubo justo cuando el gas va empujando al aire hacia fuera.</a:t>
             </a:r>
           </a:p>
         </p:txBody>
@@ -1085,12 +1085,12 @@
           <a:lstStyle/>
           <a:p>
             <a:r>
-              <a:t>N1: ¿Por qué la be?</a:t>
-            </a:r>
-          </a:p>
-          <a:p>
-            <a:r>
-              <a:t>N2: Durante el purgado conviven aire y gas, y esa mezcla es explosiva con una simple chispa. Por eso se purga al exterior, sin llamas ni chispas y con detector, hasta que sale gas puro y queda fuera de los límites de inflamabilidad.</a:t>
+              <a:t>N2: La respuesta correcta es la opción B: porque puede formarse una mezcla aire-gas explosiva. Al expulsar el aire con gas, en el punto intermedio conviven aire y gas, y esa mezcla, en cierta proporción, estalla con una simple chispa. El truco para no fallar: por eso se purga al exterior, sin llamas ni chispas y con detector, hasta que sale gas puro.</a:t>
+            </a:r>
+          </a:p>
+          <a:p>
+            <a:r>
+              <a:t>N1: Mezcla aire-gas: por eso el purgado es el paso más delicado.</a:t>
             </a:r>
           </a:p>
         </p:txBody>
@@ -1726,12 +1726,12 @@
           <a:lstStyle/>
           <a:p>
             <a:r>
-              <a:t>N1: Trampa clásica de las dos estanquidades. La de la Parte nueve, ¿con qué y a qué presión?</a:t>
-            </a:r>
-          </a:p>
-          <a:p>
-            <a:r>
-              <a:t>N2: Recuerda: una prueba la tubería vacía antes de entregar; la otra confirma ya con gas. ¿Cuál es esta?</a:t>
+              <a:t>N1: Trampa clásica de las dos estanquidades. Atento a la pregunta y a las cuatro opciones. La verificación de estanquidad de la Parte nueve, ¿cómo se hace? Opción A, con aire, a la presión de prueba alta. Opción B, con gas inerte y la tubería vacía. Opción C, con gas real, a la presión de operación. Opción D, con agua jabonosa, a la presión de prueba. Párate un momento a pensarlo.</a:t>
+            </a:r>
+          </a:p>
+          <a:p>
+            <a:r>
+              <a:t>N2: Pista: una prueba la tubería vacía antes de entregar; la otra confirma ya con gas. ¿Cuál es esta?</a:t>
             </a:r>
           </a:p>
         </p:txBody>
@@ -1801,12 +1801,12 @@
           <a:lstStyle/>
           <a:p>
             <a:r>
-              <a:t>N1: ¿Por qué la ce?</a:t>
-            </a:r>
-          </a:p>
-          <a:p>
-            <a:r>
-              <a:t>N2: La Parte ocho prueba con aire o inerte a presión de prueba, con el tubo vacío. La Parte nueve verifica ya con gas real y a la presión de operación, como paso final de la puesta en servicio. Son dos comprobaciones en dos momentos.</a:t>
+              <a:t>N2: La respuesta correcta es la opción C: con gas real, a la presión de operación. La Parte ocho prueba con aire o inerte a presión de prueba y con el tubo vacío; la Parte nueve verifica ya con gas real y a la presión de operación, como paso final de la puesta en servicio. El truco para no fallar: son dos estanquidades en dos momentos, no las mezcles.</a:t>
+            </a:r>
+          </a:p>
+          <a:p>
+            <a:r>
+              <a:t>N1: Gas real y presión de operación; esa es la de la Parte nueve.</a:t>
             </a:r>
           </a:p>
         </p:txBody>
